--- a/docs/qa/BPMSquare_WFM_Feature_Guide.pptx
+++ b/docs/qa/BPMSquare_WFM_Feature_Guide.pptx
@@ -39,9 +39,11 @@
     <p:sldId id="287" r:id="rId33"/>
     <p:sldId id="288" r:id="rId34"/>
     <p:sldId id="289" r:id="rId35"/>
+    <p:sldId id="290" r:id="rId36"/>
+    <p:sldId id="291" r:id="rId37"/>
   </p:sldIdLst>
   <p:notesMasterIdLst>
-    <p:notesMasterId r:id="rId36"/>
+    <p:notesMasterId r:id="rId38"/>
   </p:notesMasterIdLst>
   <p:sldSz cx="12192000" cy="6858000"/>
   <p:notesSz cx="6858000" cy="12192000"/>
@@ -1855,7 +1857,7 @@
           <a:p>
             <a:r>
               <a:rPr lang="en-US" dirty="0"/>
-              <a:t>Employees and the Employee Hub — The people master, plus one page that gathers everything about a single employee.</a:t>
+              <a:t>Who sees and approves what — Each site has one supervisor, and they handle that site's people — nobody else's.</a:t>
             </a:r>
             <a:endParaRPr lang="en-US" dirty="0"/>
           </a:p>
@@ -1943,7 +1945,7 @@
           <a:p>
             <a:r>
               <a:rPr lang="en-US" dirty="0"/>
-              <a:t>How to: Employees and the Employee Hub. Path: Workforce &gt; Employees</a:t>
+              <a:t>How to: Who sees and approves what. Path: Settings &gt; Workforce &gt; Sites</a:t>
             </a:r>
             <a:endParaRPr lang="en-US" dirty="0"/>
           </a:p>
@@ -2031,7 +2033,7 @@
           <a:p>
             <a:r>
               <a:rPr lang="en-US" dirty="0"/>
-              <a:t>Monthly summary and Excel export — The whole month, per employee, in the shape the accountant actually needs.</a:t>
+              <a:t>Employees and the Employee Hub — The people master, plus one page that gathers everything about a single employee.</a:t>
             </a:r>
             <a:endParaRPr lang="en-US" dirty="0"/>
           </a:p>
@@ -2119,7 +2121,7 @@
           <a:p>
             <a:r>
               <a:rPr lang="en-US" dirty="0"/>
-              <a:t>How to: Monthly summary and Excel export. Path: Workforce &gt; Monthly Summary</a:t>
+              <a:t>How to: Employees and the Employee Hub. Path: Workforce &gt; Employees</a:t>
             </a:r>
             <a:endParaRPr lang="en-US" dirty="0"/>
           </a:p>
@@ -2207,7 +2209,7 @@
           <a:p>
             <a:r>
               <a:rPr lang="en-US" dirty="0"/>
-              <a:t>Shifts and sites — Working hours, and the physical places where a punch is considered on-site.</a:t>
+              <a:t>Monthly summary and Excel export — The whole month, per employee, in the shape the accountant actually needs.</a:t>
             </a:r>
             <a:endParaRPr lang="en-US" dirty="0"/>
           </a:p>
@@ -2295,7 +2297,7 @@
           <a:p>
             <a:r>
               <a:rPr lang="en-US" dirty="0"/>
-              <a:t>How to: Shifts and sites. Path: Settings &gt; Workforce &gt; Shifts / Sites</a:t>
+              <a:t>How to: Monthly summary and Excel export. Path: Workforce &gt; Monthly Summary</a:t>
             </a:r>
             <a:endParaRPr lang="en-US" dirty="0"/>
           </a:p>
@@ -2383,7 +2385,7 @@
           <a:p>
             <a:r>
               <a:rPr lang="en-US" dirty="0"/>
-              <a:t>Leave types and holidays — What people are allowed to take, and the days on which nobody is marked absent.</a:t>
+              <a:t>Shifts and sites — Working hours, and the physical places where a punch is considered on-site.</a:t>
             </a:r>
             <a:endParaRPr lang="en-US" dirty="0"/>
           </a:p>
@@ -2559,7 +2561,7 @@
           <a:p>
             <a:r>
               <a:rPr lang="en-US" dirty="0"/>
-              <a:t>How to: Leave types and holidays. Path: Settings &gt; Workforce &gt; Leave Types / Holidays</a:t>
+              <a:t>How to: Shifts and sites. Path: Settings &gt; Workforce &gt; Shifts / Sites</a:t>
             </a:r>
             <a:endParaRPr lang="en-US" dirty="0"/>
           </a:p>
@@ -2647,7 +2649,7 @@
           <a:p>
             <a:r>
               <a:rPr lang="en-US" dirty="0"/>
-              <a:t>Attendance rules and notifications — The workspace-wide switches that decide how hours are counted and who gets told.</a:t>
+              <a:t>Leave types and holidays — What people are allowed to take, and the days on which nobody is marked absent.</a:t>
             </a:r>
             <a:endParaRPr lang="en-US" dirty="0"/>
           </a:p>
@@ -2735,7 +2737,7 @@
           <a:p>
             <a:r>
               <a:rPr lang="en-US" dirty="0"/>
-              <a:t>How to: Attendance rules and notifications. Path: Settings &gt; Workforce &gt; General</a:t>
+              <a:t>How to: Leave types and holidays. Path: Settings &gt; Workforce &gt; Leave Types / Holidays</a:t>
             </a:r>
             <a:endParaRPr lang="en-US" dirty="0"/>
           </a:p>
@@ -2823,7 +2825,7 @@
           <a:p>
             <a:r>
               <a:rPr lang="en-US" dirty="0"/>
-              <a:t>An employee who is also a supervisor gets the supervisor column. Admin implies supervisor.</a:t>
+              <a:t>Attendance rules and notifications — The workspace-wide switches that decide how hours are counted and who gets told.</a:t>
             </a:r>
             <a:endParaRPr lang="en-US" dirty="0"/>
           </a:p>
@@ -2911,7 +2913,7 @@
           <a:p>
             <a:r>
               <a:rPr lang="en-US" dirty="0"/>
-              <a:t>Close here; the API reference and Postman collection cover the machine-facing side.</a:t>
+              <a:t>How to: Attendance rules and notifications. Path: Settings &gt; Workforce &gt; General</a:t>
             </a:r>
             <a:endParaRPr lang="en-US" dirty="0"/>
           </a:p>
@@ -2935,6 +2937,182 @@
             <a:fld id="{F7021451-1387-4CA6-816F-3879F97B5CBC}" type="slidenum">
               <a:rPr lang="en-US"/>
               <a:t>34</a:t>
+            </a:fld>
+            <a:endParaRPr lang="en-US"/>
+          </a:p>
+        </p:txBody>
+      </p:sp>
+    </p:spTree>
+    <p:extLst>
+      <p:ext uri="{BB962C8B-B14F-4D97-AF65-F5344CB8AC3E}">
+        <p14:creationId xmlns:p14="http://schemas.microsoft.com/office/powerpoint/2010/main" val="1024086991"/>
+      </p:ext>
+    </p:extLst>
+  </p:cSld>
+  <p:clrMapOvr>
+    <a:masterClrMapping/>
+  </p:clrMapOvr>
+</p:notes>
+</file>
+
+<file path=ppt/notesSlides/notesSlide35.xml><?xml version="1.0" encoding="utf-8"?>
+<p:notes xmlns:a="http://schemas.openxmlformats.org/drawingml/2006/main" xmlns:r="http://schemas.openxmlformats.org/officeDocument/2006/relationships" xmlns:p="http://schemas.openxmlformats.org/presentationml/2006/main">
+  <p:cSld>
+    <p:spTree>
+      <p:nvGrpSpPr>
+        <p:cNvPr id="1" name=""/>
+        <p:cNvGrpSpPr/>
+        <p:nvPr/>
+      </p:nvGrpSpPr>
+      <p:grpSpPr>
+        <a:xfrm>
+          <a:off x="0" y="0"/>
+          <a:ext cx="0" cy="0"/>
+          <a:chOff x="0" y="0"/>
+          <a:chExt cx="0" cy="0"/>
+        </a:xfrm>
+      </p:grpSpPr>
+      <p:sp>
+        <p:nvSpPr>
+          <p:cNvPr id="2" name="Slide Image Placeholder 1"/>
+          <p:cNvSpPr>
+            <a:spLocks noGrp="1" noRot="1" noChangeAspect="1"/>
+          </p:cNvSpPr>
+          <p:nvPr>
+            <p:ph type="sldImg"/>
+          </p:nvPr>
+        </p:nvSpPr>
+        <p:spPr/>
+      </p:sp>
+      <p:sp>
+        <p:nvSpPr>
+          <p:cNvPr id="3" name="Notes Placeholder 2"/>
+          <p:cNvSpPr>
+            <a:spLocks noGrp="1"/>
+          </p:cNvSpPr>
+          <p:nvPr>
+            <p:ph type="body" idx="1"/>
+          </p:nvPr>
+        </p:nvSpPr>
+        <p:spPr/>
+        <p:txBody>
+          <a:bodyPr/>
+          <a:lstStyle/>
+          <a:p>
+            <a:r>
+              <a:rPr lang="en-US" dirty="0"/>
+              <a:t>Scope follows the site you are assigned to, per date. Nobody approves their own request.</a:t>
+            </a:r>
+            <a:endParaRPr lang="en-US" dirty="0"/>
+          </a:p>
+        </p:txBody>
+      </p:sp>
+      <p:sp>
+        <p:nvSpPr>
+          <p:cNvPr id="4" name="Slide Number Placeholder 3"/>
+          <p:cNvSpPr>
+            <a:spLocks noGrp="1"/>
+          </p:cNvSpPr>
+          <p:nvPr>
+            <p:ph type="sldNum" sz="quarter" idx="10"/>
+          </p:nvPr>
+        </p:nvSpPr>
+        <p:spPr/>
+        <p:txBody>
+          <a:bodyPr/>
+          <a:lstStyle/>
+          <a:p>
+            <a:fld id="{F7021451-1387-4CA6-816F-3879F97B5CBC}" type="slidenum">
+              <a:rPr lang="en-US"/>
+              <a:t>35</a:t>
+            </a:fld>
+            <a:endParaRPr lang="en-US"/>
+          </a:p>
+        </p:txBody>
+      </p:sp>
+    </p:spTree>
+    <p:extLst>
+      <p:ext uri="{BB962C8B-B14F-4D97-AF65-F5344CB8AC3E}">
+        <p14:creationId xmlns:p14="http://schemas.microsoft.com/office/powerpoint/2010/main" val="1024086991"/>
+      </p:ext>
+    </p:extLst>
+  </p:cSld>
+  <p:clrMapOvr>
+    <a:masterClrMapping/>
+  </p:clrMapOvr>
+</p:notes>
+</file>
+
+<file path=ppt/notesSlides/notesSlide36.xml><?xml version="1.0" encoding="utf-8"?>
+<p:notes xmlns:a="http://schemas.openxmlformats.org/drawingml/2006/main" xmlns:r="http://schemas.openxmlformats.org/officeDocument/2006/relationships" xmlns:p="http://schemas.openxmlformats.org/presentationml/2006/main">
+  <p:cSld>
+    <p:spTree>
+      <p:nvGrpSpPr>
+        <p:cNvPr id="1" name=""/>
+        <p:cNvGrpSpPr/>
+        <p:nvPr/>
+      </p:nvGrpSpPr>
+      <p:grpSpPr>
+        <a:xfrm>
+          <a:off x="0" y="0"/>
+          <a:ext cx="0" cy="0"/>
+          <a:chOff x="0" y="0"/>
+          <a:chExt cx="0" cy="0"/>
+        </a:xfrm>
+      </p:grpSpPr>
+      <p:sp>
+        <p:nvSpPr>
+          <p:cNvPr id="2" name="Slide Image Placeholder 1"/>
+          <p:cNvSpPr>
+            <a:spLocks noGrp="1" noRot="1" noChangeAspect="1"/>
+          </p:cNvSpPr>
+          <p:nvPr>
+            <p:ph type="sldImg"/>
+          </p:nvPr>
+        </p:nvSpPr>
+        <p:spPr/>
+      </p:sp>
+      <p:sp>
+        <p:nvSpPr>
+          <p:cNvPr id="3" name="Notes Placeholder 2"/>
+          <p:cNvSpPr>
+            <a:spLocks noGrp="1"/>
+          </p:cNvSpPr>
+          <p:nvPr>
+            <p:ph type="body" idx="1"/>
+          </p:nvPr>
+        </p:nvSpPr>
+        <p:spPr/>
+        <p:txBody>
+          <a:bodyPr/>
+          <a:lstStyle/>
+          <a:p>
+            <a:r>
+              <a:rPr lang="en-US" dirty="0"/>
+              <a:t>Close here; the API reference and Postman collection cover the machine-facing side.</a:t>
+            </a:r>
+            <a:endParaRPr lang="en-US" dirty="0"/>
+          </a:p>
+        </p:txBody>
+      </p:sp>
+      <p:sp>
+        <p:nvSpPr>
+          <p:cNvPr id="4" name="Slide Number Placeholder 3"/>
+          <p:cNvSpPr>
+            <a:spLocks noGrp="1"/>
+          </p:cNvSpPr>
+          <p:nvPr>
+            <p:ph type="sldNum" sz="quarter" idx="10"/>
+          </p:nvPr>
+        </p:nvSpPr>
+        <p:spPr/>
+        <p:txBody>
+          <a:bodyPr/>
+          <a:lstStyle/>
+          <a:p>
+            <a:fld id="{F7021451-1387-4CA6-816F-3879F97B5CBC}" type="slidenum">
+              <a:rPr lang="en-US"/>
+              <a:t>36</a:t>
             </a:fld>
             <a:endParaRPr lang="en-US"/>
           </a:p>
@@ -5769,7 +5947,7 @@
                 <a:ea typeface="Calibri" pitchFamily="34" charset="-122"/>
                 <a:cs typeface="Calibri" pitchFamily="34" charset="-120"/>
               </a:rPr>
-              <a:t>Open My Workforce and choose the Leave tab.</a:t>
+              <a:t>Open My Workforce → Leave. Your requests are the first thing you see.</a:t>
             </a:r>
             <a:endParaRPr lang="en-US" sz="1500" dirty="0"/>
           </a:p>
@@ -5872,7 +6050,7 @@
                 <a:ea typeface="Calibri" pitchFamily="34" charset="-122"/>
                 <a:cs typeface="Calibri" pitchFamily="34" charset="-120"/>
               </a:rPr>
-              <a:t>Drag across the days you want on the calendar.</a:t>
+              <a:t>Press + Request leave, then drag across the days you want.</a:t>
             </a:r>
             <a:endParaRPr lang="en-US" sz="1500" dirty="0"/>
           </a:p>
@@ -6158,7 +6336,7 @@
                 <a:ea typeface="Calibri" pitchFamily="34" charset="-122"/>
                 <a:cs typeface="Calibri" pitchFamily="34" charset="-120"/>
               </a:rPr>
-              <a:t>A warning appears when your range covers days that would not be deducted from your balance anyway.</a:t>
+              <a:t>Balances sit behind the Leave balance toggle — open it for the chart, or read the totals on the row itself.</a:t>
             </a:r>
             <a:endParaRPr lang="en-US" sz="1050" dirty="0"/>
           </a:p>
@@ -8060,7 +8238,7 @@
                 <a:ea typeface="Calibri" pitchFamily="34" charset="-122"/>
                 <a:cs typeface="Calibri" pitchFamily="34" charset="-120"/>
               </a:rPr>
-              <a:t>The original punch is never edited or deleted</a:t>
+              <a:t>The proposed time must fall on the day being corrected</a:t>
             </a:r>
             <a:endParaRPr lang="en-US" sz="1400" dirty="0"/>
           </a:p>
@@ -8898,7 +9076,7 @@
                 <a:ea typeface="Calibri" pitchFamily="34" charset="-122"/>
                 <a:cs typeface="Calibri" pitchFamily="34" charset="-120"/>
               </a:rPr>
-              <a:t>Filing changes nothing. Attendance moves only at the moment of approval.</a:t>
+              <a:t>Filing changes nothing — attendance moves only on approval. A “wrong time” correction now moves the punch it names; previously it was approved but changed nothing.</a:t>
             </a:r>
             <a:endParaRPr lang="en-US" sz="1050" dirty="0"/>
           </a:p>
@@ -10718,7 +10896,7 @@
                 <a:ea typeface="Calibri" pitchFamily="34" charset="-122"/>
                 <a:cs typeface="Calibri" pitchFamily="34" charset="-120"/>
               </a:rPr>
-              <a:t>Mark days off and attach a note</a:t>
+              <a:t>Mark days off — no lateness or absence is marked on those</a:t>
             </a:r>
             <a:endParaRPr lang="en-US" sz="1400" dirty="0"/>
           </a:p>
@@ -10848,7 +11026,7 @@
                 <a:ea typeface="Calibri" pitchFamily="34" charset="-122"/>
                 <a:cs typeface="Calibri" pitchFamily="34" charset="-120"/>
               </a:rPr>
-              <a:t>Clearing a date reverts that person to their standing shift</a:t>
+              <a:t>The roster now decides who counts as late, not the standing shift</a:t>
             </a:r>
             <a:endParaRPr lang="en-US" sz="1400" dirty="0"/>
           </a:p>
@@ -12177,7 +12355,7 @@
                 <a:ea typeface="Calibri" pitchFamily="34" charset="-122"/>
                 <a:cs typeface="Calibri" pitchFamily="34" charset="-120"/>
               </a:rPr>
-              <a:t>Geofenced punch locations</a:t>
+              <a:t>Locations + who supervises each</a:t>
             </a:r>
             <a:endParaRPr lang="en-US" sz="1200" dirty="0"/>
           </a:p>
@@ -13202,7 +13380,7 @@
                 <a:ea typeface="Calibri" pitchFamily="34" charset="-122"/>
                 <a:cs typeface="Calibri" pitchFamily="34" charset="-120"/>
               </a:rPr>
-              <a:t>Limits per action: 500 employees, 62 dates, 3000 employee-by-date combinations.</a:t>
+              <a:t>Roster someone onto a different shift and lateness follows it the same day. Limits per action: 500 employees, 62 dates, 3000 combinations.</a:t>
             </a:r>
             <a:endParaRPr lang="en-US" sz="1050" dirty="0"/>
           </a:p>
@@ -14569,7 +14747,7 @@
                 <a:ea typeface="Calibri" pitchFamily="34" charset="-122"/>
                 <a:cs typeface="Calibri" pitchFamily="34" charset="-120"/>
               </a:rPr>
-              <a:t>Employees and the Employee Hub</a:t>
+              <a:t>Who sees and approves what</a:t>
             </a:r>
             <a:endParaRPr lang="en-US" sz="3300" dirty="0"/>
           </a:p>
@@ -14611,7 +14789,7 @@
                 <a:ea typeface="Calibri" pitchFamily="34" charset="-122"/>
                 <a:cs typeface="Calibri" pitchFamily="34" charset="-120"/>
               </a:rPr>
-              <a:t>The people master, plus one page that gathers everything about a single employee.</a:t>
+              <a:t>Each site has one supervisor, and they handle that site's people — nobody else's.</a:t>
             </a:r>
             <a:endParaRPr lang="en-US" sz="1500" dirty="0"/>
           </a:p>
@@ -14741,7 +14919,7 @@
                 <a:ea typeface="Calibri" pitchFamily="34" charset="-122"/>
                 <a:cs typeface="Calibri" pitchFamily="34" charset="-120"/>
               </a:rPr>
-              <a:t>Shift, site, reporting supervisor and employment type</a:t>
+              <a:t>Your approver is whoever runs the site you're assigned to</a:t>
             </a:r>
             <a:endParaRPr lang="en-US" sz="1400" dirty="0"/>
           </a:p>
@@ -14871,7 +15049,7 @@
                 <a:ea typeface="Calibri" pitchFamily="34" charset="-122"/>
                 <a:cs typeface="Calibri" pitchFamily="34" charset="-120"/>
               </a:rPr>
-              <a:t>Hub shows month totals, leave balance and direct reports</a:t>
+              <a:t>Move site next month and approvals follow, with no re-mapping</a:t>
             </a:r>
             <a:endParaRPr lang="en-US" sz="1400" dirty="0"/>
           </a:p>
@@ -15001,7 +15179,7 @@
                 <a:ea typeface="Calibri" pitchFamily="34" charset="-122"/>
                 <a:cs typeface="Calibri" pitchFamily="34" charset="-120"/>
               </a:rPr>
-              <a:t>Issue a login with an admin-set initial password</a:t>
+              <a:t>A manager sees every site beneath them, and their supervisors too</a:t>
             </a:r>
             <a:endParaRPr lang="en-US" sz="1400" dirty="0"/>
           </a:p>
@@ -15109,7 +15287,7 @@
                 <a:ea typeface="Calibri" pitchFamily="34" charset="-122"/>
                 <a:cs typeface="Calibri" pitchFamily="34" charset="-120"/>
               </a:rPr>
-              <a:t>Supervisor</a:t>
+              <a:t>Admin sets it up</a:t>
             </a:r>
             <a:endParaRPr lang="en-US" sz="1500" dirty="0"/>
           </a:p>
@@ -15129,7 +15307,7 @@
                 <a:ea typeface="Calibri" pitchFamily="34" charset="-122"/>
                 <a:cs typeface="Calibri" pitchFamily="34" charset="-120"/>
               </a:rPr>
-              <a:t>Admin</a:t>
+              <a:t>Everyone is scoped by it</a:t>
             </a:r>
             <a:endParaRPr lang="en-US" sz="1500" dirty="0"/>
           </a:p>
@@ -15200,7 +15378,7 @@
                 <a:ea typeface="Calibri" pitchFamily="34" charset="-122"/>
                 <a:cs typeface="Calibri" pitchFamily="34" charset="-120"/>
               </a:rPr>
-              <a:t>HOW TO  —  SUPERVISOR + ADMIN</a:t>
+              <a:t>HOW TO  —  ADMIN</a:t>
             </a:r>
             <a:endParaRPr lang="en-US" sz="1100" dirty="0"/>
           </a:p>
@@ -15239,7 +15417,7 @@
                 <a:ea typeface="Calibri" pitchFamily="34" charset="-122"/>
                 <a:cs typeface="Calibri" pitchFamily="34" charset="-120"/>
               </a:rPr>
-              <a:t>Employees and the Employee Hub</a:t>
+              <a:t>Who sees and approves what</a:t>
             </a:r>
             <a:endParaRPr lang="en-US" sz="2700" dirty="0"/>
           </a:p>
@@ -15319,6 +15497,34 @@
                 <a:ea typeface="Calibri" pitchFamily="34" charset="-122"/>
                 <a:cs typeface="Calibri" pitchFamily="34" charset="-120"/>
               </a:rPr>
+              <a:t>Settings</a:t>
+            </a:r>
+            <a:pPr indent="0" marL="0">
+              <a:buNone/>
+            </a:pPr>
+            <a:r>
+              <a:rPr lang="en-US" sz="1500" dirty="0">
+                <a:solidFill>
+                  <a:srgbClr val="F6C177"/>
+                </a:solidFill>
+                <a:latin typeface="Calibri" pitchFamily="34" charset="0"/>
+                <a:ea typeface="Calibri" pitchFamily="34" charset="-122"/>
+                <a:cs typeface="Calibri" pitchFamily="34" charset="-120"/>
+              </a:rPr>
+              <a:t>   ›   </a:t>
+            </a:r>
+            <a:pPr indent="0" marL="0">
+              <a:buNone/>
+            </a:pPr>
+            <a:r>
+              <a:rPr lang="en-US" sz="1500" b="1" dirty="0">
+                <a:solidFill>
+                  <a:srgbClr val="FFFFFF"/>
+                </a:solidFill>
+                <a:latin typeface="Calibri" pitchFamily="34" charset="0"/>
+                <a:ea typeface="Calibri" pitchFamily="34" charset="-122"/>
+                <a:cs typeface="Calibri" pitchFamily="34" charset="-120"/>
+              </a:rPr>
               <a:t>Workforce</a:t>
             </a:r>
             <a:pPr indent="0" marL="0">
@@ -15347,7 +15553,7 @@
                 <a:ea typeface="Calibri" pitchFamily="34" charset="-122"/>
                 <a:cs typeface="Calibri" pitchFamily="34" charset="-120"/>
               </a:rPr>
-              <a:t>Employees</a:t>
+              <a:t>Sites</a:t>
             </a:r>
             <a:endParaRPr lang="en-US" sz="1100" dirty="0"/>
           </a:p>
@@ -15450,7 +15656,7 @@
                 <a:ea typeface="Calibri" pitchFamily="34" charset="-122"/>
                 <a:cs typeface="Calibri" pitchFamily="34" charset="-120"/>
               </a:rPr>
-              <a:t>Open Workforce → Employees.</a:t>
+              <a:t>Settings → Workforce → Sites. Edit each site and name its supervisor.</a:t>
             </a:r>
             <a:endParaRPr lang="en-US" sz="1500" dirty="0"/>
           </a:p>
@@ -15553,7 +15759,7 @@
                 <a:ea typeface="Calibri" pitchFamily="34" charset="-122"/>
                 <a:cs typeface="Calibri" pitchFamily="34" charset="-120"/>
               </a:rPr>
-              <a:t>Add a new employee, or open an existing one.</a:t>
+              <a:t>Workforce → Employees. Open each supervisor and set THEIR supervisor — the manager.</a:t>
             </a:r>
             <a:endParaRPr lang="en-US" sz="1500" dirty="0"/>
           </a:p>
@@ -15656,7 +15862,7 @@
                 <a:ea typeface="Calibri" pitchFamily="34" charset="-122"/>
                 <a:cs typeface="Calibri" pitchFamily="34" charset="-120"/>
               </a:rPr>
-              <a:t>Set the shift, site, supervisor and employment type.</a:t>
+              <a:t>That's the whole hierarchy. Queues, board, summary and analytics all follow it.</a:t>
             </a:r>
             <a:endParaRPr lang="en-US" sz="1500" dirty="0"/>
           </a:p>
@@ -15759,7 +15965,7 @@
                 <a:ea typeface="Calibri" pitchFamily="34" charset="-122"/>
                 <a:cs typeface="Calibri" pitchFamily="34" charset="-120"/>
               </a:rPr>
-              <a:t>Use the login action to issue an email address and initial password.</a:t>
+              <a:t>Anyone you name as a site supervisor is given supervisor access automatically.</a:t>
             </a:r>
             <a:endParaRPr lang="en-US" sz="1500" dirty="0"/>
           </a:p>
@@ -15839,7 +16045,7 @@
                 <a:ea typeface="Calibri" pitchFamily="34" charset="-122"/>
                 <a:cs typeface="Calibri" pitchFamily="34" charset="-120"/>
               </a:rPr>
-              <a:t>The employee is forced to change that initial password at their first sign-in.</a:t>
+              <a:t>Nobody can approve their own request — it always goes to the person above them, admins included.</a:t>
             </a:r>
             <a:endParaRPr lang="en-US" sz="1050" dirty="0"/>
           </a:p>
@@ -15949,7 +16155,7 @@
                 <a:ea typeface="Calibri" pitchFamily="34" charset="-122"/>
                 <a:cs typeface="Calibri" pitchFamily="34" charset="-120"/>
               </a:rPr>
-              <a:t>Monthly summary and Excel export</a:t>
+              <a:t>Employees and the Employee Hub</a:t>
             </a:r>
             <a:endParaRPr lang="en-US" sz="3300" dirty="0"/>
           </a:p>
@@ -15991,7 +16197,7 @@
                 <a:ea typeface="Calibri" pitchFamily="34" charset="-122"/>
                 <a:cs typeface="Calibri" pitchFamily="34" charset="-120"/>
               </a:rPr>
-              <a:t>The whole month, per employee, in the shape the accountant actually needs.</a:t>
+              <a:t>The people master, plus one page that gathers everything about a single employee.</a:t>
             </a:r>
             <a:endParaRPr lang="en-US" sz="1500" dirty="0"/>
           </a:p>
@@ -16121,7 +16327,7 @@
                 <a:ea typeface="Calibri" pitchFamily="34" charset="-122"/>
                 <a:cs typeface="Calibri" pitchFamily="34" charset="-120"/>
               </a:rPr>
-              <a:t>Days present, working hours, late marks and leave</a:t>
+              <a:t>Codes are generated — leave the field blank for the next one</a:t>
             </a:r>
             <a:endParaRPr lang="en-US" sz="1400" dirty="0"/>
           </a:p>
@@ -16251,7 +16457,7 @@
                 <a:ea typeface="Calibri" pitchFamily="34" charset="-122"/>
                 <a:cs typeface="Calibri" pitchFamily="34" charset="-120"/>
               </a:rPr>
-              <a:t>Approved overtime hours and the resulting OT amount</a:t>
+              <a:t>Shift, site, reporting supervisor and employment type</a:t>
             </a:r>
             <a:endParaRPr lang="en-US" sz="1400" dirty="0"/>
           </a:p>
@@ -16381,7 +16587,7 @@
                 <a:ea typeface="Calibri" pitchFamily="34" charset="-122"/>
                 <a:cs typeface="Calibri" pitchFamily="34" charset="-120"/>
               </a:rPr>
-              <a:t>One Excel sheet per employment type</a:t>
+              <a:t>Hub shows month totals, leave balance and direct reports</a:t>
             </a:r>
             <a:endParaRPr lang="en-US" sz="1400" dirty="0"/>
           </a:p>
@@ -16490,6 +16696,26 @@
                 <a:cs typeface="Calibri" pitchFamily="34" charset="-120"/>
               </a:rPr>
               <a:t>Supervisor</a:t>
+            </a:r>
+            <a:endParaRPr lang="en-US" sz="1500" dirty="0"/>
+          </a:p>
+          <a:p>
+            <a:pPr indent="0" marL="0">
+              <a:spcAft>
+                <a:spcPts val="800"/>
+              </a:spcAft>
+              <a:buNone/>
+            </a:pPr>
+            <a:r>
+              <a:rPr lang="en-US" sz="1500" b="1" dirty="0">
+                <a:solidFill>
+                  <a:srgbClr val="FFFFFF"/>
+                </a:solidFill>
+                <a:latin typeface="Calibri" pitchFamily="34" charset="0"/>
+                <a:ea typeface="Calibri" pitchFamily="34" charset="-122"/>
+                <a:cs typeface="Calibri" pitchFamily="34" charset="-120"/>
+              </a:rPr>
+              <a:t>Admin</a:t>
             </a:r>
             <a:endParaRPr lang="en-US" sz="1500" dirty="0"/>
           </a:p>
@@ -16560,7 +16786,7 @@
                 <a:ea typeface="Calibri" pitchFamily="34" charset="-122"/>
                 <a:cs typeface="Calibri" pitchFamily="34" charset="-120"/>
               </a:rPr>
-              <a:t>HOW TO  —  SUPERVISOR</a:t>
+              <a:t>HOW TO  —  SUPERVISOR + ADMIN</a:t>
             </a:r>
             <a:endParaRPr lang="en-US" sz="1100" dirty="0"/>
           </a:p>
@@ -16599,7 +16825,7 @@
                 <a:ea typeface="Calibri" pitchFamily="34" charset="-122"/>
                 <a:cs typeface="Calibri" pitchFamily="34" charset="-120"/>
               </a:rPr>
-              <a:t>Monthly summary and Excel export</a:t>
+              <a:t>Employees and the Employee Hub</a:t>
             </a:r>
             <a:endParaRPr lang="en-US" sz="2700" dirty="0"/>
           </a:p>
@@ -16707,7 +16933,7 @@
                 <a:ea typeface="Calibri" pitchFamily="34" charset="-122"/>
                 <a:cs typeface="Calibri" pitchFamily="34" charset="-120"/>
               </a:rPr>
-              <a:t>Monthly Summary</a:t>
+              <a:t>Employees</a:t>
             </a:r>
             <a:endParaRPr lang="en-US" sz="1100" dirty="0"/>
           </a:p>
@@ -16810,7 +17036,7 @@
                 <a:ea typeface="Calibri" pitchFamily="34" charset="-122"/>
                 <a:cs typeface="Calibri" pitchFamily="34" charset="-120"/>
               </a:rPr>
-              <a:t>Open Workforce → Monthly Summary.</a:t>
+              <a:t>Open Workforce → Employees. + New employee opens its own page.</a:t>
             </a:r>
             <a:endParaRPr lang="en-US" sz="1500" dirty="0"/>
           </a:p>
@@ -16913,7 +17139,7 @@
                 <a:ea typeface="Calibri" pitchFamily="34" charset="-122"/>
                 <a:cs typeface="Calibri" pitchFamily="34" charset="-120"/>
               </a:rPr>
-              <a:t>Choose the month.</a:t>
+              <a:t>Leave Code blank to get the next EMP-#### , or type your own scheme.</a:t>
             </a:r>
             <a:endParaRPr lang="en-US" sz="1500" dirty="0"/>
           </a:p>
@@ -17016,7 +17242,7 @@
                 <a:ea typeface="Calibri" pitchFamily="34" charset="-122"/>
                 <a:cs typeface="Calibri" pitchFamily="34" charset="-120"/>
               </a:rPr>
-              <a:t>Filter by site or employment type if you need a subset.</a:t>
+              <a:t>Set the shift, site, supervisor and employment type.</a:t>
             </a:r>
             <a:endParaRPr lang="en-US" sz="1500" dirty="0"/>
           </a:p>
@@ -17119,7 +17345,7 @@
                 <a:ea typeface="Calibri" pitchFamily="34" charset="-122"/>
                 <a:cs typeface="Calibri" pitchFamily="34" charset="-120"/>
               </a:rPr>
-              <a:t>Download the Excel export for the accountant.</a:t>
+              <a:t>Use the login action to issue an email address and initial password.</a:t>
             </a:r>
             <a:endParaRPr lang="en-US" sz="1500" dirty="0"/>
           </a:p>
@@ -17199,7 +17425,7 @@
                 <a:ea typeface="Calibri" pitchFamily="34" charset="-122"/>
                 <a:cs typeface="Calibri" pitchFamily="34" charset="-120"/>
               </a:rPr>
-              <a:t>Only approved overtime reaches the OT Hours and OT Amount columns.</a:t>
+              <a:t>A typed code that already exists is refused rather than overwritten. The employee must change the initial password at first sign-in.</a:t>
             </a:r>
             <a:endParaRPr lang="en-US" sz="1050" dirty="0"/>
           </a:p>
@@ -17309,7 +17535,7 @@
                 <a:ea typeface="Calibri" pitchFamily="34" charset="-122"/>
                 <a:cs typeface="Calibri" pitchFamily="34" charset="-120"/>
               </a:rPr>
-              <a:t>Shifts and sites</a:t>
+              <a:t>Monthly summary and Excel export</a:t>
             </a:r>
             <a:endParaRPr lang="en-US" sz="3300" dirty="0"/>
           </a:p>
@@ -17351,7 +17577,7 @@
                 <a:ea typeface="Calibri" pitchFamily="34" charset="-122"/>
                 <a:cs typeface="Calibri" pitchFamily="34" charset="-120"/>
               </a:rPr>
-              <a:t>Working hours, and the physical places where a punch is considered on-site.</a:t>
+              <a:t>The whole month, per employee, in the shape the accountant actually needs.</a:t>
             </a:r>
             <a:endParaRPr lang="en-US" sz="1500" dirty="0"/>
           </a:p>
@@ -17481,7 +17707,7 @@
                 <a:ea typeface="Calibri" pitchFamily="34" charset="-122"/>
                 <a:cs typeface="Calibri" pitchFamily="34" charset="-120"/>
               </a:rPr>
-              <a:t>Shift start, end, grace minutes and night allowance</a:t>
+              <a:t>Days present, working hours, late marks and leave</a:t>
             </a:r>
             <a:endParaRPr lang="en-US" sz="1400" dirty="0"/>
           </a:p>
@@ -17611,7 +17837,7 @@
                 <a:ea typeface="Calibri" pitchFamily="34" charset="-122"/>
                 <a:cs typeface="Calibri" pitchFamily="34" charset="-120"/>
               </a:rPr>
-              <a:t>Sites picked on a map with a geofence radius</a:t>
+              <a:t>Approved overtime hours and the resulting OT amount</a:t>
             </a:r>
             <a:endParaRPr lang="en-US" sz="1400" dirty="0"/>
           </a:p>
@@ -17741,7 +17967,7 @@
                 <a:ea typeface="Calibri" pitchFamily="34" charset="-122"/>
                 <a:cs typeface="Calibri" pitchFamily="34" charset="-120"/>
               </a:rPr>
-              <a:t>Geofence mode: block the punch, flag it, or ignore location</a:t>
+              <a:t>One Excel sheet per employment type</a:t>
             </a:r>
             <a:endParaRPr lang="en-US" sz="1400" dirty="0"/>
           </a:p>
@@ -17849,7 +18075,7 @@
                 <a:ea typeface="Calibri" pitchFamily="34" charset="-122"/>
                 <a:cs typeface="Calibri" pitchFamily="34" charset="-120"/>
               </a:rPr>
-              <a:t>Admin</a:t>
+              <a:t>Supervisor</a:t>
             </a:r>
             <a:endParaRPr lang="en-US" sz="1500" dirty="0"/>
           </a:p>
@@ -17920,7 +18146,7 @@
                 <a:ea typeface="Calibri" pitchFamily="34" charset="-122"/>
                 <a:cs typeface="Calibri" pitchFamily="34" charset="-120"/>
               </a:rPr>
-              <a:t>HOW TO  —  ADMIN</a:t>
+              <a:t>HOW TO  —  SUPERVISOR</a:t>
             </a:r>
             <a:endParaRPr lang="en-US" sz="1100" dirty="0"/>
           </a:p>
@@ -17959,7 +18185,7 @@
                 <a:ea typeface="Calibri" pitchFamily="34" charset="-122"/>
                 <a:cs typeface="Calibri" pitchFamily="34" charset="-120"/>
               </a:rPr>
-              <a:t>Shifts and sites</a:t>
+              <a:t>Monthly summary and Excel export</a:t>
             </a:r>
             <a:endParaRPr lang="en-US" sz="2700" dirty="0"/>
           </a:p>
@@ -18039,7 +18265,7 @@
                 <a:ea typeface="Calibri" pitchFamily="34" charset="-122"/>
                 <a:cs typeface="Calibri" pitchFamily="34" charset="-120"/>
               </a:rPr>
-              <a:t>Settings</a:t>
+              <a:t>Workforce</a:t>
             </a:r>
             <a:pPr indent="0" marL="0">
               <a:buNone/>
@@ -18067,35 +18293,7 @@
                 <a:ea typeface="Calibri" pitchFamily="34" charset="-122"/>
                 <a:cs typeface="Calibri" pitchFamily="34" charset="-120"/>
               </a:rPr>
-              <a:t>Workforce</a:t>
-            </a:r>
-            <a:pPr indent="0" marL="0">
-              <a:buNone/>
-            </a:pPr>
-            <a:r>
-              <a:rPr lang="en-US" sz="1500" dirty="0">
-                <a:solidFill>
-                  <a:srgbClr val="F6C177"/>
-                </a:solidFill>
-                <a:latin typeface="Calibri" pitchFamily="34" charset="0"/>
-                <a:ea typeface="Calibri" pitchFamily="34" charset="-122"/>
-                <a:cs typeface="Calibri" pitchFamily="34" charset="-120"/>
-              </a:rPr>
-              <a:t>   ›   </a:t>
-            </a:r>
-            <a:pPr indent="0" marL="0">
-              <a:buNone/>
-            </a:pPr>
-            <a:r>
-              <a:rPr lang="en-US" sz="1500" b="1" dirty="0">
-                <a:solidFill>
-                  <a:srgbClr val="FFFFFF"/>
-                </a:solidFill>
-                <a:latin typeface="Calibri" pitchFamily="34" charset="0"/>
-                <a:ea typeface="Calibri" pitchFamily="34" charset="-122"/>
-                <a:cs typeface="Calibri" pitchFamily="34" charset="-120"/>
-              </a:rPr>
-              <a:t>Shifts / Sites</a:t>
+              <a:t>Monthly Summary</a:t>
             </a:r>
             <a:endParaRPr lang="en-US" sz="1100" dirty="0"/>
           </a:p>
@@ -18198,7 +18396,7 @@
                 <a:ea typeface="Calibri" pitchFamily="34" charset="-122"/>
                 <a:cs typeface="Calibri" pitchFamily="34" charset="-120"/>
               </a:rPr>
-              <a:t>Open Settings → Workforce.</a:t>
+              <a:t>Open Workforce → Monthly Summary.</a:t>
             </a:r>
             <a:endParaRPr lang="en-US" sz="1500" dirty="0"/>
           </a:p>
@@ -18301,7 +18499,7 @@
                 <a:ea typeface="Calibri" pitchFamily="34" charset="-122"/>
                 <a:cs typeface="Calibri" pitchFamily="34" charset="-120"/>
               </a:rPr>
-              <a:t>Shifts tab — add the start time, end time and grace minutes.</a:t>
+              <a:t>Choose the month.</a:t>
             </a:r>
             <a:endParaRPr lang="en-US" sz="1500" dirty="0"/>
           </a:p>
@@ -18404,7 +18602,7 @@
                 <a:ea typeface="Calibri" pitchFamily="34" charset="-122"/>
                 <a:cs typeface="Calibri" pitchFamily="34" charset="-120"/>
               </a:rPr>
-              <a:t>Sites tab — search the address or drop the pin, then set the radius.</a:t>
+              <a:t>Filter by site or employment type if you need a subset.</a:t>
             </a:r>
             <a:endParaRPr lang="en-US" sz="1500" dirty="0"/>
           </a:p>
@@ -18507,7 +18705,7 @@
                 <a:ea typeface="Calibri" pitchFamily="34" charset="-122"/>
                 <a:cs typeface="Calibri" pitchFamily="34" charset="-120"/>
               </a:rPr>
-              <a:t>General tab — choose the geofence mode for the whole workspace.</a:t>
+              <a:t>Download the Excel export for the accountant.</a:t>
             </a:r>
             <a:endParaRPr lang="en-US" sz="1500" dirty="0"/>
           </a:p>
@@ -18587,7 +18785,7 @@
                 <a:ea typeface="Calibri" pitchFamily="34" charset="-122"/>
                 <a:cs typeface="Calibri" pitchFamily="34" charset="-120"/>
               </a:rPr>
-              <a:t>A shift that ends earlier than it starts crosses midnight. Mark it, or night hours land on the wrong day.</a:t>
+              <a:t>Only approved overtime reaches the OT Hours and OT Amount columns.</a:t>
             </a:r>
             <a:endParaRPr lang="en-US" sz="1050" dirty="0"/>
           </a:p>
@@ -18697,7 +18895,7 @@
                 <a:ea typeface="Calibri" pitchFamily="34" charset="-122"/>
                 <a:cs typeface="Calibri" pitchFamily="34" charset="-120"/>
               </a:rPr>
-              <a:t>Leave types and holidays</a:t>
+              <a:t>Shifts and sites</a:t>
             </a:r>
             <a:endParaRPr lang="en-US" sz="3300" dirty="0"/>
           </a:p>
@@ -18739,7 +18937,7 @@
                 <a:ea typeface="Calibri" pitchFamily="34" charset="-122"/>
                 <a:cs typeface="Calibri" pitchFamily="34" charset="-120"/>
               </a:rPr>
-              <a:t>What people are allowed to take, and the days on which nobody is marked absent.</a:t>
+              <a:t>Working hours, and the physical places where a punch is considered on-site.</a:t>
             </a:r>
             <a:endParaRPr lang="en-US" sz="1500" dirty="0"/>
           </a:p>
@@ -18869,7 +19067,7 @@
                 <a:ea typeface="Calibri" pitchFamily="34" charset="-122"/>
                 <a:cs typeface="Calibri" pitchFamily="34" charset="-120"/>
               </a:rPr>
-              <a:t>Leave types are paid, unpaid or half day, each with an annual quota</a:t>
+              <a:t>Shift start, end, grace minutes and night allowance</a:t>
             </a:r>
             <a:endParaRPr lang="en-US" sz="1400" dirty="0"/>
           </a:p>
@@ -18999,7 +19197,7 @@
                 <a:ea typeface="Calibri" pitchFamily="34" charset="-122"/>
                 <a:cs typeface="Calibri" pitchFamily="34" charset="-120"/>
               </a:rPr>
-              <a:t>Holidays apply to everyone, or to one employment type</a:t>
+              <a:t>Sites picked on a map with a geofence radius</a:t>
             </a:r>
             <a:endParaRPr lang="en-US" sz="1400" dirty="0"/>
           </a:p>
@@ -19129,7 +19327,7 @@
                 <a:ea typeface="Calibri" pitchFamily="34" charset="-122"/>
                 <a:cs typeface="Calibri" pitchFamily="34" charset="-120"/>
               </a:rPr>
-              <a:t>Both feed the leave calendar and the monthly summary</a:t>
+              <a:t>Geofence mode: block the punch, flag it, or ignore location</a:t>
             </a:r>
             <a:endParaRPr lang="en-US" sz="1400" dirty="0"/>
           </a:p>
@@ -19997,7 +20195,7 @@
                 <a:ea typeface="Calibri" pitchFamily="34" charset="-122"/>
                 <a:cs typeface="Calibri" pitchFamily="34" charset="-120"/>
               </a:rPr>
-              <a:t>Leave types and holidays</a:t>
+              <a:t>Shifts and sites</a:t>
             </a:r>
             <a:endParaRPr lang="en-US" sz="2700" dirty="0"/>
           </a:p>
@@ -20133,7 +20331,7 @@
                 <a:ea typeface="Calibri" pitchFamily="34" charset="-122"/>
                 <a:cs typeface="Calibri" pitchFamily="34" charset="-120"/>
               </a:rPr>
-              <a:t>Leave Types / Holidays</a:t>
+              <a:t>Shifts / Sites</a:t>
             </a:r>
             <a:endParaRPr lang="en-US" sz="1100" dirty="0"/>
           </a:p>
@@ -20236,7 +20434,7 @@
                 <a:ea typeface="Calibri" pitchFamily="34" charset="-122"/>
                 <a:cs typeface="Calibri" pitchFamily="34" charset="-120"/>
               </a:rPr>
-              <a:t>Open Settings → Workforce → Leave Types.</a:t>
+              <a:t>Open Settings → Workforce. Add and Edit each open their own page.</a:t>
             </a:r>
             <a:endParaRPr lang="en-US" sz="1500" dirty="0"/>
           </a:p>
@@ -20339,7 +20537,7 @@
                 <a:ea typeface="Calibri" pitchFamily="34" charset="-122"/>
                 <a:cs typeface="Calibri" pitchFamily="34" charset="-120"/>
               </a:rPr>
-              <a:t>Add the type, its category and the annual quota.</a:t>
+              <a:t>Shifts tab — add the start time, end time and grace minutes.</a:t>
             </a:r>
             <a:endParaRPr lang="en-US" sz="1500" dirty="0"/>
           </a:p>
@@ -20442,7 +20640,7 @@
                 <a:ea typeface="Calibri" pitchFamily="34" charset="-122"/>
                 <a:cs typeface="Calibri" pitchFamily="34" charset="-120"/>
               </a:rPr>
-              <a:t>Switch to the Holidays tab and add the date, name and audience.</a:t>
+              <a:t>Sites tab — set the pin, the radius, and the site's supervisor.</a:t>
             </a:r>
             <a:endParaRPr lang="en-US" sz="1500" dirty="0"/>
           </a:p>
@@ -20545,7 +20743,7 @@
                 <a:ea typeface="Calibri" pitchFamily="34" charset="-122"/>
                 <a:cs typeface="Calibri" pitchFamily="34" charset="-120"/>
               </a:rPr>
-              <a:t>Both appear on every employee's leave calendar immediately.</a:t>
+              <a:t>General tab — choose the geofence mode for the whole workspace.</a:t>
             </a:r>
             <a:endParaRPr lang="en-US" sz="1500" dirty="0"/>
           </a:p>
@@ -20625,7 +20823,7 @@
                 <a:ea typeface="Calibri" pitchFamily="34" charset="-122"/>
                 <a:cs typeface="Calibri" pitchFamily="34" charset="-120"/>
               </a:rPr>
-              <a:t>Deactivate a leave type rather than deleting it — existing records still point at it.</a:t>
+              <a:t>A site left without a supervisor has nobody to approve its people — the screen warns you by name until you fix it.</a:t>
             </a:r>
             <a:endParaRPr lang="en-US" sz="1050" dirty="0"/>
           </a:p>
@@ -20735,7 +20933,7 @@
                 <a:ea typeface="Calibri" pitchFamily="34" charset="-122"/>
                 <a:cs typeface="Calibri" pitchFamily="34" charset="-120"/>
               </a:rPr>
-              <a:t>Attendance rules and notifications</a:t>
+              <a:t>Leave types and holidays</a:t>
             </a:r>
             <a:endParaRPr lang="en-US" sz="3300" dirty="0"/>
           </a:p>
@@ -20777,7 +20975,7 @@
                 <a:ea typeface="Calibri" pitchFamily="34" charset="-122"/>
                 <a:cs typeface="Calibri" pitchFamily="34" charset="-120"/>
               </a:rPr>
-              <a:t>The workspace-wide switches that decide how hours are counted and who gets told.</a:t>
+              <a:t>What people are allowed to take, and the days on which nobody is marked absent.</a:t>
             </a:r>
             <a:endParaRPr lang="en-US" sz="1500" dirty="0"/>
           </a:p>
@@ -20907,7 +21105,7 @@
                 <a:ea typeface="Calibri" pitchFamily="34" charset="-122"/>
                 <a:cs typeface="Calibri" pitchFamily="34" charset="-120"/>
               </a:rPr>
-              <a:t>Timezone, break deduction, late marks per half-day</a:t>
+              <a:t>Leave types are paid, unpaid or half day, each with an annual quota</a:t>
             </a:r>
             <a:endParaRPr lang="en-US" sz="1400" dirty="0"/>
           </a:p>
@@ -21037,7 +21235,7 @@
                 <a:ea typeface="Calibri" pitchFamily="34" charset="-122"/>
                 <a:cs typeface="Calibri" pitchFamily="34" charset="-120"/>
               </a:rPr>
-              <a:t>Employment types are your own list, not a fixed set</a:t>
+              <a:t>Holidays apply to everyone, or to one employment type</a:t>
             </a:r>
             <a:endParaRPr lang="en-US" sz="1400" dirty="0"/>
           </a:p>
@@ -21167,7 +21365,7 @@
                 <a:ea typeface="Calibri" pitchFamily="34" charset="-122"/>
                 <a:cs typeface="Calibri" pitchFamily="34" charset="-120"/>
               </a:rPr>
-              <a:t>Email alerts for late arrival, corrections, leave and rechecks</a:t>
+              <a:t>Both feed the leave calendar and the monthly summary</a:t>
             </a:r>
             <a:endParaRPr lang="en-US" sz="1400" dirty="0"/>
           </a:p>
@@ -21385,7 +21583,7 @@
                 <a:ea typeface="Calibri" pitchFamily="34" charset="-122"/>
                 <a:cs typeface="Calibri" pitchFamily="34" charset="-120"/>
               </a:rPr>
-              <a:t>Attendance rules and notifications</a:t>
+              <a:t>Leave types and holidays</a:t>
             </a:r>
             <a:endParaRPr lang="en-US" sz="2700" dirty="0"/>
           </a:p>
@@ -21521,7 +21719,7 @@
                 <a:ea typeface="Calibri" pitchFamily="34" charset="-122"/>
                 <a:cs typeface="Calibri" pitchFamily="34" charset="-120"/>
               </a:rPr>
-              <a:t>General</a:t>
+              <a:t>Leave Types / Holidays</a:t>
             </a:r>
             <a:endParaRPr lang="en-US" sz="1100" dirty="0"/>
           </a:p>
@@ -21624,7 +21822,7 @@
                 <a:ea typeface="Calibri" pitchFamily="34" charset="-122"/>
                 <a:cs typeface="Calibri" pitchFamily="34" charset="-120"/>
               </a:rPr>
-              <a:t>Open Settings → Workforce → General.</a:t>
+              <a:t>Open Settings → Workforce → Leave Types.</a:t>
             </a:r>
             <a:endParaRPr lang="en-US" sz="1500" dirty="0"/>
           </a:p>
@@ -21727,7 +21925,7 @@
                 <a:ea typeface="Calibri" pitchFamily="34" charset="-122"/>
                 <a:cs typeface="Calibri" pitchFamily="34" charset="-120"/>
               </a:rPr>
-              <a:t>Set the timezone, break deduction and weekly off days.</a:t>
+              <a:t>Add the type, its category and the annual quota.</a:t>
             </a:r>
             <a:endParaRPr lang="en-US" sz="1500" dirty="0"/>
           </a:p>
@@ -21830,7 +22028,7 @@
                 <a:ea typeface="Calibri" pitchFamily="34" charset="-122"/>
                 <a:cs typeface="Calibri" pitchFamily="34" charset="-120"/>
               </a:rPr>
-              <a:t>Edit the employment types — add Intern, Contractor and so on.</a:t>
+              <a:t>Switch to the Holidays tab and add the date, name and audience.</a:t>
             </a:r>
             <a:endParaRPr lang="en-US" sz="1500" dirty="0"/>
           </a:p>
@@ -21933,7 +22131,7 @@
                 <a:ea typeface="Calibri" pitchFamily="34" charset="-122"/>
                 <a:cs typeface="Calibri" pitchFamily="34" charset="-120"/>
               </a:rPr>
-              <a:t>Switch the four email notifications on or off.</a:t>
+              <a:t>Both appear on every employee's leave calendar immediately.</a:t>
             </a:r>
             <a:endParaRPr lang="en-US" sz="1500" dirty="0"/>
           </a:p>
@@ -22013,7 +22211,7 @@
                 <a:ea typeface="Calibri" pitchFamily="34" charset="-122"/>
                 <a:cs typeface="Calibri" pitchFamily="34" charset="-120"/>
               </a:rPr>
-              <a:t>Never rename an employment type code once employees use it — the Excel export groups its sheets by that code.</a:t>
+              <a:t>Deactivate a leave type rather than deleting it — existing records still point at it.</a:t>
             </a:r>
             <a:endParaRPr lang="en-US" sz="1050" dirty="0"/>
           </a:p>
@@ -22060,7 +22258,7 @@
         <p:spPr>
           <a:xfrm>
             <a:off x="548640" y="384048"/>
-            <a:ext cx="5486400" cy="274320"/>
+            <a:ext cx="3657600" cy="274320"/>
           </a:xfrm>
           <a:prstGeom prst="rect">
             <a:avLst/>
@@ -22084,7 +22282,7 @@
                 <a:ea typeface="Calibri" pitchFamily="34" charset="-122"/>
                 <a:cs typeface="Calibri" pitchFamily="34" charset="-120"/>
               </a:rPr>
-              <a:t>PERMISSIONS</a:t>
+              <a:t>FEATURE 16</a:t>
             </a:r>
             <a:endParaRPr lang="en-US" sz="1100" dirty="0"/>
           </a:p>
@@ -22099,7 +22297,46 @@
         <p:spPr>
           <a:xfrm>
             <a:off x="548640" y="685800"/>
-            <a:ext cx="10515600" cy="640080"/>
+            <a:ext cx="7680960" cy="914400"/>
+          </a:xfrm>
+          <a:prstGeom prst="rect">
+            <a:avLst/>
+          </a:prstGeom>
+          <a:noFill/>
+          <a:ln/>
+        </p:spPr>
+        <p:txBody>
+          <a:bodyPr wrap="square" rtlCol="0" anchor="t"/>
+          <a:lstStyle/>
+          <a:p>
+            <a:pPr indent="0" marL="0">
+              <a:buNone/>
+            </a:pPr>
+            <a:r>
+              <a:rPr lang="en-US" sz="3300" b="1" dirty="0">
+                <a:solidFill>
+                  <a:srgbClr val="0E1A28"/>
+                </a:solidFill>
+                <a:latin typeface="Calibri" pitchFamily="34" charset="0"/>
+                <a:ea typeface="Calibri" pitchFamily="34" charset="-122"/>
+                <a:cs typeface="Calibri" pitchFamily="34" charset="-120"/>
+              </a:rPr>
+              <a:t>Attendance rules and notifications</a:t>
+            </a:r>
+            <a:endParaRPr lang="en-US" sz="3300" dirty="0"/>
+          </a:p>
+        </p:txBody>
+      </p:sp>
+      <p:sp>
+        <p:nvSpPr>
+          <p:cNvPr id="4" name="Text 2"/>
+          <p:cNvSpPr/>
+          <p:nvPr/>
+        </p:nvSpPr>
+        <p:spPr>
+          <a:xfrm>
+            <a:off x="548640" y="1664208"/>
+            <a:ext cx="7680960" cy="658368"/>
           </a:xfrm>
           <a:prstGeom prst="rect">
             <a:avLst/>
@@ -22112,49 +22349,13 @@
           <a:lstStyle/>
           <a:p>
             <a:pPr indent="0" marL="0">
-              <a:buNone/>
-            </a:pPr>
-            <a:r>
-              <a:rPr lang="en-US" sz="3300" b="1" dirty="0">
-                <a:solidFill>
-                  <a:srgbClr val="0E1A28"/>
-                </a:solidFill>
-                <a:latin typeface="Calibri" pitchFamily="34" charset="0"/>
-                <a:ea typeface="Calibri" pitchFamily="34" charset="-122"/>
-                <a:cs typeface="Calibri" pitchFamily="34" charset="-120"/>
-              </a:rPr>
-              <a:t>Who can do what</a:t>
-            </a:r>
-            <a:endParaRPr lang="en-US" sz="3300" dirty="0"/>
-          </a:p>
-        </p:txBody>
-      </p:sp>
-      <p:sp>
-        <p:nvSpPr>
-          <p:cNvPr id="4" name="Text 2"/>
-          <p:cNvSpPr/>
-          <p:nvPr/>
-        </p:nvSpPr>
-        <p:spPr>
-          <a:xfrm>
-            <a:off x="548640" y="1371600"/>
-            <a:ext cx="10515600" cy="365760"/>
-          </a:xfrm>
-          <a:prstGeom prst="rect">
-            <a:avLst/>
-          </a:prstGeom>
-          <a:noFill/>
-          <a:ln/>
-        </p:spPr>
-        <p:txBody>
-          <a:bodyPr wrap="square" rtlCol="0" anchor="ctr"/>
-          <a:lstStyle/>
-          <a:p>
-            <a:pPr indent="0" marL="0">
-              <a:buNone/>
-            </a:pPr>
-            <a:r>
-              <a:rPr lang="en-US" sz="1400" dirty="0">
+              <a:lnSpc>
+                <a:spcPts val="2100"/>
+              </a:lnSpc>
+              <a:buNone/>
+            </a:pPr>
+            <a:r>
+              <a:rPr lang="en-US" sz="1500" dirty="0">
                 <a:solidFill>
                   <a:srgbClr val="5C6B7A"/>
                 </a:solidFill>
@@ -22162,9 +22363,9 @@
                 <a:ea typeface="Calibri" pitchFamily="34" charset="-122"/>
                 <a:cs typeface="Calibri" pitchFamily="34" charset="-120"/>
               </a:rPr>
-              <a:t>Enforced on the server, not just hidden in the interface.</a:t>
-            </a:r>
-            <a:endParaRPr lang="en-US" sz="1400" dirty="0"/>
+              <a:t>The workspace-wide switches that decide how hours are counted and who gets told.</a:t>
+            </a:r>
+            <a:endParaRPr lang="en-US" sz="1500" dirty="0"/>
           </a:p>
         </p:txBody>
       </p:sp>
@@ -22176,13 +22377,38 @@
         </p:nvSpPr>
         <p:spPr>
           <a:xfrm>
-            <a:off x="548640" y="1874520"/>
-            <a:ext cx="11064240" cy="493776"/>
+            <a:off x="548640" y="2487168"/>
+            <a:ext cx="7680960" cy="786384"/>
           </a:xfrm>
           <a:prstGeom prst="roundRect">
             <a:avLst>
-              <a:gd name="adj" fmla="val 9259"/>
+              <a:gd name="adj" fmla="val 9302"/>
             </a:avLst>
+          </a:prstGeom>
+          <a:solidFill>
+            <a:srgbClr val="F3F5F7"/>
+          </a:solidFill>
+          <a:ln w="12700">
+            <a:solidFill>
+              <a:srgbClr val="F3F5F7"/>
+            </a:solidFill>
+            <a:prstDash val="solid"/>
+          </a:ln>
+        </p:spPr>
+      </p:sp>
+      <p:sp>
+        <p:nvSpPr>
+          <p:cNvPr id="6" name="Shape 4"/>
+          <p:cNvSpPr/>
+          <p:nvPr/>
+        </p:nvSpPr>
+        <p:spPr>
+          <a:xfrm>
+            <a:off x="786384" y="2702052"/>
+            <a:ext cx="356616" cy="356616"/>
+          </a:xfrm>
+          <a:prstGeom prst="ellipse">
+            <a:avLst/>
           </a:prstGeom>
           <a:solidFill>
             <a:srgbClr val="0E1A28"/>
@@ -22197,38 +22423,38 @@
       </p:sp>
       <p:sp>
         <p:nvSpPr>
-          <p:cNvPr id="6" name="Text 4"/>
-          <p:cNvSpPr/>
-          <p:nvPr/>
-        </p:nvSpPr>
-        <p:spPr>
-          <a:xfrm>
-            <a:off x="548640" y="1874520"/>
-            <a:ext cx="6263640" cy="493776"/>
-          </a:xfrm>
-          <a:prstGeom prst="rect">
-            <a:avLst/>
-          </a:prstGeom>
-          <a:noFill/>
-          <a:ln/>
-        </p:spPr>
-        <p:txBody>
-          <a:bodyPr wrap="square" lIns="0" tIns="0" rIns="0" bIns="0" rtlCol="0" anchor="ctr"/>
-          <a:lstStyle/>
-          <a:p>
-            <a:pPr algn="l" indent="0" marL="0">
+          <p:cNvPr id="7" name="Text 5"/>
+          <p:cNvSpPr/>
+          <p:nvPr/>
+        </p:nvSpPr>
+        <p:spPr>
+          <a:xfrm>
+            <a:off x="786384" y="2702052"/>
+            <a:ext cx="356616" cy="356616"/>
+          </a:xfrm>
+          <a:prstGeom prst="rect">
+            <a:avLst/>
+          </a:prstGeom>
+          <a:noFill/>
+          <a:ln/>
+        </p:spPr>
+        <p:txBody>
+          <a:bodyPr wrap="square" lIns="0" tIns="0" rIns="0" bIns="0" rtlCol="0" anchor="ctr"/>
+          <a:lstStyle/>
+          <a:p>
+            <a:pPr algn="ctr" indent="0" marL="0">
               <a:buNone/>
             </a:pPr>
             <a:r>
               <a:rPr lang="en-US" sz="1200" b="1" dirty="0">
                 <a:solidFill>
-                  <a:srgbClr val="FFFFFF"/>
-                </a:solidFill>
-                <a:latin typeface="Calibri" pitchFamily="34" charset="0"/>
-                <a:ea typeface="Calibri" pitchFamily="34" charset="-122"/>
-                <a:cs typeface="Calibri" pitchFamily="34" charset="-120"/>
-              </a:rPr>
-              <a:t>Action</a:t>
+                  <a:srgbClr val="F6C177"/>
+                </a:solidFill>
+                <a:latin typeface="Calibri" pitchFamily="34" charset="0"/>
+                <a:ea typeface="Calibri" pitchFamily="34" charset="-122"/>
+                <a:cs typeface="Calibri" pitchFamily="34" charset="-120"/>
+              </a:rPr>
+              <a:t>1</a:t>
             </a:r>
             <a:endParaRPr lang="en-US" sz="1200" dirty="0"/>
           </a:p>
@@ -22236,143 +22462,65 @@
       </p:sp>
       <p:sp>
         <p:nvSpPr>
-          <p:cNvPr id="7" name="Text 5"/>
-          <p:cNvSpPr/>
-          <p:nvPr/>
-        </p:nvSpPr>
-        <p:spPr>
-          <a:xfrm>
-            <a:off x="6903720" y="1874520"/>
-            <a:ext cx="1554480" cy="493776"/>
-          </a:xfrm>
-          <a:prstGeom prst="rect">
-            <a:avLst/>
-          </a:prstGeom>
-          <a:noFill/>
-          <a:ln/>
-        </p:spPr>
-        <p:txBody>
-          <a:bodyPr wrap="square" lIns="0" tIns="0" rIns="0" bIns="0" rtlCol="0" anchor="ctr"/>
-          <a:lstStyle/>
-          <a:p>
-            <a:pPr algn="ctr" indent="0" marL="0">
-              <a:buNone/>
-            </a:pPr>
-            <a:r>
-              <a:rPr lang="en-US" sz="1200" b="1" dirty="0">
-                <a:solidFill>
-                  <a:srgbClr val="FFFFFF"/>
-                </a:solidFill>
-                <a:latin typeface="Calibri" pitchFamily="34" charset="0"/>
-                <a:ea typeface="Calibri" pitchFamily="34" charset="-122"/>
-                <a:cs typeface="Calibri" pitchFamily="34" charset="-120"/>
-              </a:rPr>
-              <a:t>Employee</a:t>
-            </a:r>
-            <a:endParaRPr lang="en-US" sz="1200" dirty="0"/>
-          </a:p>
-        </p:txBody>
-      </p:sp>
-      <p:sp>
-        <p:nvSpPr>
           <p:cNvPr id="8" name="Text 6"/>
           <p:cNvSpPr/>
           <p:nvPr/>
         </p:nvSpPr>
         <p:spPr>
           <a:xfrm>
-            <a:off x="8549640" y="1874520"/>
-            <a:ext cx="1691640" cy="493776"/>
-          </a:xfrm>
-          <a:prstGeom prst="rect">
-            <a:avLst/>
-          </a:prstGeom>
-          <a:noFill/>
-          <a:ln/>
-        </p:spPr>
-        <p:txBody>
-          <a:bodyPr wrap="square" lIns="0" tIns="0" rIns="0" bIns="0" rtlCol="0" anchor="ctr"/>
-          <a:lstStyle/>
-          <a:p>
-            <a:pPr algn="ctr" indent="0" marL="0">
-              <a:buNone/>
-            </a:pPr>
-            <a:r>
-              <a:rPr lang="en-US" sz="1200" b="1" dirty="0">
-                <a:solidFill>
-                  <a:srgbClr val="FFFFFF"/>
-                </a:solidFill>
-                <a:latin typeface="Calibri" pitchFamily="34" charset="0"/>
-                <a:ea typeface="Calibri" pitchFamily="34" charset="-122"/>
-                <a:cs typeface="Calibri" pitchFamily="34" charset="-120"/>
-              </a:rPr>
-              <a:t>Supervisor</a:t>
-            </a:r>
-            <a:endParaRPr lang="en-US" sz="1200" dirty="0"/>
-          </a:p>
-        </p:txBody>
-      </p:sp>
-      <p:sp>
-        <p:nvSpPr>
-          <p:cNvPr id="9" name="Text 7"/>
-          <p:cNvSpPr/>
-          <p:nvPr/>
-        </p:nvSpPr>
-        <p:spPr>
-          <a:xfrm>
-            <a:off x="10332720" y="1874520"/>
-            <a:ext cx="1280160" cy="493776"/>
-          </a:xfrm>
-          <a:prstGeom prst="rect">
-            <a:avLst/>
-          </a:prstGeom>
-          <a:noFill/>
-          <a:ln/>
-        </p:spPr>
-        <p:txBody>
-          <a:bodyPr wrap="square" lIns="0" tIns="0" rIns="0" bIns="0" rtlCol="0" anchor="ctr"/>
-          <a:lstStyle/>
-          <a:p>
-            <a:pPr algn="ctr" indent="0" marL="0">
-              <a:buNone/>
-            </a:pPr>
-            <a:r>
-              <a:rPr lang="en-US" sz="1200" b="1" dirty="0">
-                <a:solidFill>
-                  <a:srgbClr val="FFFFFF"/>
-                </a:solidFill>
-                <a:latin typeface="Calibri" pitchFamily="34" charset="0"/>
-                <a:ea typeface="Calibri" pitchFamily="34" charset="-122"/>
-                <a:cs typeface="Calibri" pitchFamily="34" charset="-120"/>
-              </a:rPr>
-              <a:t>Admin</a:t>
-            </a:r>
-            <a:endParaRPr lang="en-US" sz="1200" dirty="0"/>
-          </a:p>
-        </p:txBody>
-      </p:sp>
-      <p:sp>
-        <p:nvSpPr>
-          <p:cNvPr id="10" name="Shape 8"/>
-          <p:cNvSpPr/>
-          <p:nvPr/>
-        </p:nvSpPr>
-        <p:spPr>
-          <a:xfrm>
-            <a:off x="548640" y="2423160"/>
-            <a:ext cx="11064240" cy="493776"/>
+            <a:off x="1298448" y="2542032"/>
+            <a:ext cx="6766560" cy="676656"/>
+          </a:xfrm>
+          <a:prstGeom prst="rect">
+            <a:avLst/>
+          </a:prstGeom>
+          <a:noFill/>
+          <a:ln/>
+        </p:spPr>
+        <p:txBody>
+          <a:bodyPr wrap="square" lIns="0" tIns="0" rIns="0" bIns="0" rtlCol="0" anchor="ctr"/>
+          <a:lstStyle/>
+          <a:p>
+            <a:pPr indent="0" marL="0">
+              <a:buNone/>
+            </a:pPr>
+            <a:r>
+              <a:rPr lang="en-US" sz="1400" dirty="0">
+                <a:solidFill>
+                  <a:srgbClr val="16202B"/>
+                </a:solidFill>
+                <a:latin typeface="Calibri" pitchFamily="34" charset="0"/>
+                <a:ea typeface="Calibri" pitchFamily="34" charset="-122"/>
+                <a:cs typeface="Calibri" pitchFamily="34" charset="-120"/>
+              </a:rPr>
+              <a:t>Timezone, break deduction, late marks per half-day</a:t>
+            </a:r>
+            <a:endParaRPr lang="en-US" sz="1400" dirty="0"/>
+          </a:p>
+        </p:txBody>
+      </p:sp>
+      <p:sp>
+        <p:nvSpPr>
+          <p:cNvPr id="9" name="Shape 7"/>
+          <p:cNvSpPr/>
+          <p:nvPr/>
+        </p:nvSpPr>
+        <p:spPr>
+          <a:xfrm>
+            <a:off x="548640" y="3401568"/>
+            <a:ext cx="7680960" cy="786384"/>
           </a:xfrm>
           <a:prstGeom prst="roundRect">
             <a:avLst>
-              <a:gd name="adj" fmla="val 9259"/>
+              <a:gd name="adj" fmla="val 9302"/>
             </a:avLst>
           </a:prstGeom>
           <a:solidFill>
             <a:srgbClr val="F3F5F7"/>
           </a:solidFill>
-          <a:ln w="6350">
+          <a:ln w="12700">
             <a:solidFill>
-              <a:srgbClr val="D9DEE4"/>
+              <a:srgbClr val="F3F5F7"/>
             </a:solidFill>
             <a:prstDash val="solid"/>
           </a:ln>
@@ -22380,182 +22528,24 @@
       </p:sp>
       <p:sp>
         <p:nvSpPr>
-          <p:cNvPr id="11" name="Text 9"/>
-          <p:cNvSpPr/>
-          <p:nvPr/>
-        </p:nvSpPr>
-        <p:spPr>
-          <a:xfrm>
-            <a:off x="548640" y="2423160"/>
-            <a:ext cx="6263640" cy="493776"/>
-          </a:xfrm>
-          <a:prstGeom prst="rect">
-            <a:avLst/>
-          </a:prstGeom>
-          <a:noFill/>
-          <a:ln/>
-        </p:spPr>
-        <p:txBody>
-          <a:bodyPr wrap="square" lIns="0" tIns="0" rIns="0" bIns="0" rtlCol="0" anchor="ctr"/>
-          <a:lstStyle/>
-          <a:p>
-            <a:pPr algn="l" indent="0" marL="0">
-              <a:buNone/>
-            </a:pPr>
-            <a:r>
-              <a:rPr lang="en-US" sz="1250" b="1" dirty="0">
-                <a:solidFill>
-                  <a:srgbClr val="16202B"/>
-                </a:solidFill>
-                <a:latin typeface="Calibri" pitchFamily="34" charset="0"/>
-                <a:ea typeface="Calibri" pitchFamily="34" charset="-122"/>
-                <a:cs typeface="Calibri" pitchFamily="34" charset="-120"/>
-              </a:rPr>
-              <a:t>Punch, view own timesheet, apply for leave</a:t>
-            </a:r>
-            <a:endParaRPr lang="en-US" sz="1250" dirty="0"/>
-          </a:p>
-        </p:txBody>
-      </p:sp>
-      <p:sp>
-        <p:nvSpPr>
-          <p:cNvPr id="12" name="Text 10"/>
-          <p:cNvSpPr/>
-          <p:nvPr/>
-        </p:nvSpPr>
-        <p:spPr>
-          <a:xfrm>
-            <a:off x="6903720" y="2423160"/>
-            <a:ext cx="1554480" cy="493776"/>
-          </a:xfrm>
-          <a:prstGeom prst="rect">
-            <a:avLst/>
-          </a:prstGeom>
-          <a:noFill/>
-          <a:ln/>
-        </p:spPr>
-        <p:txBody>
-          <a:bodyPr wrap="square" lIns="0" tIns="0" rIns="0" bIns="0" rtlCol="0" anchor="ctr"/>
-          <a:lstStyle/>
-          <a:p>
-            <a:pPr algn="ctr" indent="0" marL="0">
-              <a:buNone/>
-            </a:pPr>
-            <a:r>
-              <a:rPr lang="en-US" sz="1250" b="1" dirty="0">
-                <a:solidFill>
-                  <a:srgbClr val="1E7A4C"/>
-                </a:solidFill>
-                <a:latin typeface="Calibri" pitchFamily="34" charset="0"/>
-                <a:ea typeface="Calibri" pitchFamily="34" charset="-122"/>
-                <a:cs typeface="Calibri" pitchFamily="34" charset="-120"/>
-              </a:rPr>
-              <a:t>Yes</a:t>
-            </a:r>
-            <a:endParaRPr lang="en-US" sz="1250" dirty="0"/>
-          </a:p>
-        </p:txBody>
-      </p:sp>
-      <p:sp>
-        <p:nvSpPr>
-          <p:cNvPr id="13" name="Text 11"/>
-          <p:cNvSpPr/>
-          <p:nvPr/>
-        </p:nvSpPr>
-        <p:spPr>
-          <a:xfrm>
-            <a:off x="8549640" y="2423160"/>
-            <a:ext cx="1691640" cy="493776"/>
-          </a:xfrm>
-          <a:prstGeom prst="rect">
-            <a:avLst/>
-          </a:prstGeom>
-          <a:noFill/>
-          <a:ln/>
-        </p:spPr>
-        <p:txBody>
-          <a:bodyPr wrap="square" lIns="0" tIns="0" rIns="0" bIns="0" rtlCol="0" anchor="ctr"/>
-          <a:lstStyle/>
-          <a:p>
-            <a:pPr algn="ctr" indent="0" marL="0">
-              <a:buNone/>
-            </a:pPr>
-            <a:r>
-              <a:rPr lang="en-US" sz="1250" b="1" dirty="0">
-                <a:solidFill>
-                  <a:srgbClr val="1E7A4C"/>
-                </a:solidFill>
-                <a:latin typeface="Calibri" pitchFamily="34" charset="0"/>
-                <a:ea typeface="Calibri" pitchFamily="34" charset="-122"/>
-                <a:cs typeface="Calibri" pitchFamily="34" charset="-120"/>
-              </a:rPr>
-              <a:t>Yes</a:t>
-            </a:r>
-            <a:endParaRPr lang="en-US" sz="1250" dirty="0"/>
-          </a:p>
-        </p:txBody>
-      </p:sp>
-      <p:sp>
-        <p:nvSpPr>
-          <p:cNvPr id="14" name="Text 12"/>
-          <p:cNvSpPr/>
-          <p:nvPr/>
-        </p:nvSpPr>
-        <p:spPr>
-          <a:xfrm>
-            <a:off x="10332720" y="2423160"/>
-            <a:ext cx="1280160" cy="493776"/>
-          </a:xfrm>
-          <a:prstGeom prst="rect">
-            <a:avLst/>
-          </a:prstGeom>
-          <a:noFill/>
-          <a:ln/>
-        </p:spPr>
-        <p:txBody>
-          <a:bodyPr wrap="square" lIns="0" tIns="0" rIns="0" bIns="0" rtlCol="0" anchor="ctr"/>
-          <a:lstStyle/>
-          <a:p>
-            <a:pPr algn="ctr" indent="0" marL="0">
-              <a:buNone/>
-            </a:pPr>
-            <a:r>
-              <a:rPr lang="en-US" sz="1250" b="1" dirty="0">
-                <a:solidFill>
-                  <a:srgbClr val="1E7A4C"/>
-                </a:solidFill>
-                <a:latin typeface="Calibri" pitchFamily="34" charset="0"/>
-                <a:ea typeface="Calibri" pitchFamily="34" charset="-122"/>
-                <a:cs typeface="Calibri" pitchFamily="34" charset="-120"/>
-              </a:rPr>
-              <a:t>Yes</a:t>
-            </a:r>
-            <a:endParaRPr lang="en-US" sz="1250" dirty="0"/>
-          </a:p>
-        </p:txBody>
-      </p:sp>
-      <p:sp>
-        <p:nvSpPr>
-          <p:cNvPr id="15" name="Shape 13"/>
-          <p:cNvSpPr/>
-          <p:nvPr/>
-        </p:nvSpPr>
-        <p:spPr>
-          <a:xfrm>
-            <a:off x="548640" y="2971800"/>
-            <a:ext cx="11064240" cy="493776"/>
-          </a:xfrm>
-          <a:prstGeom prst="roundRect">
-            <a:avLst>
-              <a:gd name="adj" fmla="val 9259"/>
-            </a:avLst>
+          <p:cNvPr id="10" name="Shape 8"/>
+          <p:cNvSpPr/>
+          <p:nvPr/>
+        </p:nvSpPr>
+        <p:spPr>
+          <a:xfrm>
+            <a:off x="786384" y="3616452"/>
+            <a:ext cx="356616" cy="356616"/>
+          </a:xfrm>
+          <a:prstGeom prst="ellipse">
+            <a:avLst/>
           </a:prstGeom>
           <a:solidFill>
-            <a:srgbClr val="FFFFFF"/>
+            <a:srgbClr val="0E1A28"/>
           </a:solidFill>
-          <a:ln w="6350">
+          <a:ln w="12700">
             <a:solidFill>
-              <a:srgbClr val="D9DEE4"/>
+              <a:srgbClr val="0E1A28"/>
             </a:solidFill>
             <a:prstDash val="solid"/>
           </a:ln>
@@ -22563,30 +22553,69 @@
       </p:sp>
       <p:sp>
         <p:nvSpPr>
-          <p:cNvPr id="16" name="Text 14"/>
-          <p:cNvSpPr/>
-          <p:nvPr/>
-        </p:nvSpPr>
-        <p:spPr>
-          <a:xfrm>
-            <a:off x="548640" y="2971800"/>
-            <a:ext cx="6263640" cy="493776"/>
-          </a:xfrm>
-          <a:prstGeom prst="rect">
-            <a:avLst/>
-          </a:prstGeom>
-          <a:noFill/>
-          <a:ln/>
-        </p:spPr>
-        <p:txBody>
-          <a:bodyPr wrap="square" lIns="0" tIns="0" rIns="0" bIns="0" rtlCol="0" anchor="ctr"/>
-          <a:lstStyle/>
-          <a:p>
-            <a:pPr algn="l" indent="0" marL="0">
-              <a:buNone/>
-            </a:pPr>
-            <a:r>
-              <a:rPr lang="en-US" sz="1250" b="1" dirty="0">
+          <p:cNvPr id="11" name="Text 9"/>
+          <p:cNvSpPr/>
+          <p:nvPr/>
+        </p:nvSpPr>
+        <p:spPr>
+          <a:xfrm>
+            <a:off x="786384" y="3616452"/>
+            <a:ext cx="356616" cy="356616"/>
+          </a:xfrm>
+          <a:prstGeom prst="rect">
+            <a:avLst/>
+          </a:prstGeom>
+          <a:noFill/>
+          <a:ln/>
+        </p:spPr>
+        <p:txBody>
+          <a:bodyPr wrap="square" lIns="0" tIns="0" rIns="0" bIns="0" rtlCol="0" anchor="ctr"/>
+          <a:lstStyle/>
+          <a:p>
+            <a:pPr algn="ctr" indent="0" marL="0">
+              <a:buNone/>
+            </a:pPr>
+            <a:r>
+              <a:rPr lang="en-US" sz="1200" b="1" dirty="0">
+                <a:solidFill>
+                  <a:srgbClr val="F6C177"/>
+                </a:solidFill>
+                <a:latin typeface="Calibri" pitchFamily="34" charset="0"/>
+                <a:ea typeface="Calibri" pitchFamily="34" charset="-122"/>
+                <a:cs typeface="Calibri" pitchFamily="34" charset="-120"/>
+              </a:rPr>
+              <a:t>2</a:t>
+            </a:r>
+            <a:endParaRPr lang="en-US" sz="1200" dirty="0"/>
+          </a:p>
+        </p:txBody>
+      </p:sp>
+      <p:sp>
+        <p:nvSpPr>
+          <p:cNvPr id="12" name="Text 10"/>
+          <p:cNvSpPr/>
+          <p:nvPr/>
+        </p:nvSpPr>
+        <p:spPr>
+          <a:xfrm>
+            <a:off x="1298448" y="3456432"/>
+            <a:ext cx="6766560" cy="676656"/>
+          </a:xfrm>
+          <a:prstGeom prst="rect">
+            <a:avLst/>
+          </a:prstGeom>
+          <a:noFill/>
+          <a:ln/>
+        </p:spPr>
+        <p:txBody>
+          <a:bodyPr wrap="square" lIns="0" tIns="0" rIns="0" bIns="0" rtlCol="0" anchor="ctr"/>
+          <a:lstStyle/>
+          <a:p>
+            <a:pPr indent="0" marL="0">
+              <a:buNone/>
+            </a:pPr>
+            <a:r>
+              <a:rPr lang="en-US" sz="1400" dirty="0">
                 <a:solidFill>
                   <a:srgbClr val="16202B"/>
                 </a:solidFill>
@@ -22594,151 +22623,34 @@
                 <a:ea typeface="Calibri" pitchFamily="34" charset="-122"/>
                 <a:cs typeface="Calibri" pitchFamily="34" charset="-120"/>
               </a:rPr>
-              <a:t>File a correction, answer a recheck</a:t>
-            </a:r>
-            <a:endParaRPr lang="en-US" sz="1250" dirty="0"/>
-          </a:p>
-        </p:txBody>
-      </p:sp>
-      <p:sp>
-        <p:nvSpPr>
-          <p:cNvPr id="17" name="Text 15"/>
-          <p:cNvSpPr/>
-          <p:nvPr/>
-        </p:nvSpPr>
-        <p:spPr>
-          <a:xfrm>
-            <a:off x="6903720" y="2971800"/>
-            <a:ext cx="1554480" cy="493776"/>
-          </a:xfrm>
-          <a:prstGeom prst="rect">
-            <a:avLst/>
-          </a:prstGeom>
-          <a:noFill/>
-          <a:ln/>
-        </p:spPr>
-        <p:txBody>
-          <a:bodyPr wrap="square" lIns="0" tIns="0" rIns="0" bIns="0" rtlCol="0" anchor="ctr"/>
-          <a:lstStyle/>
-          <a:p>
-            <a:pPr algn="ctr" indent="0" marL="0">
-              <a:buNone/>
-            </a:pPr>
-            <a:r>
-              <a:rPr lang="en-US" sz="1250" b="1" dirty="0">
-                <a:solidFill>
-                  <a:srgbClr val="1E7A4C"/>
-                </a:solidFill>
-                <a:latin typeface="Calibri" pitchFamily="34" charset="0"/>
-                <a:ea typeface="Calibri" pitchFamily="34" charset="-122"/>
-                <a:cs typeface="Calibri" pitchFamily="34" charset="-120"/>
-              </a:rPr>
-              <a:t>Yes</a:t>
-            </a:r>
-            <a:endParaRPr lang="en-US" sz="1250" dirty="0"/>
-          </a:p>
-        </p:txBody>
-      </p:sp>
-      <p:sp>
-        <p:nvSpPr>
-          <p:cNvPr id="18" name="Text 16"/>
-          <p:cNvSpPr/>
-          <p:nvPr/>
-        </p:nvSpPr>
-        <p:spPr>
-          <a:xfrm>
-            <a:off x="8549640" y="2971800"/>
-            <a:ext cx="1691640" cy="493776"/>
-          </a:xfrm>
-          <a:prstGeom prst="rect">
-            <a:avLst/>
-          </a:prstGeom>
-          <a:noFill/>
-          <a:ln/>
-        </p:spPr>
-        <p:txBody>
-          <a:bodyPr wrap="square" lIns="0" tIns="0" rIns="0" bIns="0" rtlCol="0" anchor="ctr"/>
-          <a:lstStyle/>
-          <a:p>
-            <a:pPr algn="ctr" indent="0" marL="0">
-              <a:buNone/>
-            </a:pPr>
-            <a:r>
-              <a:rPr lang="en-US" sz="1250" b="1" dirty="0">
-                <a:solidFill>
-                  <a:srgbClr val="1E7A4C"/>
-                </a:solidFill>
-                <a:latin typeface="Calibri" pitchFamily="34" charset="0"/>
-                <a:ea typeface="Calibri" pitchFamily="34" charset="-122"/>
-                <a:cs typeface="Calibri" pitchFamily="34" charset="-120"/>
-              </a:rPr>
-              <a:t>Yes</a:t>
-            </a:r>
-            <a:endParaRPr lang="en-US" sz="1250" dirty="0"/>
-          </a:p>
-        </p:txBody>
-      </p:sp>
-      <p:sp>
-        <p:nvSpPr>
-          <p:cNvPr id="19" name="Text 17"/>
-          <p:cNvSpPr/>
-          <p:nvPr/>
-        </p:nvSpPr>
-        <p:spPr>
-          <a:xfrm>
-            <a:off x="10332720" y="2971800"/>
-            <a:ext cx="1280160" cy="493776"/>
-          </a:xfrm>
-          <a:prstGeom prst="rect">
-            <a:avLst/>
-          </a:prstGeom>
-          <a:noFill/>
-          <a:ln/>
-        </p:spPr>
-        <p:txBody>
-          <a:bodyPr wrap="square" lIns="0" tIns="0" rIns="0" bIns="0" rtlCol="0" anchor="ctr"/>
-          <a:lstStyle/>
-          <a:p>
-            <a:pPr algn="ctr" indent="0" marL="0">
-              <a:buNone/>
-            </a:pPr>
-            <a:r>
-              <a:rPr lang="en-US" sz="1250" b="1" dirty="0">
-                <a:solidFill>
-                  <a:srgbClr val="1E7A4C"/>
-                </a:solidFill>
-                <a:latin typeface="Calibri" pitchFamily="34" charset="0"/>
-                <a:ea typeface="Calibri" pitchFamily="34" charset="-122"/>
-                <a:cs typeface="Calibri" pitchFamily="34" charset="-120"/>
-              </a:rPr>
-              <a:t>Yes</a:t>
-            </a:r>
-            <a:endParaRPr lang="en-US" sz="1250" dirty="0"/>
-          </a:p>
-        </p:txBody>
-      </p:sp>
-      <p:sp>
-        <p:nvSpPr>
-          <p:cNvPr id="20" name="Shape 18"/>
-          <p:cNvSpPr/>
-          <p:nvPr/>
-        </p:nvSpPr>
-        <p:spPr>
-          <a:xfrm>
-            <a:off x="548640" y="3520440"/>
-            <a:ext cx="11064240" cy="493776"/>
+              <a:t>Employment types are your own list, not a fixed set</a:t>
+            </a:r>
+            <a:endParaRPr lang="en-US" sz="1400" dirty="0"/>
+          </a:p>
+        </p:txBody>
+      </p:sp>
+      <p:sp>
+        <p:nvSpPr>
+          <p:cNvPr id="13" name="Shape 11"/>
+          <p:cNvSpPr/>
+          <p:nvPr/>
+        </p:nvSpPr>
+        <p:spPr>
+          <a:xfrm>
+            <a:off x="548640" y="4315968"/>
+            <a:ext cx="7680960" cy="786384"/>
           </a:xfrm>
           <a:prstGeom prst="roundRect">
             <a:avLst>
-              <a:gd name="adj" fmla="val 9259"/>
+              <a:gd name="adj" fmla="val 9302"/>
             </a:avLst>
           </a:prstGeom>
           <a:solidFill>
             <a:srgbClr val="F3F5F7"/>
           </a:solidFill>
-          <a:ln w="6350">
+          <a:ln w="12700">
             <a:solidFill>
-              <a:srgbClr val="D9DEE4"/>
+              <a:srgbClr val="F3F5F7"/>
             </a:solidFill>
             <a:prstDash val="solid"/>
           </a:ln>
@@ -22746,182 +22658,24 @@
       </p:sp>
       <p:sp>
         <p:nvSpPr>
-          <p:cNvPr id="21" name="Text 19"/>
-          <p:cNvSpPr/>
-          <p:nvPr/>
-        </p:nvSpPr>
-        <p:spPr>
-          <a:xfrm>
-            <a:off x="548640" y="3520440"/>
-            <a:ext cx="6263640" cy="493776"/>
-          </a:xfrm>
-          <a:prstGeom prst="rect">
-            <a:avLst/>
-          </a:prstGeom>
-          <a:noFill/>
-          <a:ln/>
-        </p:spPr>
-        <p:txBody>
-          <a:bodyPr wrap="square" lIns="0" tIns="0" rIns="0" bIns="0" rtlCol="0" anchor="ctr"/>
-          <a:lstStyle/>
-          <a:p>
-            <a:pPr algn="l" indent="0" marL="0">
-              <a:buNone/>
-            </a:pPr>
-            <a:r>
-              <a:rPr lang="en-US" sz="1250" b="1" dirty="0">
-                <a:solidFill>
-                  <a:srgbClr val="16202B"/>
-                </a:solidFill>
-                <a:latin typeface="Calibri" pitchFamily="34" charset="0"/>
-                <a:ea typeface="Calibri" pitchFamily="34" charset="-122"/>
-                <a:cs typeface="Calibri" pitchFamily="34" charset="-120"/>
-              </a:rPr>
-              <a:t>See a colleague's punches or the live board</a:t>
-            </a:r>
-            <a:endParaRPr lang="en-US" sz="1250" dirty="0"/>
-          </a:p>
-        </p:txBody>
-      </p:sp>
-      <p:sp>
-        <p:nvSpPr>
-          <p:cNvPr id="22" name="Text 20"/>
-          <p:cNvSpPr/>
-          <p:nvPr/>
-        </p:nvSpPr>
-        <p:spPr>
-          <a:xfrm>
-            <a:off x="6903720" y="3520440"/>
-            <a:ext cx="1554480" cy="493776"/>
-          </a:xfrm>
-          <a:prstGeom prst="rect">
-            <a:avLst/>
-          </a:prstGeom>
-          <a:noFill/>
-          <a:ln/>
-        </p:spPr>
-        <p:txBody>
-          <a:bodyPr wrap="square" lIns="0" tIns="0" rIns="0" bIns="0" rtlCol="0" anchor="ctr"/>
-          <a:lstStyle/>
-          <a:p>
-            <a:pPr algn="ctr" indent="0" marL="0">
-              <a:buNone/>
-            </a:pPr>
-            <a:r>
-              <a:rPr lang="en-US" sz="1250" dirty="0">
-                <a:solidFill>
-                  <a:srgbClr val="A03A3A"/>
-                </a:solidFill>
-                <a:latin typeface="Calibri" pitchFamily="34" charset="0"/>
-                <a:ea typeface="Calibri" pitchFamily="34" charset="-122"/>
-                <a:cs typeface="Calibri" pitchFamily="34" charset="-120"/>
-              </a:rPr>
-              <a:t>No</a:t>
-            </a:r>
-            <a:endParaRPr lang="en-US" sz="1250" dirty="0"/>
-          </a:p>
-        </p:txBody>
-      </p:sp>
-      <p:sp>
-        <p:nvSpPr>
-          <p:cNvPr id="23" name="Text 21"/>
-          <p:cNvSpPr/>
-          <p:nvPr/>
-        </p:nvSpPr>
-        <p:spPr>
-          <a:xfrm>
-            <a:off x="8549640" y="3520440"/>
-            <a:ext cx="1691640" cy="493776"/>
-          </a:xfrm>
-          <a:prstGeom prst="rect">
-            <a:avLst/>
-          </a:prstGeom>
-          <a:noFill/>
-          <a:ln/>
-        </p:spPr>
-        <p:txBody>
-          <a:bodyPr wrap="square" lIns="0" tIns="0" rIns="0" bIns="0" rtlCol="0" anchor="ctr"/>
-          <a:lstStyle/>
-          <a:p>
-            <a:pPr algn="ctr" indent="0" marL="0">
-              <a:buNone/>
-            </a:pPr>
-            <a:r>
-              <a:rPr lang="en-US" sz="1250" b="1" dirty="0">
-                <a:solidFill>
-                  <a:srgbClr val="1E7A4C"/>
-                </a:solidFill>
-                <a:latin typeface="Calibri" pitchFamily="34" charset="0"/>
-                <a:ea typeface="Calibri" pitchFamily="34" charset="-122"/>
-                <a:cs typeface="Calibri" pitchFamily="34" charset="-120"/>
-              </a:rPr>
-              <a:t>Yes</a:t>
-            </a:r>
-            <a:endParaRPr lang="en-US" sz="1250" dirty="0"/>
-          </a:p>
-        </p:txBody>
-      </p:sp>
-      <p:sp>
-        <p:nvSpPr>
-          <p:cNvPr id="24" name="Text 22"/>
-          <p:cNvSpPr/>
-          <p:nvPr/>
-        </p:nvSpPr>
-        <p:spPr>
-          <a:xfrm>
-            <a:off x="10332720" y="3520440"/>
-            <a:ext cx="1280160" cy="493776"/>
-          </a:xfrm>
-          <a:prstGeom prst="rect">
-            <a:avLst/>
-          </a:prstGeom>
-          <a:noFill/>
-          <a:ln/>
-        </p:spPr>
-        <p:txBody>
-          <a:bodyPr wrap="square" lIns="0" tIns="0" rIns="0" bIns="0" rtlCol="0" anchor="ctr"/>
-          <a:lstStyle/>
-          <a:p>
-            <a:pPr algn="ctr" indent="0" marL="0">
-              <a:buNone/>
-            </a:pPr>
-            <a:r>
-              <a:rPr lang="en-US" sz="1250" b="1" dirty="0">
-                <a:solidFill>
-                  <a:srgbClr val="1E7A4C"/>
-                </a:solidFill>
-                <a:latin typeface="Calibri" pitchFamily="34" charset="0"/>
-                <a:ea typeface="Calibri" pitchFamily="34" charset="-122"/>
-                <a:cs typeface="Calibri" pitchFamily="34" charset="-120"/>
-              </a:rPr>
-              <a:t>Yes</a:t>
-            </a:r>
-            <a:endParaRPr lang="en-US" sz="1250" dirty="0"/>
-          </a:p>
-        </p:txBody>
-      </p:sp>
-      <p:sp>
-        <p:nvSpPr>
-          <p:cNvPr id="25" name="Shape 23"/>
-          <p:cNvSpPr/>
-          <p:nvPr/>
-        </p:nvSpPr>
-        <p:spPr>
-          <a:xfrm>
-            <a:off x="548640" y="4069080"/>
-            <a:ext cx="11064240" cy="493776"/>
-          </a:xfrm>
-          <a:prstGeom prst="roundRect">
-            <a:avLst>
-              <a:gd name="adj" fmla="val 9259"/>
-            </a:avLst>
+          <p:cNvPr id="14" name="Shape 12"/>
+          <p:cNvSpPr/>
+          <p:nvPr/>
+        </p:nvSpPr>
+        <p:spPr>
+          <a:xfrm>
+            <a:off x="786384" y="4530852"/>
+            <a:ext cx="356616" cy="356616"/>
+          </a:xfrm>
+          <a:prstGeom prst="ellipse">
+            <a:avLst/>
           </a:prstGeom>
           <a:solidFill>
-            <a:srgbClr val="FFFFFF"/>
+            <a:srgbClr val="0E1A28"/>
           </a:solidFill>
-          <a:ln w="6350">
+          <a:ln w="12700">
             <a:solidFill>
-              <a:srgbClr val="D9DEE4"/>
+              <a:srgbClr val="0E1A28"/>
             </a:solidFill>
             <a:prstDash val="solid"/>
           </a:ln>
@@ -22929,30 +22683,69 @@
       </p:sp>
       <p:sp>
         <p:nvSpPr>
-          <p:cNvPr id="26" name="Text 24"/>
-          <p:cNvSpPr/>
-          <p:nvPr/>
-        </p:nvSpPr>
-        <p:spPr>
-          <a:xfrm>
-            <a:off x="548640" y="4069080"/>
-            <a:ext cx="6263640" cy="493776"/>
-          </a:xfrm>
-          <a:prstGeom prst="rect">
-            <a:avLst/>
-          </a:prstGeom>
-          <a:noFill/>
-          <a:ln/>
-        </p:spPr>
-        <p:txBody>
-          <a:bodyPr wrap="square" lIns="0" tIns="0" rIns="0" bIns="0" rtlCol="0" anchor="ctr"/>
-          <a:lstStyle/>
-          <a:p>
-            <a:pPr algn="l" indent="0" marL="0">
-              <a:buNone/>
-            </a:pPr>
-            <a:r>
-              <a:rPr lang="en-US" sz="1250" b="1" dirty="0">
+          <p:cNvPr id="15" name="Text 13"/>
+          <p:cNvSpPr/>
+          <p:nvPr/>
+        </p:nvSpPr>
+        <p:spPr>
+          <a:xfrm>
+            <a:off x="786384" y="4530852"/>
+            <a:ext cx="356616" cy="356616"/>
+          </a:xfrm>
+          <a:prstGeom prst="rect">
+            <a:avLst/>
+          </a:prstGeom>
+          <a:noFill/>
+          <a:ln/>
+        </p:spPr>
+        <p:txBody>
+          <a:bodyPr wrap="square" lIns="0" tIns="0" rIns="0" bIns="0" rtlCol="0" anchor="ctr"/>
+          <a:lstStyle/>
+          <a:p>
+            <a:pPr algn="ctr" indent="0" marL="0">
+              <a:buNone/>
+            </a:pPr>
+            <a:r>
+              <a:rPr lang="en-US" sz="1200" b="1" dirty="0">
+                <a:solidFill>
+                  <a:srgbClr val="F6C177"/>
+                </a:solidFill>
+                <a:latin typeface="Calibri" pitchFamily="34" charset="0"/>
+                <a:ea typeface="Calibri" pitchFamily="34" charset="-122"/>
+                <a:cs typeface="Calibri" pitchFamily="34" charset="-120"/>
+              </a:rPr>
+              <a:t>3</a:t>
+            </a:r>
+            <a:endParaRPr lang="en-US" sz="1200" dirty="0"/>
+          </a:p>
+        </p:txBody>
+      </p:sp>
+      <p:sp>
+        <p:nvSpPr>
+          <p:cNvPr id="16" name="Text 14"/>
+          <p:cNvSpPr/>
+          <p:nvPr/>
+        </p:nvSpPr>
+        <p:spPr>
+          <a:xfrm>
+            <a:off x="1298448" y="4370832"/>
+            <a:ext cx="6766560" cy="676656"/>
+          </a:xfrm>
+          <a:prstGeom prst="rect">
+            <a:avLst/>
+          </a:prstGeom>
+          <a:noFill/>
+          <a:ln/>
+        </p:spPr>
+        <p:txBody>
+          <a:bodyPr wrap="square" lIns="0" tIns="0" rIns="0" bIns="0" rtlCol="0" anchor="ctr"/>
+          <a:lstStyle/>
+          <a:p>
+            <a:pPr indent="0" marL="0">
+              <a:buNone/>
+            </a:pPr>
+            <a:r>
+              <a:rPr lang="en-US" sz="1400" dirty="0">
                 <a:solidFill>
                   <a:srgbClr val="16202B"/>
                 </a:solidFill>
@@ -22960,151 +22753,34 @@
                 <a:ea typeface="Calibri" pitchFamily="34" charset="-122"/>
                 <a:cs typeface="Calibri" pitchFamily="34" charset="-120"/>
               </a:rPr>
-              <a:t>Approve overtime, corrections and leave</a:t>
-            </a:r>
-            <a:endParaRPr lang="en-US" sz="1250" dirty="0"/>
-          </a:p>
-        </p:txBody>
-      </p:sp>
-      <p:sp>
-        <p:nvSpPr>
-          <p:cNvPr id="27" name="Text 25"/>
-          <p:cNvSpPr/>
-          <p:nvPr/>
-        </p:nvSpPr>
-        <p:spPr>
-          <a:xfrm>
-            <a:off x="6903720" y="4069080"/>
-            <a:ext cx="1554480" cy="493776"/>
-          </a:xfrm>
-          <a:prstGeom prst="rect">
-            <a:avLst/>
-          </a:prstGeom>
-          <a:noFill/>
-          <a:ln/>
-        </p:spPr>
-        <p:txBody>
-          <a:bodyPr wrap="square" lIns="0" tIns="0" rIns="0" bIns="0" rtlCol="0" anchor="ctr"/>
-          <a:lstStyle/>
-          <a:p>
-            <a:pPr algn="ctr" indent="0" marL="0">
-              <a:buNone/>
-            </a:pPr>
-            <a:r>
-              <a:rPr lang="en-US" sz="1250" dirty="0">
-                <a:solidFill>
-                  <a:srgbClr val="A03A3A"/>
-                </a:solidFill>
-                <a:latin typeface="Calibri" pitchFamily="34" charset="0"/>
-                <a:ea typeface="Calibri" pitchFamily="34" charset="-122"/>
-                <a:cs typeface="Calibri" pitchFamily="34" charset="-120"/>
-              </a:rPr>
-              <a:t>No</a:t>
-            </a:r>
-            <a:endParaRPr lang="en-US" sz="1250" dirty="0"/>
-          </a:p>
-        </p:txBody>
-      </p:sp>
-      <p:sp>
-        <p:nvSpPr>
-          <p:cNvPr id="28" name="Text 26"/>
-          <p:cNvSpPr/>
-          <p:nvPr/>
-        </p:nvSpPr>
-        <p:spPr>
-          <a:xfrm>
-            <a:off x="8549640" y="4069080"/>
-            <a:ext cx="1691640" cy="493776"/>
-          </a:xfrm>
-          <a:prstGeom prst="rect">
-            <a:avLst/>
-          </a:prstGeom>
-          <a:noFill/>
-          <a:ln/>
-        </p:spPr>
-        <p:txBody>
-          <a:bodyPr wrap="square" lIns="0" tIns="0" rIns="0" bIns="0" rtlCol="0" anchor="ctr"/>
-          <a:lstStyle/>
-          <a:p>
-            <a:pPr algn="ctr" indent="0" marL="0">
-              <a:buNone/>
-            </a:pPr>
-            <a:r>
-              <a:rPr lang="en-US" sz="1250" b="1" dirty="0">
-                <a:solidFill>
-                  <a:srgbClr val="1E7A4C"/>
-                </a:solidFill>
-                <a:latin typeface="Calibri" pitchFamily="34" charset="0"/>
-                <a:ea typeface="Calibri" pitchFamily="34" charset="-122"/>
-                <a:cs typeface="Calibri" pitchFamily="34" charset="-120"/>
-              </a:rPr>
-              <a:t>Yes</a:t>
-            </a:r>
-            <a:endParaRPr lang="en-US" sz="1250" dirty="0"/>
-          </a:p>
-        </p:txBody>
-      </p:sp>
-      <p:sp>
-        <p:nvSpPr>
-          <p:cNvPr id="29" name="Text 27"/>
-          <p:cNvSpPr/>
-          <p:nvPr/>
-        </p:nvSpPr>
-        <p:spPr>
-          <a:xfrm>
-            <a:off x="10332720" y="4069080"/>
-            <a:ext cx="1280160" cy="493776"/>
-          </a:xfrm>
-          <a:prstGeom prst="rect">
-            <a:avLst/>
-          </a:prstGeom>
-          <a:noFill/>
-          <a:ln/>
-        </p:spPr>
-        <p:txBody>
-          <a:bodyPr wrap="square" lIns="0" tIns="0" rIns="0" bIns="0" rtlCol="0" anchor="ctr"/>
-          <a:lstStyle/>
-          <a:p>
-            <a:pPr algn="ctr" indent="0" marL="0">
-              <a:buNone/>
-            </a:pPr>
-            <a:r>
-              <a:rPr lang="en-US" sz="1250" b="1" dirty="0">
-                <a:solidFill>
-                  <a:srgbClr val="1E7A4C"/>
-                </a:solidFill>
-                <a:latin typeface="Calibri" pitchFamily="34" charset="0"/>
-                <a:ea typeface="Calibri" pitchFamily="34" charset="-122"/>
-                <a:cs typeface="Calibri" pitchFamily="34" charset="-120"/>
-              </a:rPr>
-              <a:t>Yes</a:t>
-            </a:r>
-            <a:endParaRPr lang="en-US" sz="1250" dirty="0"/>
-          </a:p>
-        </p:txBody>
-      </p:sp>
-      <p:sp>
-        <p:nvSpPr>
-          <p:cNvPr id="30" name="Shape 28"/>
-          <p:cNvSpPr/>
-          <p:nvPr/>
-        </p:nvSpPr>
-        <p:spPr>
-          <a:xfrm>
-            <a:off x="548640" y="4617720"/>
-            <a:ext cx="11064240" cy="493776"/>
+              <a:t>Email alerts for late arrival, corrections, leave and rechecks</a:t>
+            </a:r>
+            <a:endParaRPr lang="en-US" sz="1400" dirty="0"/>
+          </a:p>
+        </p:txBody>
+      </p:sp>
+      <p:sp>
+        <p:nvSpPr>
+          <p:cNvPr id="17" name="Shape 15"/>
+          <p:cNvSpPr/>
+          <p:nvPr/>
+        </p:nvSpPr>
+        <p:spPr>
+          <a:xfrm>
+            <a:off x="8549640" y="2487168"/>
+            <a:ext cx="3063240" cy="2322576"/>
           </a:xfrm>
           <a:prstGeom prst="roundRect">
             <a:avLst>
-              <a:gd name="adj" fmla="val 9259"/>
+              <a:gd name="adj" fmla="val 3150"/>
             </a:avLst>
           </a:prstGeom>
           <a:solidFill>
-            <a:srgbClr val="F3F5F7"/>
+            <a:srgbClr val="0E1A28"/>
           </a:solidFill>
-          <a:ln w="6350">
+          <a:ln w="12700">
             <a:solidFill>
-              <a:srgbClr val="D9DEE4"/>
+              <a:srgbClr val="0E1A28"/>
             </a:solidFill>
             <a:prstDash val="solid"/>
           </a:ln>
@@ -23112,706 +22788,82 @@
       </p:sp>
       <p:sp>
         <p:nvSpPr>
-          <p:cNvPr id="31" name="Text 29"/>
-          <p:cNvSpPr/>
-          <p:nvPr/>
-        </p:nvSpPr>
-        <p:spPr>
-          <a:xfrm>
-            <a:off x="548640" y="4617720"/>
-            <a:ext cx="6263640" cy="493776"/>
-          </a:xfrm>
-          <a:prstGeom prst="rect">
-            <a:avLst/>
-          </a:prstGeom>
-          <a:noFill/>
-          <a:ln/>
-        </p:spPr>
-        <p:txBody>
-          <a:bodyPr wrap="square" lIns="0" tIns="0" rIns="0" bIns="0" rtlCol="0" anchor="ctr"/>
-          <a:lstStyle/>
-          <a:p>
-            <a:pPr algn="l" indent="0" marL="0">
-              <a:buNone/>
-            </a:pPr>
-            <a:r>
-              <a:rPr lang="en-US" sz="1250" b="1" dirty="0">
-                <a:solidFill>
-                  <a:srgbClr val="16202B"/>
-                </a:solidFill>
-                <a:latin typeface="Calibri" pitchFamily="34" charset="0"/>
-                <a:ea typeface="Calibri" pitchFamily="34" charset="-122"/>
-                <a:cs typeface="Calibri" pitchFamily="34" charset="-120"/>
-              </a:rPr>
-              <a:t>Plan the roster, manage employees</a:t>
-            </a:r>
-            <a:endParaRPr lang="en-US" sz="1250" dirty="0"/>
-          </a:p>
-        </p:txBody>
-      </p:sp>
-      <p:sp>
-        <p:nvSpPr>
-          <p:cNvPr id="32" name="Text 30"/>
-          <p:cNvSpPr/>
-          <p:nvPr/>
-        </p:nvSpPr>
-        <p:spPr>
-          <a:xfrm>
-            <a:off x="6903720" y="4617720"/>
-            <a:ext cx="1554480" cy="493776"/>
-          </a:xfrm>
-          <a:prstGeom prst="rect">
-            <a:avLst/>
-          </a:prstGeom>
-          <a:noFill/>
-          <a:ln/>
-        </p:spPr>
-        <p:txBody>
-          <a:bodyPr wrap="square" lIns="0" tIns="0" rIns="0" bIns="0" rtlCol="0" anchor="ctr"/>
-          <a:lstStyle/>
-          <a:p>
-            <a:pPr algn="ctr" indent="0" marL="0">
-              <a:buNone/>
-            </a:pPr>
-            <a:r>
-              <a:rPr lang="en-US" sz="1250" dirty="0">
-                <a:solidFill>
-                  <a:srgbClr val="A03A3A"/>
-                </a:solidFill>
-                <a:latin typeface="Calibri" pitchFamily="34" charset="0"/>
-                <a:ea typeface="Calibri" pitchFamily="34" charset="-122"/>
-                <a:cs typeface="Calibri" pitchFamily="34" charset="-120"/>
-              </a:rPr>
-              <a:t>No</a:t>
-            </a:r>
-            <a:endParaRPr lang="en-US" sz="1250" dirty="0"/>
-          </a:p>
-        </p:txBody>
-      </p:sp>
-      <p:sp>
-        <p:nvSpPr>
-          <p:cNvPr id="33" name="Text 31"/>
-          <p:cNvSpPr/>
-          <p:nvPr/>
-        </p:nvSpPr>
-        <p:spPr>
-          <a:xfrm>
-            <a:off x="8549640" y="4617720"/>
-            <a:ext cx="1691640" cy="493776"/>
-          </a:xfrm>
-          <a:prstGeom prst="rect">
-            <a:avLst/>
-          </a:prstGeom>
-          <a:noFill/>
-          <a:ln/>
-        </p:spPr>
-        <p:txBody>
-          <a:bodyPr wrap="square" lIns="0" tIns="0" rIns="0" bIns="0" rtlCol="0" anchor="ctr"/>
-          <a:lstStyle/>
-          <a:p>
-            <a:pPr algn="ctr" indent="0" marL="0">
-              <a:buNone/>
-            </a:pPr>
-            <a:r>
-              <a:rPr lang="en-US" sz="1250" b="1" dirty="0">
-                <a:solidFill>
-                  <a:srgbClr val="1E7A4C"/>
-                </a:solidFill>
-                <a:latin typeface="Calibri" pitchFamily="34" charset="0"/>
-                <a:ea typeface="Calibri" pitchFamily="34" charset="-122"/>
-                <a:cs typeface="Calibri" pitchFamily="34" charset="-120"/>
-              </a:rPr>
-              <a:t>Yes</a:t>
-            </a:r>
-            <a:endParaRPr lang="en-US" sz="1250" dirty="0"/>
-          </a:p>
-        </p:txBody>
-      </p:sp>
-      <p:sp>
-        <p:nvSpPr>
-          <p:cNvPr id="34" name="Text 32"/>
-          <p:cNvSpPr/>
-          <p:nvPr/>
-        </p:nvSpPr>
-        <p:spPr>
-          <a:xfrm>
-            <a:off x="10332720" y="4617720"/>
-            <a:ext cx="1280160" cy="493776"/>
-          </a:xfrm>
-          <a:prstGeom prst="rect">
-            <a:avLst/>
-          </a:prstGeom>
-          <a:noFill/>
-          <a:ln/>
-        </p:spPr>
-        <p:txBody>
-          <a:bodyPr wrap="square" lIns="0" tIns="0" rIns="0" bIns="0" rtlCol="0" anchor="ctr"/>
-          <a:lstStyle/>
-          <a:p>
-            <a:pPr algn="ctr" indent="0" marL="0">
-              <a:buNone/>
-            </a:pPr>
-            <a:r>
-              <a:rPr lang="en-US" sz="1250" b="1" dirty="0">
-                <a:solidFill>
-                  <a:srgbClr val="1E7A4C"/>
-                </a:solidFill>
-                <a:latin typeface="Calibri" pitchFamily="34" charset="0"/>
-                <a:ea typeface="Calibri" pitchFamily="34" charset="-122"/>
-                <a:cs typeface="Calibri" pitchFamily="34" charset="-120"/>
-              </a:rPr>
-              <a:t>Yes</a:t>
-            </a:r>
-            <a:endParaRPr lang="en-US" sz="1250" dirty="0"/>
-          </a:p>
-        </p:txBody>
-      </p:sp>
-      <p:sp>
-        <p:nvSpPr>
-          <p:cNvPr id="35" name="Shape 33"/>
-          <p:cNvSpPr/>
-          <p:nvPr/>
-        </p:nvSpPr>
-        <p:spPr>
-          <a:xfrm>
-            <a:off x="548640" y="5166360"/>
-            <a:ext cx="11064240" cy="493776"/>
-          </a:xfrm>
-          <a:prstGeom prst="roundRect">
-            <a:avLst>
-              <a:gd name="adj" fmla="val 9259"/>
-            </a:avLst>
-          </a:prstGeom>
-          <a:solidFill>
-            <a:srgbClr val="FFFFFF"/>
-          </a:solidFill>
-          <a:ln w="6350">
-            <a:solidFill>
-              <a:srgbClr val="D9DEE4"/>
-            </a:solidFill>
-            <a:prstDash val="solid"/>
-          </a:ln>
-        </p:spPr>
-      </p:sp>
-      <p:sp>
-        <p:nvSpPr>
-          <p:cNvPr id="36" name="Text 34"/>
-          <p:cNvSpPr/>
-          <p:nvPr/>
-        </p:nvSpPr>
-        <p:spPr>
-          <a:xfrm>
-            <a:off x="548640" y="5166360"/>
-            <a:ext cx="6263640" cy="493776"/>
-          </a:xfrm>
-          <a:prstGeom prst="rect">
-            <a:avLst/>
-          </a:prstGeom>
-          <a:noFill/>
-          <a:ln/>
-        </p:spPr>
-        <p:txBody>
-          <a:bodyPr wrap="square" lIns="0" tIns="0" rIns="0" bIns="0" rtlCol="0" anchor="ctr"/>
-          <a:lstStyle/>
-          <a:p>
-            <a:pPr algn="l" indent="0" marL="0">
-              <a:buNone/>
-            </a:pPr>
-            <a:r>
-              <a:rPr lang="en-US" sz="1250" b="1" dirty="0">
-                <a:solidFill>
-                  <a:srgbClr val="16202B"/>
-                </a:solidFill>
-                <a:latin typeface="Calibri" pitchFamily="34" charset="0"/>
-                <a:ea typeface="Calibri" pitchFamily="34" charset="-122"/>
-                <a:cs typeface="Calibri" pitchFamily="34" charset="-120"/>
-              </a:rPr>
-              <a:t>Monthly summary and Excel export</a:t>
-            </a:r>
-            <a:endParaRPr lang="en-US" sz="1250" dirty="0"/>
-          </a:p>
-        </p:txBody>
-      </p:sp>
-      <p:sp>
-        <p:nvSpPr>
-          <p:cNvPr id="37" name="Text 35"/>
-          <p:cNvSpPr/>
-          <p:nvPr/>
-        </p:nvSpPr>
-        <p:spPr>
-          <a:xfrm>
-            <a:off x="6903720" y="5166360"/>
-            <a:ext cx="1554480" cy="493776"/>
-          </a:xfrm>
-          <a:prstGeom prst="rect">
-            <a:avLst/>
-          </a:prstGeom>
-          <a:noFill/>
-          <a:ln/>
-        </p:spPr>
-        <p:txBody>
-          <a:bodyPr wrap="square" lIns="0" tIns="0" rIns="0" bIns="0" rtlCol="0" anchor="ctr"/>
-          <a:lstStyle/>
-          <a:p>
-            <a:pPr algn="ctr" indent="0" marL="0">
-              <a:buNone/>
-            </a:pPr>
-            <a:r>
-              <a:rPr lang="en-US" sz="1250" dirty="0">
-                <a:solidFill>
-                  <a:srgbClr val="A03A3A"/>
-                </a:solidFill>
-                <a:latin typeface="Calibri" pitchFamily="34" charset="0"/>
-                <a:ea typeface="Calibri" pitchFamily="34" charset="-122"/>
-                <a:cs typeface="Calibri" pitchFamily="34" charset="-120"/>
-              </a:rPr>
-              <a:t>No</a:t>
-            </a:r>
-            <a:endParaRPr lang="en-US" sz="1250" dirty="0"/>
-          </a:p>
-        </p:txBody>
-      </p:sp>
-      <p:sp>
-        <p:nvSpPr>
-          <p:cNvPr id="38" name="Text 36"/>
-          <p:cNvSpPr/>
-          <p:nvPr/>
-        </p:nvSpPr>
-        <p:spPr>
-          <a:xfrm>
-            <a:off x="8549640" y="5166360"/>
-            <a:ext cx="1691640" cy="493776"/>
-          </a:xfrm>
-          <a:prstGeom prst="rect">
-            <a:avLst/>
-          </a:prstGeom>
-          <a:noFill/>
-          <a:ln/>
-        </p:spPr>
-        <p:txBody>
-          <a:bodyPr wrap="square" lIns="0" tIns="0" rIns="0" bIns="0" rtlCol="0" anchor="ctr"/>
-          <a:lstStyle/>
-          <a:p>
-            <a:pPr algn="ctr" indent="0" marL="0">
-              <a:buNone/>
-            </a:pPr>
-            <a:r>
-              <a:rPr lang="en-US" sz="1250" b="1" dirty="0">
-                <a:solidFill>
-                  <a:srgbClr val="1E7A4C"/>
-                </a:solidFill>
-                <a:latin typeface="Calibri" pitchFamily="34" charset="0"/>
-                <a:ea typeface="Calibri" pitchFamily="34" charset="-122"/>
-                <a:cs typeface="Calibri" pitchFamily="34" charset="-120"/>
-              </a:rPr>
-              <a:t>Yes</a:t>
-            </a:r>
-            <a:endParaRPr lang="en-US" sz="1250" dirty="0"/>
-          </a:p>
-        </p:txBody>
-      </p:sp>
-      <p:sp>
-        <p:nvSpPr>
-          <p:cNvPr id="39" name="Text 37"/>
-          <p:cNvSpPr/>
-          <p:nvPr/>
-        </p:nvSpPr>
-        <p:spPr>
-          <a:xfrm>
-            <a:off x="10332720" y="5166360"/>
-            <a:ext cx="1280160" cy="493776"/>
-          </a:xfrm>
-          <a:prstGeom prst="rect">
-            <a:avLst/>
-          </a:prstGeom>
-          <a:noFill/>
-          <a:ln/>
-        </p:spPr>
-        <p:txBody>
-          <a:bodyPr wrap="square" lIns="0" tIns="0" rIns="0" bIns="0" rtlCol="0" anchor="ctr"/>
-          <a:lstStyle/>
-          <a:p>
-            <a:pPr algn="ctr" indent="0" marL="0">
-              <a:buNone/>
-            </a:pPr>
-            <a:r>
-              <a:rPr lang="en-US" sz="1250" b="1" dirty="0">
-                <a:solidFill>
-                  <a:srgbClr val="1E7A4C"/>
-                </a:solidFill>
-                <a:latin typeface="Calibri" pitchFamily="34" charset="0"/>
-                <a:ea typeface="Calibri" pitchFamily="34" charset="-122"/>
-                <a:cs typeface="Calibri" pitchFamily="34" charset="-120"/>
-              </a:rPr>
-              <a:t>Yes</a:t>
-            </a:r>
-            <a:endParaRPr lang="en-US" sz="1250" dirty="0"/>
-          </a:p>
-        </p:txBody>
-      </p:sp>
-      <p:sp>
-        <p:nvSpPr>
-          <p:cNvPr id="40" name="Shape 38"/>
-          <p:cNvSpPr/>
-          <p:nvPr/>
-        </p:nvSpPr>
-        <p:spPr>
-          <a:xfrm>
-            <a:off x="548640" y="5715000"/>
-            <a:ext cx="11064240" cy="493776"/>
-          </a:xfrm>
-          <a:prstGeom prst="roundRect">
-            <a:avLst>
-              <a:gd name="adj" fmla="val 9259"/>
-            </a:avLst>
-          </a:prstGeom>
-          <a:solidFill>
-            <a:srgbClr val="F3F5F7"/>
-          </a:solidFill>
-          <a:ln w="6350">
-            <a:solidFill>
-              <a:srgbClr val="D9DEE4"/>
-            </a:solidFill>
-            <a:prstDash val="solid"/>
-          </a:ln>
-        </p:spPr>
-      </p:sp>
-      <p:sp>
-        <p:nvSpPr>
-          <p:cNvPr id="41" name="Text 39"/>
-          <p:cNvSpPr/>
-          <p:nvPr/>
-        </p:nvSpPr>
-        <p:spPr>
-          <a:xfrm>
-            <a:off x="548640" y="5715000"/>
-            <a:ext cx="6263640" cy="493776"/>
-          </a:xfrm>
-          <a:prstGeom prst="rect">
-            <a:avLst/>
-          </a:prstGeom>
-          <a:noFill/>
-          <a:ln/>
-        </p:spPr>
-        <p:txBody>
-          <a:bodyPr wrap="square" lIns="0" tIns="0" rIns="0" bIns="0" rtlCol="0" anchor="ctr"/>
-          <a:lstStyle/>
-          <a:p>
-            <a:pPr algn="l" indent="0" marL="0">
-              <a:buNone/>
-            </a:pPr>
-            <a:r>
-              <a:rPr lang="en-US" sz="1250" b="1" dirty="0">
-                <a:solidFill>
-                  <a:srgbClr val="16202B"/>
-                </a:solidFill>
-                <a:latin typeface="Calibri" pitchFamily="34" charset="0"/>
-                <a:ea typeface="Calibri" pitchFamily="34" charset="-122"/>
-                <a:cs typeface="Calibri" pitchFamily="34" charset="-120"/>
-              </a:rPr>
-              <a:t>Shifts, sites, leave types, holidays</a:t>
-            </a:r>
-            <a:endParaRPr lang="en-US" sz="1250" dirty="0"/>
-          </a:p>
-        </p:txBody>
-      </p:sp>
-      <p:sp>
-        <p:nvSpPr>
-          <p:cNvPr id="42" name="Text 40"/>
-          <p:cNvSpPr/>
-          <p:nvPr/>
-        </p:nvSpPr>
-        <p:spPr>
-          <a:xfrm>
-            <a:off x="6903720" y="5715000"/>
-            <a:ext cx="1554480" cy="493776"/>
-          </a:xfrm>
-          <a:prstGeom prst="rect">
-            <a:avLst/>
-          </a:prstGeom>
-          <a:noFill/>
-          <a:ln/>
-        </p:spPr>
-        <p:txBody>
-          <a:bodyPr wrap="square" lIns="0" tIns="0" rIns="0" bIns="0" rtlCol="0" anchor="ctr"/>
-          <a:lstStyle/>
-          <a:p>
-            <a:pPr algn="ctr" indent="0" marL="0">
-              <a:buNone/>
-            </a:pPr>
-            <a:r>
-              <a:rPr lang="en-US" sz="1250" dirty="0">
-                <a:solidFill>
-                  <a:srgbClr val="A03A3A"/>
-                </a:solidFill>
-                <a:latin typeface="Calibri" pitchFamily="34" charset="0"/>
-                <a:ea typeface="Calibri" pitchFamily="34" charset="-122"/>
-                <a:cs typeface="Calibri" pitchFamily="34" charset="-120"/>
-              </a:rPr>
-              <a:t>No</a:t>
-            </a:r>
-            <a:endParaRPr lang="en-US" sz="1250" dirty="0"/>
-          </a:p>
-        </p:txBody>
-      </p:sp>
-      <p:sp>
-        <p:nvSpPr>
-          <p:cNvPr id="43" name="Text 41"/>
-          <p:cNvSpPr/>
-          <p:nvPr/>
-        </p:nvSpPr>
-        <p:spPr>
-          <a:xfrm>
-            <a:off x="8549640" y="5715000"/>
-            <a:ext cx="1691640" cy="493776"/>
-          </a:xfrm>
-          <a:prstGeom prst="rect">
-            <a:avLst/>
-          </a:prstGeom>
-          <a:noFill/>
-          <a:ln/>
-        </p:spPr>
-        <p:txBody>
-          <a:bodyPr wrap="square" lIns="0" tIns="0" rIns="0" bIns="0" rtlCol="0" anchor="ctr"/>
-          <a:lstStyle/>
-          <a:p>
-            <a:pPr algn="ctr" indent="0" marL="0">
-              <a:buNone/>
-            </a:pPr>
-            <a:r>
-              <a:rPr lang="en-US" sz="1250" dirty="0">
-                <a:solidFill>
-                  <a:srgbClr val="A03A3A"/>
-                </a:solidFill>
-                <a:latin typeface="Calibri" pitchFamily="34" charset="0"/>
-                <a:ea typeface="Calibri" pitchFamily="34" charset="-122"/>
-                <a:cs typeface="Calibri" pitchFamily="34" charset="-120"/>
-              </a:rPr>
-              <a:t>No</a:t>
-            </a:r>
-            <a:endParaRPr lang="en-US" sz="1250" dirty="0"/>
-          </a:p>
-        </p:txBody>
-      </p:sp>
-      <p:sp>
-        <p:nvSpPr>
-          <p:cNvPr id="44" name="Text 42"/>
-          <p:cNvSpPr/>
-          <p:nvPr/>
-        </p:nvSpPr>
-        <p:spPr>
-          <a:xfrm>
-            <a:off x="10332720" y="5715000"/>
-            <a:ext cx="1280160" cy="493776"/>
-          </a:xfrm>
-          <a:prstGeom prst="rect">
-            <a:avLst/>
-          </a:prstGeom>
-          <a:noFill/>
-          <a:ln/>
-        </p:spPr>
-        <p:txBody>
-          <a:bodyPr wrap="square" lIns="0" tIns="0" rIns="0" bIns="0" rtlCol="0" anchor="ctr"/>
-          <a:lstStyle/>
-          <a:p>
-            <a:pPr algn="ctr" indent="0" marL="0">
-              <a:buNone/>
-            </a:pPr>
-            <a:r>
-              <a:rPr lang="en-US" sz="1250" b="1" dirty="0">
-                <a:solidFill>
-                  <a:srgbClr val="1E7A4C"/>
-                </a:solidFill>
-                <a:latin typeface="Calibri" pitchFamily="34" charset="0"/>
-                <a:ea typeface="Calibri" pitchFamily="34" charset="-122"/>
-                <a:cs typeface="Calibri" pitchFamily="34" charset="-120"/>
-              </a:rPr>
-              <a:t>Yes</a:t>
-            </a:r>
-            <a:endParaRPr lang="en-US" sz="1250" dirty="0"/>
-          </a:p>
-        </p:txBody>
-      </p:sp>
-      <p:sp>
-        <p:nvSpPr>
-          <p:cNvPr id="45" name="Shape 43"/>
-          <p:cNvSpPr/>
-          <p:nvPr/>
-        </p:nvSpPr>
-        <p:spPr>
-          <a:xfrm>
-            <a:off x="548640" y="6263640"/>
-            <a:ext cx="11064240" cy="493776"/>
-          </a:xfrm>
-          <a:prstGeom prst="roundRect">
-            <a:avLst>
-              <a:gd name="adj" fmla="val 9259"/>
-            </a:avLst>
-          </a:prstGeom>
-          <a:solidFill>
-            <a:srgbClr val="FFFFFF"/>
-          </a:solidFill>
-          <a:ln w="6350">
-            <a:solidFill>
-              <a:srgbClr val="D9DEE4"/>
-            </a:solidFill>
-            <a:prstDash val="solid"/>
-          </a:ln>
-        </p:spPr>
-      </p:sp>
-      <p:sp>
-        <p:nvSpPr>
-          <p:cNvPr id="46" name="Text 44"/>
-          <p:cNvSpPr/>
-          <p:nvPr/>
-        </p:nvSpPr>
-        <p:spPr>
-          <a:xfrm>
-            <a:off x="548640" y="6263640"/>
-            <a:ext cx="6263640" cy="493776"/>
-          </a:xfrm>
-          <a:prstGeom prst="rect">
-            <a:avLst/>
-          </a:prstGeom>
-          <a:noFill/>
-          <a:ln/>
-        </p:spPr>
-        <p:txBody>
-          <a:bodyPr wrap="square" lIns="0" tIns="0" rIns="0" bIns="0" rtlCol="0" anchor="ctr"/>
-          <a:lstStyle/>
-          <a:p>
-            <a:pPr algn="l" indent="0" marL="0">
-              <a:buNone/>
-            </a:pPr>
-            <a:r>
-              <a:rPr lang="en-US" sz="1250" b="1" dirty="0">
-                <a:solidFill>
-                  <a:srgbClr val="16202B"/>
-                </a:solidFill>
-                <a:latin typeface="Calibri" pitchFamily="34" charset="0"/>
-                <a:ea typeface="Calibri" pitchFamily="34" charset="-122"/>
-                <a:cs typeface="Calibri" pitchFamily="34" charset="-120"/>
-              </a:rPr>
-              <a:t>Attendance rules, OT rate, punch types</a:t>
-            </a:r>
-            <a:endParaRPr lang="en-US" sz="1250" dirty="0"/>
-          </a:p>
-        </p:txBody>
-      </p:sp>
-      <p:sp>
-        <p:nvSpPr>
-          <p:cNvPr id="47" name="Text 45"/>
-          <p:cNvSpPr/>
-          <p:nvPr/>
-        </p:nvSpPr>
-        <p:spPr>
-          <a:xfrm>
-            <a:off x="6903720" y="6263640"/>
-            <a:ext cx="1554480" cy="493776"/>
-          </a:xfrm>
-          <a:prstGeom prst="rect">
-            <a:avLst/>
-          </a:prstGeom>
-          <a:noFill/>
-          <a:ln/>
-        </p:spPr>
-        <p:txBody>
-          <a:bodyPr wrap="square" lIns="0" tIns="0" rIns="0" bIns="0" rtlCol="0" anchor="ctr"/>
-          <a:lstStyle/>
-          <a:p>
-            <a:pPr algn="ctr" indent="0" marL="0">
-              <a:buNone/>
-            </a:pPr>
-            <a:r>
-              <a:rPr lang="en-US" sz="1250" dirty="0">
-                <a:solidFill>
-                  <a:srgbClr val="A03A3A"/>
-                </a:solidFill>
-                <a:latin typeface="Calibri" pitchFamily="34" charset="0"/>
-                <a:ea typeface="Calibri" pitchFamily="34" charset="-122"/>
-                <a:cs typeface="Calibri" pitchFamily="34" charset="-120"/>
-              </a:rPr>
-              <a:t>No</a:t>
-            </a:r>
-            <a:endParaRPr lang="en-US" sz="1250" dirty="0"/>
-          </a:p>
-        </p:txBody>
-      </p:sp>
-      <p:sp>
-        <p:nvSpPr>
-          <p:cNvPr id="48" name="Text 46"/>
-          <p:cNvSpPr/>
-          <p:nvPr/>
-        </p:nvSpPr>
-        <p:spPr>
-          <a:xfrm>
-            <a:off x="8549640" y="6263640"/>
-            <a:ext cx="1691640" cy="493776"/>
-          </a:xfrm>
-          <a:prstGeom prst="rect">
-            <a:avLst/>
-          </a:prstGeom>
-          <a:noFill/>
-          <a:ln/>
-        </p:spPr>
-        <p:txBody>
-          <a:bodyPr wrap="square" lIns="0" tIns="0" rIns="0" bIns="0" rtlCol="0" anchor="ctr"/>
-          <a:lstStyle/>
-          <a:p>
-            <a:pPr algn="ctr" indent="0" marL="0">
-              <a:buNone/>
-            </a:pPr>
-            <a:r>
-              <a:rPr lang="en-US" sz="1250" dirty="0">
-                <a:solidFill>
-                  <a:srgbClr val="A03A3A"/>
-                </a:solidFill>
-                <a:latin typeface="Calibri" pitchFamily="34" charset="0"/>
-                <a:ea typeface="Calibri" pitchFamily="34" charset="-122"/>
-                <a:cs typeface="Calibri" pitchFamily="34" charset="-120"/>
-              </a:rPr>
-              <a:t>No</a:t>
-            </a:r>
-            <a:endParaRPr lang="en-US" sz="1250" dirty="0"/>
-          </a:p>
-        </p:txBody>
-      </p:sp>
-      <p:sp>
-        <p:nvSpPr>
-          <p:cNvPr id="49" name="Text 47"/>
-          <p:cNvSpPr/>
-          <p:nvPr/>
-        </p:nvSpPr>
-        <p:spPr>
-          <a:xfrm>
-            <a:off x="10332720" y="6263640"/>
-            <a:ext cx="1280160" cy="493776"/>
-          </a:xfrm>
-          <a:prstGeom prst="rect">
-            <a:avLst/>
-          </a:prstGeom>
-          <a:noFill/>
-          <a:ln/>
-        </p:spPr>
-        <p:txBody>
-          <a:bodyPr wrap="square" lIns="0" tIns="0" rIns="0" bIns="0" rtlCol="0" anchor="ctr"/>
-          <a:lstStyle/>
-          <a:p>
-            <a:pPr algn="ctr" indent="0" marL="0">
-              <a:buNone/>
-            </a:pPr>
-            <a:r>
-              <a:rPr lang="en-US" sz="1250" b="1" dirty="0">
-                <a:solidFill>
-                  <a:srgbClr val="1E7A4C"/>
-                </a:solidFill>
-                <a:latin typeface="Calibri" pitchFamily="34" charset="0"/>
-                <a:ea typeface="Calibri" pitchFamily="34" charset="-122"/>
-                <a:cs typeface="Calibri" pitchFamily="34" charset="-120"/>
-              </a:rPr>
-              <a:t>Yes</a:t>
-            </a:r>
-            <a:endParaRPr lang="en-US" sz="1250" dirty="0"/>
+          <p:cNvPr id="18" name="Text 16"/>
+          <p:cNvSpPr/>
+          <p:nvPr/>
+        </p:nvSpPr>
+        <p:spPr>
+          <a:xfrm>
+            <a:off x="8796528" y="2743200"/>
+            <a:ext cx="2560320" cy="274320"/>
+          </a:xfrm>
+          <a:prstGeom prst="rect">
+            <a:avLst/>
+          </a:prstGeom>
+          <a:noFill/>
+          <a:ln/>
+        </p:spPr>
+        <p:txBody>
+          <a:bodyPr wrap="square" lIns="0" tIns="0" rIns="0" bIns="0" rtlCol="0" anchor="ctr"/>
+          <a:lstStyle/>
+          <a:p>
+            <a:pPr indent="0" marL="0">
+              <a:buNone/>
+            </a:pPr>
+            <a:r>
+              <a:rPr lang="en-US" sz="1000" b="1" spc="160" kern="0" dirty="0">
+                <a:solidFill>
+                  <a:srgbClr val="E08A2E"/>
+                </a:solidFill>
+                <a:latin typeface="Calibri" pitchFamily="34" charset="0"/>
+                <a:ea typeface="Calibri" pitchFamily="34" charset="-122"/>
+                <a:cs typeface="Calibri" pitchFamily="34" charset="-120"/>
+              </a:rPr>
+              <a:t>WHO USES IT</a:t>
+            </a:r>
+            <a:endParaRPr lang="en-US" sz="1000" dirty="0"/>
+          </a:p>
+        </p:txBody>
+      </p:sp>
+      <p:sp>
+        <p:nvSpPr>
+          <p:cNvPr id="19" name="Text 17"/>
+          <p:cNvSpPr/>
+          <p:nvPr/>
+        </p:nvSpPr>
+        <p:spPr>
+          <a:xfrm>
+            <a:off x="8796528" y="3127248"/>
+            <a:ext cx="2560320" cy="1371600"/>
+          </a:xfrm>
+          <a:prstGeom prst="rect">
+            <a:avLst/>
+          </a:prstGeom>
+          <a:noFill/>
+          <a:ln/>
+        </p:spPr>
+        <p:txBody>
+          <a:bodyPr wrap="square" lIns="0" tIns="0" rIns="0" bIns="0" rtlCol="0" anchor="t"/>
+          <a:lstStyle/>
+          <a:p>
+            <a:pPr indent="0" marL="0">
+              <a:spcAft>
+                <a:spcPts val="800"/>
+              </a:spcAft>
+              <a:buNone/>
+            </a:pPr>
+            <a:r>
+              <a:rPr lang="en-US" sz="1500" b="1" dirty="0">
+                <a:solidFill>
+                  <a:srgbClr val="FFFFFF"/>
+                </a:solidFill>
+                <a:latin typeface="Calibri" pitchFamily="34" charset="0"/>
+                <a:ea typeface="Calibri" pitchFamily="34" charset="-122"/>
+                <a:cs typeface="Calibri" pitchFamily="34" charset="-120"/>
+              </a:rPr>
+              <a:t>Admin</a:t>
+            </a:r>
+            <a:endParaRPr lang="en-US" sz="1500" dirty="0"/>
           </a:p>
         </p:txBody>
       </p:sp>
@@ -23855,7 +22907,7 @@
         </p:nvSpPr>
         <p:spPr>
           <a:xfrm>
-            <a:off x="548640" y="1234440"/>
+            <a:off x="548640" y="384048"/>
             <a:ext cx="7315200" cy="274320"/>
           </a:xfrm>
           <a:prstGeom prst="rect">
@@ -23872,7 +22924,7 @@
               <a:buNone/>
             </a:pPr>
             <a:r>
-              <a:rPr lang="en-US" sz="1100" b="1" spc="240" kern="0" dirty="0">
+              <a:rPr lang="en-US" sz="1100" b="1" spc="200" kern="0" dirty="0">
                 <a:solidFill>
                   <a:srgbClr val="E08A2E"/>
                 </a:solidFill>
@@ -23880,7 +22932,7 @@
                 <a:ea typeface="Calibri" pitchFamily="34" charset="-122"/>
                 <a:cs typeface="Calibri" pitchFamily="34" charset="-120"/>
               </a:rPr>
-              <a:t>THE SHORT VERSION</a:t>
+              <a:t>HOW TO  —  ADMIN</a:t>
             </a:r>
             <a:endParaRPr lang="en-US" sz="1100" dirty="0"/>
           </a:p>
@@ -23894,24 +22946,24 @@
         </p:nvSpPr>
         <p:spPr>
           <a:xfrm>
-            <a:off x="548640" y="1600200"/>
-            <a:ext cx="10515600" cy="777240"/>
-          </a:xfrm>
-          <a:prstGeom prst="rect">
-            <a:avLst/>
-          </a:prstGeom>
-          <a:noFill/>
-          <a:ln/>
-        </p:spPr>
-        <p:txBody>
-          <a:bodyPr wrap="square" rtlCol="0" anchor="ctr"/>
-          <a:lstStyle/>
-          <a:p>
-            <a:pPr indent="0" marL="0">
-              <a:buNone/>
-            </a:pPr>
-            <a:r>
-              <a:rPr lang="en-US" sz="3800" b="1" dirty="0">
+            <a:off x="548640" y="694944"/>
+            <a:ext cx="11064240" cy="566928"/>
+          </a:xfrm>
+          <a:prstGeom prst="rect">
+            <a:avLst/>
+          </a:prstGeom>
+          <a:noFill/>
+          <a:ln/>
+        </p:spPr>
+        <p:txBody>
+          <a:bodyPr wrap="square" rtlCol="0" anchor="t"/>
+          <a:lstStyle/>
+          <a:p>
+            <a:pPr indent="0" marL="0">
+              <a:buNone/>
+            </a:pPr>
+            <a:r>
+              <a:rPr lang="en-US" sz="2700" b="1" dirty="0">
                 <a:solidFill>
                   <a:srgbClr val="FFFFFF"/>
                 </a:solidFill>
@@ -23919,9 +22971,9 @@
                 <a:ea typeface="Calibri" pitchFamily="34" charset="-122"/>
                 <a:cs typeface="Calibri" pitchFamily="34" charset="-120"/>
               </a:rPr>
-              <a:t>Three things worth remembering</a:t>
-            </a:r>
-            <a:endParaRPr lang="en-US" sz="3800" dirty="0"/>
+              <a:t>Attendance rules and notifications</a:t>
+            </a:r>
+            <a:endParaRPr lang="en-US" sz="2700" dirty="0"/>
           </a:p>
         </p:txBody>
       </p:sp>
@@ -23933,12 +22985,12 @@
         </p:nvSpPr>
         <p:spPr>
           <a:xfrm>
-            <a:off x="548640" y="2788920"/>
-            <a:ext cx="11064240" cy="969264"/>
+            <a:off x="548640" y="1463040"/>
+            <a:ext cx="11064240" cy="676656"/>
           </a:xfrm>
           <a:prstGeom prst="roundRect">
             <a:avLst>
-              <a:gd name="adj" fmla="val 7547"/>
+              <a:gd name="adj" fmla="val 10811"/>
             </a:avLst>
           </a:prstGeom>
           <a:solidFill>
@@ -23954,14 +23006,123 @@
       </p:sp>
       <p:sp>
         <p:nvSpPr>
-          <p:cNvPr id="5" name="Shape 3"/>
-          <p:cNvSpPr/>
-          <p:nvPr/>
-        </p:nvSpPr>
-        <p:spPr>
-          <a:xfrm>
-            <a:off x="841248" y="3072384"/>
-            <a:ext cx="402336" cy="402336"/>
+          <p:cNvPr id="5" name="Text 3"/>
+          <p:cNvSpPr/>
+          <p:nvPr/>
+        </p:nvSpPr>
+        <p:spPr>
+          <a:xfrm>
+            <a:off x="822960" y="1463040"/>
+            <a:ext cx="10515600" cy="676656"/>
+          </a:xfrm>
+          <a:prstGeom prst="rect">
+            <a:avLst/>
+          </a:prstGeom>
+          <a:noFill/>
+          <a:ln/>
+        </p:spPr>
+        <p:txBody>
+          <a:bodyPr wrap="square" lIns="0" tIns="0" rIns="0" bIns="0" rtlCol="0" anchor="ctr"/>
+          <a:lstStyle/>
+          <a:p>
+            <a:pPr indent="0" marL="0">
+              <a:buNone/>
+            </a:pPr>
+            <a:r>
+              <a:rPr lang="en-US" sz="1100" b="1" spc="150" kern="0" dirty="0">
+                <a:solidFill>
+                  <a:srgbClr val="E08A2E"/>
+                </a:solidFill>
+                <a:latin typeface="Calibri" pitchFamily="34" charset="0"/>
+                <a:ea typeface="Calibri" pitchFamily="34" charset="-122"/>
+                <a:cs typeface="Calibri" pitchFamily="34" charset="-120"/>
+              </a:rPr>
+              <a:t>PATH   </a:t>
+            </a:r>
+            <a:pPr indent="0" marL="0">
+              <a:buNone/>
+            </a:pPr>
+            <a:r>
+              <a:rPr lang="en-US" sz="1500" b="1" dirty="0">
+                <a:solidFill>
+                  <a:srgbClr val="FFFFFF"/>
+                </a:solidFill>
+                <a:latin typeface="Calibri" pitchFamily="34" charset="0"/>
+                <a:ea typeface="Calibri" pitchFamily="34" charset="-122"/>
+                <a:cs typeface="Calibri" pitchFamily="34" charset="-120"/>
+              </a:rPr>
+              <a:t>Settings</a:t>
+            </a:r>
+            <a:pPr indent="0" marL="0">
+              <a:buNone/>
+            </a:pPr>
+            <a:r>
+              <a:rPr lang="en-US" sz="1500" dirty="0">
+                <a:solidFill>
+                  <a:srgbClr val="F6C177"/>
+                </a:solidFill>
+                <a:latin typeface="Calibri" pitchFamily="34" charset="0"/>
+                <a:ea typeface="Calibri" pitchFamily="34" charset="-122"/>
+                <a:cs typeface="Calibri" pitchFamily="34" charset="-120"/>
+              </a:rPr>
+              <a:t>   ›   </a:t>
+            </a:r>
+            <a:pPr indent="0" marL="0">
+              <a:buNone/>
+            </a:pPr>
+            <a:r>
+              <a:rPr lang="en-US" sz="1500" b="1" dirty="0">
+                <a:solidFill>
+                  <a:srgbClr val="FFFFFF"/>
+                </a:solidFill>
+                <a:latin typeface="Calibri" pitchFamily="34" charset="0"/>
+                <a:ea typeface="Calibri" pitchFamily="34" charset="-122"/>
+                <a:cs typeface="Calibri" pitchFamily="34" charset="-120"/>
+              </a:rPr>
+              <a:t>Workforce</a:t>
+            </a:r>
+            <a:pPr indent="0" marL="0">
+              <a:buNone/>
+            </a:pPr>
+            <a:r>
+              <a:rPr lang="en-US" sz="1500" dirty="0">
+                <a:solidFill>
+                  <a:srgbClr val="F6C177"/>
+                </a:solidFill>
+                <a:latin typeface="Calibri" pitchFamily="34" charset="0"/>
+                <a:ea typeface="Calibri" pitchFamily="34" charset="-122"/>
+                <a:cs typeface="Calibri" pitchFamily="34" charset="-120"/>
+              </a:rPr>
+              <a:t>   ›   </a:t>
+            </a:r>
+            <a:pPr indent="0" marL="0">
+              <a:buNone/>
+            </a:pPr>
+            <a:r>
+              <a:rPr lang="en-US" sz="1500" b="1" dirty="0">
+                <a:solidFill>
+                  <a:srgbClr val="FFFFFF"/>
+                </a:solidFill>
+                <a:latin typeface="Calibri" pitchFamily="34" charset="0"/>
+                <a:ea typeface="Calibri" pitchFamily="34" charset="-122"/>
+                <a:cs typeface="Calibri" pitchFamily="34" charset="-120"/>
+              </a:rPr>
+              <a:t>General</a:t>
+            </a:r>
+            <a:endParaRPr lang="en-US" sz="1100" dirty="0"/>
+          </a:p>
+        </p:txBody>
+      </p:sp>
+      <p:sp>
+        <p:nvSpPr>
+          <p:cNvPr id="6" name="Shape 4"/>
+          <p:cNvSpPr/>
+          <p:nvPr/>
+        </p:nvSpPr>
+        <p:spPr>
+          <a:xfrm>
+            <a:off x="585216" y="2487168"/>
+            <a:ext cx="384048" cy="384048"/>
           </a:xfrm>
           <a:prstGeom prst="ellipse">
             <a:avLst/>
@@ -23979,14 +23140,14 @@
       </p:sp>
       <p:sp>
         <p:nvSpPr>
-          <p:cNvPr id="6" name="Text 4"/>
-          <p:cNvSpPr/>
-          <p:nvPr/>
-        </p:nvSpPr>
-        <p:spPr>
-          <a:xfrm>
-            <a:off x="841248" y="3072384"/>
-            <a:ext cx="402336" cy="402336"/>
+          <p:cNvPr id="7" name="Text 5"/>
+          <p:cNvSpPr/>
+          <p:nvPr/>
+        </p:nvSpPr>
+        <p:spPr>
+          <a:xfrm>
+            <a:off x="585216" y="2487168"/>
+            <a:ext cx="384048" cy="384048"/>
           </a:xfrm>
           <a:prstGeom prst="rect">
             <a:avLst/>
@@ -24018,80 +23179,366 @@
       </p:sp>
       <p:sp>
         <p:nvSpPr>
-          <p:cNvPr id="7" name="Text 5"/>
-          <p:cNvSpPr/>
-          <p:nvPr/>
-        </p:nvSpPr>
-        <p:spPr>
-          <a:xfrm>
-            <a:off x="1463040" y="2788920"/>
-            <a:ext cx="9875520" cy="969264"/>
-          </a:xfrm>
-          <a:prstGeom prst="rect">
-            <a:avLst/>
-          </a:prstGeom>
-          <a:noFill/>
-          <a:ln/>
-        </p:spPr>
-        <p:txBody>
-          <a:bodyPr wrap="square" lIns="0" tIns="0" rIns="0" bIns="0" rtlCol="0" anchor="ctr"/>
-          <a:lstStyle/>
-          <a:p>
-            <a:pPr indent="0" marL="0">
-              <a:lnSpc>
-                <a:spcPts val="1800"/>
-              </a:lnSpc>
-              <a:buNone/>
-            </a:pPr>
-            <a:r>
-              <a:rPr lang="en-US" sz="1600" b="1" dirty="0">
-                <a:solidFill>
-                  <a:srgbClr val="FFFFFF"/>
-                </a:solidFill>
-                <a:latin typeface="Calibri" pitchFamily="34" charset="0"/>
-                <a:ea typeface="Calibri" pitchFamily="34" charset="-122"/>
-                <a:cs typeface="Calibri" pitchFamily="34" charset="-120"/>
-              </a:rPr>
-              <a:t>Attendance is never edited</a:t>
-            </a:r>
-            <a:endParaRPr lang="en-US" sz="1600" dirty="0"/>
-          </a:p>
-          <a:p>
-            <a:pPr indent="0" marL="0">
-              <a:lnSpc>
-                <a:spcPts val="1800"/>
-              </a:lnSpc>
-              <a:buNone/>
-            </a:pPr>
-            <a:r>
-              <a:rPr lang="en-US" sz="1300" dirty="0">
-                <a:solidFill>
-                  <a:srgbClr val="C6D0DA"/>
-                </a:solidFill>
-                <a:latin typeface="Calibri" pitchFamily="34" charset="0"/>
-                <a:ea typeface="Calibri" pitchFamily="34" charset="-122"/>
-                <a:cs typeface="Calibri" pitchFamily="34" charset="-120"/>
-              </a:rPr>
-              <a:t>Every fix adds a new event and supersedes the old one, so the history always survives.</a:t>
-            </a:r>
-            <a:endParaRPr lang="en-US" sz="1600" dirty="0"/>
-          </a:p>
-        </p:txBody>
-      </p:sp>
-      <p:sp>
-        <p:nvSpPr>
-          <p:cNvPr id="8" name="Shape 6"/>
-          <p:cNvSpPr/>
-          <p:nvPr/>
-        </p:nvSpPr>
-        <p:spPr>
-          <a:xfrm>
-            <a:off x="548640" y="3886200"/>
-            <a:ext cx="11064240" cy="969264"/>
+          <p:cNvPr id="8" name="Text 6"/>
+          <p:cNvSpPr/>
+          <p:nvPr/>
+        </p:nvSpPr>
+        <p:spPr>
+          <a:xfrm>
+            <a:off x="1170432" y="2450592"/>
+            <a:ext cx="10424160" cy="457200"/>
+          </a:xfrm>
+          <a:prstGeom prst="rect">
+            <a:avLst/>
+          </a:prstGeom>
+          <a:noFill/>
+          <a:ln/>
+        </p:spPr>
+        <p:txBody>
+          <a:bodyPr wrap="square" lIns="0" tIns="0" rIns="0" bIns="0" rtlCol="0" anchor="ctr"/>
+          <a:lstStyle/>
+          <a:p>
+            <a:pPr indent="0" marL="0">
+              <a:buNone/>
+            </a:pPr>
+            <a:r>
+              <a:rPr lang="en-US" sz="1500" dirty="0">
+                <a:solidFill>
+                  <a:srgbClr val="F0F3F6"/>
+                </a:solidFill>
+                <a:latin typeface="Calibri" pitchFamily="34" charset="0"/>
+                <a:ea typeface="Calibri" pitchFamily="34" charset="-122"/>
+                <a:cs typeface="Calibri" pitchFamily="34" charset="-120"/>
+              </a:rPr>
+              <a:t>Open Settings → Workforce → General.</a:t>
+            </a:r>
+            <a:endParaRPr lang="en-US" sz="1500" dirty="0"/>
+          </a:p>
+        </p:txBody>
+      </p:sp>
+      <p:sp>
+        <p:nvSpPr>
+          <p:cNvPr id="9" name="Shape 7"/>
+          <p:cNvSpPr/>
+          <p:nvPr/>
+        </p:nvSpPr>
+        <p:spPr>
+          <a:xfrm>
+            <a:off x="585216" y="3090672"/>
+            <a:ext cx="384048" cy="384048"/>
+          </a:xfrm>
+          <a:prstGeom prst="ellipse">
+            <a:avLst/>
+          </a:prstGeom>
+          <a:solidFill>
+            <a:srgbClr val="E08A2E"/>
+          </a:solidFill>
+          <a:ln w="12700">
+            <a:solidFill>
+              <a:srgbClr val="E08A2E"/>
+            </a:solidFill>
+            <a:prstDash val="solid"/>
+          </a:ln>
+        </p:spPr>
+      </p:sp>
+      <p:sp>
+        <p:nvSpPr>
+          <p:cNvPr id="10" name="Text 8"/>
+          <p:cNvSpPr/>
+          <p:nvPr/>
+        </p:nvSpPr>
+        <p:spPr>
+          <a:xfrm>
+            <a:off x="585216" y="3090672"/>
+            <a:ext cx="384048" cy="384048"/>
+          </a:xfrm>
+          <a:prstGeom prst="rect">
+            <a:avLst/>
+          </a:prstGeom>
+          <a:noFill/>
+          <a:ln/>
+        </p:spPr>
+        <p:txBody>
+          <a:bodyPr wrap="square" lIns="0" tIns="0" rIns="0" bIns="0" rtlCol="0" anchor="ctr"/>
+          <a:lstStyle/>
+          <a:p>
+            <a:pPr algn="ctr" indent="0" marL="0">
+              <a:buNone/>
+            </a:pPr>
+            <a:r>
+              <a:rPr lang="en-US" sz="1300" b="1" dirty="0">
+                <a:solidFill>
+                  <a:srgbClr val="0E1A28"/>
+                </a:solidFill>
+                <a:latin typeface="Calibri" pitchFamily="34" charset="0"/>
+                <a:ea typeface="Calibri" pitchFamily="34" charset="-122"/>
+                <a:cs typeface="Calibri" pitchFamily="34" charset="-120"/>
+              </a:rPr>
+              <a:t>2</a:t>
+            </a:r>
+            <a:endParaRPr lang="en-US" sz="1300" dirty="0"/>
+          </a:p>
+        </p:txBody>
+      </p:sp>
+      <p:sp>
+        <p:nvSpPr>
+          <p:cNvPr id="11" name="Text 9"/>
+          <p:cNvSpPr/>
+          <p:nvPr/>
+        </p:nvSpPr>
+        <p:spPr>
+          <a:xfrm>
+            <a:off x="1170432" y="3054096"/>
+            <a:ext cx="10424160" cy="457200"/>
+          </a:xfrm>
+          <a:prstGeom prst="rect">
+            <a:avLst/>
+          </a:prstGeom>
+          <a:noFill/>
+          <a:ln/>
+        </p:spPr>
+        <p:txBody>
+          <a:bodyPr wrap="square" lIns="0" tIns="0" rIns="0" bIns="0" rtlCol="0" anchor="ctr"/>
+          <a:lstStyle/>
+          <a:p>
+            <a:pPr indent="0" marL="0">
+              <a:buNone/>
+            </a:pPr>
+            <a:r>
+              <a:rPr lang="en-US" sz="1500" dirty="0">
+                <a:solidFill>
+                  <a:srgbClr val="F0F3F6"/>
+                </a:solidFill>
+                <a:latin typeface="Calibri" pitchFamily="34" charset="0"/>
+                <a:ea typeface="Calibri" pitchFamily="34" charset="-122"/>
+                <a:cs typeface="Calibri" pitchFamily="34" charset="-120"/>
+              </a:rPr>
+              <a:t>Set the timezone, break deduction and weekly off days.</a:t>
+            </a:r>
+            <a:endParaRPr lang="en-US" sz="1500" dirty="0"/>
+          </a:p>
+        </p:txBody>
+      </p:sp>
+      <p:sp>
+        <p:nvSpPr>
+          <p:cNvPr id="12" name="Shape 10"/>
+          <p:cNvSpPr/>
+          <p:nvPr/>
+        </p:nvSpPr>
+        <p:spPr>
+          <a:xfrm>
+            <a:off x="585216" y="3694176"/>
+            <a:ext cx="384048" cy="384048"/>
+          </a:xfrm>
+          <a:prstGeom prst="ellipse">
+            <a:avLst/>
+          </a:prstGeom>
+          <a:solidFill>
+            <a:srgbClr val="E08A2E"/>
+          </a:solidFill>
+          <a:ln w="12700">
+            <a:solidFill>
+              <a:srgbClr val="E08A2E"/>
+            </a:solidFill>
+            <a:prstDash val="solid"/>
+          </a:ln>
+        </p:spPr>
+      </p:sp>
+      <p:sp>
+        <p:nvSpPr>
+          <p:cNvPr id="13" name="Text 11"/>
+          <p:cNvSpPr/>
+          <p:nvPr/>
+        </p:nvSpPr>
+        <p:spPr>
+          <a:xfrm>
+            <a:off x="585216" y="3694176"/>
+            <a:ext cx="384048" cy="384048"/>
+          </a:xfrm>
+          <a:prstGeom prst="rect">
+            <a:avLst/>
+          </a:prstGeom>
+          <a:noFill/>
+          <a:ln/>
+        </p:spPr>
+        <p:txBody>
+          <a:bodyPr wrap="square" lIns="0" tIns="0" rIns="0" bIns="0" rtlCol="0" anchor="ctr"/>
+          <a:lstStyle/>
+          <a:p>
+            <a:pPr algn="ctr" indent="0" marL="0">
+              <a:buNone/>
+            </a:pPr>
+            <a:r>
+              <a:rPr lang="en-US" sz="1300" b="1" dirty="0">
+                <a:solidFill>
+                  <a:srgbClr val="0E1A28"/>
+                </a:solidFill>
+                <a:latin typeface="Calibri" pitchFamily="34" charset="0"/>
+                <a:ea typeface="Calibri" pitchFamily="34" charset="-122"/>
+                <a:cs typeface="Calibri" pitchFamily="34" charset="-120"/>
+              </a:rPr>
+              <a:t>3</a:t>
+            </a:r>
+            <a:endParaRPr lang="en-US" sz="1300" dirty="0"/>
+          </a:p>
+        </p:txBody>
+      </p:sp>
+      <p:sp>
+        <p:nvSpPr>
+          <p:cNvPr id="14" name="Text 12"/>
+          <p:cNvSpPr/>
+          <p:nvPr/>
+        </p:nvSpPr>
+        <p:spPr>
+          <a:xfrm>
+            <a:off x="1170432" y="3657600"/>
+            <a:ext cx="10424160" cy="457200"/>
+          </a:xfrm>
+          <a:prstGeom prst="rect">
+            <a:avLst/>
+          </a:prstGeom>
+          <a:noFill/>
+          <a:ln/>
+        </p:spPr>
+        <p:txBody>
+          <a:bodyPr wrap="square" lIns="0" tIns="0" rIns="0" bIns="0" rtlCol="0" anchor="ctr"/>
+          <a:lstStyle/>
+          <a:p>
+            <a:pPr indent="0" marL="0">
+              <a:buNone/>
+            </a:pPr>
+            <a:r>
+              <a:rPr lang="en-US" sz="1500" dirty="0">
+                <a:solidFill>
+                  <a:srgbClr val="F0F3F6"/>
+                </a:solidFill>
+                <a:latin typeface="Calibri" pitchFamily="34" charset="0"/>
+                <a:ea typeface="Calibri" pitchFamily="34" charset="-122"/>
+                <a:cs typeface="Calibri" pitchFamily="34" charset="-120"/>
+              </a:rPr>
+              <a:t>Edit the employment types — add Intern, Contractor and so on.</a:t>
+            </a:r>
+            <a:endParaRPr lang="en-US" sz="1500" dirty="0"/>
+          </a:p>
+        </p:txBody>
+      </p:sp>
+      <p:sp>
+        <p:nvSpPr>
+          <p:cNvPr id="15" name="Shape 13"/>
+          <p:cNvSpPr/>
+          <p:nvPr/>
+        </p:nvSpPr>
+        <p:spPr>
+          <a:xfrm>
+            <a:off x="585216" y="4297680"/>
+            <a:ext cx="384048" cy="384048"/>
+          </a:xfrm>
+          <a:prstGeom prst="ellipse">
+            <a:avLst/>
+          </a:prstGeom>
+          <a:solidFill>
+            <a:srgbClr val="E08A2E"/>
+          </a:solidFill>
+          <a:ln w="12700">
+            <a:solidFill>
+              <a:srgbClr val="E08A2E"/>
+            </a:solidFill>
+            <a:prstDash val="solid"/>
+          </a:ln>
+        </p:spPr>
+      </p:sp>
+      <p:sp>
+        <p:nvSpPr>
+          <p:cNvPr id="16" name="Text 14"/>
+          <p:cNvSpPr/>
+          <p:nvPr/>
+        </p:nvSpPr>
+        <p:spPr>
+          <a:xfrm>
+            <a:off x="585216" y="4297680"/>
+            <a:ext cx="384048" cy="384048"/>
+          </a:xfrm>
+          <a:prstGeom prst="rect">
+            <a:avLst/>
+          </a:prstGeom>
+          <a:noFill/>
+          <a:ln/>
+        </p:spPr>
+        <p:txBody>
+          <a:bodyPr wrap="square" lIns="0" tIns="0" rIns="0" bIns="0" rtlCol="0" anchor="ctr"/>
+          <a:lstStyle/>
+          <a:p>
+            <a:pPr algn="ctr" indent="0" marL="0">
+              <a:buNone/>
+            </a:pPr>
+            <a:r>
+              <a:rPr lang="en-US" sz="1300" b="1" dirty="0">
+                <a:solidFill>
+                  <a:srgbClr val="0E1A28"/>
+                </a:solidFill>
+                <a:latin typeface="Calibri" pitchFamily="34" charset="0"/>
+                <a:ea typeface="Calibri" pitchFamily="34" charset="-122"/>
+                <a:cs typeface="Calibri" pitchFamily="34" charset="-120"/>
+              </a:rPr>
+              <a:t>4</a:t>
+            </a:r>
+            <a:endParaRPr lang="en-US" sz="1300" dirty="0"/>
+          </a:p>
+        </p:txBody>
+      </p:sp>
+      <p:sp>
+        <p:nvSpPr>
+          <p:cNvPr id="17" name="Text 15"/>
+          <p:cNvSpPr/>
+          <p:nvPr/>
+        </p:nvSpPr>
+        <p:spPr>
+          <a:xfrm>
+            <a:off x="1170432" y="4261104"/>
+            <a:ext cx="10424160" cy="457200"/>
+          </a:xfrm>
+          <a:prstGeom prst="rect">
+            <a:avLst/>
+          </a:prstGeom>
+          <a:noFill/>
+          <a:ln/>
+        </p:spPr>
+        <p:txBody>
+          <a:bodyPr wrap="square" lIns="0" tIns="0" rIns="0" bIns="0" rtlCol="0" anchor="ctr"/>
+          <a:lstStyle/>
+          <a:p>
+            <a:pPr indent="0" marL="0">
+              <a:buNone/>
+            </a:pPr>
+            <a:r>
+              <a:rPr lang="en-US" sz="1500" dirty="0">
+                <a:solidFill>
+                  <a:srgbClr val="F0F3F6"/>
+                </a:solidFill>
+                <a:latin typeface="Calibri" pitchFamily="34" charset="0"/>
+                <a:ea typeface="Calibri" pitchFamily="34" charset="-122"/>
+                <a:cs typeface="Calibri" pitchFamily="34" charset="-120"/>
+              </a:rPr>
+              <a:t>Switch the four email notifications on or off.</a:t>
+            </a:r>
+            <a:endParaRPr lang="en-US" sz="1500" dirty="0"/>
+          </a:p>
+        </p:txBody>
+      </p:sp>
+      <p:sp>
+        <p:nvSpPr>
+          <p:cNvPr id="18" name="Shape 16"/>
+          <p:cNvSpPr/>
+          <p:nvPr/>
+        </p:nvSpPr>
+        <p:spPr>
+          <a:xfrm>
+            <a:off x="548640" y="5742432"/>
+            <a:ext cx="11064240" cy="658368"/>
           </a:xfrm>
           <a:prstGeom prst="roundRect">
             <a:avLst>
-              <a:gd name="adj" fmla="val 7547"/>
+              <a:gd name="adj" fmla="val 11111"/>
             </a:avLst>
           </a:prstGeom>
           <a:solidFill>
@@ -24107,13 +23554,2389 @@
       </p:sp>
       <p:sp>
         <p:nvSpPr>
-          <p:cNvPr id="9" name="Shape 7"/>
-          <p:cNvSpPr/>
-          <p:nvPr/>
-        </p:nvSpPr>
-        <p:spPr>
-          <a:xfrm>
-            <a:off x="841248" y="4169664"/>
+          <p:cNvPr id="19" name="Text 17"/>
+          <p:cNvSpPr/>
+          <p:nvPr/>
+        </p:nvSpPr>
+        <p:spPr>
+          <a:xfrm>
+            <a:off x="822960" y="5742432"/>
+            <a:ext cx="10515600" cy="658368"/>
+          </a:xfrm>
+          <a:prstGeom prst="rect">
+            <a:avLst/>
+          </a:prstGeom>
+          <a:noFill/>
+          <a:ln/>
+        </p:spPr>
+        <p:txBody>
+          <a:bodyPr wrap="square" lIns="0" tIns="0" rIns="0" bIns="0" rtlCol="0" anchor="ctr"/>
+          <a:lstStyle/>
+          <a:p>
+            <a:pPr indent="0" marL="0">
+              <a:buNone/>
+            </a:pPr>
+            <a:r>
+              <a:rPr lang="en-US" sz="1050" b="1" spc="140" kern="0" dirty="0">
+                <a:solidFill>
+                  <a:srgbClr val="E08A2E"/>
+                </a:solidFill>
+                <a:latin typeface="Calibri" pitchFamily="34" charset="0"/>
+                <a:ea typeface="Calibri" pitchFamily="34" charset="-122"/>
+                <a:cs typeface="Calibri" pitchFamily="34" charset="-120"/>
+              </a:rPr>
+              <a:t>NOTE   </a:t>
+            </a:r>
+            <a:pPr indent="0" marL="0">
+              <a:buNone/>
+            </a:pPr>
+            <a:r>
+              <a:rPr lang="en-US" sz="1300" i="1" dirty="0">
+                <a:solidFill>
+                  <a:srgbClr val="DCE3EA"/>
+                </a:solidFill>
+                <a:latin typeface="Calibri" pitchFamily="34" charset="0"/>
+                <a:ea typeface="Calibri" pitchFamily="34" charset="-122"/>
+                <a:cs typeface="Calibri" pitchFamily="34" charset="-120"/>
+              </a:rPr>
+              <a:t>Never rename an employment type code once employees use it — the Excel export groups its sheets by that code.</a:t>
+            </a:r>
+            <a:endParaRPr lang="en-US" sz="1050" dirty="0"/>
+          </a:p>
+        </p:txBody>
+      </p:sp>
+    </p:spTree>
+  </p:cSld>
+  <p:clrMapOvr>
+    <a:masterClrMapping/>
+  </p:clrMapOvr>
+</p:sld>
+</file>
+
+<file path=ppt/slides/slide35.xml><?xml version="1.0" encoding="utf-8"?>
+<p:sld xmlns:a="http://schemas.openxmlformats.org/drawingml/2006/main" xmlns:r="http://schemas.openxmlformats.org/officeDocument/2006/relationships" xmlns:p="http://schemas.openxmlformats.org/presentationml/2006/main">
+  <p:cSld name="Slide 35">
+    <p:bg>
+      <p:bgPr>
+        <a:solidFill>
+          <a:srgbClr val="FFFFFF"/>
+        </a:solidFill>
+      </p:bgPr>
+    </p:bg>
+    <p:spTree>
+      <p:nvGrpSpPr>
+        <p:cNvPr id="1" name=""/>
+        <p:cNvGrpSpPr/>
+        <p:nvPr/>
+      </p:nvGrpSpPr>
+      <p:grpSpPr>
+        <a:xfrm>
+          <a:off x="0" y="0"/>
+          <a:ext cx="0" cy="0"/>
+          <a:chOff x="0" y="0"/>
+          <a:chExt cx="0" cy="0"/>
+        </a:xfrm>
+      </p:grpSpPr>
+      <p:sp>
+        <p:nvSpPr>
+          <p:cNvPr id="2" name="Text 0"/>
+          <p:cNvSpPr/>
+          <p:nvPr/>
+        </p:nvSpPr>
+        <p:spPr>
+          <a:xfrm>
+            <a:off x="548640" y="384048"/>
+            <a:ext cx="5486400" cy="274320"/>
+          </a:xfrm>
+          <a:prstGeom prst="rect">
+            <a:avLst/>
+          </a:prstGeom>
+          <a:noFill/>
+          <a:ln/>
+        </p:spPr>
+        <p:txBody>
+          <a:bodyPr wrap="square" rtlCol="0" anchor="ctr"/>
+          <a:lstStyle/>
+          <a:p>
+            <a:pPr indent="0" marL="0">
+              <a:buNone/>
+            </a:pPr>
+            <a:r>
+              <a:rPr lang="en-US" sz="1100" b="1" spc="200" kern="0" dirty="0">
+                <a:solidFill>
+                  <a:srgbClr val="E08A2E"/>
+                </a:solidFill>
+                <a:latin typeface="Calibri" pitchFamily="34" charset="0"/>
+                <a:ea typeface="Calibri" pitchFamily="34" charset="-122"/>
+                <a:cs typeface="Calibri" pitchFamily="34" charset="-120"/>
+              </a:rPr>
+              <a:t>PERMISSIONS</a:t>
+            </a:r>
+            <a:endParaRPr lang="en-US" sz="1100" dirty="0"/>
+          </a:p>
+        </p:txBody>
+      </p:sp>
+      <p:sp>
+        <p:nvSpPr>
+          <p:cNvPr id="3" name="Text 1"/>
+          <p:cNvSpPr/>
+          <p:nvPr/>
+        </p:nvSpPr>
+        <p:spPr>
+          <a:xfrm>
+            <a:off x="548640" y="685800"/>
+            <a:ext cx="10515600" cy="640080"/>
+          </a:xfrm>
+          <a:prstGeom prst="rect">
+            <a:avLst/>
+          </a:prstGeom>
+          <a:noFill/>
+          <a:ln/>
+        </p:spPr>
+        <p:txBody>
+          <a:bodyPr wrap="square" rtlCol="0" anchor="ctr"/>
+          <a:lstStyle/>
+          <a:p>
+            <a:pPr indent="0" marL="0">
+              <a:buNone/>
+            </a:pPr>
+            <a:r>
+              <a:rPr lang="en-US" sz="3300" b="1" dirty="0">
+                <a:solidFill>
+                  <a:srgbClr val="0E1A28"/>
+                </a:solidFill>
+                <a:latin typeface="Calibri" pitchFamily="34" charset="0"/>
+                <a:ea typeface="Calibri" pitchFamily="34" charset="-122"/>
+                <a:cs typeface="Calibri" pitchFamily="34" charset="-120"/>
+              </a:rPr>
+              <a:t>Who can do what</a:t>
+            </a:r>
+            <a:endParaRPr lang="en-US" sz="3300" dirty="0"/>
+          </a:p>
+        </p:txBody>
+      </p:sp>
+      <p:sp>
+        <p:nvSpPr>
+          <p:cNvPr id="4" name="Text 2"/>
+          <p:cNvSpPr/>
+          <p:nvPr/>
+        </p:nvSpPr>
+        <p:spPr>
+          <a:xfrm>
+            <a:off x="548640" y="1371600"/>
+            <a:ext cx="10515600" cy="365760"/>
+          </a:xfrm>
+          <a:prstGeom prst="rect">
+            <a:avLst/>
+          </a:prstGeom>
+          <a:noFill/>
+          <a:ln/>
+        </p:spPr>
+        <p:txBody>
+          <a:bodyPr wrap="square" rtlCol="0" anchor="ctr"/>
+          <a:lstStyle/>
+          <a:p>
+            <a:pPr indent="0" marL="0">
+              <a:buNone/>
+            </a:pPr>
+            <a:r>
+              <a:rPr lang="en-US" sz="1400" dirty="0">
+                <a:solidFill>
+                  <a:srgbClr val="5C6B7A"/>
+                </a:solidFill>
+                <a:latin typeface="Calibri" pitchFamily="34" charset="0"/>
+                <a:ea typeface="Calibri" pitchFamily="34" charset="-122"/>
+                <a:cs typeface="Calibri" pitchFamily="34" charset="-120"/>
+              </a:rPr>
+              <a:t>Enforced on the server, not just hidden in the interface.</a:t>
+            </a:r>
+            <a:endParaRPr lang="en-US" sz="1400" dirty="0"/>
+          </a:p>
+        </p:txBody>
+      </p:sp>
+      <p:sp>
+        <p:nvSpPr>
+          <p:cNvPr id="5" name="Shape 3"/>
+          <p:cNvSpPr/>
+          <p:nvPr/>
+        </p:nvSpPr>
+        <p:spPr>
+          <a:xfrm>
+            <a:off x="548640" y="1874520"/>
+            <a:ext cx="11064240" cy="457200"/>
+          </a:xfrm>
+          <a:prstGeom prst="roundRect">
+            <a:avLst>
+              <a:gd name="adj" fmla="val 10000"/>
+            </a:avLst>
+          </a:prstGeom>
+          <a:solidFill>
+            <a:srgbClr val="0E1A28"/>
+          </a:solidFill>
+          <a:ln w="12700">
+            <a:solidFill>
+              <a:srgbClr val="0E1A28"/>
+            </a:solidFill>
+            <a:prstDash val="solid"/>
+          </a:ln>
+        </p:spPr>
+      </p:sp>
+      <p:sp>
+        <p:nvSpPr>
+          <p:cNvPr id="6" name="Text 4"/>
+          <p:cNvSpPr/>
+          <p:nvPr/>
+        </p:nvSpPr>
+        <p:spPr>
+          <a:xfrm>
+            <a:off x="548640" y="1874520"/>
+            <a:ext cx="5029200" cy="457200"/>
+          </a:xfrm>
+          <a:prstGeom prst="rect">
+            <a:avLst/>
+          </a:prstGeom>
+          <a:noFill/>
+          <a:ln/>
+        </p:spPr>
+        <p:txBody>
+          <a:bodyPr wrap="square" lIns="0" tIns="0" rIns="0" bIns="0" rtlCol="0" anchor="ctr"/>
+          <a:lstStyle/>
+          <a:p>
+            <a:pPr algn="l" indent="0" marL="0">
+              <a:buNone/>
+            </a:pPr>
+            <a:r>
+              <a:rPr lang="en-US" sz="1150" b="1" dirty="0">
+                <a:solidFill>
+                  <a:srgbClr val="FFFFFF"/>
+                </a:solidFill>
+                <a:latin typeface="Calibri" pitchFamily="34" charset="0"/>
+                <a:ea typeface="Calibri" pitchFamily="34" charset="-122"/>
+                <a:cs typeface="Calibri" pitchFamily="34" charset="-120"/>
+              </a:rPr>
+              <a:t>Action</a:t>
+            </a:r>
+            <a:endParaRPr lang="en-US" sz="1150" dirty="0"/>
+          </a:p>
+        </p:txBody>
+      </p:sp>
+      <p:sp>
+        <p:nvSpPr>
+          <p:cNvPr id="7" name="Text 5"/>
+          <p:cNvSpPr/>
+          <p:nvPr/>
+        </p:nvSpPr>
+        <p:spPr>
+          <a:xfrm>
+            <a:off x="5623560" y="1874520"/>
+            <a:ext cx="1463040" cy="457200"/>
+          </a:xfrm>
+          <a:prstGeom prst="rect">
+            <a:avLst/>
+          </a:prstGeom>
+          <a:noFill/>
+          <a:ln/>
+        </p:spPr>
+        <p:txBody>
+          <a:bodyPr wrap="square" lIns="0" tIns="0" rIns="0" bIns="0" rtlCol="0" anchor="ctr"/>
+          <a:lstStyle/>
+          <a:p>
+            <a:pPr algn="ctr" indent="0" marL="0">
+              <a:buNone/>
+            </a:pPr>
+            <a:r>
+              <a:rPr lang="en-US" sz="1150" b="1" dirty="0">
+                <a:solidFill>
+                  <a:srgbClr val="FFFFFF"/>
+                </a:solidFill>
+                <a:latin typeface="Calibri" pitchFamily="34" charset="0"/>
+                <a:ea typeface="Calibri" pitchFamily="34" charset="-122"/>
+                <a:cs typeface="Calibri" pitchFamily="34" charset="-120"/>
+              </a:rPr>
+              <a:t>Employee</a:t>
+            </a:r>
+            <a:endParaRPr lang="en-US" sz="1150" dirty="0"/>
+          </a:p>
+        </p:txBody>
+      </p:sp>
+      <p:sp>
+        <p:nvSpPr>
+          <p:cNvPr id="8" name="Text 6"/>
+          <p:cNvSpPr/>
+          <p:nvPr/>
+        </p:nvSpPr>
+        <p:spPr>
+          <a:xfrm>
+            <a:off x="7086600" y="1874520"/>
+            <a:ext cx="1828800" cy="457200"/>
+          </a:xfrm>
+          <a:prstGeom prst="rect">
+            <a:avLst/>
+          </a:prstGeom>
+          <a:noFill/>
+          <a:ln/>
+        </p:spPr>
+        <p:txBody>
+          <a:bodyPr wrap="square" lIns="0" tIns="0" rIns="0" bIns="0" rtlCol="0" anchor="ctr"/>
+          <a:lstStyle/>
+          <a:p>
+            <a:pPr algn="ctr" indent="0" marL="0">
+              <a:buNone/>
+            </a:pPr>
+            <a:r>
+              <a:rPr lang="en-US" sz="1150" b="1" dirty="0">
+                <a:solidFill>
+                  <a:srgbClr val="FFFFFF"/>
+                </a:solidFill>
+                <a:latin typeface="Calibri" pitchFamily="34" charset="0"/>
+                <a:ea typeface="Calibri" pitchFamily="34" charset="-122"/>
+                <a:cs typeface="Calibri" pitchFamily="34" charset="-120"/>
+              </a:rPr>
+              <a:t>Site supervisor</a:t>
+            </a:r>
+            <a:endParaRPr lang="en-US" sz="1150" dirty="0"/>
+          </a:p>
+        </p:txBody>
+      </p:sp>
+      <p:sp>
+        <p:nvSpPr>
+          <p:cNvPr id="9" name="Text 7"/>
+          <p:cNvSpPr/>
+          <p:nvPr/>
+        </p:nvSpPr>
+        <p:spPr>
+          <a:xfrm>
+            <a:off x="8915400" y="1874520"/>
+            <a:ext cx="1463040" cy="457200"/>
+          </a:xfrm>
+          <a:prstGeom prst="rect">
+            <a:avLst/>
+          </a:prstGeom>
+          <a:noFill/>
+          <a:ln/>
+        </p:spPr>
+        <p:txBody>
+          <a:bodyPr wrap="square" lIns="0" tIns="0" rIns="0" bIns="0" rtlCol="0" anchor="ctr"/>
+          <a:lstStyle/>
+          <a:p>
+            <a:pPr algn="ctr" indent="0" marL="0">
+              <a:buNone/>
+            </a:pPr>
+            <a:r>
+              <a:rPr lang="en-US" sz="1150" b="1" dirty="0">
+                <a:solidFill>
+                  <a:srgbClr val="FFFFFF"/>
+                </a:solidFill>
+                <a:latin typeface="Calibri" pitchFamily="34" charset="0"/>
+                <a:ea typeface="Calibri" pitchFamily="34" charset="-122"/>
+                <a:cs typeface="Calibri" pitchFamily="34" charset="-120"/>
+              </a:rPr>
+              <a:t>Manager</a:t>
+            </a:r>
+            <a:endParaRPr lang="en-US" sz="1150" dirty="0"/>
+          </a:p>
+        </p:txBody>
+      </p:sp>
+      <p:sp>
+        <p:nvSpPr>
+          <p:cNvPr id="10" name="Text 8"/>
+          <p:cNvSpPr/>
+          <p:nvPr/>
+        </p:nvSpPr>
+        <p:spPr>
+          <a:xfrm>
+            <a:off x="10378440" y="1874520"/>
+            <a:ext cx="1234440" cy="457200"/>
+          </a:xfrm>
+          <a:prstGeom prst="rect">
+            <a:avLst/>
+          </a:prstGeom>
+          <a:noFill/>
+          <a:ln/>
+        </p:spPr>
+        <p:txBody>
+          <a:bodyPr wrap="square" lIns="0" tIns="0" rIns="0" bIns="0" rtlCol="0" anchor="ctr"/>
+          <a:lstStyle/>
+          <a:p>
+            <a:pPr algn="ctr" indent="0" marL="0">
+              <a:buNone/>
+            </a:pPr>
+            <a:r>
+              <a:rPr lang="en-US" sz="1150" b="1" dirty="0">
+                <a:solidFill>
+                  <a:srgbClr val="FFFFFF"/>
+                </a:solidFill>
+                <a:latin typeface="Calibri" pitchFamily="34" charset="0"/>
+                <a:ea typeface="Calibri" pitchFamily="34" charset="-122"/>
+                <a:cs typeface="Calibri" pitchFamily="34" charset="-120"/>
+              </a:rPr>
+              <a:t>Admin</a:t>
+            </a:r>
+            <a:endParaRPr lang="en-US" sz="1150" dirty="0"/>
+          </a:p>
+        </p:txBody>
+      </p:sp>
+      <p:sp>
+        <p:nvSpPr>
+          <p:cNvPr id="11" name="Shape 9"/>
+          <p:cNvSpPr/>
+          <p:nvPr/>
+        </p:nvSpPr>
+        <p:spPr>
+          <a:xfrm>
+            <a:off x="548640" y="2386584"/>
+            <a:ext cx="11064240" cy="457200"/>
+          </a:xfrm>
+          <a:prstGeom prst="roundRect">
+            <a:avLst>
+              <a:gd name="adj" fmla="val 10000"/>
+            </a:avLst>
+          </a:prstGeom>
+          <a:solidFill>
+            <a:srgbClr val="F3F5F7"/>
+          </a:solidFill>
+          <a:ln w="6350">
+            <a:solidFill>
+              <a:srgbClr val="D9DEE4"/>
+            </a:solidFill>
+            <a:prstDash val="solid"/>
+          </a:ln>
+        </p:spPr>
+      </p:sp>
+      <p:sp>
+        <p:nvSpPr>
+          <p:cNvPr id="12" name="Text 10"/>
+          <p:cNvSpPr/>
+          <p:nvPr/>
+        </p:nvSpPr>
+        <p:spPr>
+          <a:xfrm>
+            <a:off x="548640" y="2386584"/>
+            <a:ext cx="5029200" cy="457200"/>
+          </a:xfrm>
+          <a:prstGeom prst="rect">
+            <a:avLst/>
+          </a:prstGeom>
+          <a:noFill/>
+          <a:ln/>
+        </p:spPr>
+        <p:txBody>
+          <a:bodyPr wrap="square" lIns="0" tIns="0" rIns="0" bIns="0" rtlCol="0" anchor="ctr"/>
+          <a:lstStyle/>
+          <a:p>
+            <a:pPr algn="l" indent="0" marL="0">
+              <a:buNone/>
+            </a:pPr>
+            <a:r>
+              <a:rPr lang="en-US" sz="1200" b="1" dirty="0">
+                <a:solidFill>
+                  <a:srgbClr val="16202B"/>
+                </a:solidFill>
+                <a:latin typeface="Calibri" pitchFamily="34" charset="0"/>
+                <a:ea typeface="Calibri" pitchFamily="34" charset="-122"/>
+                <a:cs typeface="Calibri" pitchFamily="34" charset="-120"/>
+              </a:rPr>
+              <a:t>Punch, own timesheet, apply for leave</a:t>
+            </a:r>
+            <a:endParaRPr lang="en-US" sz="1200" dirty="0"/>
+          </a:p>
+        </p:txBody>
+      </p:sp>
+      <p:sp>
+        <p:nvSpPr>
+          <p:cNvPr id="13" name="Text 11"/>
+          <p:cNvSpPr/>
+          <p:nvPr/>
+        </p:nvSpPr>
+        <p:spPr>
+          <a:xfrm>
+            <a:off x="5623560" y="2386584"/>
+            <a:ext cx="1463040" cy="457200"/>
+          </a:xfrm>
+          <a:prstGeom prst="rect">
+            <a:avLst/>
+          </a:prstGeom>
+          <a:noFill/>
+          <a:ln/>
+        </p:spPr>
+        <p:txBody>
+          <a:bodyPr wrap="square" lIns="0" tIns="0" rIns="0" bIns="0" rtlCol="0" anchor="ctr"/>
+          <a:lstStyle/>
+          <a:p>
+            <a:pPr algn="ctr" indent="0" marL="0">
+              <a:buNone/>
+            </a:pPr>
+            <a:r>
+              <a:rPr lang="en-US" sz="1200" b="1" dirty="0">
+                <a:solidFill>
+                  <a:srgbClr val="1E7A4C"/>
+                </a:solidFill>
+                <a:latin typeface="Calibri" pitchFamily="34" charset="0"/>
+                <a:ea typeface="Calibri" pitchFamily="34" charset="-122"/>
+                <a:cs typeface="Calibri" pitchFamily="34" charset="-120"/>
+              </a:rPr>
+              <a:t>Yes</a:t>
+            </a:r>
+            <a:endParaRPr lang="en-US" sz="1200" dirty="0"/>
+          </a:p>
+        </p:txBody>
+      </p:sp>
+      <p:sp>
+        <p:nvSpPr>
+          <p:cNvPr id="14" name="Text 12"/>
+          <p:cNvSpPr/>
+          <p:nvPr/>
+        </p:nvSpPr>
+        <p:spPr>
+          <a:xfrm>
+            <a:off x="7086600" y="2386584"/>
+            <a:ext cx="1828800" cy="457200"/>
+          </a:xfrm>
+          <a:prstGeom prst="rect">
+            <a:avLst/>
+          </a:prstGeom>
+          <a:noFill/>
+          <a:ln/>
+        </p:spPr>
+        <p:txBody>
+          <a:bodyPr wrap="square" lIns="0" tIns="0" rIns="0" bIns="0" rtlCol="0" anchor="ctr"/>
+          <a:lstStyle/>
+          <a:p>
+            <a:pPr algn="ctr" indent="0" marL="0">
+              <a:buNone/>
+            </a:pPr>
+            <a:r>
+              <a:rPr lang="en-US" sz="1200" b="1" dirty="0">
+                <a:solidFill>
+                  <a:srgbClr val="1E7A4C"/>
+                </a:solidFill>
+                <a:latin typeface="Calibri" pitchFamily="34" charset="0"/>
+                <a:ea typeface="Calibri" pitchFamily="34" charset="-122"/>
+                <a:cs typeface="Calibri" pitchFamily="34" charset="-120"/>
+              </a:rPr>
+              <a:t>Yes</a:t>
+            </a:r>
+            <a:endParaRPr lang="en-US" sz="1200" dirty="0"/>
+          </a:p>
+        </p:txBody>
+      </p:sp>
+      <p:sp>
+        <p:nvSpPr>
+          <p:cNvPr id="15" name="Text 13"/>
+          <p:cNvSpPr/>
+          <p:nvPr/>
+        </p:nvSpPr>
+        <p:spPr>
+          <a:xfrm>
+            <a:off x="8915400" y="2386584"/>
+            <a:ext cx="1463040" cy="457200"/>
+          </a:xfrm>
+          <a:prstGeom prst="rect">
+            <a:avLst/>
+          </a:prstGeom>
+          <a:noFill/>
+          <a:ln/>
+        </p:spPr>
+        <p:txBody>
+          <a:bodyPr wrap="square" lIns="0" tIns="0" rIns="0" bIns="0" rtlCol="0" anchor="ctr"/>
+          <a:lstStyle/>
+          <a:p>
+            <a:pPr algn="ctr" indent="0" marL="0">
+              <a:buNone/>
+            </a:pPr>
+            <a:r>
+              <a:rPr lang="en-US" sz="1200" b="1" dirty="0">
+                <a:solidFill>
+                  <a:srgbClr val="1E7A4C"/>
+                </a:solidFill>
+                <a:latin typeface="Calibri" pitchFamily="34" charset="0"/>
+                <a:ea typeface="Calibri" pitchFamily="34" charset="-122"/>
+                <a:cs typeface="Calibri" pitchFamily="34" charset="-120"/>
+              </a:rPr>
+              <a:t>Yes</a:t>
+            </a:r>
+            <a:endParaRPr lang="en-US" sz="1200" dirty="0"/>
+          </a:p>
+        </p:txBody>
+      </p:sp>
+      <p:sp>
+        <p:nvSpPr>
+          <p:cNvPr id="16" name="Text 14"/>
+          <p:cNvSpPr/>
+          <p:nvPr/>
+        </p:nvSpPr>
+        <p:spPr>
+          <a:xfrm>
+            <a:off x="10378440" y="2386584"/>
+            <a:ext cx="1234440" cy="457200"/>
+          </a:xfrm>
+          <a:prstGeom prst="rect">
+            <a:avLst/>
+          </a:prstGeom>
+          <a:noFill/>
+          <a:ln/>
+        </p:spPr>
+        <p:txBody>
+          <a:bodyPr wrap="square" lIns="0" tIns="0" rIns="0" bIns="0" rtlCol="0" anchor="ctr"/>
+          <a:lstStyle/>
+          <a:p>
+            <a:pPr algn="ctr" indent="0" marL="0">
+              <a:buNone/>
+            </a:pPr>
+            <a:r>
+              <a:rPr lang="en-US" sz="1200" b="1" dirty="0">
+                <a:solidFill>
+                  <a:srgbClr val="1E7A4C"/>
+                </a:solidFill>
+                <a:latin typeface="Calibri" pitchFamily="34" charset="0"/>
+                <a:ea typeface="Calibri" pitchFamily="34" charset="-122"/>
+                <a:cs typeface="Calibri" pitchFamily="34" charset="-120"/>
+              </a:rPr>
+              <a:t>Yes</a:t>
+            </a:r>
+            <a:endParaRPr lang="en-US" sz="1200" dirty="0"/>
+          </a:p>
+        </p:txBody>
+      </p:sp>
+      <p:sp>
+        <p:nvSpPr>
+          <p:cNvPr id="17" name="Shape 15"/>
+          <p:cNvSpPr/>
+          <p:nvPr/>
+        </p:nvSpPr>
+        <p:spPr>
+          <a:xfrm>
+            <a:off x="548640" y="2898648"/>
+            <a:ext cx="11064240" cy="457200"/>
+          </a:xfrm>
+          <a:prstGeom prst="roundRect">
+            <a:avLst>
+              <a:gd name="adj" fmla="val 10000"/>
+            </a:avLst>
+          </a:prstGeom>
+          <a:solidFill>
+            <a:srgbClr val="FFFFFF"/>
+          </a:solidFill>
+          <a:ln w="6350">
+            <a:solidFill>
+              <a:srgbClr val="D9DEE4"/>
+            </a:solidFill>
+            <a:prstDash val="solid"/>
+          </a:ln>
+        </p:spPr>
+      </p:sp>
+      <p:sp>
+        <p:nvSpPr>
+          <p:cNvPr id="18" name="Text 16"/>
+          <p:cNvSpPr/>
+          <p:nvPr/>
+        </p:nvSpPr>
+        <p:spPr>
+          <a:xfrm>
+            <a:off x="548640" y="2898648"/>
+            <a:ext cx="5029200" cy="457200"/>
+          </a:xfrm>
+          <a:prstGeom prst="rect">
+            <a:avLst/>
+          </a:prstGeom>
+          <a:noFill/>
+          <a:ln/>
+        </p:spPr>
+        <p:txBody>
+          <a:bodyPr wrap="square" lIns="0" tIns="0" rIns="0" bIns="0" rtlCol="0" anchor="ctr"/>
+          <a:lstStyle/>
+          <a:p>
+            <a:pPr algn="l" indent="0" marL="0">
+              <a:buNone/>
+            </a:pPr>
+            <a:r>
+              <a:rPr lang="en-US" sz="1200" b="1" dirty="0">
+                <a:solidFill>
+                  <a:srgbClr val="16202B"/>
+                </a:solidFill>
+                <a:latin typeface="Calibri" pitchFamily="34" charset="0"/>
+                <a:ea typeface="Calibri" pitchFamily="34" charset="-122"/>
+                <a:cs typeface="Calibri" pitchFamily="34" charset="-120"/>
+              </a:rPr>
+              <a:t>See the people at the site(s) you supervise</a:t>
+            </a:r>
+            <a:endParaRPr lang="en-US" sz="1200" dirty="0"/>
+          </a:p>
+        </p:txBody>
+      </p:sp>
+      <p:sp>
+        <p:nvSpPr>
+          <p:cNvPr id="19" name="Text 17"/>
+          <p:cNvSpPr/>
+          <p:nvPr/>
+        </p:nvSpPr>
+        <p:spPr>
+          <a:xfrm>
+            <a:off x="5623560" y="2898648"/>
+            <a:ext cx="1463040" cy="457200"/>
+          </a:xfrm>
+          <a:prstGeom prst="rect">
+            <a:avLst/>
+          </a:prstGeom>
+          <a:noFill/>
+          <a:ln/>
+        </p:spPr>
+        <p:txBody>
+          <a:bodyPr wrap="square" lIns="0" tIns="0" rIns="0" bIns="0" rtlCol="0" anchor="ctr"/>
+          <a:lstStyle/>
+          <a:p>
+            <a:pPr algn="ctr" indent="0" marL="0">
+              <a:buNone/>
+            </a:pPr>
+            <a:r>
+              <a:rPr lang="en-US" sz="1200" dirty="0">
+                <a:solidFill>
+                  <a:srgbClr val="A03A3A"/>
+                </a:solidFill>
+                <a:latin typeface="Calibri" pitchFamily="34" charset="0"/>
+                <a:ea typeface="Calibri" pitchFamily="34" charset="-122"/>
+                <a:cs typeface="Calibri" pitchFamily="34" charset="-120"/>
+              </a:rPr>
+              <a:t>No</a:t>
+            </a:r>
+            <a:endParaRPr lang="en-US" sz="1200" dirty="0"/>
+          </a:p>
+        </p:txBody>
+      </p:sp>
+      <p:sp>
+        <p:nvSpPr>
+          <p:cNvPr id="20" name="Text 18"/>
+          <p:cNvSpPr/>
+          <p:nvPr/>
+        </p:nvSpPr>
+        <p:spPr>
+          <a:xfrm>
+            <a:off x="7086600" y="2898648"/>
+            <a:ext cx="1828800" cy="457200"/>
+          </a:xfrm>
+          <a:prstGeom prst="rect">
+            <a:avLst/>
+          </a:prstGeom>
+          <a:noFill/>
+          <a:ln/>
+        </p:spPr>
+        <p:txBody>
+          <a:bodyPr wrap="square" lIns="0" tIns="0" rIns="0" bIns="0" rtlCol="0" anchor="ctr"/>
+          <a:lstStyle/>
+          <a:p>
+            <a:pPr algn="ctr" indent="0" marL="0">
+              <a:buNone/>
+            </a:pPr>
+            <a:r>
+              <a:rPr lang="en-US" sz="1200" b="1" dirty="0">
+                <a:solidFill>
+                  <a:srgbClr val="1E7A4C"/>
+                </a:solidFill>
+                <a:latin typeface="Calibri" pitchFamily="34" charset="0"/>
+                <a:ea typeface="Calibri" pitchFamily="34" charset="-122"/>
+                <a:cs typeface="Calibri" pitchFamily="34" charset="-120"/>
+              </a:rPr>
+              <a:t>Yes</a:t>
+            </a:r>
+            <a:endParaRPr lang="en-US" sz="1200" dirty="0"/>
+          </a:p>
+        </p:txBody>
+      </p:sp>
+      <p:sp>
+        <p:nvSpPr>
+          <p:cNvPr id="21" name="Text 19"/>
+          <p:cNvSpPr/>
+          <p:nvPr/>
+        </p:nvSpPr>
+        <p:spPr>
+          <a:xfrm>
+            <a:off x="8915400" y="2898648"/>
+            <a:ext cx="1463040" cy="457200"/>
+          </a:xfrm>
+          <a:prstGeom prst="rect">
+            <a:avLst/>
+          </a:prstGeom>
+          <a:noFill/>
+          <a:ln/>
+        </p:spPr>
+        <p:txBody>
+          <a:bodyPr wrap="square" lIns="0" tIns="0" rIns="0" bIns="0" rtlCol="0" anchor="ctr"/>
+          <a:lstStyle/>
+          <a:p>
+            <a:pPr algn="ctr" indent="0" marL="0">
+              <a:buNone/>
+            </a:pPr>
+            <a:r>
+              <a:rPr lang="en-US" sz="1200" b="1" dirty="0">
+                <a:solidFill>
+                  <a:srgbClr val="1E7A4C"/>
+                </a:solidFill>
+                <a:latin typeface="Calibri" pitchFamily="34" charset="0"/>
+                <a:ea typeface="Calibri" pitchFamily="34" charset="-122"/>
+                <a:cs typeface="Calibri" pitchFamily="34" charset="-120"/>
+              </a:rPr>
+              <a:t>Yes</a:t>
+            </a:r>
+            <a:endParaRPr lang="en-US" sz="1200" dirty="0"/>
+          </a:p>
+        </p:txBody>
+      </p:sp>
+      <p:sp>
+        <p:nvSpPr>
+          <p:cNvPr id="22" name="Text 20"/>
+          <p:cNvSpPr/>
+          <p:nvPr/>
+        </p:nvSpPr>
+        <p:spPr>
+          <a:xfrm>
+            <a:off x="10378440" y="2898648"/>
+            <a:ext cx="1234440" cy="457200"/>
+          </a:xfrm>
+          <a:prstGeom prst="rect">
+            <a:avLst/>
+          </a:prstGeom>
+          <a:noFill/>
+          <a:ln/>
+        </p:spPr>
+        <p:txBody>
+          <a:bodyPr wrap="square" lIns="0" tIns="0" rIns="0" bIns="0" rtlCol="0" anchor="ctr"/>
+          <a:lstStyle/>
+          <a:p>
+            <a:pPr algn="ctr" indent="0" marL="0">
+              <a:buNone/>
+            </a:pPr>
+            <a:r>
+              <a:rPr lang="en-US" sz="1200" b="1" dirty="0">
+                <a:solidFill>
+                  <a:srgbClr val="1E7A4C"/>
+                </a:solidFill>
+                <a:latin typeface="Calibri" pitchFamily="34" charset="0"/>
+                <a:ea typeface="Calibri" pitchFamily="34" charset="-122"/>
+                <a:cs typeface="Calibri" pitchFamily="34" charset="-120"/>
+              </a:rPr>
+              <a:t>Yes</a:t>
+            </a:r>
+            <a:endParaRPr lang="en-US" sz="1200" dirty="0"/>
+          </a:p>
+        </p:txBody>
+      </p:sp>
+      <p:sp>
+        <p:nvSpPr>
+          <p:cNvPr id="23" name="Shape 21"/>
+          <p:cNvSpPr/>
+          <p:nvPr/>
+        </p:nvSpPr>
+        <p:spPr>
+          <a:xfrm>
+            <a:off x="548640" y="3410712"/>
+            <a:ext cx="11064240" cy="457200"/>
+          </a:xfrm>
+          <a:prstGeom prst="roundRect">
+            <a:avLst>
+              <a:gd name="adj" fmla="val 10000"/>
+            </a:avLst>
+          </a:prstGeom>
+          <a:solidFill>
+            <a:srgbClr val="F3F5F7"/>
+          </a:solidFill>
+          <a:ln w="6350">
+            <a:solidFill>
+              <a:srgbClr val="D9DEE4"/>
+            </a:solidFill>
+            <a:prstDash val="solid"/>
+          </a:ln>
+        </p:spPr>
+      </p:sp>
+      <p:sp>
+        <p:nvSpPr>
+          <p:cNvPr id="24" name="Text 22"/>
+          <p:cNvSpPr/>
+          <p:nvPr/>
+        </p:nvSpPr>
+        <p:spPr>
+          <a:xfrm>
+            <a:off x="548640" y="3410712"/>
+            <a:ext cx="5029200" cy="457200"/>
+          </a:xfrm>
+          <a:prstGeom prst="rect">
+            <a:avLst/>
+          </a:prstGeom>
+          <a:noFill/>
+          <a:ln/>
+        </p:spPr>
+        <p:txBody>
+          <a:bodyPr wrap="square" lIns="0" tIns="0" rIns="0" bIns="0" rtlCol="0" anchor="ctr"/>
+          <a:lstStyle/>
+          <a:p>
+            <a:pPr algn="l" indent="0" marL="0">
+              <a:buNone/>
+            </a:pPr>
+            <a:r>
+              <a:rPr lang="en-US" sz="1200" b="1" dirty="0">
+                <a:solidFill>
+                  <a:srgbClr val="16202B"/>
+                </a:solidFill>
+                <a:latin typeface="Calibri" pitchFamily="34" charset="0"/>
+                <a:ea typeface="Calibri" pitchFamily="34" charset="-122"/>
+                <a:cs typeface="Calibri" pitchFamily="34" charset="-120"/>
+              </a:rPr>
+              <a:t>See a site you don't supervise</a:t>
+            </a:r>
+            <a:endParaRPr lang="en-US" sz="1200" dirty="0"/>
+          </a:p>
+        </p:txBody>
+      </p:sp>
+      <p:sp>
+        <p:nvSpPr>
+          <p:cNvPr id="25" name="Text 23"/>
+          <p:cNvSpPr/>
+          <p:nvPr/>
+        </p:nvSpPr>
+        <p:spPr>
+          <a:xfrm>
+            <a:off x="5623560" y="3410712"/>
+            <a:ext cx="1463040" cy="457200"/>
+          </a:xfrm>
+          <a:prstGeom prst="rect">
+            <a:avLst/>
+          </a:prstGeom>
+          <a:noFill/>
+          <a:ln/>
+        </p:spPr>
+        <p:txBody>
+          <a:bodyPr wrap="square" lIns="0" tIns="0" rIns="0" bIns="0" rtlCol="0" anchor="ctr"/>
+          <a:lstStyle/>
+          <a:p>
+            <a:pPr algn="ctr" indent="0" marL="0">
+              <a:buNone/>
+            </a:pPr>
+            <a:r>
+              <a:rPr lang="en-US" sz="1200" dirty="0">
+                <a:solidFill>
+                  <a:srgbClr val="A03A3A"/>
+                </a:solidFill>
+                <a:latin typeface="Calibri" pitchFamily="34" charset="0"/>
+                <a:ea typeface="Calibri" pitchFamily="34" charset="-122"/>
+                <a:cs typeface="Calibri" pitchFamily="34" charset="-120"/>
+              </a:rPr>
+              <a:t>No</a:t>
+            </a:r>
+            <a:endParaRPr lang="en-US" sz="1200" dirty="0"/>
+          </a:p>
+        </p:txBody>
+      </p:sp>
+      <p:sp>
+        <p:nvSpPr>
+          <p:cNvPr id="26" name="Text 24"/>
+          <p:cNvSpPr/>
+          <p:nvPr/>
+        </p:nvSpPr>
+        <p:spPr>
+          <a:xfrm>
+            <a:off x="7086600" y="3410712"/>
+            <a:ext cx="1828800" cy="457200"/>
+          </a:xfrm>
+          <a:prstGeom prst="rect">
+            <a:avLst/>
+          </a:prstGeom>
+          <a:noFill/>
+          <a:ln/>
+        </p:spPr>
+        <p:txBody>
+          <a:bodyPr wrap="square" lIns="0" tIns="0" rIns="0" bIns="0" rtlCol="0" anchor="ctr"/>
+          <a:lstStyle/>
+          <a:p>
+            <a:pPr algn="ctr" indent="0" marL="0">
+              <a:buNone/>
+            </a:pPr>
+            <a:r>
+              <a:rPr lang="en-US" sz="1200" dirty="0">
+                <a:solidFill>
+                  <a:srgbClr val="A03A3A"/>
+                </a:solidFill>
+                <a:latin typeface="Calibri" pitchFamily="34" charset="0"/>
+                <a:ea typeface="Calibri" pitchFamily="34" charset="-122"/>
+                <a:cs typeface="Calibri" pitchFamily="34" charset="-120"/>
+              </a:rPr>
+              <a:t>No</a:t>
+            </a:r>
+            <a:endParaRPr lang="en-US" sz="1200" dirty="0"/>
+          </a:p>
+        </p:txBody>
+      </p:sp>
+      <p:sp>
+        <p:nvSpPr>
+          <p:cNvPr id="27" name="Text 25"/>
+          <p:cNvSpPr/>
+          <p:nvPr/>
+        </p:nvSpPr>
+        <p:spPr>
+          <a:xfrm>
+            <a:off x="8915400" y="3410712"/>
+            <a:ext cx="1463040" cy="457200"/>
+          </a:xfrm>
+          <a:prstGeom prst="rect">
+            <a:avLst/>
+          </a:prstGeom>
+          <a:noFill/>
+          <a:ln/>
+        </p:spPr>
+        <p:txBody>
+          <a:bodyPr wrap="square" lIns="0" tIns="0" rIns="0" bIns="0" rtlCol="0" anchor="ctr"/>
+          <a:lstStyle/>
+          <a:p>
+            <a:pPr algn="ctr" indent="0" marL="0">
+              <a:buNone/>
+            </a:pPr>
+            <a:r>
+              <a:rPr lang="en-US" sz="1200" b="1" dirty="0">
+                <a:solidFill>
+                  <a:srgbClr val="1E7A4C"/>
+                </a:solidFill>
+                <a:latin typeface="Calibri" pitchFamily="34" charset="0"/>
+                <a:ea typeface="Calibri" pitchFamily="34" charset="-122"/>
+                <a:cs typeface="Calibri" pitchFamily="34" charset="-120"/>
+              </a:rPr>
+              <a:t>Yes*</a:t>
+            </a:r>
+            <a:endParaRPr lang="en-US" sz="1200" dirty="0"/>
+          </a:p>
+        </p:txBody>
+      </p:sp>
+      <p:sp>
+        <p:nvSpPr>
+          <p:cNvPr id="28" name="Text 26"/>
+          <p:cNvSpPr/>
+          <p:nvPr/>
+        </p:nvSpPr>
+        <p:spPr>
+          <a:xfrm>
+            <a:off x="10378440" y="3410712"/>
+            <a:ext cx="1234440" cy="457200"/>
+          </a:xfrm>
+          <a:prstGeom prst="rect">
+            <a:avLst/>
+          </a:prstGeom>
+          <a:noFill/>
+          <a:ln/>
+        </p:spPr>
+        <p:txBody>
+          <a:bodyPr wrap="square" lIns="0" tIns="0" rIns="0" bIns="0" rtlCol="0" anchor="ctr"/>
+          <a:lstStyle/>
+          <a:p>
+            <a:pPr algn="ctr" indent="0" marL="0">
+              <a:buNone/>
+            </a:pPr>
+            <a:r>
+              <a:rPr lang="en-US" sz="1200" b="1" dirty="0">
+                <a:solidFill>
+                  <a:srgbClr val="1E7A4C"/>
+                </a:solidFill>
+                <a:latin typeface="Calibri" pitchFamily="34" charset="0"/>
+                <a:ea typeface="Calibri" pitchFamily="34" charset="-122"/>
+                <a:cs typeface="Calibri" pitchFamily="34" charset="-120"/>
+              </a:rPr>
+              <a:t>Yes</a:t>
+            </a:r>
+            <a:endParaRPr lang="en-US" sz="1200" dirty="0"/>
+          </a:p>
+        </p:txBody>
+      </p:sp>
+      <p:sp>
+        <p:nvSpPr>
+          <p:cNvPr id="29" name="Shape 27"/>
+          <p:cNvSpPr/>
+          <p:nvPr/>
+        </p:nvSpPr>
+        <p:spPr>
+          <a:xfrm>
+            <a:off x="548640" y="3922776"/>
+            <a:ext cx="11064240" cy="457200"/>
+          </a:xfrm>
+          <a:prstGeom prst="roundRect">
+            <a:avLst>
+              <a:gd name="adj" fmla="val 10000"/>
+            </a:avLst>
+          </a:prstGeom>
+          <a:solidFill>
+            <a:srgbClr val="FFFFFF"/>
+          </a:solidFill>
+          <a:ln w="6350">
+            <a:solidFill>
+              <a:srgbClr val="D9DEE4"/>
+            </a:solidFill>
+            <a:prstDash val="solid"/>
+          </a:ln>
+        </p:spPr>
+      </p:sp>
+      <p:sp>
+        <p:nvSpPr>
+          <p:cNvPr id="30" name="Text 28"/>
+          <p:cNvSpPr/>
+          <p:nvPr/>
+        </p:nvSpPr>
+        <p:spPr>
+          <a:xfrm>
+            <a:off x="548640" y="3922776"/>
+            <a:ext cx="5029200" cy="457200"/>
+          </a:xfrm>
+          <a:prstGeom prst="rect">
+            <a:avLst/>
+          </a:prstGeom>
+          <a:noFill/>
+          <a:ln/>
+        </p:spPr>
+        <p:txBody>
+          <a:bodyPr wrap="square" lIns="0" tIns="0" rIns="0" bIns="0" rtlCol="0" anchor="ctr"/>
+          <a:lstStyle/>
+          <a:p>
+            <a:pPr algn="l" indent="0" marL="0">
+              <a:buNone/>
+            </a:pPr>
+            <a:r>
+              <a:rPr lang="en-US" sz="1200" b="1" dirty="0">
+                <a:solidFill>
+                  <a:srgbClr val="16202B"/>
+                </a:solidFill>
+                <a:latin typeface="Calibri" pitchFamily="34" charset="0"/>
+                <a:ea typeface="Calibri" pitchFamily="34" charset="-122"/>
+                <a:cs typeface="Calibri" pitchFamily="34" charset="-120"/>
+              </a:rPr>
+              <a:t>Approve overtime, corrections and leave</a:t>
+            </a:r>
+            <a:endParaRPr lang="en-US" sz="1200" dirty="0"/>
+          </a:p>
+        </p:txBody>
+      </p:sp>
+      <p:sp>
+        <p:nvSpPr>
+          <p:cNvPr id="31" name="Text 29"/>
+          <p:cNvSpPr/>
+          <p:nvPr/>
+        </p:nvSpPr>
+        <p:spPr>
+          <a:xfrm>
+            <a:off x="5623560" y="3922776"/>
+            <a:ext cx="1463040" cy="457200"/>
+          </a:xfrm>
+          <a:prstGeom prst="rect">
+            <a:avLst/>
+          </a:prstGeom>
+          <a:noFill/>
+          <a:ln/>
+        </p:spPr>
+        <p:txBody>
+          <a:bodyPr wrap="square" lIns="0" tIns="0" rIns="0" bIns="0" rtlCol="0" anchor="ctr"/>
+          <a:lstStyle/>
+          <a:p>
+            <a:pPr algn="ctr" indent="0" marL="0">
+              <a:buNone/>
+            </a:pPr>
+            <a:r>
+              <a:rPr lang="en-US" sz="1200" dirty="0">
+                <a:solidFill>
+                  <a:srgbClr val="A03A3A"/>
+                </a:solidFill>
+                <a:latin typeface="Calibri" pitchFamily="34" charset="0"/>
+                <a:ea typeface="Calibri" pitchFamily="34" charset="-122"/>
+                <a:cs typeface="Calibri" pitchFamily="34" charset="-120"/>
+              </a:rPr>
+              <a:t>No</a:t>
+            </a:r>
+            <a:endParaRPr lang="en-US" sz="1200" dirty="0"/>
+          </a:p>
+        </p:txBody>
+      </p:sp>
+      <p:sp>
+        <p:nvSpPr>
+          <p:cNvPr id="32" name="Text 30"/>
+          <p:cNvSpPr/>
+          <p:nvPr/>
+        </p:nvSpPr>
+        <p:spPr>
+          <a:xfrm>
+            <a:off x="7086600" y="3922776"/>
+            <a:ext cx="1828800" cy="457200"/>
+          </a:xfrm>
+          <a:prstGeom prst="rect">
+            <a:avLst/>
+          </a:prstGeom>
+          <a:noFill/>
+          <a:ln/>
+        </p:spPr>
+        <p:txBody>
+          <a:bodyPr wrap="square" lIns="0" tIns="0" rIns="0" bIns="0" rtlCol="0" anchor="ctr"/>
+          <a:lstStyle/>
+          <a:p>
+            <a:pPr algn="ctr" indent="0" marL="0">
+              <a:buNone/>
+            </a:pPr>
+            <a:r>
+              <a:rPr lang="en-US" sz="1200" b="1" dirty="0">
+                <a:solidFill>
+                  <a:srgbClr val="1E7A4C"/>
+                </a:solidFill>
+                <a:latin typeface="Calibri" pitchFamily="34" charset="0"/>
+                <a:ea typeface="Calibri" pitchFamily="34" charset="-122"/>
+                <a:cs typeface="Calibri" pitchFamily="34" charset="-120"/>
+              </a:rPr>
+              <a:t>Yes</a:t>
+            </a:r>
+            <a:endParaRPr lang="en-US" sz="1200" dirty="0"/>
+          </a:p>
+        </p:txBody>
+      </p:sp>
+      <p:sp>
+        <p:nvSpPr>
+          <p:cNvPr id="33" name="Text 31"/>
+          <p:cNvSpPr/>
+          <p:nvPr/>
+        </p:nvSpPr>
+        <p:spPr>
+          <a:xfrm>
+            <a:off x="8915400" y="3922776"/>
+            <a:ext cx="1463040" cy="457200"/>
+          </a:xfrm>
+          <a:prstGeom prst="rect">
+            <a:avLst/>
+          </a:prstGeom>
+          <a:noFill/>
+          <a:ln/>
+        </p:spPr>
+        <p:txBody>
+          <a:bodyPr wrap="square" lIns="0" tIns="0" rIns="0" bIns="0" rtlCol="0" anchor="ctr"/>
+          <a:lstStyle/>
+          <a:p>
+            <a:pPr algn="ctr" indent="0" marL="0">
+              <a:buNone/>
+            </a:pPr>
+            <a:r>
+              <a:rPr lang="en-US" sz="1200" b="1" dirty="0">
+                <a:solidFill>
+                  <a:srgbClr val="1E7A4C"/>
+                </a:solidFill>
+                <a:latin typeface="Calibri" pitchFamily="34" charset="0"/>
+                <a:ea typeface="Calibri" pitchFamily="34" charset="-122"/>
+                <a:cs typeface="Calibri" pitchFamily="34" charset="-120"/>
+              </a:rPr>
+              <a:t>Yes</a:t>
+            </a:r>
+            <a:endParaRPr lang="en-US" sz="1200" dirty="0"/>
+          </a:p>
+        </p:txBody>
+      </p:sp>
+      <p:sp>
+        <p:nvSpPr>
+          <p:cNvPr id="34" name="Text 32"/>
+          <p:cNvSpPr/>
+          <p:nvPr/>
+        </p:nvSpPr>
+        <p:spPr>
+          <a:xfrm>
+            <a:off x="10378440" y="3922776"/>
+            <a:ext cx="1234440" cy="457200"/>
+          </a:xfrm>
+          <a:prstGeom prst="rect">
+            <a:avLst/>
+          </a:prstGeom>
+          <a:noFill/>
+          <a:ln/>
+        </p:spPr>
+        <p:txBody>
+          <a:bodyPr wrap="square" lIns="0" tIns="0" rIns="0" bIns="0" rtlCol="0" anchor="ctr"/>
+          <a:lstStyle/>
+          <a:p>
+            <a:pPr algn="ctr" indent="0" marL="0">
+              <a:buNone/>
+            </a:pPr>
+            <a:r>
+              <a:rPr lang="en-US" sz="1200" b="1" dirty="0">
+                <a:solidFill>
+                  <a:srgbClr val="1E7A4C"/>
+                </a:solidFill>
+                <a:latin typeface="Calibri" pitchFamily="34" charset="0"/>
+                <a:ea typeface="Calibri" pitchFamily="34" charset="-122"/>
+                <a:cs typeface="Calibri" pitchFamily="34" charset="-120"/>
+              </a:rPr>
+              <a:t>Yes</a:t>
+            </a:r>
+            <a:endParaRPr lang="en-US" sz="1200" dirty="0"/>
+          </a:p>
+        </p:txBody>
+      </p:sp>
+      <p:sp>
+        <p:nvSpPr>
+          <p:cNvPr id="35" name="Shape 33"/>
+          <p:cNvSpPr/>
+          <p:nvPr/>
+        </p:nvSpPr>
+        <p:spPr>
+          <a:xfrm>
+            <a:off x="548640" y="4434840"/>
+            <a:ext cx="11064240" cy="457200"/>
+          </a:xfrm>
+          <a:prstGeom prst="roundRect">
+            <a:avLst>
+              <a:gd name="adj" fmla="val 10000"/>
+            </a:avLst>
+          </a:prstGeom>
+          <a:solidFill>
+            <a:srgbClr val="F3F5F7"/>
+          </a:solidFill>
+          <a:ln w="6350">
+            <a:solidFill>
+              <a:srgbClr val="D9DEE4"/>
+            </a:solidFill>
+            <a:prstDash val="solid"/>
+          </a:ln>
+        </p:spPr>
+      </p:sp>
+      <p:sp>
+        <p:nvSpPr>
+          <p:cNvPr id="36" name="Text 34"/>
+          <p:cNvSpPr/>
+          <p:nvPr/>
+        </p:nvSpPr>
+        <p:spPr>
+          <a:xfrm>
+            <a:off x="548640" y="4434840"/>
+            <a:ext cx="5029200" cy="457200"/>
+          </a:xfrm>
+          <a:prstGeom prst="rect">
+            <a:avLst/>
+          </a:prstGeom>
+          <a:noFill/>
+          <a:ln/>
+        </p:spPr>
+        <p:txBody>
+          <a:bodyPr wrap="square" lIns="0" tIns="0" rIns="0" bIns="0" rtlCol="0" anchor="ctr"/>
+          <a:lstStyle/>
+          <a:p>
+            <a:pPr algn="l" indent="0" marL="0">
+              <a:buNone/>
+            </a:pPr>
+            <a:r>
+              <a:rPr lang="en-US" sz="1200" b="1" dirty="0">
+                <a:solidFill>
+                  <a:srgbClr val="16202B"/>
+                </a:solidFill>
+                <a:latin typeface="Calibri" pitchFamily="34" charset="0"/>
+                <a:ea typeface="Calibri" pitchFamily="34" charset="-122"/>
+                <a:cs typeface="Calibri" pitchFamily="34" charset="-120"/>
+              </a:rPr>
+              <a:t>Approve your OWN request</a:t>
+            </a:r>
+            <a:endParaRPr lang="en-US" sz="1200" dirty="0"/>
+          </a:p>
+        </p:txBody>
+      </p:sp>
+      <p:sp>
+        <p:nvSpPr>
+          <p:cNvPr id="37" name="Text 35"/>
+          <p:cNvSpPr/>
+          <p:nvPr/>
+        </p:nvSpPr>
+        <p:spPr>
+          <a:xfrm>
+            <a:off x="5623560" y="4434840"/>
+            <a:ext cx="1463040" cy="457200"/>
+          </a:xfrm>
+          <a:prstGeom prst="rect">
+            <a:avLst/>
+          </a:prstGeom>
+          <a:noFill/>
+          <a:ln/>
+        </p:spPr>
+        <p:txBody>
+          <a:bodyPr wrap="square" lIns="0" tIns="0" rIns="0" bIns="0" rtlCol="0" anchor="ctr"/>
+          <a:lstStyle/>
+          <a:p>
+            <a:pPr algn="ctr" indent="0" marL="0">
+              <a:buNone/>
+            </a:pPr>
+            <a:r>
+              <a:rPr lang="en-US" sz="1200" dirty="0">
+                <a:solidFill>
+                  <a:srgbClr val="A03A3A"/>
+                </a:solidFill>
+                <a:latin typeface="Calibri" pitchFamily="34" charset="0"/>
+                <a:ea typeface="Calibri" pitchFamily="34" charset="-122"/>
+                <a:cs typeface="Calibri" pitchFamily="34" charset="-120"/>
+              </a:rPr>
+              <a:t>No</a:t>
+            </a:r>
+            <a:endParaRPr lang="en-US" sz="1200" dirty="0"/>
+          </a:p>
+        </p:txBody>
+      </p:sp>
+      <p:sp>
+        <p:nvSpPr>
+          <p:cNvPr id="38" name="Text 36"/>
+          <p:cNvSpPr/>
+          <p:nvPr/>
+        </p:nvSpPr>
+        <p:spPr>
+          <a:xfrm>
+            <a:off x="7086600" y="4434840"/>
+            <a:ext cx="1828800" cy="457200"/>
+          </a:xfrm>
+          <a:prstGeom prst="rect">
+            <a:avLst/>
+          </a:prstGeom>
+          <a:noFill/>
+          <a:ln/>
+        </p:spPr>
+        <p:txBody>
+          <a:bodyPr wrap="square" lIns="0" tIns="0" rIns="0" bIns="0" rtlCol="0" anchor="ctr"/>
+          <a:lstStyle/>
+          <a:p>
+            <a:pPr algn="ctr" indent="0" marL="0">
+              <a:buNone/>
+            </a:pPr>
+            <a:r>
+              <a:rPr lang="en-US" sz="1200" dirty="0">
+                <a:solidFill>
+                  <a:srgbClr val="A03A3A"/>
+                </a:solidFill>
+                <a:latin typeface="Calibri" pitchFamily="34" charset="0"/>
+                <a:ea typeface="Calibri" pitchFamily="34" charset="-122"/>
+                <a:cs typeface="Calibri" pitchFamily="34" charset="-120"/>
+              </a:rPr>
+              <a:t>No</a:t>
+            </a:r>
+            <a:endParaRPr lang="en-US" sz="1200" dirty="0"/>
+          </a:p>
+        </p:txBody>
+      </p:sp>
+      <p:sp>
+        <p:nvSpPr>
+          <p:cNvPr id="39" name="Text 37"/>
+          <p:cNvSpPr/>
+          <p:nvPr/>
+        </p:nvSpPr>
+        <p:spPr>
+          <a:xfrm>
+            <a:off x="8915400" y="4434840"/>
+            <a:ext cx="1463040" cy="457200"/>
+          </a:xfrm>
+          <a:prstGeom prst="rect">
+            <a:avLst/>
+          </a:prstGeom>
+          <a:noFill/>
+          <a:ln/>
+        </p:spPr>
+        <p:txBody>
+          <a:bodyPr wrap="square" lIns="0" tIns="0" rIns="0" bIns="0" rtlCol="0" anchor="ctr"/>
+          <a:lstStyle/>
+          <a:p>
+            <a:pPr algn="ctr" indent="0" marL="0">
+              <a:buNone/>
+            </a:pPr>
+            <a:r>
+              <a:rPr lang="en-US" sz="1200" dirty="0">
+                <a:solidFill>
+                  <a:srgbClr val="A03A3A"/>
+                </a:solidFill>
+                <a:latin typeface="Calibri" pitchFamily="34" charset="0"/>
+                <a:ea typeface="Calibri" pitchFamily="34" charset="-122"/>
+                <a:cs typeface="Calibri" pitchFamily="34" charset="-120"/>
+              </a:rPr>
+              <a:t>No</a:t>
+            </a:r>
+            <a:endParaRPr lang="en-US" sz="1200" dirty="0"/>
+          </a:p>
+        </p:txBody>
+      </p:sp>
+      <p:sp>
+        <p:nvSpPr>
+          <p:cNvPr id="40" name="Text 38"/>
+          <p:cNvSpPr/>
+          <p:nvPr/>
+        </p:nvSpPr>
+        <p:spPr>
+          <a:xfrm>
+            <a:off x="10378440" y="4434840"/>
+            <a:ext cx="1234440" cy="457200"/>
+          </a:xfrm>
+          <a:prstGeom prst="rect">
+            <a:avLst/>
+          </a:prstGeom>
+          <a:noFill/>
+          <a:ln/>
+        </p:spPr>
+        <p:txBody>
+          <a:bodyPr wrap="square" lIns="0" tIns="0" rIns="0" bIns="0" rtlCol="0" anchor="ctr"/>
+          <a:lstStyle/>
+          <a:p>
+            <a:pPr algn="ctr" indent="0" marL="0">
+              <a:buNone/>
+            </a:pPr>
+            <a:r>
+              <a:rPr lang="en-US" sz="1200" dirty="0">
+                <a:solidFill>
+                  <a:srgbClr val="A03A3A"/>
+                </a:solidFill>
+                <a:latin typeface="Calibri" pitchFamily="34" charset="0"/>
+                <a:ea typeface="Calibri" pitchFamily="34" charset="-122"/>
+                <a:cs typeface="Calibri" pitchFamily="34" charset="-120"/>
+              </a:rPr>
+              <a:t>No</a:t>
+            </a:r>
+            <a:endParaRPr lang="en-US" sz="1200" dirty="0"/>
+          </a:p>
+        </p:txBody>
+      </p:sp>
+      <p:sp>
+        <p:nvSpPr>
+          <p:cNvPr id="41" name="Shape 39"/>
+          <p:cNvSpPr/>
+          <p:nvPr/>
+        </p:nvSpPr>
+        <p:spPr>
+          <a:xfrm>
+            <a:off x="548640" y="4946904"/>
+            <a:ext cx="11064240" cy="457200"/>
+          </a:xfrm>
+          <a:prstGeom prst="roundRect">
+            <a:avLst>
+              <a:gd name="adj" fmla="val 10000"/>
+            </a:avLst>
+          </a:prstGeom>
+          <a:solidFill>
+            <a:srgbClr val="FFFFFF"/>
+          </a:solidFill>
+          <a:ln w="6350">
+            <a:solidFill>
+              <a:srgbClr val="D9DEE4"/>
+            </a:solidFill>
+            <a:prstDash val="solid"/>
+          </a:ln>
+        </p:spPr>
+      </p:sp>
+      <p:sp>
+        <p:nvSpPr>
+          <p:cNvPr id="42" name="Text 40"/>
+          <p:cNvSpPr/>
+          <p:nvPr/>
+        </p:nvSpPr>
+        <p:spPr>
+          <a:xfrm>
+            <a:off x="548640" y="4946904"/>
+            <a:ext cx="5029200" cy="457200"/>
+          </a:xfrm>
+          <a:prstGeom prst="rect">
+            <a:avLst/>
+          </a:prstGeom>
+          <a:noFill/>
+          <a:ln/>
+        </p:spPr>
+        <p:txBody>
+          <a:bodyPr wrap="square" lIns="0" tIns="0" rIns="0" bIns="0" rtlCol="0" anchor="ctr"/>
+          <a:lstStyle/>
+          <a:p>
+            <a:pPr algn="l" indent="0" marL="0">
+              <a:buNone/>
+            </a:pPr>
+            <a:r>
+              <a:rPr lang="en-US" sz="1200" b="1" dirty="0">
+                <a:solidFill>
+                  <a:srgbClr val="16202B"/>
+                </a:solidFill>
+                <a:latin typeface="Calibri" pitchFamily="34" charset="0"/>
+                <a:ea typeface="Calibri" pitchFamily="34" charset="-122"/>
+                <a:cs typeface="Calibri" pitchFamily="34" charset="-120"/>
+              </a:rPr>
+              <a:t>Plan the roster, manage employees</a:t>
+            </a:r>
+            <a:endParaRPr lang="en-US" sz="1200" dirty="0"/>
+          </a:p>
+        </p:txBody>
+      </p:sp>
+      <p:sp>
+        <p:nvSpPr>
+          <p:cNvPr id="43" name="Text 41"/>
+          <p:cNvSpPr/>
+          <p:nvPr/>
+        </p:nvSpPr>
+        <p:spPr>
+          <a:xfrm>
+            <a:off x="5623560" y="4946904"/>
+            <a:ext cx="1463040" cy="457200"/>
+          </a:xfrm>
+          <a:prstGeom prst="rect">
+            <a:avLst/>
+          </a:prstGeom>
+          <a:noFill/>
+          <a:ln/>
+        </p:spPr>
+        <p:txBody>
+          <a:bodyPr wrap="square" lIns="0" tIns="0" rIns="0" bIns="0" rtlCol="0" anchor="ctr"/>
+          <a:lstStyle/>
+          <a:p>
+            <a:pPr algn="ctr" indent="0" marL="0">
+              <a:buNone/>
+            </a:pPr>
+            <a:r>
+              <a:rPr lang="en-US" sz="1200" dirty="0">
+                <a:solidFill>
+                  <a:srgbClr val="A03A3A"/>
+                </a:solidFill>
+                <a:latin typeface="Calibri" pitchFamily="34" charset="0"/>
+                <a:ea typeface="Calibri" pitchFamily="34" charset="-122"/>
+                <a:cs typeface="Calibri" pitchFamily="34" charset="-120"/>
+              </a:rPr>
+              <a:t>No</a:t>
+            </a:r>
+            <a:endParaRPr lang="en-US" sz="1200" dirty="0"/>
+          </a:p>
+        </p:txBody>
+      </p:sp>
+      <p:sp>
+        <p:nvSpPr>
+          <p:cNvPr id="44" name="Text 42"/>
+          <p:cNvSpPr/>
+          <p:nvPr/>
+        </p:nvSpPr>
+        <p:spPr>
+          <a:xfrm>
+            <a:off x="7086600" y="4946904"/>
+            <a:ext cx="1828800" cy="457200"/>
+          </a:xfrm>
+          <a:prstGeom prst="rect">
+            <a:avLst/>
+          </a:prstGeom>
+          <a:noFill/>
+          <a:ln/>
+        </p:spPr>
+        <p:txBody>
+          <a:bodyPr wrap="square" lIns="0" tIns="0" rIns="0" bIns="0" rtlCol="0" anchor="ctr"/>
+          <a:lstStyle/>
+          <a:p>
+            <a:pPr algn="ctr" indent="0" marL="0">
+              <a:buNone/>
+            </a:pPr>
+            <a:r>
+              <a:rPr lang="en-US" sz="1200" b="1" dirty="0">
+                <a:solidFill>
+                  <a:srgbClr val="1E7A4C"/>
+                </a:solidFill>
+                <a:latin typeface="Calibri" pitchFamily="34" charset="0"/>
+                <a:ea typeface="Calibri" pitchFamily="34" charset="-122"/>
+                <a:cs typeface="Calibri" pitchFamily="34" charset="-120"/>
+              </a:rPr>
+              <a:t>Yes</a:t>
+            </a:r>
+            <a:endParaRPr lang="en-US" sz="1200" dirty="0"/>
+          </a:p>
+        </p:txBody>
+      </p:sp>
+      <p:sp>
+        <p:nvSpPr>
+          <p:cNvPr id="45" name="Text 43"/>
+          <p:cNvSpPr/>
+          <p:nvPr/>
+        </p:nvSpPr>
+        <p:spPr>
+          <a:xfrm>
+            <a:off x="8915400" y="4946904"/>
+            <a:ext cx="1463040" cy="457200"/>
+          </a:xfrm>
+          <a:prstGeom prst="rect">
+            <a:avLst/>
+          </a:prstGeom>
+          <a:noFill/>
+          <a:ln/>
+        </p:spPr>
+        <p:txBody>
+          <a:bodyPr wrap="square" lIns="0" tIns="0" rIns="0" bIns="0" rtlCol="0" anchor="ctr"/>
+          <a:lstStyle/>
+          <a:p>
+            <a:pPr algn="ctr" indent="0" marL="0">
+              <a:buNone/>
+            </a:pPr>
+            <a:r>
+              <a:rPr lang="en-US" sz="1200" b="1" dirty="0">
+                <a:solidFill>
+                  <a:srgbClr val="1E7A4C"/>
+                </a:solidFill>
+                <a:latin typeface="Calibri" pitchFamily="34" charset="0"/>
+                <a:ea typeface="Calibri" pitchFamily="34" charset="-122"/>
+                <a:cs typeface="Calibri" pitchFamily="34" charset="-120"/>
+              </a:rPr>
+              <a:t>Yes</a:t>
+            </a:r>
+            <a:endParaRPr lang="en-US" sz="1200" dirty="0"/>
+          </a:p>
+        </p:txBody>
+      </p:sp>
+      <p:sp>
+        <p:nvSpPr>
+          <p:cNvPr id="46" name="Text 44"/>
+          <p:cNvSpPr/>
+          <p:nvPr/>
+        </p:nvSpPr>
+        <p:spPr>
+          <a:xfrm>
+            <a:off x="10378440" y="4946904"/>
+            <a:ext cx="1234440" cy="457200"/>
+          </a:xfrm>
+          <a:prstGeom prst="rect">
+            <a:avLst/>
+          </a:prstGeom>
+          <a:noFill/>
+          <a:ln/>
+        </p:spPr>
+        <p:txBody>
+          <a:bodyPr wrap="square" lIns="0" tIns="0" rIns="0" bIns="0" rtlCol="0" anchor="ctr"/>
+          <a:lstStyle/>
+          <a:p>
+            <a:pPr algn="ctr" indent="0" marL="0">
+              <a:buNone/>
+            </a:pPr>
+            <a:r>
+              <a:rPr lang="en-US" sz="1200" b="1" dirty="0">
+                <a:solidFill>
+                  <a:srgbClr val="1E7A4C"/>
+                </a:solidFill>
+                <a:latin typeface="Calibri" pitchFamily="34" charset="0"/>
+                <a:ea typeface="Calibri" pitchFamily="34" charset="-122"/>
+                <a:cs typeface="Calibri" pitchFamily="34" charset="-120"/>
+              </a:rPr>
+              <a:t>Yes</a:t>
+            </a:r>
+            <a:endParaRPr lang="en-US" sz="1200" dirty="0"/>
+          </a:p>
+        </p:txBody>
+      </p:sp>
+      <p:sp>
+        <p:nvSpPr>
+          <p:cNvPr id="47" name="Shape 45"/>
+          <p:cNvSpPr/>
+          <p:nvPr/>
+        </p:nvSpPr>
+        <p:spPr>
+          <a:xfrm>
+            <a:off x="548640" y="5458968"/>
+            <a:ext cx="11064240" cy="457200"/>
+          </a:xfrm>
+          <a:prstGeom prst="roundRect">
+            <a:avLst>
+              <a:gd name="adj" fmla="val 10000"/>
+            </a:avLst>
+          </a:prstGeom>
+          <a:solidFill>
+            <a:srgbClr val="F3F5F7"/>
+          </a:solidFill>
+          <a:ln w="6350">
+            <a:solidFill>
+              <a:srgbClr val="D9DEE4"/>
+            </a:solidFill>
+            <a:prstDash val="solid"/>
+          </a:ln>
+        </p:spPr>
+      </p:sp>
+      <p:sp>
+        <p:nvSpPr>
+          <p:cNvPr id="48" name="Text 46"/>
+          <p:cNvSpPr/>
+          <p:nvPr/>
+        </p:nvSpPr>
+        <p:spPr>
+          <a:xfrm>
+            <a:off x="548640" y="5458968"/>
+            <a:ext cx="5029200" cy="457200"/>
+          </a:xfrm>
+          <a:prstGeom prst="rect">
+            <a:avLst/>
+          </a:prstGeom>
+          <a:noFill/>
+          <a:ln/>
+        </p:spPr>
+        <p:txBody>
+          <a:bodyPr wrap="square" lIns="0" tIns="0" rIns="0" bIns="0" rtlCol="0" anchor="ctr"/>
+          <a:lstStyle/>
+          <a:p>
+            <a:pPr algn="l" indent="0" marL="0">
+              <a:buNone/>
+            </a:pPr>
+            <a:r>
+              <a:rPr lang="en-US" sz="1200" b="1" dirty="0">
+                <a:solidFill>
+                  <a:srgbClr val="16202B"/>
+                </a:solidFill>
+                <a:latin typeface="Calibri" pitchFamily="34" charset="0"/>
+                <a:ea typeface="Calibri" pitchFamily="34" charset="-122"/>
+                <a:cs typeface="Calibri" pitchFamily="34" charset="-120"/>
+              </a:rPr>
+              <a:t>Monthly summary and Excel export</a:t>
+            </a:r>
+            <a:endParaRPr lang="en-US" sz="1200" dirty="0"/>
+          </a:p>
+        </p:txBody>
+      </p:sp>
+      <p:sp>
+        <p:nvSpPr>
+          <p:cNvPr id="49" name="Text 47"/>
+          <p:cNvSpPr/>
+          <p:nvPr/>
+        </p:nvSpPr>
+        <p:spPr>
+          <a:xfrm>
+            <a:off x="5623560" y="5458968"/>
+            <a:ext cx="1463040" cy="457200"/>
+          </a:xfrm>
+          <a:prstGeom prst="rect">
+            <a:avLst/>
+          </a:prstGeom>
+          <a:noFill/>
+          <a:ln/>
+        </p:spPr>
+        <p:txBody>
+          <a:bodyPr wrap="square" lIns="0" tIns="0" rIns="0" bIns="0" rtlCol="0" anchor="ctr"/>
+          <a:lstStyle/>
+          <a:p>
+            <a:pPr algn="ctr" indent="0" marL="0">
+              <a:buNone/>
+            </a:pPr>
+            <a:r>
+              <a:rPr lang="en-US" sz="1200" dirty="0">
+                <a:solidFill>
+                  <a:srgbClr val="A03A3A"/>
+                </a:solidFill>
+                <a:latin typeface="Calibri" pitchFamily="34" charset="0"/>
+                <a:ea typeface="Calibri" pitchFamily="34" charset="-122"/>
+                <a:cs typeface="Calibri" pitchFamily="34" charset="-120"/>
+              </a:rPr>
+              <a:t>No</a:t>
+            </a:r>
+            <a:endParaRPr lang="en-US" sz="1200" dirty="0"/>
+          </a:p>
+        </p:txBody>
+      </p:sp>
+      <p:sp>
+        <p:nvSpPr>
+          <p:cNvPr id="50" name="Text 48"/>
+          <p:cNvSpPr/>
+          <p:nvPr/>
+        </p:nvSpPr>
+        <p:spPr>
+          <a:xfrm>
+            <a:off x="7086600" y="5458968"/>
+            <a:ext cx="1828800" cy="457200"/>
+          </a:xfrm>
+          <a:prstGeom prst="rect">
+            <a:avLst/>
+          </a:prstGeom>
+          <a:noFill/>
+          <a:ln/>
+        </p:spPr>
+        <p:txBody>
+          <a:bodyPr wrap="square" lIns="0" tIns="0" rIns="0" bIns="0" rtlCol="0" anchor="ctr"/>
+          <a:lstStyle/>
+          <a:p>
+            <a:pPr algn="ctr" indent="0" marL="0">
+              <a:buNone/>
+            </a:pPr>
+            <a:r>
+              <a:rPr lang="en-US" sz="1200" b="1" dirty="0">
+                <a:solidFill>
+                  <a:srgbClr val="1E7A4C"/>
+                </a:solidFill>
+                <a:latin typeface="Calibri" pitchFamily="34" charset="0"/>
+                <a:ea typeface="Calibri" pitchFamily="34" charset="-122"/>
+                <a:cs typeface="Calibri" pitchFamily="34" charset="-120"/>
+              </a:rPr>
+              <a:t>Yes</a:t>
+            </a:r>
+            <a:endParaRPr lang="en-US" sz="1200" dirty="0"/>
+          </a:p>
+        </p:txBody>
+      </p:sp>
+      <p:sp>
+        <p:nvSpPr>
+          <p:cNvPr id="51" name="Text 49"/>
+          <p:cNvSpPr/>
+          <p:nvPr/>
+        </p:nvSpPr>
+        <p:spPr>
+          <a:xfrm>
+            <a:off x="8915400" y="5458968"/>
+            <a:ext cx="1463040" cy="457200"/>
+          </a:xfrm>
+          <a:prstGeom prst="rect">
+            <a:avLst/>
+          </a:prstGeom>
+          <a:noFill/>
+          <a:ln/>
+        </p:spPr>
+        <p:txBody>
+          <a:bodyPr wrap="square" lIns="0" tIns="0" rIns="0" bIns="0" rtlCol="0" anchor="ctr"/>
+          <a:lstStyle/>
+          <a:p>
+            <a:pPr algn="ctr" indent="0" marL="0">
+              <a:buNone/>
+            </a:pPr>
+            <a:r>
+              <a:rPr lang="en-US" sz="1200" b="1" dirty="0">
+                <a:solidFill>
+                  <a:srgbClr val="1E7A4C"/>
+                </a:solidFill>
+                <a:latin typeface="Calibri" pitchFamily="34" charset="0"/>
+                <a:ea typeface="Calibri" pitchFamily="34" charset="-122"/>
+                <a:cs typeface="Calibri" pitchFamily="34" charset="-120"/>
+              </a:rPr>
+              <a:t>Yes</a:t>
+            </a:r>
+            <a:endParaRPr lang="en-US" sz="1200" dirty="0"/>
+          </a:p>
+        </p:txBody>
+      </p:sp>
+      <p:sp>
+        <p:nvSpPr>
+          <p:cNvPr id="52" name="Text 50"/>
+          <p:cNvSpPr/>
+          <p:nvPr/>
+        </p:nvSpPr>
+        <p:spPr>
+          <a:xfrm>
+            <a:off x="10378440" y="5458968"/>
+            <a:ext cx="1234440" cy="457200"/>
+          </a:xfrm>
+          <a:prstGeom prst="rect">
+            <a:avLst/>
+          </a:prstGeom>
+          <a:noFill/>
+          <a:ln/>
+        </p:spPr>
+        <p:txBody>
+          <a:bodyPr wrap="square" lIns="0" tIns="0" rIns="0" bIns="0" rtlCol="0" anchor="ctr"/>
+          <a:lstStyle/>
+          <a:p>
+            <a:pPr algn="ctr" indent="0" marL="0">
+              <a:buNone/>
+            </a:pPr>
+            <a:r>
+              <a:rPr lang="en-US" sz="1200" b="1" dirty="0">
+                <a:solidFill>
+                  <a:srgbClr val="1E7A4C"/>
+                </a:solidFill>
+                <a:latin typeface="Calibri" pitchFamily="34" charset="0"/>
+                <a:ea typeface="Calibri" pitchFamily="34" charset="-122"/>
+                <a:cs typeface="Calibri" pitchFamily="34" charset="-120"/>
+              </a:rPr>
+              <a:t>Yes</a:t>
+            </a:r>
+            <a:endParaRPr lang="en-US" sz="1200" dirty="0"/>
+          </a:p>
+        </p:txBody>
+      </p:sp>
+      <p:sp>
+        <p:nvSpPr>
+          <p:cNvPr id="53" name="Shape 51"/>
+          <p:cNvSpPr/>
+          <p:nvPr/>
+        </p:nvSpPr>
+        <p:spPr>
+          <a:xfrm>
+            <a:off x="548640" y="5971032"/>
+            <a:ext cx="11064240" cy="457200"/>
+          </a:xfrm>
+          <a:prstGeom prst="roundRect">
+            <a:avLst>
+              <a:gd name="adj" fmla="val 10000"/>
+            </a:avLst>
+          </a:prstGeom>
+          <a:solidFill>
+            <a:srgbClr val="FFFFFF"/>
+          </a:solidFill>
+          <a:ln w="6350">
+            <a:solidFill>
+              <a:srgbClr val="D9DEE4"/>
+            </a:solidFill>
+            <a:prstDash val="solid"/>
+          </a:ln>
+        </p:spPr>
+      </p:sp>
+      <p:sp>
+        <p:nvSpPr>
+          <p:cNvPr id="54" name="Text 52"/>
+          <p:cNvSpPr/>
+          <p:nvPr/>
+        </p:nvSpPr>
+        <p:spPr>
+          <a:xfrm>
+            <a:off x="548640" y="5971032"/>
+            <a:ext cx="5029200" cy="457200"/>
+          </a:xfrm>
+          <a:prstGeom prst="rect">
+            <a:avLst/>
+          </a:prstGeom>
+          <a:noFill/>
+          <a:ln/>
+        </p:spPr>
+        <p:txBody>
+          <a:bodyPr wrap="square" lIns="0" tIns="0" rIns="0" bIns="0" rtlCol="0" anchor="ctr"/>
+          <a:lstStyle/>
+          <a:p>
+            <a:pPr algn="l" indent="0" marL="0">
+              <a:buNone/>
+            </a:pPr>
+            <a:r>
+              <a:rPr lang="en-US" sz="1200" b="1" dirty="0">
+                <a:solidFill>
+                  <a:srgbClr val="16202B"/>
+                </a:solidFill>
+                <a:latin typeface="Calibri" pitchFamily="34" charset="0"/>
+                <a:ea typeface="Calibri" pitchFamily="34" charset="-122"/>
+                <a:cs typeface="Calibri" pitchFamily="34" charset="-120"/>
+              </a:rPr>
+              <a:t>Shifts, sites, leave types, attendance rules</a:t>
+            </a:r>
+            <a:endParaRPr lang="en-US" sz="1200" dirty="0"/>
+          </a:p>
+        </p:txBody>
+      </p:sp>
+      <p:sp>
+        <p:nvSpPr>
+          <p:cNvPr id="55" name="Text 53"/>
+          <p:cNvSpPr/>
+          <p:nvPr/>
+        </p:nvSpPr>
+        <p:spPr>
+          <a:xfrm>
+            <a:off x="5623560" y="5971032"/>
+            <a:ext cx="1463040" cy="457200"/>
+          </a:xfrm>
+          <a:prstGeom prst="rect">
+            <a:avLst/>
+          </a:prstGeom>
+          <a:noFill/>
+          <a:ln/>
+        </p:spPr>
+        <p:txBody>
+          <a:bodyPr wrap="square" lIns="0" tIns="0" rIns="0" bIns="0" rtlCol="0" anchor="ctr"/>
+          <a:lstStyle/>
+          <a:p>
+            <a:pPr algn="ctr" indent="0" marL="0">
+              <a:buNone/>
+            </a:pPr>
+            <a:r>
+              <a:rPr lang="en-US" sz="1200" dirty="0">
+                <a:solidFill>
+                  <a:srgbClr val="A03A3A"/>
+                </a:solidFill>
+                <a:latin typeface="Calibri" pitchFamily="34" charset="0"/>
+                <a:ea typeface="Calibri" pitchFamily="34" charset="-122"/>
+                <a:cs typeface="Calibri" pitchFamily="34" charset="-120"/>
+              </a:rPr>
+              <a:t>No</a:t>
+            </a:r>
+            <a:endParaRPr lang="en-US" sz="1200" dirty="0"/>
+          </a:p>
+        </p:txBody>
+      </p:sp>
+      <p:sp>
+        <p:nvSpPr>
+          <p:cNvPr id="56" name="Text 54"/>
+          <p:cNvSpPr/>
+          <p:nvPr/>
+        </p:nvSpPr>
+        <p:spPr>
+          <a:xfrm>
+            <a:off x="7086600" y="5971032"/>
+            <a:ext cx="1828800" cy="457200"/>
+          </a:xfrm>
+          <a:prstGeom prst="rect">
+            <a:avLst/>
+          </a:prstGeom>
+          <a:noFill/>
+          <a:ln/>
+        </p:spPr>
+        <p:txBody>
+          <a:bodyPr wrap="square" lIns="0" tIns="0" rIns="0" bIns="0" rtlCol="0" anchor="ctr"/>
+          <a:lstStyle/>
+          <a:p>
+            <a:pPr algn="ctr" indent="0" marL="0">
+              <a:buNone/>
+            </a:pPr>
+            <a:r>
+              <a:rPr lang="en-US" sz="1200" dirty="0">
+                <a:solidFill>
+                  <a:srgbClr val="A03A3A"/>
+                </a:solidFill>
+                <a:latin typeface="Calibri" pitchFamily="34" charset="0"/>
+                <a:ea typeface="Calibri" pitchFamily="34" charset="-122"/>
+                <a:cs typeface="Calibri" pitchFamily="34" charset="-120"/>
+              </a:rPr>
+              <a:t>No</a:t>
+            </a:r>
+            <a:endParaRPr lang="en-US" sz="1200" dirty="0"/>
+          </a:p>
+        </p:txBody>
+      </p:sp>
+      <p:sp>
+        <p:nvSpPr>
+          <p:cNvPr id="57" name="Text 55"/>
+          <p:cNvSpPr/>
+          <p:nvPr/>
+        </p:nvSpPr>
+        <p:spPr>
+          <a:xfrm>
+            <a:off x="8915400" y="5971032"/>
+            <a:ext cx="1463040" cy="457200"/>
+          </a:xfrm>
+          <a:prstGeom prst="rect">
+            <a:avLst/>
+          </a:prstGeom>
+          <a:noFill/>
+          <a:ln/>
+        </p:spPr>
+        <p:txBody>
+          <a:bodyPr wrap="square" lIns="0" tIns="0" rIns="0" bIns="0" rtlCol="0" anchor="ctr"/>
+          <a:lstStyle/>
+          <a:p>
+            <a:pPr algn="ctr" indent="0" marL="0">
+              <a:buNone/>
+            </a:pPr>
+            <a:r>
+              <a:rPr lang="en-US" sz="1200" dirty="0">
+                <a:solidFill>
+                  <a:srgbClr val="A03A3A"/>
+                </a:solidFill>
+                <a:latin typeface="Calibri" pitchFamily="34" charset="0"/>
+                <a:ea typeface="Calibri" pitchFamily="34" charset="-122"/>
+                <a:cs typeface="Calibri" pitchFamily="34" charset="-120"/>
+              </a:rPr>
+              <a:t>No</a:t>
+            </a:r>
+            <a:endParaRPr lang="en-US" sz="1200" dirty="0"/>
+          </a:p>
+        </p:txBody>
+      </p:sp>
+      <p:sp>
+        <p:nvSpPr>
+          <p:cNvPr id="58" name="Text 56"/>
+          <p:cNvSpPr/>
+          <p:nvPr/>
+        </p:nvSpPr>
+        <p:spPr>
+          <a:xfrm>
+            <a:off x="10378440" y="5971032"/>
+            <a:ext cx="1234440" cy="457200"/>
+          </a:xfrm>
+          <a:prstGeom prst="rect">
+            <a:avLst/>
+          </a:prstGeom>
+          <a:noFill/>
+          <a:ln/>
+        </p:spPr>
+        <p:txBody>
+          <a:bodyPr wrap="square" lIns="0" tIns="0" rIns="0" bIns="0" rtlCol="0" anchor="ctr"/>
+          <a:lstStyle/>
+          <a:p>
+            <a:pPr algn="ctr" indent="0" marL="0">
+              <a:buNone/>
+            </a:pPr>
+            <a:r>
+              <a:rPr lang="en-US" sz="1200" b="1" dirty="0">
+                <a:solidFill>
+                  <a:srgbClr val="1E7A4C"/>
+                </a:solidFill>
+                <a:latin typeface="Calibri" pitchFamily="34" charset="0"/>
+                <a:ea typeface="Calibri" pitchFamily="34" charset="-122"/>
+                <a:cs typeface="Calibri" pitchFamily="34" charset="-120"/>
+              </a:rPr>
+              <a:t>Yes</a:t>
+            </a:r>
+            <a:endParaRPr lang="en-US" sz="1200" dirty="0"/>
+          </a:p>
+        </p:txBody>
+      </p:sp>
+      <p:sp>
+        <p:nvSpPr>
+          <p:cNvPr id="59" name="Text 57"/>
+          <p:cNvSpPr/>
+          <p:nvPr/>
+        </p:nvSpPr>
+        <p:spPr>
+          <a:xfrm>
+            <a:off x="548640" y="6556248"/>
+            <a:ext cx="11064240" cy="310896"/>
+          </a:xfrm>
+          <a:prstGeom prst="rect">
+            <a:avLst/>
+          </a:prstGeom>
+          <a:noFill/>
+          <a:ln/>
+        </p:spPr>
+        <p:txBody>
+          <a:bodyPr wrap="square" lIns="0" tIns="0" rIns="0" bIns="0" rtlCol="0" anchor="ctr"/>
+          <a:lstStyle/>
+          <a:p>
+            <a:pPr indent="0" marL="0">
+              <a:buNone/>
+            </a:pPr>
+            <a:r>
+              <a:rPr lang="en-US" sz="1150" i="1" dirty="0">
+                <a:solidFill>
+                  <a:srgbClr val="5C6B7A"/>
+                </a:solidFill>
+                <a:latin typeface="Calibri" pitchFamily="34" charset="0"/>
+                <a:ea typeface="Calibri" pitchFamily="34" charset="-122"/>
+                <a:cs typeface="Calibri" pitchFamily="34" charset="-120"/>
+              </a:rPr>
+              <a:t>*  A manager reaches only the sites beneath them — not another manager's branch. A tenant admin sits above the whole tree.</a:t>
+            </a:r>
+            <a:endParaRPr lang="en-US" sz="1150" dirty="0"/>
+          </a:p>
+        </p:txBody>
+      </p:sp>
+    </p:spTree>
+  </p:cSld>
+  <p:clrMapOvr>
+    <a:masterClrMapping/>
+  </p:clrMapOvr>
+</p:sld>
+</file>
+
+<file path=ppt/slides/slide36.xml><?xml version="1.0" encoding="utf-8"?>
+<p:sld xmlns:a="http://schemas.openxmlformats.org/drawingml/2006/main" xmlns:r="http://schemas.openxmlformats.org/officeDocument/2006/relationships" xmlns:p="http://schemas.openxmlformats.org/presentationml/2006/main">
+  <p:cSld name="Slide 36">
+    <p:bg>
+      <p:bgPr>
+        <a:solidFill>
+          <a:srgbClr val="0E1A28"/>
+        </a:solidFill>
+      </p:bgPr>
+    </p:bg>
+    <p:spTree>
+      <p:nvGrpSpPr>
+        <p:cNvPr id="1" name=""/>
+        <p:cNvGrpSpPr/>
+        <p:nvPr/>
+      </p:nvGrpSpPr>
+      <p:grpSpPr>
+        <a:xfrm>
+          <a:off x="0" y="0"/>
+          <a:ext cx="0" cy="0"/>
+          <a:chOff x="0" y="0"/>
+          <a:chExt cx="0" cy="0"/>
+        </a:xfrm>
+      </p:grpSpPr>
+      <p:sp>
+        <p:nvSpPr>
+          <p:cNvPr id="2" name="Text 0"/>
+          <p:cNvSpPr/>
+          <p:nvPr/>
+        </p:nvSpPr>
+        <p:spPr>
+          <a:xfrm>
+            <a:off x="548640" y="1234440"/>
+            <a:ext cx="7315200" cy="274320"/>
+          </a:xfrm>
+          <a:prstGeom prst="rect">
+            <a:avLst/>
+          </a:prstGeom>
+          <a:noFill/>
+          <a:ln/>
+        </p:spPr>
+        <p:txBody>
+          <a:bodyPr wrap="square" rtlCol="0" anchor="ctr"/>
+          <a:lstStyle/>
+          <a:p>
+            <a:pPr indent="0" marL="0">
+              <a:buNone/>
+            </a:pPr>
+            <a:r>
+              <a:rPr lang="en-US" sz="1100" b="1" spc="240" kern="0" dirty="0">
+                <a:solidFill>
+                  <a:srgbClr val="E08A2E"/>
+                </a:solidFill>
+                <a:latin typeface="Calibri" pitchFamily="34" charset="0"/>
+                <a:ea typeface="Calibri" pitchFamily="34" charset="-122"/>
+                <a:cs typeface="Calibri" pitchFamily="34" charset="-120"/>
+              </a:rPr>
+              <a:t>THE SHORT VERSION</a:t>
+            </a:r>
+            <a:endParaRPr lang="en-US" sz="1100" dirty="0"/>
+          </a:p>
+        </p:txBody>
+      </p:sp>
+      <p:sp>
+        <p:nvSpPr>
+          <p:cNvPr id="3" name="Text 1"/>
+          <p:cNvSpPr/>
+          <p:nvPr/>
+        </p:nvSpPr>
+        <p:spPr>
+          <a:xfrm>
+            <a:off x="548640" y="1600200"/>
+            <a:ext cx="10515600" cy="777240"/>
+          </a:xfrm>
+          <a:prstGeom prst="rect">
+            <a:avLst/>
+          </a:prstGeom>
+          <a:noFill/>
+          <a:ln/>
+        </p:spPr>
+        <p:txBody>
+          <a:bodyPr wrap="square" rtlCol="0" anchor="ctr"/>
+          <a:lstStyle/>
+          <a:p>
+            <a:pPr indent="0" marL="0">
+              <a:buNone/>
+            </a:pPr>
+            <a:r>
+              <a:rPr lang="en-US" sz="3800" b="1" dirty="0">
+                <a:solidFill>
+                  <a:srgbClr val="FFFFFF"/>
+                </a:solidFill>
+                <a:latin typeface="Calibri" pitchFamily="34" charset="0"/>
+                <a:ea typeface="Calibri" pitchFamily="34" charset="-122"/>
+                <a:cs typeface="Calibri" pitchFamily="34" charset="-120"/>
+              </a:rPr>
+              <a:t>Three things worth remembering</a:t>
+            </a:r>
+            <a:endParaRPr lang="en-US" sz="3800" dirty="0"/>
+          </a:p>
+        </p:txBody>
+      </p:sp>
+      <p:sp>
+        <p:nvSpPr>
+          <p:cNvPr id="4" name="Shape 2"/>
+          <p:cNvSpPr/>
+          <p:nvPr/>
+        </p:nvSpPr>
+        <p:spPr>
+          <a:xfrm>
+            <a:off x="548640" y="2788920"/>
+            <a:ext cx="11064240" cy="969264"/>
+          </a:xfrm>
+          <a:prstGeom prst="roundRect">
+            <a:avLst>
+              <a:gd name="adj" fmla="val 7547"/>
+            </a:avLst>
+          </a:prstGeom>
+          <a:solidFill>
+            <a:srgbClr val="1B2C3F"/>
+          </a:solidFill>
+          <a:ln w="12700">
+            <a:solidFill>
+              <a:srgbClr val="1B2C3F"/>
+            </a:solidFill>
+            <a:prstDash val="solid"/>
+          </a:ln>
+        </p:spPr>
+      </p:sp>
+      <p:sp>
+        <p:nvSpPr>
+          <p:cNvPr id="5" name="Shape 3"/>
+          <p:cNvSpPr/>
+          <p:nvPr/>
+        </p:nvSpPr>
+        <p:spPr>
+          <a:xfrm>
+            <a:off x="841248" y="3072384"/>
             <a:ext cx="402336" cy="402336"/>
           </a:xfrm>
           <a:prstGeom prst="ellipse">
@@ -24132,13 +25955,13 @@
       </p:sp>
       <p:sp>
         <p:nvSpPr>
-          <p:cNvPr id="10" name="Text 8"/>
-          <p:cNvSpPr/>
-          <p:nvPr/>
-        </p:nvSpPr>
-        <p:spPr>
-          <a:xfrm>
-            <a:off x="841248" y="4169664"/>
+          <p:cNvPr id="6" name="Text 4"/>
+          <p:cNvSpPr/>
+          <p:nvPr/>
+        </p:nvSpPr>
+        <p:spPr>
+          <a:xfrm>
+            <a:off x="841248" y="3072384"/>
             <a:ext cx="402336" cy="402336"/>
           </a:xfrm>
           <a:prstGeom prst="rect">
@@ -24163,7 +25986,7 @@
                 <a:ea typeface="Calibri" pitchFamily="34" charset="-122"/>
                 <a:cs typeface="Calibri" pitchFamily="34" charset="-120"/>
               </a:rPr>
-              <a:t>2</a:t>
+              <a:t>1</a:t>
             </a:r>
             <a:endParaRPr lang="en-US" sz="1300" dirty="0"/>
           </a:p>
@@ -24171,13 +25994,13 @@
       </p:sp>
       <p:sp>
         <p:nvSpPr>
-          <p:cNvPr id="11" name="Text 9"/>
-          <p:cNvSpPr/>
-          <p:nvPr/>
-        </p:nvSpPr>
-        <p:spPr>
-          <a:xfrm>
-            <a:off x="1463040" y="3886200"/>
+          <p:cNvPr id="7" name="Text 5"/>
+          <p:cNvSpPr/>
+          <p:nvPr/>
+        </p:nvSpPr>
+        <p:spPr>
+          <a:xfrm>
+            <a:off x="1463040" y="2788920"/>
             <a:ext cx="9875520" cy="969264"/>
           </a:xfrm>
           <a:prstGeom prst="rect">
@@ -24205,7 +26028,7 @@
                 <a:ea typeface="Calibri" pitchFamily="34" charset="-122"/>
                 <a:cs typeface="Calibri" pitchFamily="34" charset="-120"/>
               </a:rPr>
-              <a:t>Overtime is separate, and approved</a:t>
+              <a:t>Attendance is never edited</a:t>
             </a:r>
             <a:endParaRPr lang="en-US" sz="1600" dirty="0"/>
           </a:p>
@@ -24225,7 +26048,7 @@
                 <a:ea typeface="Calibri" pitchFamily="34" charset="-122"/>
                 <a:cs typeface="Calibri" pitchFamily="34" charset="-120"/>
               </a:rPr>
-              <a:t>Punch out of the shift first. Nothing reaches pay until a supervisor approves it.</a:t>
+              <a:t>Every fix adds a new event and supersedes the old one, so the history always survives.</a:t>
             </a:r>
             <a:endParaRPr lang="en-US" sz="1600" dirty="0"/>
           </a:p>
@@ -24233,13 +26056,13 @@
       </p:sp>
       <p:sp>
         <p:nvSpPr>
-          <p:cNvPr id="12" name="Shape 10"/>
-          <p:cNvSpPr/>
-          <p:nvPr/>
-        </p:nvSpPr>
-        <p:spPr>
-          <a:xfrm>
-            <a:off x="548640" y="4983480"/>
+          <p:cNvPr id="8" name="Shape 6"/>
+          <p:cNvSpPr/>
+          <p:nvPr/>
+        </p:nvSpPr>
+        <p:spPr>
+          <a:xfrm>
+            <a:off x="548640" y="3886200"/>
             <a:ext cx="11064240" cy="969264"/>
           </a:xfrm>
           <a:prstGeom prst="roundRect">
@@ -24260,13 +26083,13 @@
       </p:sp>
       <p:sp>
         <p:nvSpPr>
-          <p:cNvPr id="13" name="Shape 11"/>
-          <p:cNvSpPr/>
-          <p:nvPr/>
-        </p:nvSpPr>
-        <p:spPr>
-          <a:xfrm>
-            <a:off x="841248" y="5266944"/>
+          <p:cNvPr id="9" name="Shape 7"/>
+          <p:cNvSpPr/>
+          <p:nvPr/>
+        </p:nvSpPr>
+        <p:spPr>
+          <a:xfrm>
+            <a:off x="841248" y="4169664"/>
             <a:ext cx="402336" cy="402336"/>
           </a:xfrm>
           <a:prstGeom prst="ellipse">
@@ -24285,13 +26108,13 @@
       </p:sp>
       <p:sp>
         <p:nvSpPr>
-          <p:cNvPr id="14" name="Text 12"/>
-          <p:cNvSpPr/>
-          <p:nvPr/>
-        </p:nvSpPr>
-        <p:spPr>
-          <a:xfrm>
-            <a:off x="841248" y="5266944"/>
+          <p:cNvPr id="10" name="Text 8"/>
+          <p:cNvSpPr/>
+          <p:nvPr/>
+        </p:nvSpPr>
+        <p:spPr>
+          <a:xfrm>
+            <a:off x="841248" y="4169664"/>
             <a:ext cx="402336" cy="402336"/>
           </a:xfrm>
           <a:prstGeom prst="rect">
@@ -24316,7 +26139,7 @@
                 <a:ea typeface="Calibri" pitchFamily="34" charset="-122"/>
                 <a:cs typeface="Calibri" pitchFamily="34" charset="-120"/>
               </a:rPr>
-              <a:t>3</a:t>
+              <a:t>2</a:t>
             </a:r>
             <a:endParaRPr lang="en-US" sz="1300" dirty="0"/>
           </a:p>
@@ -24324,13 +26147,13 @@
       </p:sp>
       <p:sp>
         <p:nvSpPr>
-          <p:cNvPr id="15" name="Text 13"/>
-          <p:cNvSpPr/>
-          <p:nvPr/>
-        </p:nvSpPr>
-        <p:spPr>
-          <a:xfrm>
-            <a:off x="1463040" y="4983480"/>
+          <p:cNvPr id="11" name="Text 9"/>
+          <p:cNvSpPr/>
+          <p:nvPr/>
+        </p:nvSpPr>
+        <p:spPr>
+          <a:xfrm>
+            <a:off x="1463040" y="3886200"/>
             <a:ext cx="9875520" cy="969264"/>
           </a:xfrm>
           <a:prstGeom prst="rect">
@@ -24358,7 +26181,7 @@
                 <a:ea typeface="Calibri" pitchFamily="34" charset="-122"/>
                 <a:cs typeface="Calibri" pitchFamily="34" charset="-120"/>
               </a:rPr>
-              <a:t>Configuration is admin-only</a:t>
+              <a:t>Overtime is separate, and approved</a:t>
             </a:r>
             <a:endParaRPr lang="en-US" sz="1600" dirty="0"/>
           </a:p>
@@ -24378,7 +26201,160 @@
                 <a:ea typeface="Calibri" pitchFamily="34" charset="-122"/>
                 <a:cs typeface="Calibri" pitchFamily="34" charset="-120"/>
               </a:rPr>
-              <a:t>Shifts, sites, leave types, holidays and the rules all live under Settings › Workforce.</a:t>
+              <a:t>Punch out of the shift first. Nothing reaches pay until a supervisor approves it.</a:t>
+            </a:r>
+            <a:endParaRPr lang="en-US" sz="1600" dirty="0"/>
+          </a:p>
+        </p:txBody>
+      </p:sp>
+      <p:sp>
+        <p:nvSpPr>
+          <p:cNvPr id="12" name="Shape 10"/>
+          <p:cNvSpPr/>
+          <p:nvPr/>
+        </p:nvSpPr>
+        <p:spPr>
+          <a:xfrm>
+            <a:off x="548640" y="4983480"/>
+            <a:ext cx="11064240" cy="969264"/>
+          </a:xfrm>
+          <a:prstGeom prst="roundRect">
+            <a:avLst>
+              <a:gd name="adj" fmla="val 7547"/>
+            </a:avLst>
+          </a:prstGeom>
+          <a:solidFill>
+            <a:srgbClr val="1B2C3F"/>
+          </a:solidFill>
+          <a:ln w="12700">
+            <a:solidFill>
+              <a:srgbClr val="1B2C3F"/>
+            </a:solidFill>
+            <a:prstDash val="solid"/>
+          </a:ln>
+        </p:spPr>
+      </p:sp>
+      <p:sp>
+        <p:nvSpPr>
+          <p:cNvPr id="13" name="Shape 11"/>
+          <p:cNvSpPr/>
+          <p:nvPr/>
+        </p:nvSpPr>
+        <p:spPr>
+          <a:xfrm>
+            <a:off x="841248" y="5266944"/>
+            <a:ext cx="402336" cy="402336"/>
+          </a:xfrm>
+          <a:prstGeom prst="ellipse">
+            <a:avLst/>
+          </a:prstGeom>
+          <a:solidFill>
+            <a:srgbClr val="E08A2E"/>
+          </a:solidFill>
+          <a:ln w="12700">
+            <a:solidFill>
+              <a:srgbClr val="E08A2E"/>
+            </a:solidFill>
+            <a:prstDash val="solid"/>
+          </a:ln>
+        </p:spPr>
+      </p:sp>
+      <p:sp>
+        <p:nvSpPr>
+          <p:cNvPr id="14" name="Text 12"/>
+          <p:cNvSpPr/>
+          <p:nvPr/>
+        </p:nvSpPr>
+        <p:spPr>
+          <a:xfrm>
+            <a:off x="841248" y="5266944"/>
+            <a:ext cx="402336" cy="402336"/>
+          </a:xfrm>
+          <a:prstGeom prst="rect">
+            <a:avLst/>
+          </a:prstGeom>
+          <a:noFill/>
+          <a:ln/>
+        </p:spPr>
+        <p:txBody>
+          <a:bodyPr wrap="square" lIns="0" tIns="0" rIns="0" bIns="0" rtlCol="0" anchor="ctr"/>
+          <a:lstStyle/>
+          <a:p>
+            <a:pPr algn="ctr" indent="0" marL="0">
+              <a:buNone/>
+            </a:pPr>
+            <a:r>
+              <a:rPr lang="en-US" sz="1300" b="1" dirty="0">
+                <a:solidFill>
+                  <a:srgbClr val="0E1A28"/>
+                </a:solidFill>
+                <a:latin typeface="Calibri" pitchFamily="34" charset="0"/>
+                <a:ea typeface="Calibri" pitchFamily="34" charset="-122"/>
+                <a:cs typeface="Calibri" pitchFamily="34" charset="-120"/>
+              </a:rPr>
+              <a:t>3</a:t>
+            </a:r>
+            <a:endParaRPr lang="en-US" sz="1300" dirty="0"/>
+          </a:p>
+        </p:txBody>
+      </p:sp>
+      <p:sp>
+        <p:nvSpPr>
+          <p:cNvPr id="15" name="Text 13"/>
+          <p:cNvSpPr/>
+          <p:nvPr/>
+        </p:nvSpPr>
+        <p:spPr>
+          <a:xfrm>
+            <a:off x="1463040" y="4983480"/>
+            <a:ext cx="9875520" cy="969264"/>
+          </a:xfrm>
+          <a:prstGeom prst="rect">
+            <a:avLst/>
+          </a:prstGeom>
+          <a:noFill/>
+          <a:ln/>
+        </p:spPr>
+        <p:txBody>
+          <a:bodyPr wrap="square" lIns="0" tIns="0" rIns="0" bIns="0" rtlCol="0" anchor="ctr"/>
+          <a:lstStyle/>
+          <a:p>
+            <a:pPr indent="0" marL="0">
+              <a:lnSpc>
+                <a:spcPts val="1800"/>
+              </a:lnSpc>
+              <a:buNone/>
+            </a:pPr>
+            <a:r>
+              <a:rPr lang="en-US" sz="1600" b="1" dirty="0">
+                <a:solidFill>
+                  <a:srgbClr val="FFFFFF"/>
+                </a:solidFill>
+                <a:latin typeface="Calibri" pitchFamily="34" charset="0"/>
+                <a:ea typeface="Calibri" pitchFamily="34" charset="-122"/>
+                <a:cs typeface="Calibri" pitchFamily="34" charset="-120"/>
+              </a:rPr>
+              <a:t>You handle your own site</a:t>
+            </a:r>
+            <a:endParaRPr lang="en-US" sz="1600" dirty="0"/>
+          </a:p>
+          <a:p>
+            <a:pPr indent="0" marL="0">
+              <a:lnSpc>
+                <a:spcPts val="1800"/>
+              </a:lnSpc>
+              <a:buNone/>
+            </a:pPr>
+            <a:r>
+              <a:rPr lang="en-US" sz="1300" dirty="0">
+                <a:solidFill>
+                  <a:srgbClr val="C6D0DA"/>
+                </a:solidFill>
+                <a:latin typeface="Calibri" pitchFamily="34" charset="0"/>
+                <a:ea typeface="Calibri" pitchFamily="34" charset="-122"/>
+                <a:cs typeface="Calibri" pitchFamily="34" charset="-120"/>
+              </a:rPr>
+              <a:t>Each site has one supervisor; a manager covers the sites beneath them. Nobody approves their own request.</a:t>
             </a:r>
             <a:endParaRPr lang="en-US" sz="1600" dirty="0"/>
           </a:p>

--- a/docs/qa/BPMSquare_WFM_Feature_Guide.pptx
+++ b/docs/qa/BPMSquare_WFM_Feature_Guide.pptx
@@ -41,9 +41,11 @@
     <p:sldId id="289" r:id="rId35"/>
     <p:sldId id="290" r:id="rId36"/>
     <p:sldId id="291" r:id="rId37"/>
+    <p:sldId id="292" r:id="rId38"/>
+    <p:sldId id="293" r:id="rId39"/>
   </p:sldIdLst>
   <p:notesMasterIdLst>
-    <p:notesMasterId r:id="rId38"/>
+    <p:notesMasterId r:id="rId40"/>
   </p:notesMasterIdLst>
   <p:sldSz cx="12192000" cy="6858000"/>
   <p:notesSz cx="6858000" cy="12192000"/>
@@ -625,7 +627,7 @@
           <a:p>
             <a:r>
               <a:rPr lang="en-US" dirty="0"/>
-              <a:t>How to: Monthly timeline. Path: Workforce &gt; My Workforce &gt; Timeline</a:t>
+              <a:t>How to: Overtime — record and approve. Path: Workforce &gt; Corrections &gt; Overtime</a:t>
             </a:r>
             <a:endParaRPr lang="en-US" dirty="0"/>
           </a:p>
@@ -713,7 +715,7 @@
           <a:p>
             <a:r>
               <a:rPr lang="en-US" dirty="0"/>
-              <a:t>Apply for leave — Pick dates by dragging across a calendar rather than typing two dates into boxes.</a:t>
+              <a:t>Monthly timeline — One calendar month per page, each day drawn as a horizontal bar against a time axis.</a:t>
             </a:r>
             <a:endParaRPr lang="en-US" dirty="0"/>
           </a:p>
@@ -801,7 +803,7 @@
           <a:p>
             <a:r>
               <a:rPr lang="en-US" dirty="0"/>
-              <a:t>How to: Apply for leave. Path: Workforce &gt; My Workforce &gt; Leave</a:t>
+              <a:t>How to: Monthly timeline. Path: Workforce &gt; My Workforce &gt; Timeline</a:t>
             </a:r>
             <a:endParaRPr lang="en-US" dirty="0"/>
           </a:p>
@@ -889,7 +891,7 @@
           <a:p>
             <a:r>
               <a:rPr lang="en-US" dirty="0"/>
-              <a:t>Leave approval and records — Approving a request writes a real leave record. That record, not the request, moves the balance.</a:t>
+              <a:t>Apply for leave — Pick dates by dragging across a calendar rather than typing two dates into boxes.</a:t>
             </a:r>
             <a:endParaRPr lang="en-US" dirty="0"/>
           </a:p>
@@ -977,7 +979,7 @@
           <a:p>
             <a:r>
               <a:rPr lang="en-US" dirty="0"/>
-              <a:t>How to: Leave approval and records. Path: Workforce &gt; Leave &amp; Holidays</a:t>
+              <a:t>How to: Apply for leave. Path: Workforce &gt; My Workforce &gt; Leave</a:t>
             </a:r>
             <a:endParaRPr lang="en-US" dirty="0"/>
           </a:p>
@@ -1065,7 +1067,7 @@
           <a:p>
             <a:r>
               <a:rPr lang="en-US" dirty="0"/>
-              <a:t>Attendance corrections — Employees ask for a fix. Only a supervisor's approval actually changes attendance.</a:t>
+              <a:t>Leave approval and records — Approving a request writes a real leave record. That record, not the request, moves the balance.</a:t>
             </a:r>
             <a:endParaRPr lang="en-US" dirty="0"/>
           </a:p>
@@ -1153,7 +1155,7 @@
           <a:p>
             <a:r>
               <a:rPr lang="en-US" dirty="0"/>
-              <a:t>How to: Attendance corrections. Path: Workforce &gt; Corrections</a:t>
+              <a:t>How to: Leave approval and records. Path: Workforce &gt; Leave &amp; Holidays</a:t>
             </a:r>
             <a:endParaRPr lang="en-US" dirty="0"/>
           </a:p>
@@ -1241,7 +1243,7 @@
           <a:p>
             <a:r>
               <a:rPr lang="en-US" dirty="0"/>
-              <a:t>Recheck requests — The reverse direction — a supervisor flags a punch and asks the employee to explain it.</a:t>
+              <a:t>Attendance corrections — Employees ask for a fix. Only a supervisor's approval actually changes attendance.</a:t>
             </a:r>
             <a:endParaRPr lang="en-US" dirty="0"/>
           </a:p>
@@ -1329,7 +1331,7 @@
           <a:p>
             <a:r>
               <a:rPr lang="en-US" dirty="0"/>
-              <a:t>How to: Recheck requests. Path: Workforce &gt; Corrections &gt; Recheck requests</a:t>
+              <a:t>How to: Attendance corrections. Path: Workforce &gt; Corrections</a:t>
             </a:r>
             <a:endParaRPr lang="en-US" dirty="0"/>
           </a:p>
@@ -1417,7 +1419,7 @@
           <a:p>
             <a:r>
               <a:rPr lang="en-US" dirty="0"/>
-              <a:t>Roster and shift planning — Bulk shift and site planning layered on top of everyone's standing shift.</a:t>
+              <a:t>Recheck requests — A supervisor queries a punch and asks the employee to explain it — the mirror of a correction.</a:t>
             </a:r>
             <a:endParaRPr lang="en-US" dirty="0"/>
           </a:p>
@@ -1593,7 +1595,7 @@
           <a:p>
             <a:r>
               <a:rPr lang="en-US" dirty="0"/>
-              <a:t>How to: Roster and shift planning. Path: Workforce &gt; Roster</a:t>
+              <a:t>How to: Recheck requests. Path: Workforce &gt; Corrections &gt; Recheck requests</a:t>
             </a:r>
             <a:endParaRPr lang="en-US" dirty="0"/>
           </a:p>
@@ -1681,7 +1683,7 @@
           <a:p>
             <a:r>
               <a:rPr lang="en-US" dirty="0"/>
-              <a:t>Live board — Who is in, who is late and who has not arrived — for today, at a glance.</a:t>
+              <a:t>Roster and shift planning — Bulk shift and site planning layered on top of everyone's standing shift.</a:t>
             </a:r>
             <a:endParaRPr lang="en-US" dirty="0"/>
           </a:p>
@@ -1769,7 +1771,7 @@
           <a:p>
             <a:r>
               <a:rPr lang="en-US" dirty="0"/>
-              <a:t>How to: Live board. Path: Workforce &gt; Live board</a:t>
+              <a:t>How to: Roster and shift planning. Path: Workforce &gt; Roster</a:t>
             </a:r>
             <a:endParaRPr lang="en-US" dirty="0"/>
           </a:p>
@@ -1857,7 +1859,7 @@
           <a:p>
             <a:r>
               <a:rPr lang="en-US" dirty="0"/>
-              <a:t>Who sees and approves what — Each site has one supervisor, and they handle that site's people — nobody else's.</a:t>
+              <a:t>Live board — Who is in, who is late and who has not arrived — for today, at a glance.</a:t>
             </a:r>
             <a:endParaRPr lang="en-US" dirty="0"/>
           </a:p>
@@ -1945,7 +1947,7 @@
           <a:p>
             <a:r>
               <a:rPr lang="en-US" dirty="0"/>
-              <a:t>How to: Who sees and approves what. Path: Settings &gt; Workforce &gt; Sites</a:t>
+              <a:t>How to: Live board. Path: Workforce &gt; Live board</a:t>
             </a:r>
             <a:endParaRPr lang="en-US" dirty="0"/>
           </a:p>
@@ -2033,7 +2035,7 @@
           <a:p>
             <a:r>
               <a:rPr lang="en-US" dirty="0"/>
-              <a:t>Employees and the Employee Hub — The people master, plus one page that gathers everything about a single employee.</a:t>
+              <a:t>Who sees and approves what — Each site has one supervisor, and they handle that site's people — nobody else's.</a:t>
             </a:r>
             <a:endParaRPr lang="en-US" dirty="0"/>
           </a:p>
@@ -2121,7 +2123,7 @@
           <a:p>
             <a:r>
               <a:rPr lang="en-US" dirty="0"/>
-              <a:t>How to: Employees and the Employee Hub. Path: Workforce &gt; Employees</a:t>
+              <a:t>How to: Who sees and approves what. Path: Settings &gt; Workforce &gt; Sites</a:t>
             </a:r>
             <a:endParaRPr lang="en-US" dirty="0"/>
           </a:p>
@@ -2209,7 +2211,7 @@
           <a:p>
             <a:r>
               <a:rPr lang="en-US" dirty="0"/>
-              <a:t>Monthly summary and Excel export — The whole month, per employee, in the shape the accountant actually needs.</a:t>
+              <a:t>Employees and the Employee Hub — The people master, plus one page that gathers everything about a single employee.</a:t>
             </a:r>
             <a:endParaRPr lang="en-US" dirty="0"/>
           </a:p>
@@ -2297,7 +2299,7 @@
           <a:p>
             <a:r>
               <a:rPr lang="en-US" dirty="0"/>
-              <a:t>How to: Monthly summary and Excel export. Path: Workforce &gt; Monthly Summary</a:t>
+              <a:t>How to: Employees and the Employee Hub. Path: Workforce &gt; Employees</a:t>
             </a:r>
             <a:endParaRPr lang="en-US" dirty="0"/>
           </a:p>
@@ -2385,7 +2387,7 @@
           <a:p>
             <a:r>
               <a:rPr lang="en-US" dirty="0"/>
-              <a:t>Shifts and sites — Working hours, and the physical places where a punch is considered on-site.</a:t>
+              <a:t>Monthly summary and Excel export — The whole month, per employee, in the shape the accountant actually needs.</a:t>
             </a:r>
             <a:endParaRPr lang="en-US" dirty="0"/>
           </a:p>
@@ -2561,7 +2563,7 @@
           <a:p>
             <a:r>
               <a:rPr lang="en-US" dirty="0"/>
-              <a:t>How to: Shifts and sites. Path: Settings &gt; Workforce &gt; Shifts / Sites</a:t>
+              <a:t>How to: Monthly summary and Excel export. Path: Workforce &gt; Monthly Summary</a:t>
             </a:r>
             <a:endParaRPr lang="en-US" dirty="0"/>
           </a:p>
@@ -2649,7 +2651,7 @@
           <a:p>
             <a:r>
               <a:rPr lang="en-US" dirty="0"/>
-              <a:t>Leave types and holidays — What people are allowed to take, and the days on which nobody is marked absent.</a:t>
+              <a:t>Shifts and sites — Working hours, and the physical places where a punch is considered on-site.</a:t>
             </a:r>
             <a:endParaRPr lang="en-US" dirty="0"/>
           </a:p>
@@ -2737,7 +2739,7 @@
           <a:p>
             <a:r>
               <a:rPr lang="en-US" dirty="0"/>
-              <a:t>How to: Leave types and holidays. Path: Settings &gt; Workforce &gt; Leave Types / Holidays</a:t>
+              <a:t>How to: Shifts and sites. Path: Settings &gt; Workforce &gt; Shifts / Sites</a:t>
             </a:r>
             <a:endParaRPr lang="en-US" dirty="0"/>
           </a:p>
@@ -2825,7 +2827,7 @@
           <a:p>
             <a:r>
               <a:rPr lang="en-US" dirty="0"/>
-              <a:t>Attendance rules and notifications — The workspace-wide switches that decide how hours are counted and who gets told.</a:t>
+              <a:t>Leave types and holidays — What people are allowed to take, and the days on which nobody is marked absent.</a:t>
             </a:r>
             <a:endParaRPr lang="en-US" dirty="0"/>
           </a:p>
@@ -2913,7 +2915,7 @@
           <a:p>
             <a:r>
               <a:rPr lang="en-US" dirty="0"/>
-              <a:t>How to: Attendance rules and notifications. Path: Settings &gt; Workforce &gt; General</a:t>
+              <a:t>How to: Leave types and holidays. Path: Settings &gt; Workforce &gt; Leave Types / Holidays</a:t>
             </a:r>
             <a:endParaRPr lang="en-US" dirty="0"/>
           </a:p>
@@ -3001,7 +3003,7 @@
           <a:p>
             <a:r>
               <a:rPr lang="en-US" dirty="0"/>
-              <a:t>Scope follows the site you are assigned to, per date. Nobody approves their own request.</a:t>
+              <a:t>Attendance rules and notifications — The workspace-wide switches that decide how hours are counted and who gets told.</a:t>
             </a:r>
             <a:endParaRPr lang="en-US" dirty="0"/>
           </a:p>
@@ -3089,7 +3091,7 @@
           <a:p>
             <a:r>
               <a:rPr lang="en-US" dirty="0"/>
-              <a:t>Close here; the API reference and Postman collection cover the machine-facing side.</a:t>
+              <a:t>How to: Attendance rules and notifications. Path: Settings &gt; Workforce &gt; General</a:t>
             </a:r>
             <a:endParaRPr lang="en-US" dirty="0"/>
           </a:p>
@@ -3113,6 +3115,182 @@
             <a:fld id="{F7021451-1387-4CA6-816F-3879F97B5CBC}" type="slidenum">
               <a:rPr lang="en-US"/>
               <a:t>36</a:t>
+            </a:fld>
+            <a:endParaRPr lang="en-US"/>
+          </a:p>
+        </p:txBody>
+      </p:sp>
+    </p:spTree>
+    <p:extLst>
+      <p:ext uri="{BB962C8B-B14F-4D97-AF65-F5344CB8AC3E}">
+        <p14:creationId xmlns:p14="http://schemas.microsoft.com/office/powerpoint/2010/main" val="1024086991"/>
+      </p:ext>
+    </p:extLst>
+  </p:cSld>
+  <p:clrMapOvr>
+    <a:masterClrMapping/>
+  </p:clrMapOvr>
+</p:notes>
+</file>
+
+<file path=ppt/notesSlides/notesSlide37.xml><?xml version="1.0" encoding="utf-8"?>
+<p:notes xmlns:a="http://schemas.openxmlformats.org/drawingml/2006/main" xmlns:r="http://schemas.openxmlformats.org/officeDocument/2006/relationships" xmlns:p="http://schemas.openxmlformats.org/presentationml/2006/main">
+  <p:cSld>
+    <p:spTree>
+      <p:nvGrpSpPr>
+        <p:cNvPr id="1" name=""/>
+        <p:cNvGrpSpPr/>
+        <p:nvPr/>
+      </p:nvGrpSpPr>
+      <p:grpSpPr>
+        <a:xfrm>
+          <a:off x="0" y="0"/>
+          <a:ext cx="0" cy="0"/>
+          <a:chOff x="0" y="0"/>
+          <a:chExt cx="0" cy="0"/>
+        </a:xfrm>
+      </p:grpSpPr>
+      <p:sp>
+        <p:nvSpPr>
+          <p:cNvPr id="2" name="Slide Image Placeholder 1"/>
+          <p:cNvSpPr>
+            <a:spLocks noGrp="1" noRot="1" noChangeAspect="1"/>
+          </p:cNvSpPr>
+          <p:nvPr>
+            <p:ph type="sldImg"/>
+          </p:nvPr>
+        </p:nvSpPr>
+        <p:spPr/>
+      </p:sp>
+      <p:sp>
+        <p:nvSpPr>
+          <p:cNvPr id="3" name="Notes Placeholder 2"/>
+          <p:cNvSpPr>
+            <a:spLocks noGrp="1"/>
+          </p:cNvSpPr>
+          <p:nvPr>
+            <p:ph type="body" idx="1"/>
+          </p:nvPr>
+        </p:nvSpPr>
+        <p:spPr/>
+        <p:txBody>
+          <a:bodyPr/>
+          <a:lstStyle/>
+          <a:p>
+            <a:r>
+              <a:rPr lang="en-US" dirty="0"/>
+              <a:t>Scope follows the site you are assigned to, per date. Nobody approves their own request.</a:t>
+            </a:r>
+            <a:endParaRPr lang="en-US" dirty="0"/>
+          </a:p>
+        </p:txBody>
+      </p:sp>
+      <p:sp>
+        <p:nvSpPr>
+          <p:cNvPr id="4" name="Slide Number Placeholder 3"/>
+          <p:cNvSpPr>
+            <a:spLocks noGrp="1"/>
+          </p:cNvSpPr>
+          <p:nvPr>
+            <p:ph type="sldNum" sz="quarter" idx="10"/>
+          </p:nvPr>
+        </p:nvSpPr>
+        <p:spPr/>
+        <p:txBody>
+          <a:bodyPr/>
+          <a:lstStyle/>
+          <a:p>
+            <a:fld id="{F7021451-1387-4CA6-816F-3879F97B5CBC}" type="slidenum">
+              <a:rPr lang="en-US"/>
+              <a:t>37</a:t>
+            </a:fld>
+            <a:endParaRPr lang="en-US"/>
+          </a:p>
+        </p:txBody>
+      </p:sp>
+    </p:spTree>
+    <p:extLst>
+      <p:ext uri="{BB962C8B-B14F-4D97-AF65-F5344CB8AC3E}">
+        <p14:creationId xmlns:p14="http://schemas.microsoft.com/office/powerpoint/2010/main" val="1024086991"/>
+      </p:ext>
+    </p:extLst>
+  </p:cSld>
+  <p:clrMapOvr>
+    <a:masterClrMapping/>
+  </p:clrMapOvr>
+</p:notes>
+</file>
+
+<file path=ppt/notesSlides/notesSlide38.xml><?xml version="1.0" encoding="utf-8"?>
+<p:notes xmlns:a="http://schemas.openxmlformats.org/drawingml/2006/main" xmlns:r="http://schemas.openxmlformats.org/officeDocument/2006/relationships" xmlns:p="http://schemas.openxmlformats.org/presentationml/2006/main">
+  <p:cSld>
+    <p:spTree>
+      <p:nvGrpSpPr>
+        <p:cNvPr id="1" name=""/>
+        <p:cNvGrpSpPr/>
+        <p:nvPr/>
+      </p:nvGrpSpPr>
+      <p:grpSpPr>
+        <a:xfrm>
+          <a:off x="0" y="0"/>
+          <a:ext cx="0" cy="0"/>
+          <a:chOff x="0" y="0"/>
+          <a:chExt cx="0" cy="0"/>
+        </a:xfrm>
+      </p:grpSpPr>
+      <p:sp>
+        <p:nvSpPr>
+          <p:cNvPr id="2" name="Slide Image Placeholder 1"/>
+          <p:cNvSpPr>
+            <a:spLocks noGrp="1" noRot="1" noChangeAspect="1"/>
+          </p:cNvSpPr>
+          <p:nvPr>
+            <p:ph type="sldImg"/>
+          </p:nvPr>
+        </p:nvSpPr>
+        <p:spPr/>
+      </p:sp>
+      <p:sp>
+        <p:nvSpPr>
+          <p:cNvPr id="3" name="Notes Placeholder 2"/>
+          <p:cNvSpPr>
+            <a:spLocks noGrp="1"/>
+          </p:cNvSpPr>
+          <p:nvPr>
+            <p:ph type="body" idx="1"/>
+          </p:nvPr>
+        </p:nvSpPr>
+        <p:spPr/>
+        <p:txBody>
+          <a:bodyPr/>
+          <a:lstStyle/>
+          <a:p>
+            <a:r>
+              <a:rPr lang="en-US" dirty="0"/>
+              <a:t>Close here; the API reference and Postman collection cover the machine-facing side.</a:t>
+            </a:r>
+            <a:endParaRPr lang="en-US" dirty="0"/>
+          </a:p>
+        </p:txBody>
+      </p:sp>
+      <p:sp>
+        <p:nvSpPr>
+          <p:cNvPr id="4" name="Slide Number Placeholder 3"/>
+          <p:cNvSpPr>
+            <a:spLocks noGrp="1"/>
+          </p:cNvSpPr>
+          <p:nvPr>
+            <p:ph type="sldNum" sz="quarter" idx="10"/>
+          </p:nvPr>
+        </p:nvSpPr>
+        <p:spPr/>
+        <p:txBody>
+          <a:bodyPr/>
+          <a:lstStyle/>
+          <a:p>
+            <a:fld id="{F7021451-1387-4CA6-816F-3879F97B5CBC}" type="slidenum">
+              <a:rPr lang="en-US"/>
+              <a:t>38</a:t>
             </a:fld>
             <a:endParaRPr lang="en-US"/>
           </a:p>
@@ -3265,7 +3443,7 @@
           <a:p>
             <a:r>
               <a:rPr lang="en-US" dirty="0"/>
-              <a:t>Punch types: OT, mobile work, trips — Extra punch types sit in a dropdown next to the main button — only the ones your workspace switches on.</a:t>
+              <a:t>Punching with no signal — A dead spot doesn't cost anyone their attendance. The punch is captured on the device and sent when the network returns.</a:t>
             </a:r>
             <a:endParaRPr lang="en-US" dirty="0"/>
           </a:p>
@@ -3353,7 +3531,7 @@
           <a:p>
             <a:r>
               <a:rPr lang="en-US" dirty="0"/>
-              <a:t>How to: Punch types: OT, mobile work, trips. Path: Settings &gt; Workforce &gt; General &gt; Punch types</a:t>
+              <a:t>How to: Punching with no signal. Path: Workforce &gt; My Workforce &gt; Home</a:t>
             </a:r>
             <a:endParaRPr lang="en-US" dirty="0"/>
           </a:p>
@@ -3441,7 +3619,7 @@
           <a:p>
             <a:r>
               <a:rPr lang="en-US" dirty="0"/>
-              <a:t>Overtime — record and approve — Overtime is a separate session, punched after checking out, and paid only once a supervisor approves it.</a:t>
+              <a:t>Punch types: OT, mobile work, trips — Extra punch types sit in a dropdown next to the main button — only the ones your workspace switches on.</a:t>
             </a:r>
             <a:endParaRPr lang="en-US" dirty="0"/>
           </a:p>
@@ -3529,7 +3707,7 @@
           <a:p>
             <a:r>
               <a:rPr lang="en-US" dirty="0"/>
-              <a:t>How to: Overtime — record and approve. Path: Workforce &gt; Corrections &gt; Overtime</a:t>
+              <a:t>How to: Punch types: OT, mobile work, trips. Path: Settings &gt; Workforce &gt; General &gt; Punch types</a:t>
             </a:r>
             <a:endParaRPr lang="en-US" dirty="0"/>
           </a:p>
@@ -3617,7 +3795,7 @@
           <a:p>
             <a:r>
               <a:rPr lang="en-US" dirty="0"/>
-              <a:t>Monthly timeline — One calendar month per page, each day drawn as a horizontal bar against a time axis.</a:t>
+              <a:t>Overtime — record and approve — Overtime is a separate session, punched after checking out, and paid only once a supervisor approves it.</a:t>
             </a:r>
             <a:endParaRPr lang="en-US" dirty="0"/>
           </a:p>
@@ -4281,7 +4459,7 @@
                 <a:ea typeface="Calibri" pitchFamily="34" charset="-122"/>
                 <a:cs typeface="Calibri" pitchFamily="34" charset="-120"/>
               </a:rPr>
-              <a:t>HOW TO  —  EMPLOYEE</a:t>
+              <a:t>HOW TO  —  EMPLOYEE + SUPERVISOR</a:t>
             </a:r>
             <a:endParaRPr lang="en-US" sz="1100" dirty="0"/>
           </a:p>
@@ -4320,7 +4498,7 @@
                 <a:ea typeface="Calibri" pitchFamily="34" charset="-122"/>
                 <a:cs typeface="Calibri" pitchFamily="34" charset="-120"/>
               </a:rPr>
-              <a:t>Monthly timeline</a:t>
+              <a:t>Overtime — record and approve</a:t>
             </a:r>
             <a:endParaRPr lang="en-US" sz="2700" dirty="0"/>
           </a:p>
@@ -4428,7 +4606,7 @@
                 <a:ea typeface="Calibri" pitchFamily="34" charset="-122"/>
                 <a:cs typeface="Calibri" pitchFamily="34" charset="-120"/>
               </a:rPr>
-              <a:t>My Workforce</a:t>
+              <a:t>Corrections</a:t>
             </a:r>
             <a:pPr indent="0" marL="0">
               <a:buNone/>
@@ -4456,7 +4634,7 @@
                 <a:ea typeface="Calibri" pitchFamily="34" charset="-122"/>
                 <a:cs typeface="Calibri" pitchFamily="34" charset="-120"/>
               </a:rPr>
-              <a:t>Timeline</a:t>
+              <a:t>Overtime</a:t>
             </a:r>
             <a:endParaRPr lang="en-US" sz="1100" dirty="0"/>
           </a:p>
@@ -4559,7 +4737,7 @@
                 <a:ea typeface="Calibri" pitchFamily="34" charset="-122"/>
                 <a:cs typeface="Calibri" pitchFamily="34" charset="-120"/>
               </a:rPr>
-              <a:t>Open My Workforce and choose the Timeline tab.</a:t>
+              <a:t>Employee checks OUT of the regular shift first — this is required.</a:t>
             </a:r>
             <a:endParaRPr lang="en-US" sz="1500" dirty="0"/>
           </a:p>
@@ -4662,7 +4840,7 @@
                 <a:ea typeface="Calibri" pitchFamily="34" charset="-122"/>
                 <a:cs typeface="Calibri" pitchFamily="34" charset="-120"/>
               </a:rPr>
-              <a:t>Use the month arrows to move between months.</a:t>
+              <a:t>Employee picks OT in from the punch dropdown, then OT out when finished.</a:t>
             </a:r>
             <a:endParaRPr lang="en-US" sz="1500" dirty="0"/>
           </a:p>
@@ -4765,7 +4943,7 @@
                 <a:ea typeface="Calibri" pitchFamily="34" charset="-122"/>
                 <a:cs typeface="Calibri" pitchFamily="34" charset="-120"/>
               </a:rPr>
-              <a:t>Click a day's bar to open the detail popup.</a:t>
+              <a:t>Supervisor opens Workforce → Corrections → Overtime tab.</a:t>
             </a:r>
             <a:endParaRPr lang="en-US" sz="1500" dirty="0"/>
           </a:p>
@@ -4868,7 +5046,7 @@
                 <a:ea typeface="Calibri" pitchFamily="34" charset="-122"/>
                 <a:cs typeface="Calibri" pitchFamily="34" charset="-120"/>
               </a:rPr>
-              <a:t>Choose “Request a correction for this day” if something is wrong.</a:t>
+              <a:t>Review the date, duration and +1d marker, then Approve or Reject.</a:t>
             </a:r>
             <a:endParaRPr lang="en-US" sz="1500" dirty="0"/>
           </a:p>
@@ -4948,7 +5126,7 @@
                 <a:ea typeface="Calibri" pitchFamily="34" charset="-122"/>
                 <a:cs typeface="Calibri" pitchFamily="34" charset="-120"/>
               </a:rPr>
-              <a:t>Faded, dashed bands mean overtime that is still waiting for supervisor approval.</a:t>
+              <a:t>A remark is mandatory to reject. Pending and rejected overtime is visible everywhere but counted nowhere.</a:t>
             </a:r>
             <a:endParaRPr lang="en-US" sz="1050" dirty="0"/>
           </a:p>
@@ -5058,7 +5236,7 @@
                 <a:ea typeface="Calibri" pitchFamily="34" charset="-122"/>
                 <a:cs typeface="Calibri" pitchFamily="34" charset="-120"/>
               </a:rPr>
-              <a:t>Apply for leave</a:t>
+              <a:t>Monthly timeline</a:t>
             </a:r>
             <a:endParaRPr lang="en-US" sz="3300" dirty="0"/>
           </a:p>
@@ -5100,7 +5278,7 @@
                 <a:ea typeface="Calibri" pitchFamily="34" charset="-122"/>
                 <a:cs typeface="Calibri" pitchFamily="34" charset="-120"/>
               </a:rPr>
-              <a:t>Pick dates by dragging across a calendar rather than typing two dates into boxes.</a:t>
+              <a:t>One calendar month per page, each day drawn as a horizontal bar against a time axis.</a:t>
             </a:r>
             <a:endParaRPr lang="en-US" sz="1500" dirty="0"/>
           </a:p>
@@ -5230,7 +5408,7 @@
                 <a:ea typeface="Calibri" pitchFamily="34" charset="-122"/>
                 <a:cs typeface="Calibri" pitchFamily="34" charset="-120"/>
               </a:rPr>
-              <a:t>Click a single day, or drag across a range</a:t>
+              <a:t>Work, break and overtime shown as separate bands</a:t>
             </a:r>
             <a:endParaRPr lang="en-US" sz="1400" dirty="0"/>
           </a:p>
@@ -5360,7 +5538,7 @@
                 <a:ea typeface="Calibri" pitchFamily="34" charset="-122"/>
                 <a:cs typeface="Calibri" pitchFamily="34" charset="-120"/>
               </a:rPr>
-              <a:t>Holidays, week-offs and existing leave are marked before you submit</a:t>
+              <a:t>Pending overtime is faded and dashed until approved</a:t>
             </a:r>
             <a:endParaRPr lang="en-US" sz="1400" dirty="0"/>
           </a:p>
@@ -5490,7 +5668,7 @@
                 <a:ea typeface="Calibri" pitchFamily="34" charset="-122"/>
                 <a:cs typeface="Calibri" pitchFamily="34" charset="-120"/>
               </a:rPr>
-              <a:t>Half day appears only when the from and to dates match</a:t>
+              <a:t>Click any day to open its detail and file a correction</a:t>
             </a:r>
             <a:endParaRPr lang="en-US" sz="1400" dirty="0"/>
           </a:p>
@@ -5708,7 +5886,7 @@
                 <a:ea typeface="Calibri" pitchFamily="34" charset="-122"/>
                 <a:cs typeface="Calibri" pitchFamily="34" charset="-120"/>
               </a:rPr>
-              <a:t>Apply for leave</a:t>
+              <a:t>Monthly timeline</a:t>
             </a:r>
             <a:endParaRPr lang="en-US" sz="2700" dirty="0"/>
           </a:p>
@@ -5844,7 +6022,7 @@
                 <a:ea typeface="Calibri" pitchFamily="34" charset="-122"/>
                 <a:cs typeface="Calibri" pitchFamily="34" charset="-120"/>
               </a:rPr>
-              <a:t>Leave</a:t>
+              <a:t>Timeline</a:t>
             </a:r>
             <a:endParaRPr lang="en-US" sz="1100" dirty="0"/>
           </a:p>
@@ -5947,7 +6125,7 @@
                 <a:ea typeface="Calibri" pitchFamily="34" charset="-122"/>
                 <a:cs typeface="Calibri" pitchFamily="34" charset="-120"/>
               </a:rPr>
-              <a:t>Open My Workforce → Leave. Your requests are the first thing you see.</a:t>
+              <a:t>Open My Workforce and choose the Timeline tab.</a:t>
             </a:r>
             <a:endParaRPr lang="en-US" sz="1500" dirty="0"/>
           </a:p>
@@ -6050,7 +6228,7 @@
                 <a:ea typeface="Calibri" pitchFamily="34" charset="-122"/>
                 <a:cs typeface="Calibri" pitchFamily="34" charset="-120"/>
               </a:rPr>
-              <a:t>Press + Request leave, then drag across the days you want.</a:t>
+              <a:t>Use the month arrows to move between months.</a:t>
             </a:r>
             <a:endParaRPr lang="en-US" sz="1500" dirty="0"/>
           </a:p>
@@ -6153,7 +6331,7 @@
                 <a:ea typeface="Calibri" pitchFamily="34" charset="-122"/>
                 <a:cs typeface="Calibri" pitchFamily="34" charset="-120"/>
               </a:rPr>
-              <a:t>Pick the leave type and write a reason.</a:t>
+              <a:t>Click a day's bar to open the detail popup.</a:t>
             </a:r>
             <a:endParaRPr lang="en-US" sz="1500" dirty="0"/>
           </a:p>
@@ -6256,7 +6434,7 @@
                 <a:ea typeface="Calibri" pitchFamily="34" charset="-122"/>
                 <a:cs typeface="Calibri" pitchFamily="34" charset="-120"/>
               </a:rPr>
-              <a:t>Submit — it reaches your supervisor as Pending.</a:t>
+              <a:t>Choose “Request a correction for this day” if something is wrong.</a:t>
             </a:r>
             <a:endParaRPr lang="en-US" sz="1500" dirty="0"/>
           </a:p>
@@ -6336,7 +6514,7 @@
                 <a:ea typeface="Calibri" pitchFamily="34" charset="-122"/>
                 <a:cs typeface="Calibri" pitchFamily="34" charset="-120"/>
               </a:rPr>
-              <a:t>Balances sit behind the Leave balance toggle — open it for the chart, or read the totals on the row itself.</a:t>
+              <a:t>Faded, dashed bands mean overtime that is still waiting for supervisor approval.</a:t>
             </a:r>
             <a:endParaRPr lang="en-US" sz="1050" dirty="0"/>
           </a:p>
@@ -6446,7 +6624,7 @@
                 <a:ea typeface="Calibri" pitchFamily="34" charset="-122"/>
                 <a:cs typeface="Calibri" pitchFamily="34" charset="-120"/>
               </a:rPr>
-              <a:t>Leave approval and records</a:t>
+              <a:t>Apply for leave</a:t>
             </a:r>
             <a:endParaRPr lang="en-US" sz="3300" dirty="0"/>
           </a:p>
@@ -6488,7 +6666,7 @@
                 <a:ea typeface="Calibri" pitchFamily="34" charset="-122"/>
                 <a:cs typeface="Calibri" pitchFamily="34" charset="-120"/>
               </a:rPr>
-              <a:t>Approving a request writes a real leave record. That record, not the request, moves the balance.</a:t>
+              <a:t>Pick dates by dragging across a calendar rather than typing two dates into boxes.</a:t>
             </a:r>
             <a:endParaRPr lang="en-US" sz="1500" dirty="0"/>
           </a:p>
@@ -6618,7 +6796,7 @@
                 <a:ea typeface="Calibri" pitchFamily="34" charset="-122"/>
                 <a:cs typeface="Calibri" pitchFamily="34" charset="-120"/>
               </a:rPr>
-              <a:t>Pending queue with one-click approve or reject</a:t>
+              <a:t>Click a single day, or drag across a range</a:t>
             </a:r>
             <a:endParaRPr lang="en-US" sz="1400" dirty="0"/>
           </a:p>
@@ -6748,7 +6926,7 @@
                 <a:ea typeface="Calibri" pitchFamily="34" charset="-122"/>
                 <a:cs typeface="Calibri" pitchFamily="34" charset="-120"/>
               </a:rPr>
-              <a:t>Supervisors can also enter leave directly, with no request</a:t>
+              <a:t>Holidays, week-offs and existing leave are marked before you submit</a:t>
             </a:r>
             <a:endParaRPr lang="en-US" sz="1400" dirty="0"/>
           </a:p>
@@ -6878,7 +7056,7 @@
                 <a:ea typeface="Calibri" pitchFamily="34" charset="-122"/>
                 <a:cs typeface="Calibri" pitchFamily="34" charset="-120"/>
               </a:rPr>
-              <a:t>Rejection always requires a written remark</a:t>
+              <a:t>Half day appears only when the from and to dates match</a:t>
             </a:r>
             <a:endParaRPr lang="en-US" sz="1400" dirty="0"/>
           </a:p>
@@ -6986,7 +7164,7 @@
                 <a:ea typeface="Calibri" pitchFamily="34" charset="-122"/>
                 <a:cs typeface="Calibri" pitchFamily="34" charset="-120"/>
               </a:rPr>
-              <a:t>Supervisor</a:t>
+              <a:t>Employee</a:t>
             </a:r>
             <a:endParaRPr lang="en-US" sz="1500" dirty="0"/>
           </a:p>
@@ -7057,7 +7235,7 @@
                 <a:ea typeface="Calibri" pitchFamily="34" charset="-122"/>
                 <a:cs typeface="Calibri" pitchFamily="34" charset="-120"/>
               </a:rPr>
-              <a:t>HOW TO  —  SUPERVISOR</a:t>
+              <a:t>HOW TO  —  EMPLOYEE</a:t>
             </a:r>
             <a:endParaRPr lang="en-US" sz="1100" dirty="0"/>
           </a:p>
@@ -7096,7 +7274,7 @@
                 <a:ea typeface="Calibri" pitchFamily="34" charset="-122"/>
                 <a:cs typeface="Calibri" pitchFamily="34" charset="-120"/>
               </a:rPr>
-              <a:t>Leave approval and records</a:t>
+              <a:t>Apply for leave</a:t>
             </a:r>
             <a:endParaRPr lang="en-US" sz="2700" dirty="0"/>
           </a:p>
@@ -7204,7 +7382,35 @@
                 <a:ea typeface="Calibri" pitchFamily="34" charset="-122"/>
                 <a:cs typeface="Calibri" pitchFamily="34" charset="-120"/>
               </a:rPr>
-              <a:t>Leave &amp; Holidays</a:t>
+              <a:t>My Workforce</a:t>
+            </a:r>
+            <a:pPr indent="0" marL="0">
+              <a:buNone/>
+            </a:pPr>
+            <a:r>
+              <a:rPr lang="en-US" sz="1500" dirty="0">
+                <a:solidFill>
+                  <a:srgbClr val="F6C177"/>
+                </a:solidFill>
+                <a:latin typeface="Calibri" pitchFamily="34" charset="0"/>
+                <a:ea typeface="Calibri" pitchFamily="34" charset="-122"/>
+                <a:cs typeface="Calibri" pitchFamily="34" charset="-120"/>
+              </a:rPr>
+              <a:t>   ›   </a:t>
+            </a:r>
+            <a:pPr indent="0" marL="0">
+              <a:buNone/>
+            </a:pPr>
+            <a:r>
+              <a:rPr lang="en-US" sz="1500" b="1" dirty="0">
+                <a:solidFill>
+                  <a:srgbClr val="FFFFFF"/>
+                </a:solidFill>
+                <a:latin typeface="Calibri" pitchFamily="34" charset="0"/>
+                <a:ea typeface="Calibri" pitchFamily="34" charset="-122"/>
+                <a:cs typeface="Calibri" pitchFamily="34" charset="-120"/>
+              </a:rPr>
+              <a:t>Leave</a:t>
             </a:r>
             <a:endParaRPr lang="en-US" sz="1100" dirty="0"/>
           </a:p>
@@ -7307,7 +7513,7 @@
                 <a:ea typeface="Calibri" pitchFamily="34" charset="-122"/>
                 <a:cs typeface="Calibri" pitchFamily="34" charset="-120"/>
               </a:rPr>
-              <a:t>Open Workforce → Leave &amp; Holidays.</a:t>
+              <a:t>Open My Workforce → Leave. Your requests are the first thing you see.</a:t>
             </a:r>
             <a:endParaRPr lang="en-US" sz="1500" dirty="0"/>
           </a:p>
@@ -7410,7 +7616,7 @@
                 <a:ea typeface="Calibri" pitchFamily="34" charset="-122"/>
                 <a:cs typeface="Calibri" pitchFamily="34" charset="-120"/>
               </a:rPr>
-              <a:t>Filter the list to Pending.</a:t>
+              <a:t>Press + Request leave, then drag across the days you want.</a:t>
             </a:r>
             <a:endParaRPr lang="en-US" sz="1500" dirty="0"/>
           </a:p>
@@ -7513,7 +7719,7 @@
                 <a:ea typeface="Calibri" pitchFamily="34" charset="-122"/>
                 <a:cs typeface="Calibri" pitchFamily="34" charset="-120"/>
               </a:rPr>
-              <a:t>Approve or Reject each request — a remark is required to reject.</a:t>
+              <a:t>Pick the leave type and write a reason.</a:t>
             </a:r>
             <a:endParaRPr lang="en-US" sz="1500" dirty="0"/>
           </a:p>
@@ -7616,7 +7822,7 @@
                 <a:ea typeface="Calibri" pitchFamily="34" charset="-122"/>
                 <a:cs typeface="Calibri" pitchFamily="34" charset="-120"/>
               </a:rPr>
-              <a:t>Use Leave records below to add or remove leave directly.</a:t>
+              <a:t>Submit — it reaches your supervisor as Pending.</a:t>
             </a:r>
             <a:endParaRPr lang="en-US" sz="1500" dirty="0"/>
           </a:p>
@@ -7696,7 +7902,7 @@
                 <a:ea typeface="Calibri" pitchFamily="34" charset="-122"/>
                 <a:cs typeface="Calibri" pitchFamily="34" charset="-120"/>
               </a:rPr>
-              <a:t>Approved leave suppresses late and absent marks for every day it covers.</a:t>
+              <a:t>Balances sit behind the Leave balance toggle — open it for the chart, or read the totals on the row itself.</a:t>
             </a:r>
             <a:endParaRPr lang="en-US" sz="1050" dirty="0"/>
           </a:p>
@@ -7806,7 +8012,7 @@
                 <a:ea typeface="Calibri" pitchFamily="34" charset="-122"/>
                 <a:cs typeface="Calibri" pitchFamily="34" charset="-120"/>
               </a:rPr>
-              <a:t>Attendance corrections</a:t>
+              <a:t>Leave approval and records</a:t>
             </a:r>
             <a:endParaRPr lang="en-US" sz="3300" dirty="0"/>
           </a:p>
@@ -7848,7 +8054,7 @@
                 <a:ea typeface="Calibri" pitchFamily="34" charset="-122"/>
                 <a:cs typeface="Calibri" pitchFamily="34" charset="-120"/>
               </a:rPr>
-              <a:t>Employees ask for a fix. Only a supervisor's approval actually changes attendance.</a:t>
+              <a:t>Approving a request writes a real leave record. That record, not the request, moves the balance.</a:t>
             </a:r>
             <a:endParaRPr lang="en-US" sz="1500" dirty="0"/>
           </a:p>
@@ -7978,7 +8184,7 @@
                 <a:ea typeface="Calibri" pitchFamily="34" charset="-122"/>
                 <a:cs typeface="Calibri" pitchFamily="34" charset="-120"/>
               </a:rPr>
-              <a:t>Missing check-in, missing check-out, wrong time, or other</a:t>
+              <a:t>Pending queue with one-click approve or reject</a:t>
             </a:r>
             <a:endParaRPr lang="en-US" sz="1400" dirty="0"/>
           </a:p>
@@ -8108,7 +8314,7 @@
                 <a:ea typeface="Calibri" pitchFamily="34" charset="-122"/>
                 <a:cs typeface="Calibri" pitchFamily="34" charset="-120"/>
               </a:rPr>
-              <a:t>Approval adds a new event and supersedes the old one</a:t>
+              <a:t>Supervisors can also enter leave directly, with no request</a:t>
             </a:r>
             <a:endParaRPr lang="en-US" sz="1400" dirty="0"/>
           </a:p>
@@ -8238,7 +8444,7 @@
                 <a:ea typeface="Calibri" pitchFamily="34" charset="-122"/>
                 <a:cs typeface="Calibri" pitchFamily="34" charset="-120"/>
               </a:rPr>
-              <a:t>The proposed time must fall on the day being corrected</a:t>
+              <a:t>Rejection always requires a written remark</a:t>
             </a:r>
             <a:endParaRPr lang="en-US" sz="1400" dirty="0"/>
           </a:p>
@@ -8346,27 +8552,7 @@
                 <a:ea typeface="Calibri" pitchFamily="34" charset="-122"/>
                 <a:cs typeface="Calibri" pitchFamily="34" charset="-120"/>
               </a:rPr>
-              <a:t>Employee files</a:t>
-            </a:r>
-            <a:endParaRPr lang="en-US" sz="1500" dirty="0"/>
-          </a:p>
-          <a:p>
-            <a:pPr indent="0" marL="0">
-              <a:spcAft>
-                <a:spcPts val="800"/>
-              </a:spcAft>
-              <a:buNone/>
-            </a:pPr>
-            <a:r>
-              <a:rPr lang="en-US" sz="1500" b="1" dirty="0">
-                <a:solidFill>
-                  <a:srgbClr val="FFFFFF"/>
-                </a:solidFill>
-                <a:latin typeface="Calibri" pitchFamily="34" charset="0"/>
-                <a:ea typeface="Calibri" pitchFamily="34" charset="-122"/>
-                <a:cs typeface="Calibri" pitchFamily="34" charset="-120"/>
-              </a:rPr>
-              <a:t>Supervisor approves</a:t>
+              <a:t>Supervisor</a:t>
             </a:r>
             <a:endParaRPr lang="en-US" sz="1500" dirty="0"/>
           </a:p>
@@ -8437,7 +8623,7 @@
                 <a:ea typeface="Calibri" pitchFamily="34" charset="-122"/>
                 <a:cs typeface="Calibri" pitchFamily="34" charset="-120"/>
               </a:rPr>
-              <a:t>HOW TO  —  EMPLOYEE + SUPERVISOR</a:t>
+              <a:t>HOW TO  —  SUPERVISOR</a:t>
             </a:r>
             <a:endParaRPr lang="en-US" sz="1100" dirty="0"/>
           </a:p>
@@ -8476,7 +8662,7 @@
                 <a:ea typeface="Calibri" pitchFamily="34" charset="-122"/>
                 <a:cs typeface="Calibri" pitchFamily="34" charset="-120"/>
               </a:rPr>
-              <a:t>Attendance corrections</a:t>
+              <a:t>Leave approval and records</a:t>
             </a:r>
             <a:endParaRPr lang="en-US" sz="2700" dirty="0"/>
           </a:p>
@@ -8584,7 +8770,7 @@
                 <a:ea typeface="Calibri" pitchFamily="34" charset="-122"/>
                 <a:cs typeface="Calibri" pitchFamily="34" charset="-120"/>
               </a:rPr>
-              <a:t>Corrections</a:t>
+              <a:t>Leave &amp; Holidays</a:t>
             </a:r>
             <a:endParaRPr lang="en-US" sz="1100" dirty="0"/>
           </a:p>
@@ -8687,7 +8873,7 @@
                 <a:ea typeface="Calibri" pitchFamily="34" charset="-122"/>
                 <a:cs typeface="Calibri" pitchFamily="34" charset="-120"/>
               </a:rPr>
-              <a:t>Employee opens My Workforce → Time, or a day in the Timeline.</a:t>
+              <a:t>Open Workforce → Leave &amp; Holidays.</a:t>
             </a:r>
             <a:endParaRPr lang="en-US" sz="1500" dirty="0"/>
           </a:p>
@@ -8790,7 +8976,7 @@
                 <a:ea typeface="Calibri" pitchFamily="34" charset="-122"/>
                 <a:cs typeface="Calibri" pitchFamily="34" charset="-120"/>
               </a:rPr>
-              <a:t>Files the correction with the proposed time and a reason.</a:t>
+              <a:t>Filter the list to Pending.</a:t>
             </a:r>
             <a:endParaRPr lang="en-US" sz="1500" dirty="0"/>
           </a:p>
@@ -8893,7 +9079,7 @@
                 <a:ea typeface="Calibri" pitchFamily="34" charset="-122"/>
                 <a:cs typeface="Calibri" pitchFamily="34" charset="-120"/>
               </a:rPr>
-              <a:t>Supervisor opens Workforce → Corrections.</a:t>
+              <a:t>Approve or Reject each request — a remark is required to reject.</a:t>
             </a:r>
             <a:endParaRPr lang="en-US" sz="1500" dirty="0"/>
           </a:p>
@@ -8996,7 +9182,7 @@
                 <a:ea typeface="Calibri" pitchFamily="34" charset="-122"/>
                 <a:cs typeface="Calibri" pitchFamily="34" charset="-120"/>
               </a:rPr>
-              <a:t>Approve or Reject, with a remark.</a:t>
+              <a:t>Use Leave records below to add or remove leave directly.</a:t>
             </a:r>
             <a:endParaRPr lang="en-US" sz="1500" dirty="0"/>
           </a:p>
@@ -9076,7 +9262,7 @@
                 <a:ea typeface="Calibri" pitchFamily="34" charset="-122"/>
                 <a:cs typeface="Calibri" pitchFamily="34" charset="-120"/>
               </a:rPr>
-              <a:t>Filing changes nothing — attendance moves only on approval. A “wrong time” correction now moves the punch it names; previously it was approved but changed nothing.</a:t>
+              <a:t>Approved leave suppresses late and absent marks for every day it covers.</a:t>
             </a:r>
             <a:endParaRPr lang="en-US" sz="1050" dirty="0"/>
           </a:p>
@@ -9186,7 +9372,7 @@
                 <a:ea typeface="Calibri" pitchFamily="34" charset="-122"/>
                 <a:cs typeface="Calibri" pitchFamily="34" charset="-120"/>
               </a:rPr>
-              <a:t>Recheck requests</a:t>
+              <a:t>Attendance corrections</a:t>
             </a:r>
             <a:endParaRPr lang="en-US" sz="3300" dirty="0"/>
           </a:p>
@@ -9228,7 +9414,7 @@
                 <a:ea typeface="Calibri" pitchFamily="34" charset="-122"/>
                 <a:cs typeface="Calibri" pitchFamily="34" charset="-120"/>
               </a:rPr>
-              <a:t>The reverse direction — a supervisor flags a punch and asks the employee to explain it.</a:t>
+              <a:t>Employees ask for a fix. Only a supervisor's approval actually changes attendance.</a:t>
             </a:r>
             <a:endParaRPr lang="en-US" sz="1500" dirty="0"/>
           </a:p>
@@ -9358,7 +9544,7 @@
                 <a:ea typeface="Calibri" pitchFamily="34" charset="-122"/>
                 <a:cs typeface="Calibri" pitchFamily="34" charset="-120"/>
               </a:rPr>
-              <a:t>Flag a single punch or an entire day</a:t>
+              <a:t>Missing check-in, missing check-out, wrong time, or other</a:t>
             </a:r>
             <a:endParaRPr lang="en-US" sz="1400" dirty="0"/>
           </a:p>
@@ -9488,7 +9674,7 @@
                 <a:ea typeface="Calibri" pitchFamily="34" charset="-122"/>
                 <a:cs typeface="Calibri" pitchFamily="34" charset="-120"/>
               </a:rPr>
-              <a:t>Ask about the time, the selfie, or both</a:t>
+              <a:t>Approval adds a new event and supersedes the old one</a:t>
             </a:r>
             <a:endParaRPr lang="en-US" sz="1400" dirty="0"/>
           </a:p>
@@ -9618,7 +9804,7 @@
                 <a:ea typeface="Calibri" pitchFamily="34" charset="-122"/>
                 <a:cs typeface="Calibri" pitchFamily="34" charset="-120"/>
               </a:rPr>
-              <a:t>The employee replies; a real fix still needs a correction</a:t>
+              <a:t>The proposed time must fall on the day being corrected</a:t>
             </a:r>
             <a:endParaRPr lang="en-US" sz="1400" dirty="0"/>
           </a:p>
@@ -9726,7 +9912,7 @@
                 <a:ea typeface="Calibri" pitchFamily="34" charset="-122"/>
                 <a:cs typeface="Calibri" pitchFamily="34" charset="-120"/>
               </a:rPr>
-              <a:t>Supervisor flags</a:t>
+              <a:t>Employee files</a:t>
             </a:r>
             <a:endParaRPr lang="en-US" sz="1500" dirty="0"/>
           </a:p>
@@ -9746,7 +9932,7 @@
                 <a:ea typeface="Calibri" pitchFamily="34" charset="-122"/>
                 <a:cs typeface="Calibri" pitchFamily="34" charset="-120"/>
               </a:rPr>
-              <a:t>Employee responds</a:t>
+              <a:t>Supervisor approves</a:t>
             </a:r>
             <a:endParaRPr lang="en-US" sz="1500" dirty="0"/>
           </a:p>
@@ -9817,7 +10003,7 @@
                 <a:ea typeface="Calibri" pitchFamily="34" charset="-122"/>
                 <a:cs typeface="Calibri" pitchFamily="34" charset="-120"/>
               </a:rPr>
-              <a:t>HOW TO  —  SUPERVISOR</a:t>
+              <a:t>HOW TO  —  EMPLOYEE + SUPERVISOR</a:t>
             </a:r>
             <a:endParaRPr lang="en-US" sz="1100" dirty="0"/>
           </a:p>
@@ -9856,7 +10042,7 @@
                 <a:ea typeface="Calibri" pitchFamily="34" charset="-122"/>
                 <a:cs typeface="Calibri" pitchFamily="34" charset="-120"/>
               </a:rPr>
-              <a:t>Recheck requests</a:t>
+              <a:t>Attendance corrections</a:t>
             </a:r>
             <a:endParaRPr lang="en-US" sz="2700" dirty="0"/>
           </a:p>
@@ -9966,34 +10152,6 @@
               </a:rPr>
               <a:t>Corrections</a:t>
             </a:r>
-            <a:pPr indent="0" marL="0">
-              <a:buNone/>
-            </a:pPr>
-            <a:r>
-              <a:rPr lang="en-US" sz="1500" dirty="0">
-                <a:solidFill>
-                  <a:srgbClr val="F6C177"/>
-                </a:solidFill>
-                <a:latin typeface="Calibri" pitchFamily="34" charset="0"/>
-                <a:ea typeface="Calibri" pitchFamily="34" charset="-122"/>
-                <a:cs typeface="Calibri" pitchFamily="34" charset="-120"/>
-              </a:rPr>
-              <a:t>   ›   </a:t>
-            </a:r>
-            <a:pPr indent="0" marL="0">
-              <a:buNone/>
-            </a:pPr>
-            <a:r>
-              <a:rPr lang="en-US" sz="1500" b="1" dirty="0">
-                <a:solidFill>
-                  <a:srgbClr val="FFFFFF"/>
-                </a:solidFill>
-                <a:latin typeface="Calibri" pitchFamily="34" charset="0"/>
-                <a:ea typeface="Calibri" pitchFamily="34" charset="-122"/>
-                <a:cs typeface="Calibri" pitchFamily="34" charset="-120"/>
-              </a:rPr>
-              <a:t>Recheck requests</a:t>
-            </a:r>
             <a:endParaRPr lang="en-US" sz="1100" dirty="0"/>
           </a:p>
         </p:txBody>
@@ -10095,7 +10253,7 @@
                 <a:ea typeface="Calibri" pitchFamily="34" charset="-122"/>
                 <a:cs typeface="Calibri" pitchFamily="34" charset="-120"/>
               </a:rPr>
-              <a:t>Open Workforce → Corrections → Recheck requests.</a:t>
+              <a:t>Employee opens My Workforce → Time, or a day in the Timeline.</a:t>
             </a:r>
             <a:endParaRPr lang="en-US" sz="1500" dirty="0"/>
           </a:p>
@@ -10198,7 +10356,7 @@
                 <a:ea typeface="Calibri" pitchFamily="34" charset="-122"/>
                 <a:cs typeface="Calibri" pitchFamily="34" charset="-120"/>
               </a:rPr>
-              <a:t>Choose the employee, the date, and what to recheck.</a:t>
+              <a:t>Files the correction with the proposed time and a reason.</a:t>
             </a:r>
             <a:endParaRPr lang="en-US" sz="1500" dirty="0"/>
           </a:p>
@@ -10301,7 +10459,7 @@
                 <a:ea typeface="Calibri" pitchFamily="34" charset="-122"/>
                 <a:cs typeface="Calibri" pitchFamily="34" charset="-120"/>
               </a:rPr>
-              <a:t>Write the message and send — the employee is emailed.</a:t>
+              <a:t>Supervisor opens Workforce → Corrections.</a:t>
             </a:r>
             <a:endParaRPr lang="en-US" sz="1500" dirty="0"/>
           </a:p>
@@ -10404,7 +10562,7 @@
                 <a:ea typeface="Calibri" pitchFamily="34" charset="-122"/>
                 <a:cs typeface="Calibri" pitchFamily="34" charset="-120"/>
               </a:rPr>
-              <a:t>The employee replies from My Workforce; you then resolve or dismiss it.</a:t>
+              <a:t>Approve or Reject, with a remark.</a:t>
             </a:r>
             <a:endParaRPr lang="en-US" sz="1500" dirty="0"/>
           </a:p>
@@ -10484,7 +10642,7 @@
                 <a:ea typeface="Calibri" pitchFamily="34" charset="-122"/>
                 <a:cs typeface="Calibri" pitchFamily="34" charset="-120"/>
               </a:rPr>
-              <a:t>A recheck never alters attendance by itself — it only opens the conversation.</a:t>
+              <a:t>Filing changes nothing — attendance moves only on approval. A “wrong time” correction now moves the punch it names; previously it was approved but changed nothing.</a:t>
             </a:r>
             <a:endParaRPr lang="en-US" sz="1050" dirty="0"/>
           </a:p>
@@ -10594,7 +10752,7 @@
                 <a:ea typeface="Calibri" pitchFamily="34" charset="-122"/>
                 <a:cs typeface="Calibri" pitchFamily="34" charset="-120"/>
               </a:rPr>
-              <a:t>Roster and shift planning</a:t>
+              <a:t>Recheck requests</a:t>
             </a:r>
             <a:endParaRPr lang="en-US" sz="3300" dirty="0"/>
           </a:p>
@@ -10636,7 +10794,7 @@
                 <a:ea typeface="Calibri" pitchFamily="34" charset="-122"/>
                 <a:cs typeface="Calibri" pitchFamily="34" charset="-120"/>
               </a:rPr>
-              <a:t>Bulk shift and site planning layered on top of everyone's standing shift.</a:t>
+              <a:t>A supervisor queries a punch and asks the employee to explain it — the mirror of a correction.</a:t>
             </a:r>
             <a:endParaRPr lang="en-US" sz="1500" dirty="0"/>
           </a:p>
@@ -10766,7 +10924,7 @@
                 <a:ea typeface="Calibri" pitchFamily="34" charset="-122"/>
                 <a:cs typeface="Calibri" pitchFamily="34" charset="-120"/>
               </a:rPr>
-              <a:t>Assign many employees across many dates in one action</a:t>
+              <a:t>Flag a single punch or an entire day</a:t>
             </a:r>
             <a:endParaRPr lang="en-US" sz="1400" dirty="0"/>
           </a:p>
@@ -10896,7 +11054,7 @@
                 <a:ea typeface="Calibri" pitchFamily="34" charset="-122"/>
                 <a:cs typeface="Calibri" pitchFamily="34" charset="-120"/>
               </a:rPr>
-              <a:t>Mark days off — no lateness or absence is marked on those</a:t>
+              <a:t>Ask about the time, the selfie, or both</a:t>
             </a:r>
             <a:endParaRPr lang="en-US" sz="1400" dirty="0"/>
           </a:p>
@@ -11026,7 +11184,7 @@
                 <a:ea typeface="Calibri" pitchFamily="34" charset="-122"/>
                 <a:cs typeface="Calibri" pitchFamily="34" charset="-120"/>
               </a:rPr>
-              <a:t>The roster now decides who counts as late, not the standing shift</a:t>
+              <a:t>Attendance never changes from a recheck alone — a fix still needs a correction</a:t>
             </a:r>
             <a:endParaRPr lang="en-US" sz="1400" dirty="0"/>
           </a:p>
@@ -11134,7 +11292,27 @@
                 <a:ea typeface="Calibri" pitchFamily="34" charset="-122"/>
                 <a:cs typeface="Calibri" pitchFamily="34" charset="-120"/>
               </a:rPr>
-              <a:t>Supervisor</a:t>
+              <a:t>Supervisor flags</a:t>
+            </a:r>
+            <a:endParaRPr lang="en-US" sz="1500" dirty="0"/>
+          </a:p>
+          <a:p>
+            <a:pPr indent="0" marL="0">
+              <a:spcAft>
+                <a:spcPts val="800"/>
+              </a:spcAft>
+              <a:buNone/>
+            </a:pPr>
+            <a:r>
+              <a:rPr lang="en-US" sz="1500" b="1" dirty="0">
+                <a:solidFill>
+                  <a:srgbClr val="FFFFFF"/>
+                </a:solidFill>
+                <a:latin typeface="Calibri" pitchFamily="34" charset="0"/>
+                <a:ea typeface="Calibri" pitchFamily="34" charset="-122"/>
+                <a:cs typeface="Calibri" pitchFamily="34" charset="-120"/>
+              </a:rPr>
+              <a:t>Employee responds</a:t>
             </a:r>
             <a:endParaRPr lang="en-US" sz="1500" dirty="0"/>
           </a:p>
@@ -12780,7 +12958,7 @@
                 <a:ea typeface="Calibri" pitchFamily="34" charset="-122"/>
                 <a:cs typeface="Calibri" pitchFamily="34" charset="-120"/>
               </a:rPr>
-              <a:t>Roster and shift planning</a:t>
+              <a:t>Recheck requests</a:t>
             </a:r>
             <a:endParaRPr lang="en-US" sz="2700" dirty="0"/>
           </a:p>
@@ -12888,7 +13066,35 @@
                 <a:ea typeface="Calibri" pitchFamily="34" charset="-122"/>
                 <a:cs typeface="Calibri" pitchFamily="34" charset="-120"/>
               </a:rPr>
-              <a:t>Roster</a:t>
+              <a:t>Corrections</a:t>
+            </a:r>
+            <a:pPr indent="0" marL="0">
+              <a:buNone/>
+            </a:pPr>
+            <a:r>
+              <a:rPr lang="en-US" sz="1500" dirty="0">
+                <a:solidFill>
+                  <a:srgbClr val="F6C177"/>
+                </a:solidFill>
+                <a:latin typeface="Calibri" pitchFamily="34" charset="0"/>
+                <a:ea typeface="Calibri" pitchFamily="34" charset="-122"/>
+                <a:cs typeface="Calibri" pitchFamily="34" charset="-120"/>
+              </a:rPr>
+              <a:t>   ›   </a:t>
+            </a:r>
+            <a:pPr indent="0" marL="0">
+              <a:buNone/>
+            </a:pPr>
+            <a:r>
+              <a:rPr lang="en-US" sz="1500" b="1" dirty="0">
+                <a:solidFill>
+                  <a:srgbClr val="FFFFFF"/>
+                </a:solidFill>
+                <a:latin typeface="Calibri" pitchFamily="34" charset="0"/>
+                <a:ea typeface="Calibri" pitchFamily="34" charset="-122"/>
+                <a:cs typeface="Calibri" pitchFamily="34" charset="-120"/>
+              </a:rPr>
+              <a:t>Recheck requests</a:t>
             </a:r>
             <a:endParaRPr lang="en-US" sz="1100" dirty="0"/>
           </a:p>
@@ -12991,7 +13197,7 @@
                 <a:ea typeface="Calibri" pitchFamily="34" charset="-122"/>
                 <a:cs typeface="Calibri" pitchFamily="34" charset="-120"/>
               </a:rPr>
-              <a:t>Open Workforce → Roster.</a:t>
+              <a:t>Open Workforce → Corrections → Recheck requests.</a:t>
             </a:r>
             <a:endParaRPr lang="en-US" sz="1500" dirty="0"/>
           </a:p>
@@ -13094,7 +13300,7 @@
                 <a:ea typeface="Calibri" pitchFamily="34" charset="-122"/>
                 <a:cs typeface="Calibri" pitchFamily="34" charset="-120"/>
               </a:rPr>
-              <a:t>Select the employees, then tick the dates.</a:t>
+              <a:t>Choose the employee, the date, and what to recheck.</a:t>
             </a:r>
             <a:endParaRPr lang="en-US" sz="1500" dirty="0"/>
           </a:p>
@@ -13197,7 +13403,7 @@
                 <a:ea typeface="Calibri" pitchFamily="34" charset="-122"/>
                 <a:cs typeface="Calibri" pitchFamily="34" charset="-120"/>
               </a:rPr>
-              <a:t>Choose the shift, or mark the days as Day off, and optionally a site.</a:t>
+              <a:t>Write the message and send — the employee is emailed.</a:t>
             </a:r>
             <a:endParaRPr lang="en-US" sz="1500" dirty="0"/>
           </a:p>
@@ -13300,7 +13506,7 @@
                 <a:ea typeface="Calibri" pitchFamily="34" charset="-122"/>
                 <a:cs typeface="Calibri" pitchFamily="34" charset="-120"/>
               </a:rPr>
-              <a:t>Apply — any existing entry for those dates is overwritten.</a:t>
+              <a:t>The employee replies from My Workforce; you then resolve or dismiss it.</a:t>
             </a:r>
             <a:endParaRPr lang="en-US" sz="1500" dirty="0"/>
           </a:p>
@@ -13380,7 +13586,7 @@
                 <a:ea typeface="Calibri" pitchFamily="34" charset="-122"/>
                 <a:cs typeface="Calibri" pitchFamily="34" charset="-120"/>
               </a:rPr>
-              <a:t>Roster someone onto a different shift and lateness follows it the same day. Limits per action: 500 employees, 62 dates, 3000 combinations.</a:t>
+              <a:t>Why it exists: punches are append-only, so a supervisor cannot simply edit one they doubt. This is how they ask.</a:t>
             </a:r>
             <a:endParaRPr lang="en-US" sz="1050" dirty="0"/>
           </a:p>
@@ -13490,7 +13696,7 @@
                 <a:ea typeface="Calibri" pitchFamily="34" charset="-122"/>
                 <a:cs typeface="Calibri" pitchFamily="34" charset="-120"/>
               </a:rPr>
-              <a:t>Live board</a:t>
+              <a:t>Roster and shift planning</a:t>
             </a:r>
             <a:endParaRPr lang="en-US" sz="3300" dirty="0"/>
           </a:p>
@@ -13532,7 +13738,7 @@
                 <a:ea typeface="Calibri" pitchFamily="34" charset="-122"/>
                 <a:cs typeface="Calibri" pitchFamily="34" charset="-120"/>
               </a:rPr>
-              <a:t>Who is in, who is late and who has not arrived — for today, at a glance.</a:t>
+              <a:t>Bulk shift and site planning layered on top of everyone's standing shift.</a:t>
             </a:r>
             <a:endParaRPr lang="en-US" sz="1500" dirty="0"/>
           </a:p>
@@ -13662,7 +13868,7 @@
                 <a:ea typeface="Calibri" pitchFamily="34" charset="-122"/>
                 <a:cs typeface="Calibri" pitchFamily="34" charset="-120"/>
               </a:rPr>
-              <a:t>State, first in and last out for every employee</a:t>
+              <a:t>Assign many employees across many dates in one action</a:t>
             </a:r>
             <a:endParaRPr lang="en-US" sz="1400" dirty="0"/>
           </a:p>
@@ -13792,7 +13998,7 @@
                 <a:ea typeface="Calibri" pitchFamily="34" charset="-122"/>
                 <a:cs typeface="Calibri" pitchFamily="34" charset="-120"/>
               </a:rPr>
-              <a:t>Late and absent computed against the shift and its grace</a:t>
+              <a:t>Mark days off — no lateness or absence is marked on those</a:t>
             </a:r>
             <a:endParaRPr lang="en-US" sz="1400" dirty="0"/>
           </a:p>
@@ -13922,7 +14128,7 @@
                 <a:ea typeface="Calibri" pitchFamily="34" charset="-122"/>
                 <a:cs typeface="Calibri" pitchFamily="34" charset="-120"/>
               </a:rPr>
-              <a:t>Geofence flags surfaced on the row</a:t>
+              <a:t>The roster now decides who counts as late, not the standing shift</a:t>
             </a:r>
             <a:endParaRPr lang="en-US" sz="1400" dirty="0"/>
           </a:p>
@@ -14140,7 +14346,7 @@
                 <a:ea typeface="Calibri" pitchFamily="34" charset="-122"/>
                 <a:cs typeface="Calibri" pitchFamily="34" charset="-120"/>
               </a:rPr>
-              <a:t>Live board</a:t>
+              <a:t>Roster and shift planning</a:t>
             </a:r>
             <a:endParaRPr lang="en-US" sz="2700" dirty="0"/>
           </a:p>
@@ -14248,7 +14454,7 @@
                 <a:ea typeface="Calibri" pitchFamily="34" charset="-122"/>
                 <a:cs typeface="Calibri" pitchFamily="34" charset="-120"/>
               </a:rPr>
-              <a:t>Live board</a:t>
+              <a:t>Roster</a:t>
             </a:r>
             <a:endParaRPr lang="en-US" sz="1100" dirty="0"/>
           </a:p>
@@ -14351,7 +14557,7 @@
                 <a:ea typeface="Calibri" pitchFamily="34" charset="-122"/>
                 <a:cs typeface="Calibri" pitchFamily="34" charset="-120"/>
               </a:rPr>
-              <a:t>Open Workforce → Live board.</a:t>
+              <a:t>Open Workforce → Roster.</a:t>
             </a:r>
             <a:endParaRPr lang="en-US" sz="1500" dirty="0"/>
           </a:p>
@@ -14454,7 +14660,7 @@
                 <a:ea typeface="Calibri" pitchFamily="34" charset="-122"/>
                 <a:cs typeface="Calibri" pitchFamily="34" charset="-120"/>
               </a:rPr>
-              <a:t>Leave it open — it refreshes roughly every 30 seconds on its own.</a:t>
+              <a:t>Select the employees, then tick the dates.</a:t>
             </a:r>
             <a:endParaRPr lang="en-US" sz="1500" dirty="0"/>
           </a:p>
@@ -14557,7 +14763,7 @@
                 <a:ea typeface="Calibri" pitchFamily="34" charset="-122"/>
                 <a:cs typeface="Calibri" pitchFamily="34" charset="-120"/>
               </a:rPr>
-              <a:t>Click a row to see that person's punches, selfies and map positions.</a:t>
+              <a:t>Choose the shift, or mark the days as Day off, and optionally a site.</a:t>
             </a:r>
             <a:endParaRPr lang="en-US" sz="1500" dirty="0"/>
           </a:p>
@@ -14566,6 +14772,109 @@
       <p:sp>
         <p:nvSpPr>
           <p:cNvPr id="15" name="Shape 13"/>
+          <p:cNvSpPr/>
+          <p:nvPr/>
+        </p:nvSpPr>
+        <p:spPr>
+          <a:xfrm>
+            <a:off x="585216" y="4297680"/>
+            <a:ext cx="384048" cy="384048"/>
+          </a:xfrm>
+          <a:prstGeom prst="ellipse">
+            <a:avLst/>
+          </a:prstGeom>
+          <a:solidFill>
+            <a:srgbClr val="E08A2E"/>
+          </a:solidFill>
+          <a:ln w="12700">
+            <a:solidFill>
+              <a:srgbClr val="E08A2E"/>
+            </a:solidFill>
+            <a:prstDash val="solid"/>
+          </a:ln>
+        </p:spPr>
+      </p:sp>
+      <p:sp>
+        <p:nvSpPr>
+          <p:cNvPr id="16" name="Text 14"/>
+          <p:cNvSpPr/>
+          <p:nvPr/>
+        </p:nvSpPr>
+        <p:spPr>
+          <a:xfrm>
+            <a:off x="585216" y="4297680"/>
+            <a:ext cx="384048" cy="384048"/>
+          </a:xfrm>
+          <a:prstGeom prst="rect">
+            <a:avLst/>
+          </a:prstGeom>
+          <a:noFill/>
+          <a:ln/>
+        </p:spPr>
+        <p:txBody>
+          <a:bodyPr wrap="square" lIns="0" tIns="0" rIns="0" bIns="0" rtlCol="0" anchor="ctr"/>
+          <a:lstStyle/>
+          <a:p>
+            <a:pPr algn="ctr" indent="0" marL="0">
+              <a:buNone/>
+            </a:pPr>
+            <a:r>
+              <a:rPr lang="en-US" sz="1300" b="1" dirty="0">
+                <a:solidFill>
+                  <a:srgbClr val="0E1A28"/>
+                </a:solidFill>
+                <a:latin typeface="Calibri" pitchFamily="34" charset="0"/>
+                <a:ea typeface="Calibri" pitchFamily="34" charset="-122"/>
+                <a:cs typeface="Calibri" pitchFamily="34" charset="-120"/>
+              </a:rPr>
+              <a:t>4</a:t>
+            </a:r>
+            <a:endParaRPr lang="en-US" sz="1300" dirty="0"/>
+          </a:p>
+        </p:txBody>
+      </p:sp>
+      <p:sp>
+        <p:nvSpPr>
+          <p:cNvPr id="17" name="Text 15"/>
+          <p:cNvSpPr/>
+          <p:nvPr/>
+        </p:nvSpPr>
+        <p:spPr>
+          <a:xfrm>
+            <a:off x="1170432" y="4261104"/>
+            <a:ext cx="10424160" cy="457200"/>
+          </a:xfrm>
+          <a:prstGeom prst="rect">
+            <a:avLst/>
+          </a:prstGeom>
+          <a:noFill/>
+          <a:ln/>
+        </p:spPr>
+        <p:txBody>
+          <a:bodyPr wrap="square" lIns="0" tIns="0" rIns="0" bIns="0" rtlCol="0" anchor="ctr"/>
+          <a:lstStyle/>
+          <a:p>
+            <a:pPr indent="0" marL="0">
+              <a:buNone/>
+            </a:pPr>
+            <a:r>
+              <a:rPr lang="en-US" sz="1500" dirty="0">
+                <a:solidFill>
+                  <a:srgbClr val="F0F3F6"/>
+                </a:solidFill>
+                <a:latin typeface="Calibri" pitchFamily="34" charset="0"/>
+                <a:ea typeface="Calibri" pitchFamily="34" charset="-122"/>
+                <a:cs typeface="Calibri" pitchFamily="34" charset="-120"/>
+              </a:rPr>
+              <a:t>Apply — any existing entry for those dates is overwritten.</a:t>
+            </a:r>
+            <a:endParaRPr lang="en-US" sz="1500" dirty="0"/>
+          </a:p>
+        </p:txBody>
+      </p:sp>
+      <p:sp>
+        <p:nvSpPr>
+          <p:cNvPr id="18" name="Shape 16"/>
           <p:cNvSpPr/>
           <p:nvPr/>
         </p:nvSpPr>
@@ -14592,7 +14901,7 @@
       </p:sp>
       <p:sp>
         <p:nvSpPr>
-          <p:cNvPr id="16" name="Text 14"/>
+          <p:cNvPr id="19" name="Text 17"/>
           <p:cNvSpPr/>
           <p:nvPr/>
         </p:nvSpPr>
@@ -14637,7 +14946,7 @@
                 <a:ea typeface="Calibri" pitchFamily="34" charset="-122"/>
                 <a:cs typeface="Calibri" pitchFamily="34" charset="-120"/>
               </a:rPr>
-              <a:t>The fastest way to catch a missing check-out before it turns into a correction request.</a:t>
+              <a:t>Roster someone onto a different shift and lateness follows it the same day. Limits per action: 500 employees, 62 dates, 3000 combinations.</a:t>
             </a:r>
             <a:endParaRPr lang="en-US" sz="1050" dirty="0"/>
           </a:p>
@@ -14747,7 +15056,7 @@
                 <a:ea typeface="Calibri" pitchFamily="34" charset="-122"/>
                 <a:cs typeface="Calibri" pitchFamily="34" charset="-120"/>
               </a:rPr>
-              <a:t>Who sees and approves what</a:t>
+              <a:t>Live board</a:t>
             </a:r>
             <a:endParaRPr lang="en-US" sz="3300" dirty="0"/>
           </a:p>
@@ -14789,7 +15098,7 @@
                 <a:ea typeface="Calibri" pitchFamily="34" charset="-122"/>
                 <a:cs typeface="Calibri" pitchFamily="34" charset="-120"/>
               </a:rPr>
-              <a:t>Each site has one supervisor, and they handle that site's people — nobody else's.</a:t>
+              <a:t>Who is in, who is late and who has not arrived — for today, at a glance.</a:t>
             </a:r>
             <a:endParaRPr lang="en-US" sz="1500" dirty="0"/>
           </a:p>
@@ -14919,7 +15228,7 @@
                 <a:ea typeface="Calibri" pitchFamily="34" charset="-122"/>
                 <a:cs typeface="Calibri" pitchFamily="34" charset="-120"/>
               </a:rPr>
-              <a:t>Your approver is whoever runs the site you're assigned to</a:t>
+              <a:t>State, first in and last out for every employee</a:t>
             </a:r>
             <a:endParaRPr lang="en-US" sz="1400" dirty="0"/>
           </a:p>
@@ -15049,7 +15358,7 @@
                 <a:ea typeface="Calibri" pitchFamily="34" charset="-122"/>
                 <a:cs typeface="Calibri" pitchFamily="34" charset="-120"/>
               </a:rPr>
-              <a:t>Move site next month and approvals follow, with no re-mapping</a:t>
+              <a:t>Late and absent computed against the shift and its grace</a:t>
             </a:r>
             <a:endParaRPr lang="en-US" sz="1400" dirty="0"/>
           </a:p>
@@ -15179,7 +15488,7 @@
                 <a:ea typeface="Calibri" pitchFamily="34" charset="-122"/>
                 <a:cs typeface="Calibri" pitchFamily="34" charset="-120"/>
               </a:rPr>
-              <a:t>A manager sees every site beneath them, and their supervisors too</a:t>
+              <a:t>Geofence flags surfaced on the row</a:t>
             </a:r>
             <a:endParaRPr lang="en-US" sz="1400" dirty="0"/>
           </a:p>
@@ -15287,27 +15596,7 @@
                 <a:ea typeface="Calibri" pitchFamily="34" charset="-122"/>
                 <a:cs typeface="Calibri" pitchFamily="34" charset="-120"/>
               </a:rPr>
-              <a:t>Admin sets it up</a:t>
-            </a:r>
-            <a:endParaRPr lang="en-US" sz="1500" dirty="0"/>
-          </a:p>
-          <a:p>
-            <a:pPr indent="0" marL="0">
-              <a:spcAft>
-                <a:spcPts val="800"/>
-              </a:spcAft>
-              <a:buNone/>
-            </a:pPr>
-            <a:r>
-              <a:rPr lang="en-US" sz="1500" b="1" dirty="0">
-                <a:solidFill>
-                  <a:srgbClr val="FFFFFF"/>
-                </a:solidFill>
-                <a:latin typeface="Calibri" pitchFamily="34" charset="0"/>
-                <a:ea typeface="Calibri" pitchFamily="34" charset="-122"/>
-                <a:cs typeface="Calibri" pitchFamily="34" charset="-120"/>
-              </a:rPr>
-              <a:t>Everyone is scoped by it</a:t>
+              <a:t>Supervisor</a:t>
             </a:r>
             <a:endParaRPr lang="en-US" sz="1500" dirty="0"/>
           </a:p>
@@ -15378,7 +15667,7 @@
                 <a:ea typeface="Calibri" pitchFamily="34" charset="-122"/>
                 <a:cs typeface="Calibri" pitchFamily="34" charset="-120"/>
               </a:rPr>
-              <a:t>HOW TO  —  ADMIN</a:t>
+              <a:t>HOW TO  —  SUPERVISOR</a:t>
             </a:r>
             <a:endParaRPr lang="en-US" sz="1100" dirty="0"/>
           </a:p>
@@ -15417,7 +15706,7 @@
                 <a:ea typeface="Calibri" pitchFamily="34" charset="-122"/>
                 <a:cs typeface="Calibri" pitchFamily="34" charset="-120"/>
               </a:rPr>
-              <a:t>Who sees and approves what</a:t>
+              <a:t>Live board</a:t>
             </a:r>
             <a:endParaRPr lang="en-US" sz="2700" dirty="0"/>
           </a:p>
@@ -15497,7 +15786,7 @@
                 <a:ea typeface="Calibri" pitchFamily="34" charset="-122"/>
                 <a:cs typeface="Calibri" pitchFamily="34" charset="-120"/>
               </a:rPr>
-              <a:t>Settings</a:t>
+              <a:t>Workforce</a:t>
             </a:r>
             <a:pPr indent="0" marL="0">
               <a:buNone/>
@@ -15525,35 +15814,7 @@
                 <a:ea typeface="Calibri" pitchFamily="34" charset="-122"/>
                 <a:cs typeface="Calibri" pitchFamily="34" charset="-120"/>
               </a:rPr>
-              <a:t>Workforce</a:t>
-            </a:r>
-            <a:pPr indent="0" marL="0">
-              <a:buNone/>
-            </a:pPr>
-            <a:r>
-              <a:rPr lang="en-US" sz="1500" dirty="0">
-                <a:solidFill>
-                  <a:srgbClr val="F6C177"/>
-                </a:solidFill>
-                <a:latin typeface="Calibri" pitchFamily="34" charset="0"/>
-                <a:ea typeface="Calibri" pitchFamily="34" charset="-122"/>
-                <a:cs typeface="Calibri" pitchFamily="34" charset="-120"/>
-              </a:rPr>
-              <a:t>   ›   </a:t>
-            </a:r>
-            <a:pPr indent="0" marL="0">
-              <a:buNone/>
-            </a:pPr>
-            <a:r>
-              <a:rPr lang="en-US" sz="1500" b="1" dirty="0">
-                <a:solidFill>
-                  <a:srgbClr val="FFFFFF"/>
-                </a:solidFill>
-                <a:latin typeface="Calibri" pitchFamily="34" charset="0"/>
-                <a:ea typeface="Calibri" pitchFamily="34" charset="-122"/>
-                <a:cs typeface="Calibri" pitchFamily="34" charset="-120"/>
-              </a:rPr>
-              <a:t>Sites</a:t>
+              <a:t>Live board</a:t>
             </a:r>
             <a:endParaRPr lang="en-US" sz="1100" dirty="0"/>
           </a:p>
@@ -15656,7 +15917,7 @@
                 <a:ea typeface="Calibri" pitchFamily="34" charset="-122"/>
                 <a:cs typeface="Calibri" pitchFamily="34" charset="-120"/>
               </a:rPr>
-              <a:t>Settings → Workforce → Sites. Edit each site and name its supervisor.</a:t>
+              <a:t>Open Workforce → Live board.</a:t>
             </a:r>
             <a:endParaRPr lang="en-US" sz="1500" dirty="0"/>
           </a:p>
@@ -15759,7 +16020,7 @@
                 <a:ea typeface="Calibri" pitchFamily="34" charset="-122"/>
                 <a:cs typeface="Calibri" pitchFamily="34" charset="-120"/>
               </a:rPr>
-              <a:t>Workforce → Employees. Open each supervisor and set THEIR supervisor — the manager.</a:t>
+              <a:t>Leave it open — it refreshes roughly every 30 seconds on its own.</a:t>
             </a:r>
             <a:endParaRPr lang="en-US" sz="1500" dirty="0"/>
           </a:p>
@@ -15862,7 +16123,7 @@
                 <a:ea typeface="Calibri" pitchFamily="34" charset="-122"/>
                 <a:cs typeface="Calibri" pitchFamily="34" charset="-120"/>
               </a:rPr>
-              <a:t>That's the whole hierarchy. Queues, board, summary and analytics all follow it.</a:t>
+              <a:t>Click a row to see that person's punches, selfies and map positions.</a:t>
             </a:r>
             <a:endParaRPr lang="en-US" sz="1500" dirty="0"/>
           </a:p>
@@ -15871,109 +16132,6 @@
       <p:sp>
         <p:nvSpPr>
           <p:cNvPr id="15" name="Shape 13"/>
-          <p:cNvSpPr/>
-          <p:nvPr/>
-        </p:nvSpPr>
-        <p:spPr>
-          <a:xfrm>
-            <a:off x="585216" y="4297680"/>
-            <a:ext cx="384048" cy="384048"/>
-          </a:xfrm>
-          <a:prstGeom prst="ellipse">
-            <a:avLst/>
-          </a:prstGeom>
-          <a:solidFill>
-            <a:srgbClr val="E08A2E"/>
-          </a:solidFill>
-          <a:ln w="12700">
-            <a:solidFill>
-              <a:srgbClr val="E08A2E"/>
-            </a:solidFill>
-            <a:prstDash val="solid"/>
-          </a:ln>
-        </p:spPr>
-      </p:sp>
-      <p:sp>
-        <p:nvSpPr>
-          <p:cNvPr id="16" name="Text 14"/>
-          <p:cNvSpPr/>
-          <p:nvPr/>
-        </p:nvSpPr>
-        <p:spPr>
-          <a:xfrm>
-            <a:off x="585216" y="4297680"/>
-            <a:ext cx="384048" cy="384048"/>
-          </a:xfrm>
-          <a:prstGeom prst="rect">
-            <a:avLst/>
-          </a:prstGeom>
-          <a:noFill/>
-          <a:ln/>
-        </p:spPr>
-        <p:txBody>
-          <a:bodyPr wrap="square" lIns="0" tIns="0" rIns="0" bIns="0" rtlCol="0" anchor="ctr"/>
-          <a:lstStyle/>
-          <a:p>
-            <a:pPr algn="ctr" indent="0" marL="0">
-              <a:buNone/>
-            </a:pPr>
-            <a:r>
-              <a:rPr lang="en-US" sz="1300" b="1" dirty="0">
-                <a:solidFill>
-                  <a:srgbClr val="0E1A28"/>
-                </a:solidFill>
-                <a:latin typeface="Calibri" pitchFamily="34" charset="0"/>
-                <a:ea typeface="Calibri" pitchFamily="34" charset="-122"/>
-                <a:cs typeface="Calibri" pitchFamily="34" charset="-120"/>
-              </a:rPr>
-              <a:t>4</a:t>
-            </a:r>
-            <a:endParaRPr lang="en-US" sz="1300" dirty="0"/>
-          </a:p>
-        </p:txBody>
-      </p:sp>
-      <p:sp>
-        <p:nvSpPr>
-          <p:cNvPr id="17" name="Text 15"/>
-          <p:cNvSpPr/>
-          <p:nvPr/>
-        </p:nvSpPr>
-        <p:spPr>
-          <a:xfrm>
-            <a:off x="1170432" y="4261104"/>
-            <a:ext cx="10424160" cy="457200"/>
-          </a:xfrm>
-          <a:prstGeom prst="rect">
-            <a:avLst/>
-          </a:prstGeom>
-          <a:noFill/>
-          <a:ln/>
-        </p:spPr>
-        <p:txBody>
-          <a:bodyPr wrap="square" lIns="0" tIns="0" rIns="0" bIns="0" rtlCol="0" anchor="ctr"/>
-          <a:lstStyle/>
-          <a:p>
-            <a:pPr indent="0" marL="0">
-              <a:buNone/>
-            </a:pPr>
-            <a:r>
-              <a:rPr lang="en-US" sz="1500" dirty="0">
-                <a:solidFill>
-                  <a:srgbClr val="F0F3F6"/>
-                </a:solidFill>
-                <a:latin typeface="Calibri" pitchFamily="34" charset="0"/>
-                <a:ea typeface="Calibri" pitchFamily="34" charset="-122"/>
-                <a:cs typeface="Calibri" pitchFamily="34" charset="-120"/>
-              </a:rPr>
-              <a:t>Anyone you name as a site supervisor is given supervisor access automatically.</a:t>
-            </a:r>
-            <a:endParaRPr lang="en-US" sz="1500" dirty="0"/>
-          </a:p>
-        </p:txBody>
-      </p:sp>
-      <p:sp>
-        <p:nvSpPr>
-          <p:cNvPr id="18" name="Shape 16"/>
           <p:cNvSpPr/>
           <p:nvPr/>
         </p:nvSpPr>
@@ -16000,7 +16158,7 @@
       </p:sp>
       <p:sp>
         <p:nvSpPr>
-          <p:cNvPr id="19" name="Text 17"/>
+          <p:cNvPr id="16" name="Text 14"/>
           <p:cNvSpPr/>
           <p:nvPr/>
         </p:nvSpPr>
@@ -16045,7 +16203,7 @@
                 <a:ea typeface="Calibri" pitchFamily="34" charset="-122"/>
                 <a:cs typeface="Calibri" pitchFamily="34" charset="-120"/>
               </a:rPr>
-              <a:t>Nobody can approve their own request — it always goes to the person above them, admins included.</a:t>
+              <a:t>The fastest way to catch a missing check-out before it turns into a correction request.</a:t>
             </a:r>
             <a:endParaRPr lang="en-US" sz="1050" dirty="0"/>
           </a:p>
@@ -16155,7 +16313,7 @@
                 <a:ea typeface="Calibri" pitchFamily="34" charset="-122"/>
                 <a:cs typeface="Calibri" pitchFamily="34" charset="-120"/>
               </a:rPr>
-              <a:t>Employees and the Employee Hub</a:t>
+              <a:t>Who sees and approves what</a:t>
             </a:r>
             <a:endParaRPr lang="en-US" sz="3300" dirty="0"/>
           </a:p>
@@ -16197,7 +16355,7 @@
                 <a:ea typeface="Calibri" pitchFamily="34" charset="-122"/>
                 <a:cs typeface="Calibri" pitchFamily="34" charset="-120"/>
               </a:rPr>
-              <a:t>The people master, plus one page that gathers everything about a single employee.</a:t>
+              <a:t>Each site has one supervisor, and they handle that site's people — nobody else's.</a:t>
             </a:r>
             <a:endParaRPr lang="en-US" sz="1500" dirty="0"/>
           </a:p>
@@ -16327,7 +16485,7 @@
                 <a:ea typeface="Calibri" pitchFamily="34" charset="-122"/>
                 <a:cs typeface="Calibri" pitchFamily="34" charset="-120"/>
               </a:rPr>
-              <a:t>Codes are generated — leave the field blank for the next one</a:t>
+              <a:t>Your approver is whoever runs the site you're assigned to</a:t>
             </a:r>
             <a:endParaRPr lang="en-US" sz="1400" dirty="0"/>
           </a:p>
@@ -16457,7 +16615,7 @@
                 <a:ea typeface="Calibri" pitchFamily="34" charset="-122"/>
                 <a:cs typeface="Calibri" pitchFamily="34" charset="-120"/>
               </a:rPr>
-              <a:t>Shift, site, reporting supervisor and employment type</a:t>
+              <a:t>Move site next month and approvals follow, with no re-mapping</a:t>
             </a:r>
             <a:endParaRPr lang="en-US" sz="1400" dirty="0"/>
           </a:p>
@@ -16587,7 +16745,7 @@
                 <a:ea typeface="Calibri" pitchFamily="34" charset="-122"/>
                 <a:cs typeface="Calibri" pitchFamily="34" charset="-120"/>
               </a:rPr>
-              <a:t>Hub shows month totals, leave balance and direct reports</a:t>
+              <a:t>A manager sees every site beneath them, and their supervisors too</a:t>
             </a:r>
             <a:endParaRPr lang="en-US" sz="1400" dirty="0"/>
           </a:p>
@@ -16695,7 +16853,7 @@
                 <a:ea typeface="Calibri" pitchFamily="34" charset="-122"/>
                 <a:cs typeface="Calibri" pitchFamily="34" charset="-120"/>
               </a:rPr>
-              <a:t>Supervisor</a:t>
+              <a:t>Admin sets it up</a:t>
             </a:r>
             <a:endParaRPr lang="en-US" sz="1500" dirty="0"/>
           </a:p>
@@ -16715,7 +16873,7 @@
                 <a:ea typeface="Calibri" pitchFamily="34" charset="-122"/>
                 <a:cs typeface="Calibri" pitchFamily="34" charset="-120"/>
               </a:rPr>
-              <a:t>Admin</a:t>
+              <a:t>Everyone is scoped by it</a:t>
             </a:r>
             <a:endParaRPr lang="en-US" sz="1500" dirty="0"/>
           </a:p>
@@ -16786,7 +16944,7 @@
                 <a:ea typeface="Calibri" pitchFamily="34" charset="-122"/>
                 <a:cs typeface="Calibri" pitchFamily="34" charset="-120"/>
               </a:rPr>
-              <a:t>HOW TO  —  SUPERVISOR + ADMIN</a:t>
+              <a:t>HOW TO  —  ADMIN</a:t>
             </a:r>
             <a:endParaRPr lang="en-US" sz="1100" dirty="0"/>
           </a:p>
@@ -16825,7 +16983,7 @@
                 <a:ea typeface="Calibri" pitchFamily="34" charset="-122"/>
                 <a:cs typeface="Calibri" pitchFamily="34" charset="-120"/>
               </a:rPr>
-              <a:t>Employees and the Employee Hub</a:t>
+              <a:t>Who sees and approves what</a:t>
             </a:r>
             <a:endParaRPr lang="en-US" sz="2700" dirty="0"/>
           </a:p>
@@ -16905,6 +17063,34 @@
                 <a:ea typeface="Calibri" pitchFamily="34" charset="-122"/>
                 <a:cs typeface="Calibri" pitchFamily="34" charset="-120"/>
               </a:rPr>
+              <a:t>Settings</a:t>
+            </a:r>
+            <a:pPr indent="0" marL="0">
+              <a:buNone/>
+            </a:pPr>
+            <a:r>
+              <a:rPr lang="en-US" sz="1500" dirty="0">
+                <a:solidFill>
+                  <a:srgbClr val="F6C177"/>
+                </a:solidFill>
+                <a:latin typeface="Calibri" pitchFamily="34" charset="0"/>
+                <a:ea typeface="Calibri" pitchFamily="34" charset="-122"/>
+                <a:cs typeface="Calibri" pitchFamily="34" charset="-120"/>
+              </a:rPr>
+              <a:t>   ›   </a:t>
+            </a:r>
+            <a:pPr indent="0" marL="0">
+              <a:buNone/>
+            </a:pPr>
+            <a:r>
+              <a:rPr lang="en-US" sz="1500" b="1" dirty="0">
+                <a:solidFill>
+                  <a:srgbClr val="FFFFFF"/>
+                </a:solidFill>
+                <a:latin typeface="Calibri" pitchFamily="34" charset="0"/>
+                <a:ea typeface="Calibri" pitchFamily="34" charset="-122"/>
+                <a:cs typeface="Calibri" pitchFamily="34" charset="-120"/>
+              </a:rPr>
               <a:t>Workforce</a:t>
             </a:r>
             <a:pPr indent="0" marL="0">
@@ -16933,7 +17119,7 @@
                 <a:ea typeface="Calibri" pitchFamily="34" charset="-122"/>
                 <a:cs typeface="Calibri" pitchFamily="34" charset="-120"/>
               </a:rPr>
-              <a:t>Employees</a:t>
+              <a:t>Sites</a:t>
             </a:r>
             <a:endParaRPr lang="en-US" sz="1100" dirty="0"/>
           </a:p>
@@ -17036,7 +17222,7 @@
                 <a:ea typeface="Calibri" pitchFamily="34" charset="-122"/>
                 <a:cs typeface="Calibri" pitchFamily="34" charset="-120"/>
               </a:rPr>
-              <a:t>Open Workforce → Employees. + New employee opens its own page.</a:t>
+              <a:t>Settings → Workforce → Sites. Edit each site and name its supervisor.</a:t>
             </a:r>
             <a:endParaRPr lang="en-US" sz="1500" dirty="0"/>
           </a:p>
@@ -17139,7 +17325,7 @@
                 <a:ea typeface="Calibri" pitchFamily="34" charset="-122"/>
                 <a:cs typeface="Calibri" pitchFamily="34" charset="-120"/>
               </a:rPr>
-              <a:t>Leave Code blank to get the next EMP-#### , or type your own scheme.</a:t>
+              <a:t>Workforce → Employees. Open each supervisor and set THEIR supervisor — the manager.</a:t>
             </a:r>
             <a:endParaRPr lang="en-US" sz="1500" dirty="0"/>
           </a:p>
@@ -17242,7 +17428,7 @@
                 <a:ea typeface="Calibri" pitchFamily="34" charset="-122"/>
                 <a:cs typeface="Calibri" pitchFamily="34" charset="-120"/>
               </a:rPr>
-              <a:t>Set the shift, site, supervisor and employment type.</a:t>
+              <a:t>That's the whole hierarchy. Queues, board, summary and analytics all follow it.</a:t>
             </a:r>
             <a:endParaRPr lang="en-US" sz="1500" dirty="0"/>
           </a:p>
@@ -17345,7 +17531,7 @@
                 <a:ea typeface="Calibri" pitchFamily="34" charset="-122"/>
                 <a:cs typeface="Calibri" pitchFamily="34" charset="-120"/>
               </a:rPr>
-              <a:t>Use the login action to issue an email address and initial password.</a:t>
+              <a:t>Anyone you name as a site supervisor is given supervisor access automatically.</a:t>
             </a:r>
             <a:endParaRPr lang="en-US" sz="1500" dirty="0"/>
           </a:p>
@@ -17425,7 +17611,7 @@
                 <a:ea typeface="Calibri" pitchFamily="34" charset="-122"/>
                 <a:cs typeface="Calibri" pitchFamily="34" charset="-120"/>
               </a:rPr>
-              <a:t>A typed code that already exists is refused rather than overwritten. The employee must change the initial password at first sign-in.</a:t>
+              <a:t>Nobody can approve their own request — it always goes to the person above them, admins included.</a:t>
             </a:r>
             <a:endParaRPr lang="en-US" sz="1050" dirty="0"/>
           </a:p>
@@ -17535,7 +17721,7 @@
                 <a:ea typeface="Calibri" pitchFamily="34" charset="-122"/>
                 <a:cs typeface="Calibri" pitchFamily="34" charset="-120"/>
               </a:rPr>
-              <a:t>Monthly summary and Excel export</a:t>
+              <a:t>Employees and the Employee Hub</a:t>
             </a:r>
             <a:endParaRPr lang="en-US" sz="3300" dirty="0"/>
           </a:p>
@@ -17577,7 +17763,7 @@
                 <a:ea typeface="Calibri" pitchFamily="34" charset="-122"/>
                 <a:cs typeface="Calibri" pitchFamily="34" charset="-120"/>
               </a:rPr>
-              <a:t>The whole month, per employee, in the shape the accountant actually needs.</a:t>
+              <a:t>The people master, plus one page that gathers everything about a single employee.</a:t>
             </a:r>
             <a:endParaRPr lang="en-US" sz="1500" dirty="0"/>
           </a:p>
@@ -17707,7 +17893,7 @@
                 <a:ea typeface="Calibri" pitchFamily="34" charset="-122"/>
                 <a:cs typeface="Calibri" pitchFamily="34" charset="-120"/>
               </a:rPr>
-              <a:t>Days present, working hours, late marks and leave</a:t>
+              <a:t>Codes are generated — leave the field blank for the next one</a:t>
             </a:r>
             <a:endParaRPr lang="en-US" sz="1400" dirty="0"/>
           </a:p>
@@ -17837,7 +18023,7 @@
                 <a:ea typeface="Calibri" pitchFamily="34" charset="-122"/>
                 <a:cs typeface="Calibri" pitchFamily="34" charset="-120"/>
               </a:rPr>
-              <a:t>Approved overtime hours and the resulting OT amount</a:t>
+              <a:t>Shift, site, reporting supervisor and employment type</a:t>
             </a:r>
             <a:endParaRPr lang="en-US" sz="1400" dirty="0"/>
           </a:p>
@@ -17967,7 +18153,7 @@
                 <a:ea typeface="Calibri" pitchFamily="34" charset="-122"/>
                 <a:cs typeface="Calibri" pitchFamily="34" charset="-120"/>
               </a:rPr>
-              <a:t>One Excel sheet per employment type</a:t>
+              <a:t>Hub shows month totals, leave balance and direct reports</a:t>
             </a:r>
             <a:endParaRPr lang="en-US" sz="1400" dirty="0"/>
           </a:p>
@@ -18076,6 +18262,26 @@
                 <a:cs typeface="Calibri" pitchFamily="34" charset="-120"/>
               </a:rPr>
               <a:t>Supervisor</a:t>
+            </a:r>
+            <a:endParaRPr lang="en-US" sz="1500" dirty="0"/>
+          </a:p>
+          <a:p>
+            <a:pPr indent="0" marL="0">
+              <a:spcAft>
+                <a:spcPts val="800"/>
+              </a:spcAft>
+              <a:buNone/>
+            </a:pPr>
+            <a:r>
+              <a:rPr lang="en-US" sz="1500" b="1" dirty="0">
+                <a:solidFill>
+                  <a:srgbClr val="FFFFFF"/>
+                </a:solidFill>
+                <a:latin typeface="Calibri" pitchFamily="34" charset="0"/>
+                <a:ea typeface="Calibri" pitchFamily="34" charset="-122"/>
+                <a:cs typeface="Calibri" pitchFamily="34" charset="-120"/>
+              </a:rPr>
+              <a:t>Admin</a:t>
             </a:r>
             <a:endParaRPr lang="en-US" sz="1500" dirty="0"/>
           </a:p>
@@ -18146,7 +18352,7 @@
                 <a:ea typeface="Calibri" pitchFamily="34" charset="-122"/>
                 <a:cs typeface="Calibri" pitchFamily="34" charset="-120"/>
               </a:rPr>
-              <a:t>HOW TO  —  SUPERVISOR</a:t>
+              <a:t>HOW TO  —  SUPERVISOR + ADMIN</a:t>
             </a:r>
             <a:endParaRPr lang="en-US" sz="1100" dirty="0"/>
           </a:p>
@@ -18185,7 +18391,7 @@
                 <a:ea typeface="Calibri" pitchFamily="34" charset="-122"/>
                 <a:cs typeface="Calibri" pitchFamily="34" charset="-120"/>
               </a:rPr>
-              <a:t>Monthly summary and Excel export</a:t>
+              <a:t>Employees and the Employee Hub</a:t>
             </a:r>
             <a:endParaRPr lang="en-US" sz="2700" dirty="0"/>
           </a:p>
@@ -18293,7 +18499,7 @@
                 <a:ea typeface="Calibri" pitchFamily="34" charset="-122"/>
                 <a:cs typeface="Calibri" pitchFamily="34" charset="-120"/>
               </a:rPr>
-              <a:t>Monthly Summary</a:t>
+              <a:t>Employees</a:t>
             </a:r>
             <a:endParaRPr lang="en-US" sz="1100" dirty="0"/>
           </a:p>
@@ -18396,7 +18602,7 @@
                 <a:ea typeface="Calibri" pitchFamily="34" charset="-122"/>
                 <a:cs typeface="Calibri" pitchFamily="34" charset="-120"/>
               </a:rPr>
-              <a:t>Open Workforce → Monthly Summary.</a:t>
+              <a:t>Open Workforce → Employees. + New employee opens its own page.</a:t>
             </a:r>
             <a:endParaRPr lang="en-US" sz="1500" dirty="0"/>
           </a:p>
@@ -18499,7 +18705,7 @@
                 <a:ea typeface="Calibri" pitchFamily="34" charset="-122"/>
                 <a:cs typeface="Calibri" pitchFamily="34" charset="-120"/>
               </a:rPr>
-              <a:t>Choose the month.</a:t>
+              <a:t>Leave Code blank to get the next EMP-#### , or type your own scheme.</a:t>
             </a:r>
             <a:endParaRPr lang="en-US" sz="1500" dirty="0"/>
           </a:p>
@@ -18602,7 +18808,7 @@
                 <a:ea typeface="Calibri" pitchFamily="34" charset="-122"/>
                 <a:cs typeface="Calibri" pitchFamily="34" charset="-120"/>
               </a:rPr>
-              <a:t>Filter by site or employment type if you need a subset.</a:t>
+              <a:t>Set the shift, site, supervisor and employment type.</a:t>
             </a:r>
             <a:endParaRPr lang="en-US" sz="1500" dirty="0"/>
           </a:p>
@@ -18705,7 +18911,7 @@
                 <a:ea typeface="Calibri" pitchFamily="34" charset="-122"/>
                 <a:cs typeface="Calibri" pitchFamily="34" charset="-120"/>
               </a:rPr>
-              <a:t>Download the Excel export for the accountant.</a:t>
+              <a:t>Use the login action to issue an email address and initial password.</a:t>
             </a:r>
             <a:endParaRPr lang="en-US" sz="1500" dirty="0"/>
           </a:p>
@@ -18785,7 +18991,7 @@
                 <a:ea typeface="Calibri" pitchFamily="34" charset="-122"/>
                 <a:cs typeface="Calibri" pitchFamily="34" charset="-120"/>
               </a:rPr>
-              <a:t>Only approved overtime reaches the OT Hours and OT Amount columns.</a:t>
+              <a:t>A typed code that already exists is refused rather than overwritten. The employee must change the initial password at first sign-in.</a:t>
             </a:r>
             <a:endParaRPr lang="en-US" sz="1050" dirty="0"/>
           </a:p>
@@ -18895,7 +19101,7 @@
                 <a:ea typeface="Calibri" pitchFamily="34" charset="-122"/>
                 <a:cs typeface="Calibri" pitchFamily="34" charset="-120"/>
               </a:rPr>
-              <a:t>Shifts and sites</a:t>
+              <a:t>Monthly summary and Excel export</a:t>
             </a:r>
             <a:endParaRPr lang="en-US" sz="3300" dirty="0"/>
           </a:p>
@@ -18937,7 +19143,7 @@
                 <a:ea typeface="Calibri" pitchFamily="34" charset="-122"/>
                 <a:cs typeface="Calibri" pitchFamily="34" charset="-120"/>
               </a:rPr>
-              <a:t>Working hours, and the physical places where a punch is considered on-site.</a:t>
+              <a:t>The whole month, per employee, in the shape the accountant actually needs.</a:t>
             </a:r>
             <a:endParaRPr lang="en-US" sz="1500" dirty="0"/>
           </a:p>
@@ -19067,7 +19273,7 @@
                 <a:ea typeface="Calibri" pitchFamily="34" charset="-122"/>
                 <a:cs typeface="Calibri" pitchFamily="34" charset="-120"/>
               </a:rPr>
-              <a:t>Shift start, end, grace minutes and night allowance</a:t>
+              <a:t>Days present, working hours, late marks and leave</a:t>
             </a:r>
             <a:endParaRPr lang="en-US" sz="1400" dirty="0"/>
           </a:p>
@@ -19197,7 +19403,7 @@
                 <a:ea typeface="Calibri" pitchFamily="34" charset="-122"/>
                 <a:cs typeface="Calibri" pitchFamily="34" charset="-120"/>
               </a:rPr>
-              <a:t>Sites picked on a map with a geofence radius</a:t>
+              <a:t>Approved overtime hours and the resulting OT amount</a:t>
             </a:r>
             <a:endParaRPr lang="en-US" sz="1400" dirty="0"/>
           </a:p>
@@ -19327,7 +19533,7 @@
                 <a:ea typeface="Calibri" pitchFamily="34" charset="-122"/>
                 <a:cs typeface="Calibri" pitchFamily="34" charset="-120"/>
               </a:rPr>
-              <a:t>Geofence mode: block the punch, flag it, or ignore location</a:t>
+              <a:t>One Excel sheet per employment type</a:t>
             </a:r>
             <a:endParaRPr lang="en-US" sz="1400" dirty="0"/>
           </a:p>
@@ -19435,7 +19641,7 @@
                 <a:ea typeface="Calibri" pitchFamily="34" charset="-122"/>
                 <a:cs typeface="Calibri" pitchFamily="34" charset="-120"/>
               </a:rPr>
-              <a:t>Admin</a:t>
+              <a:t>Supervisor</a:t>
             </a:r>
             <a:endParaRPr lang="en-US" sz="1500" dirty="0"/>
           </a:p>
@@ -20156,7 +20362,7 @@
                 <a:ea typeface="Calibri" pitchFamily="34" charset="-122"/>
                 <a:cs typeface="Calibri" pitchFamily="34" charset="-120"/>
               </a:rPr>
-              <a:t>HOW TO  —  ADMIN</a:t>
+              <a:t>HOW TO  —  SUPERVISOR</a:t>
             </a:r>
             <a:endParaRPr lang="en-US" sz="1100" dirty="0"/>
           </a:p>
@@ -20195,7 +20401,7 @@
                 <a:ea typeface="Calibri" pitchFamily="34" charset="-122"/>
                 <a:cs typeface="Calibri" pitchFamily="34" charset="-120"/>
               </a:rPr>
-              <a:t>Shifts and sites</a:t>
+              <a:t>Monthly summary and Excel export</a:t>
             </a:r>
             <a:endParaRPr lang="en-US" sz="2700" dirty="0"/>
           </a:p>
@@ -20275,7 +20481,7 @@
                 <a:ea typeface="Calibri" pitchFamily="34" charset="-122"/>
                 <a:cs typeface="Calibri" pitchFamily="34" charset="-120"/>
               </a:rPr>
-              <a:t>Settings</a:t>
+              <a:t>Workforce</a:t>
             </a:r>
             <a:pPr indent="0" marL="0">
               <a:buNone/>
@@ -20303,35 +20509,7 @@
                 <a:ea typeface="Calibri" pitchFamily="34" charset="-122"/>
                 <a:cs typeface="Calibri" pitchFamily="34" charset="-120"/>
               </a:rPr>
-              <a:t>Workforce</a:t>
-            </a:r>
-            <a:pPr indent="0" marL="0">
-              <a:buNone/>
-            </a:pPr>
-            <a:r>
-              <a:rPr lang="en-US" sz="1500" dirty="0">
-                <a:solidFill>
-                  <a:srgbClr val="F6C177"/>
-                </a:solidFill>
-                <a:latin typeface="Calibri" pitchFamily="34" charset="0"/>
-                <a:ea typeface="Calibri" pitchFamily="34" charset="-122"/>
-                <a:cs typeface="Calibri" pitchFamily="34" charset="-120"/>
-              </a:rPr>
-              <a:t>   ›   </a:t>
-            </a:r>
-            <a:pPr indent="0" marL="0">
-              <a:buNone/>
-            </a:pPr>
-            <a:r>
-              <a:rPr lang="en-US" sz="1500" b="1" dirty="0">
-                <a:solidFill>
-                  <a:srgbClr val="FFFFFF"/>
-                </a:solidFill>
-                <a:latin typeface="Calibri" pitchFamily="34" charset="0"/>
-                <a:ea typeface="Calibri" pitchFamily="34" charset="-122"/>
-                <a:cs typeface="Calibri" pitchFamily="34" charset="-120"/>
-              </a:rPr>
-              <a:t>Shifts / Sites</a:t>
+              <a:t>Monthly Summary</a:t>
             </a:r>
             <a:endParaRPr lang="en-US" sz="1100" dirty="0"/>
           </a:p>
@@ -20434,7 +20612,7 @@
                 <a:ea typeface="Calibri" pitchFamily="34" charset="-122"/>
                 <a:cs typeface="Calibri" pitchFamily="34" charset="-120"/>
               </a:rPr>
-              <a:t>Open Settings → Workforce. Add and Edit each open their own page.</a:t>
+              <a:t>Open Workforce → Monthly Summary.</a:t>
             </a:r>
             <a:endParaRPr lang="en-US" sz="1500" dirty="0"/>
           </a:p>
@@ -20537,7 +20715,7 @@
                 <a:ea typeface="Calibri" pitchFamily="34" charset="-122"/>
                 <a:cs typeface="Calibri" pitchFamily="34" charset="-120"/>
               </a:rPr>
-              <a:t>Shifts tab — add the start time, end time and grace minutes.</a:t>
+              <a:t>Choose the month.</a:t>
             </a:r>
             <a:endParaRPr lang="en-US" sz="1500" dirty="0"/>
           </a:p>
@@ -20640,7 +20818,7 @@
                 <a:ea typeface="Calibri" pitchFamily="34" charset="-122"/>
                 <a:cs typeface="Calibri" pitchFamily="34" charset="-120"/>
               </a:rPr>
-              <a:t>Sites tab — set the pin, the radius, and the site's supervisor.</a:t>
+              <a:t>Filter by site or employment type if you need a subset.</a:t>
             </a:r>
             <a:endParaRPr lang="en-US" sz="1500" dirty="0"/>
           </a:p>
@@ -20743,7 +20921,7 @@
                 <a:ea typeface="Calibri" pitchFamily="34" charset="-122"/>
                 <a:cs typeface="Calibri" pitchFamily="34" charset="-120"/>
               </a:rPr>
-              <a:t>General tab — choose the geofence mode for the whole workspace.</a:t>
+              <a:t>Download the Excel export for the accountant.</a:t>
             </a:r>
             <a:endParaRPr lang="en-US" sz="1500" dirty="0"/>
           </a:p>
@@ -20823,7 +21001,7 @@
                 <a:ea typeface="Calibri" pitchFamily="34" charset="-122"/>
                 <a:cs typeface="Calibri" pitchFamily="34" charset="-120"/>
               </a:rPr>
-              <a:t>A site left without a supervisor has nobody to approve its people — the screen warns you by name until you fix it.</a:t>
+              <a:t>Only approved overtime reaches the OT Hours and OT Amount columns.</a:t>
             </a:r>
             <a:endParaRPr lang="en-US" sz="1050" dirty="0"/>
           </a:p>
@@ -20933,7 +21111,7 @@
                 <a:ea typeface="Calibri" pitchFamily="34" charset="-122"/>
                 <a:cs typeface="Calibri" pitchFamily="34" charset="-120"/>
               </a:rPr>
-              <a:t>Leave types and holidays</a:t>
+              <a:t>Shifts and sites</a:t>
             </a:r>
             <a:endParaRPr lang="en-US" sz="3300" dirty="0"/>
           </a:p>
@@ -20975,7 +21153,7 @@
                 <a:ea typeface="Calibri" pitchFamily="34" charset="-122"/>
                 <a:cs typeface="Calibri" pitchFamily="34" charset="-120"/>
               </a:rPr>
-              <a:t>What people are allowed to take, and the days on which nobody is marked absent.</a:t>
+              <a:t>Working hours, and the physical places where a punch is considered on-site.</a:t>
             </a:r>
             <a:endParaRPr lang="en-US" sz="1500" dirty="0"/>
           </a:p>
@@ -21105,7 +21283,7 @@
                 <a:ea typeface="Calibri" pitchFamily="34" charset="-122"/>
                 <a:cs typeface="Calibri" pitchFamily="34" charset="-120"/>
               </a:rPr>
-              <a:t>Leave types are paid, unpaid or half day, each with an annual quota</a:t>
+              <a:t>Shift start, end, grace minutes and night allowance</a:t>
             </a:r>
             <a:endParaRPr lang="en-US" sz="1400" dirty="0"/>
           </a:p>
@@ -21235,7 +21413,7 @@
                 <a:ea typeface="Calibri" pitchFamily="34" charset="-122"/>
                 <a:cs typeface="Calibri" pitchFamily="34" charset="-120"/>
               </a:rPr>
-              <a:t>Holidays apply to everyone, or to one employment type</a:t>
+              <a:t>Sites picked on a map with a geofence radius</a:t>
             </a:r>
             <a:endParaRPr lang="en-US" sz="1400" dirty="0"/>
           </a:p>
@@ -21365,7 +21543,7 @@
                 <a:ea typeface="Calibri" pitchFamily="34" charset="-122"/>
                 <a:cs typeface="Calibri" pitchFamily="34" charset="-120"/>
               </a:rPr>
-              <a:t>Both feed the leave calendar and the monthly summary</a:t>
+              <a:t>Geofence mode: block the punch, flag it, or ignore location</a:t>
             </a:r>
             <a:endParaRPr lang="en-US" sz="1400" dirty="0"/>
           </a:p>
@@ -21583,7 +21761,7 @@
                 <a:ea typeface="Calibri" pitchFamily="34" charset="-122"/>
                 <a:cs typeface="Calibri" pitchFamily="34" charset="-120"/>
               </a:rPr>
-              <a:t>Leave types and holidays</a:t>
+              <a:t>Shifts and sites</a:t>
             </a:r>
             <a:endParaRPr lang="en-US" sz="2700" dirty="0"/>
           </a:p>
@@ -21719,7 +21897,7 @@
                 <a:ea typeface="Calibri" pitchFamily="34" charset="-122"/>
                 <a:cs typeface="Calibri" pitchFamily="34" charset="-120"/>
               </a:rPr>
-              <a:t>Leave Types / Holidays</a:t>
+              <a:t>Shifts / Sites</a:t>
             </a:r>
             <a:endParaRPr lang="en-US" sz="1100" dirty="0"/>
           </a:p>
@@ -21822,7 +22000,7 @@
                 <a:ea typeface="Calibri" pitchFamily="34" charset="-122"/>
                 <a:cs typeface="Calibri" pitchFamily="34" charset="-120"/>
               </a:rPr>
-              <a:t>Open Settings → Workforce → Leave Types.</a:t>
+              <a:t>Open Settings → Workforce. Add and Edit each open their own page.</a:t>
             </a:r>
             <a:endParaRPr lang="en-US" sz="1500" dirty="0"/>
           </a:p>
@@ -21925,7 +22103,7 @@
                 <a:ea typeface="Calibri" pitchFamily="34" charset="-122"/>
                 <a:cs typeface="Calibri" pitchFamily="34" charset="-120"/>
               </a:rPr>
-              <a:t>Add the type, its category and the annual quota.</a:t>
+              <a:t>Shifts tab — add the start time, end time and grace minutes.</a:t>
             </a:r>
             <a:endParaRPr lang="en-US" sz="1500" dirty="0"/>
           </a:p>
@@ -22028,7 +22206,7 @@
                 <a:ea typeface="Calibri" pitchFamily="34" charset="-122"/>
                 <a:cs typeface="Calibri" pitchFamily="34" charset="-120"/>
               </a:rPr>
-              <a:t>Switch to the Holidays tab and add the date, name and audience.</a:t>
+              <a:t>Sites tab — set the pin, the radius, and the site's supervisor.</a:t>
             </a:r>
             <a:endParaRPr lang="en-US" sz="1500" dirty="0"/>
           </a:p>
@@ -22131,7 +22309,7 @@
                 <a:ea typeface="Calibri" pitchFamily="34" charset="-122"/>
                 <a:cs typeface="Calibri" pitchFamily="34" charset="-120"/>
               </a:rPr>
-              <a:t>Both appear on every employee's leave calendar immediately.</a:t>
+              <a:t>General tab — choose the geofence mode for the whole workspace.</a:t>
             </a:r>
             <a:endParaRPr lang="en-US" sz="1500" dirty="0"/>
           </a:p>
@@ -22211,7 +22389,7 @@
                 <a:ea typeface="Calibri" pitchFamily="34" charset="-122"/>
                 <a:cs typeface="Calibri" pitchFamily="34" charset="-120"/>
               </a:rPr>
-              <a:t>Deactivate a leave type rather than deleting it — existing records still point at it.</a:t>
+              <a:t>A site left without a supervisor has nobody to approve its people — the screen warns you by name until you fix it.</a:t>
             </a:r>
             <a:endParaRPr lang="en-US" sz="1050" dirty="0"/>
           </a:p>
@@ -22321,7 +22499,7 @@
                 <a:ea typeface="Calibri" pitchFamily="34" charset="-122"/>
                 <a:cs typeface="Calibri" pitchFamily="34" charset="-120"/>
               </a:rPr>
-              <a:t>Attendance rules and notifications</a:t>
+              <a:t>Leave types and holidays</a:t>
             </a:r>
             <a:endParaRPr lang="en-US" sz="3300" dirty="0"/>
           </a:p>
@@ -22363,7 +22541,7 @@
                 <a:ea typeface="Calibri" pitchFamily="34" charset="-122"/>
                 <a:cs typeface="Calibri" pitchFamily="34" charset="-120"/>
               </a:rPr>
-              <a:t>The workspace-wide switches that decide how hours are counted and who gets told.</a:t>
+              <a:t>What people are allowed to take, and the days on which nobody is marked absent.</a:t>
             </a:r>
             <a:endParaRPr lang="en-US" sz="1500" dirty="0"/>
           </a:p>
@@ -22493,7 +22671,7 @@
                 <a:ea typeface="Calibri" pitchFamily="34" charset="-122"/>
                 <a:cs typeface="Calibri" pitchFamily="34" charset="-120"/>
               </a:rPr>
-              <a:t>Timezone, break deduction, late marks per half-day</a:t>
+              <a:t>Leave types are paid, unpaid or half day, each with an annual quota</a:t>
             </a:r>
             <a:endParaRPr lang="en-US" sz="1400" dirty="0"/>
           </a:p>
@@ -22623,7 +22801,7 @@
                 <a:ea typeface="Calibri" pitchFamily="34" charset="-122"/>
                 <a:cs typeface="Calibri" pitchFamily="34" charset="-120"/>
               </a:rPr>
-              <a:t>Employment types are your own list, not a fixed set</a:t>
+              <a:t>Holidays apply to everyone, or to one employment type</a:t>
             </a:r>
             <a:endParaRPr lang="en-US" sz="1400" dirty="0"/>
           </a:p>
@@ -22753,7 +22931,7 @@
                 <a:ea typeface="Calibri" pitchFamily="34" charset="-122"/>
                 <a:cs typeface="Calibri" pitchFamily="34" charset="-120"/>
               </a:rPr>
-              <a:t>Email alerts for late arrival, corrections, leave and rechecks</a:t>
+              <a:t>Both feed the leave calendar and the monthly summary</a:t>
             </a:r>
             <a:endParaRPr lang="en-US" sz="1400" dirty="0"/>
           </a:p>
@@ -22971,7 +23149,7 @@
                 <a:ea typeface="Calibri" pitchFamily="34" charset="-122"/>
                 <a:cs typeface="Calibri" pitchFamily="34" charset="-120"/>
               </a:rPr>
-              <a:t>Attendance rules and notifications</a:t>
+              <a:t>Leave types and holidays</a:t>
             </a:r>
             <a:endParaRPr lang="en-US" sz="2700" dirty="0"/>
           </a:p>
@@ -23107,7 +23285,7 @@
                 <a:ea typeface="Calibri" pitchFamily="34" charset="-122"/>
                 <a:cs typeface="Calibri" pitchFamily="34" charset="-120"/>
               </a:rPr>
-              <a:t>General</a:t>
+              <a:t>Leave Types / Holidays</a:t>
             </a:r>
             <a:endParaRPr lang="en-US" sz="1100" dirty="0"/>
           </a:p>
@@ -23210,7 +23388,7 @@
                 <a:ea typeface="Calibri" pitchFamily="34" charset="-122"/>
                 <a:cs typeface="Calibri" pitchFamily="34" charset="-120"/>
               </a:rPr>
-              <a:t>Open Settings → Workforce → General.</a:t>
+              <a:t>Open Settings → Workforce → Leave Types.</a:t>
             </a:r>
             <a:endParaRPr lang="en-US" sz="1500" dirty="0"/>
           </a:p>
@@ -23313,7 +23491,7 @@
                 <a:ea typeface="Calibri" pitchFamily="34" charset="-122"/>
                 <a:cs typeface="Calibri" pitchFamily="34" charset="-120"/>
               </a:rPr>
-              <a:t>Set the timezone, break deduction and weekly off days.</a:t>
+              <a:t>Add the type, its category and the annual quota.</a:t>
             </a:r>
             <a:endParaRPr lang="en-US" sz="1500" dirty="0"/>
           </a:p>
@@ -23416,7 +23594,7 @@
                 <a:ea typeface="Calibri" pitchFamily="34" charset="-122"/>
                 <a:cs typeface="Calibri" pitchFamily="34" charset="-120"/>
               </a:rPr>
-              <a:t>Edit the employment types — add Intern, Contractor and so on.</a:t>
+              <a:t>Switch to the Holidays tab and add the date, name and audience.</a:t>
             </a:r>
             <a:endParaRPr lang="en-US" sz="1500" dirty="0"/>
           </a:p>
@@ -23519,7 +23697,7 @@
                 <a:ea typeface="Calibri" pitchFamily="34" charset="-122"/>
                 <a:cs typeface="Calibri" pitchFamily="34" charset="-120"/>
               </a:rPr>
-              <a:t>Switch the four email notifications on or off.</a:t>
+              <a:t>Both appear on every employee's leave calendar immediately.</a:t>
             </a:r>
             <a:endParaRPr lang="en-US" sz="1500" dirty="0"/>
           </a:p>
@@ -23599,7 +23777,7 @@
                 <a:ea typeface="Calibri" pitchFamily="34" charset="-122"/>
                 <a:cs typeface="Calibri" pitchFamily="34" charset="-120"/>
               </a:rPr>
-              <a:t>Never rename an employment type code once employees use it — the Excel export groups its sheets by that code.</a:t>
+              <a:t>Deactivate a leave type rather than deleting it — existing records still point at it.</a:t>
             </a:r>
             <a:endParaRPr lang="en-US" sz="1050" dirty="0"/>
           </a:p>
@@ -23646,7 +23824,7 @@
         <p:spPr>
           <a:xfrm>
             <a:off x="548640" y="384048"/>
-            <a:ext cx="5486400" cy="274320"/>
+            <a:ext cx="3657600" cy="274320"/>
           </a:xfrm>
           <a:prstGeom prst="rect">
             <a:avLst/>
@@ -23670,7 +23848,7 @@
                 <a:ea typeface="Calibri" pitchFamily="34" charset="-122"/>
                 <a:cs typeface="Calibri" pitchFamily="34" charset="-120"/>
               </a:rPr>
-              <a:t>PERMISSIONS</a:t>
+              <a:t>FEATURE 17</a:t>
             </a:r>
             <a:endParaRPr lang="en-US" sz="1100" dirty="0"/>
           </a:p>
@@ -23685,7 +23863,46 @@
         <p:spPr>
           <a:xfrm>
             <a:off x="548640" y="685800"/>
-            <a:ext cx="10515600" cy="640080"/>
+            <a:ext cx="7680960" cy="914400"/>
+          </a:xfrm>
+          <a:prstGeom prst="rect">
+            <a:avLst/>
+          </a:prstGeom>
+          <a:noFill/>
+          <a:ln/>
+        </p:spPr>
+        <p:txBody>
+          <a:bodyPr wrap="square" rtlCol="0" anchor="t"/>
+          <a:lstStyle/>
+          <a:p>
+            <a:pPr indent="0" marL="0">
+              <a:buNone/>
+            </a:pPr>
+            <a:r>
+              <a:rPr lang="en-US" sz="3300" b="1" dirty="0">
+                <a:solidFill>
+                  <a:srgbClr val="0E1A28"/>
+                </a:solidFill>
+                <a:latin typeface="Calibri" pitchFamily="34" charset="0"/>
+                <a:ea typeface="Calibri" pitchFamily="34" charset="-122"/>
+                <a:cs typeface="Calibri" pitchFamily="34" charset="-120"/>
+              </a:rPr>
+              <a:t>Attendance rules and notifications</a:t>
+            </a:r>
+            <a:endParaRPr lang="en-US" sz="3300" dirty="0"/>
+          </a:p>
+        </p:txBody>
+      </p:sp>
+      <p:sp>
+        <p:nvSpPr>
+          <p:cNvPr id="4" name="Text 2"/>
+          <p:cNvSpPr/>
+          <p:nvPr/>
+        </p:nvSpPr>
+        <p:spPr>
+          <a:xfrm>
+            <a:off x="548640" y="1664208"/>
+            <a:ext cx="7680960" cy="658368"/>
           </a:xfrm>
           <a:prstGeom prst="rect">
             <a:avLst/>
@@ -23698,49 +23915,13 @@
           <a:lstStyle/>
           <a:p>
             <a:pPr indent="0" marL="0">
-              <a:buNone/>
-            </a:pPr>
-            <a:r>
-              <a:rPr lang="en-US" sz="3300" b="1" dirty="0">
-                <a:solidFill>
-                  <a:srgbClr val="0E1A28"/>
-                </a:solidFill>
-                <a:latin typeface="Calibri" pitchFamily="34" charset="0"/>
-                <a:ea typeface="Calibri" pitchFamily="34" charset="-122"/>
-                <a:cs typeface="Calibri" pitchFamily="34" charset="-120"/>
-              </a:rPr>
-              <a:t>Who can do what</a:t>
-            </a:r>
-            <a:endParaRPr lang="en-US" sz="3300" dirty="0"/>
-          </a:p>
-        </p:txBody>
-      </p:sp>
-      <p:sp>
-        <p:nvSpPr>
-          <p:cNvPr id="4" name="Text 2"/>
-          <p:cNvSpPr/>
-          <p:nvPr/>
-        </p:nvSpPr>
-        <p:spPr>
-          <a:xfrm>
-            <a:off x="548640" y="1371600"/>
-            <a:ext cx="10515600" cy="365760"/>
-          </a:xfrm>
-          <a:prstGeom prst="rect">
-            <a:avLst/>
-          </a:prstGeom>
-          <a:noFill/>
-          <a:ln/>
-        </p:spPr>
-        <p:txBody>
-          <a:bodyPr wrap="square" rtlCol="0" anchor="ctr"/>
-          <a:lstStyle/>
-          <a:p>
-            <a:pPr indent="0" marL="0">
-              <a:buNone/>
-            </a:pPr>
-            <a:r>
-              <a:rPr lang="en-US" sz="1400" dirty="0">
+              <a:lnSpc>
+                <a:spcPts val="2100"/>
+              </a:lnSpc>
+              <a:buNone/>
+            </a:pPr>
+            <a:r>
+              <a:rPr lang="en-US" sz="1500" dirty="0">
                 <a:solidFill>
                   <a:srgbClr val="5C6B7A"/>
                 </a:solidFill>
@@ -23748,9 +23929,9 @@
                 <a:ea typeface="Calibri" pitchFamily="34" charset="-122"/>
                 <a:cs typeface="Calibri" pitchFamily="34" charset="-120"/>
               </a:rPr>
-              <a:t>Enforced on the server, not just hidden in the interface.</a:t>
-            </a:r>
-            <a:endParaRPr lang="en-US" sz="1400" dirty="0"/>
+              <a:t>The workspace-wide switches that decide how hours are counted and who gets told.</a:t>
+            </a:r>
+            <a:endParaRPr lang="en-US" sz="1500" dirty="0"/>
           </a:p>
         </p:txBody>
       </p:sp>
@@ -23762,13 +23943,38 @@
         </p:nvSpPr>
         <p:spPr>
           <a:xfrm>
-            <a:off x="548640" y="1874520"/>
-            <a:ext cx="11064240" cy="457200"/>
+            <a:off x="548640" y="2487168"/>
+            <a:ext cx="7680960" cy="786384"/>
           </a:xfrm>
           <a:prstGeom prst="roundRect">
             <a:avLst>
-              <a:gd name="adj" fmla="val 10000"/>
+              <a:gd name="adj" fmla="val 9302"/>
             </a:avLst>
+          </a:prstGeom>
+          <a:solidFill>
+            <a:srgbClr val="F3F5F7"/>
+          </a:solidFill>
+          <a:ln w="12700">
+            <a:solidFill>
+              <a:srgbClr val="F3F5F7"/>
+            </a:solidFill>
+            <a:prstDash val="solid"/>
+          </a:ln>
+        </p:spPr>
+      </p:sp>
+      <p:sp>
+        <p:nvSpPr>
+          <p:cNvPr id="6" name="Shape 4"/>
+          <p:cNvSpPr/>
+          <p:nvPr/>
+        </p:nvSpPr>
+        <p:spPr>
+          <a:xfrm>
+            <a:off x="786384" y="2702052"/>
+            <a:ext cx="356616" cy="356616"/>
+          </a:xfrm>
+          <a:prstGeom prst="ellipse">
+            <a:avLst/>
           </a:prstGeom>
           <a:solidFill>
             <a:srgbClr val="0E1A28"/>
@@ -23783,53 +23989,14 @@
       </p:sp>
       <p:sp>
         <p:nvSpPr>
-          <p:cNvPr id="6" name="Text 4"/>
-          <p:cNvSpPr/>
-          <p:nvPr/>
-        </p:nvSpPr>
-        <p:spPr>
-          <a:xfrm>
-            <a:off x="548640" y="1874520"/>
-            <a:ext cx="5029200" cy="457200"/>
-          </a:xfrm>
-          <a:prstGeom prst="rect">
-            <a:avLst/>
-          </a:prstGeom>
-          <a:noFill/>
-          <a:ln/>
-        </p:spPr>
-        <p:txBody>
-          <a:bodyPr wrap="square" lIns="0" tIns="0" rIns="0" bIns="0" rtlCol="0" anchor="ctr"/>
-          <a:lstStyle/>
-          <a:p>
-            <a:pPr algn="l" indent="0" marL="0">
-              <a:buNone/>
-            </a:pPr>
-            <a:r>
-              <a:rPr lang="en-US" sz="1150" b="1" dirty="0">
-                <a:solidFill>
-                  <a:srgbClr val="FFFFFF"/>
-                </a:solidFill>
-                <a:latin typeface="Calibri" pitchFamily="34" charset="0"/>
-                <a:ea typeface="Calibri" pitchFamily="34" charset="-122"/>
-                <a:cs typeface="Calibri" pitchFamily="34" charset="-120"/>
-              </a:rPr>
-              <a:t>Action</a:t>
-            </a:r>
-            <a:endParaRPr lang="en-US" sz="1150" dirty="0"/>
-          </a:p>
-        </p:txBody>
-      </p:sp>
-      <p:sp>
-        <p:nvSpPr>
           <p:cNvPr id="7" name="Text 5"/>
           <p:cNvSpPr/>
           <p:nvPr/>
         </p:nvSpPr>
         <p:spPr>
           <a:xfrm>
-            <a:off x="5623560" y="1874520"/>
-            <a:ext cx="1463040" cy="457200"/>
+            <a:off x="786384" y="2702052"/>
+            <a:ext cx="356616" cy="356616"/>
           </a:xfrm>
           <a:prstGeom prst="rect">
             <a:avLst/>
@@ -23845,17 +24012,17 @@
               <a:buNone/>
             </a:pPr>
             <a:r>
-              <a:rPr lang="en-US" sz="1150" b="1" dirty="0">
-                <a:solidFill>
-                  <a:srgbClr val="FFFFFF"/>
-                </a:solidFill>
-                <a:latin typeface="Calibri" pitchFamily="34" charset="0"/>
-                <a:ea typeface="Calibri" pitchFamily="34" charset="-122"/>
-                <a:cs typeface="Calibri" pitchFamily="34" charset="-120"/>
-              </a:rPr>
-              <a:t>Employee</a:t>
-            </a:r>
-            <a:endParaRPr lang="en-US" sz="1150" dirty="0"/>
+              <a:rPr lang="en-US" sz="1200" b="1" dirty="0">
+                <a:solidFill>
+                  <a:srgbClr val="F6C177"/>
+                </a:solidFill>
+                <a:latin typeface="Calibri" pitchFamily="34" charset="0"/>
+                <a:ea typeface="Calibri" pitchFamily="34" charset="-122"/>
+                <a:cs typeface="Calibri" pitchFamily="34" charset="-120"/>
+              </a:rPr>
+              <a:t>1</a:t>
+            </a:r>
+            <a:endParaRPr lang="en-US" sz="1200" dirty="0"/>
           </a:p>
         </p:txBody>
       </p:sp>
@@ -23867,137 +24034,59 @@
         </p:nvSpPr>
         <p:spPr>
           <a:xfrm>
-            <a:off x="7086600" y="1874520"/>
-            <a:ext cx="1828800" cy="457200"/>
-          </a:xfrm>
-          <a:prstGeom prst="rect">
-            <a:avLst/>
-          </a:prstGeom>
-          <a:noFill/>
-          <a:ln/>
-        </p:spPr>
-        <p:txBody>
-          <a:bodyPr wrap="square" lIns="0" tIns="0" rIns="0" bIns="0" rtlCol="0" anchor="ctr"/>
-          <a:lstStyle/>
-          <a:p>
-            <a:pPr algn="ctr" indent="0" marL="0">
-              <a:buNone/>
-            </a:pPr>
-            <a:r>
-              <a:rPr lang="en-US" sz="1150" b="1" dirty="0">
-                <a:solidFill>
-                  <a:srgbClr val="FFFFFF"/>
-                </a:solidFill>
-                <a:latin typeface="Calibri" pitchFamily="34" charset="0"/>
-                <a:ea typeface="Calibri" pitchFamily="34" charset="-122"/>
-                <a:cs typeface="Calibri" pitchFamily="34" charset="-120"/>
-              </a:rPr>
-              <a:t>Site supervisor</a:t>
-            </a:r>
-            <a:endParaRPr lang="en-US" sz="1150" dirty="0"/>
-          </a:p>
-        </p:txBody>
-      </p:sp>
-      <p:sp>
-        <p:nvSpPr>
-          <p:cNvPr id="9" name="Text 7"/>
-          <p:cNvSpPr/>
-          <p:nvPr/>
-        </p:nvSpPr>
-        <p:spPr>
-          <a:xfrm>
-            <a:off x="8915400" y="1874520"/>
-            <a:ext cx="1463040" cy="457200"/>
-          </a:xfrm>
-          <a:prstGeom prst="rect">
-            <a:avLst/>
-          </a:prstGeom>
-          <a:noFill/>
-          <a:ln/>
-        </p:spPr>
-        <p:txBody>
-          <a:bodyPr wrap="square" lIns="0" tIns="0" rIns="0" bIns="0" rtlCol="0" anchor="ctr"/>
-          <a:lstStyle/>
-          <a:p>
-            <a:pPr algn="ctr" indent="0" marL="0">
-              <a:buNone/>
-            </a:pPr>
-            <a:r>
-              <a:rPr lang="en-US" sz="1150" b="1" dirty="0">
-                <a:solidFill>
-                  <a:srgbClr val="FFFFFF"/>
-                </a:solidFill>
-                <a:latin typeface="Calibri" pitchFamily="34" charset="0"/>
-                <a:ea typeface="Calibri" pitchFamily="34" charset="-122"/>
-                <a:cs typeface="Calibri" pitchFamily="34" charset="-120"/>
-              </a:rPr>
-              <a:t>Manager</a:t>
-            </a:r>
-            <a:endParaRPr lang="en-US" sz="1150" dirty="0"/>
-          </a:p>
-        </p:txBody>
-      </p:sp>
-      <p:sp>
-        <p:nvSpPr>
-          <p:cNvPr id="10" name="Text 8"/>
-          <p:cNvSpPr/>
-          <p:nvPr/>
-        </p:nvSpPr>
-        <p:spPr>
-          <a:xfrm>
-            <a:off x="10378440" y="1874520"/>
-            <a:ext cx="1234440" cy="457200"/>
-          </a:xfrm>
-          <a:prstGeom prst="rect">
-            <a:avLst/>
-          </a:prstGeom>
-          <a:noFill/>
-          <a:ln/>
-        </p:spPr>
-        <p:txBody>
-          <a:bodyPr wrap="square" lIns="0" tIns="0" rIns="0" bIns="0" rtlCol="0" anchor="ctr"/>
-          <a:lstStyle/>
-          <a:p>
-            <a:pPr algn="ctr" indent="0" marL="0">
-              <a:buNone/>
-            </a:pPr>
-            <a:r>
-              <a:rPr lang="en-US" sz="1150" b="1" dirty="0">
-                <a:solidFill>
-                  <a:srgbClr val="FFFFFF"/>
-                </a:solidFill>
-                <a:latin typeface="Calibri" pitchFamily="34" charset="0"/>
-                <a:ea typeface="Calibri" pitchFamily="34" charset="-122"/>
-                <a:cs typeface="Calibri" pitchFamily="34" charset="-120"/>
-              </a:rPr>
-              <a:t>Admin</a:t>
-            </a:r>
-            <a:endParaRPr lang="en-US" sz="1150" dirty="0"/>
-          </a:p>
-        </p:txBody>
-      </p:sp>
-      <p:sp>
-        <p:nvSpPr>
-          <p:cNvPr id="11" name="Shape 9"/>
-          <p:cNvSpPr/>
-          <p:nvPr/>
-        </p:nvSpPr>
-        <p:spPr>
-          <a:xfrm>
-            <a:off x="548640" y="2386584"/>
-            <a:ext cx="11064240" cy="457200"/>
+            <a:off x="1298448" y="2542032"/>
+            <a:ext cx="6766560" cy="676656"/>
+          </a:xfrm>
+          <a:prstGeom prst="rect">
+            <a:avLst/>
+          </a:prstGeom>
+          <a:noFill/>
+          <a:ln/>
+        </p:spPr>
+        <p:txBody>
+          <a:bodyPr wrap="square" lIns="0" tIns="0" rIns="0" bIns="0" rtlCol="0" anchor="ctr"/>
+          <a:lstStyle/>
+          <a:p>
+            <a:pPr indent="0" marL="0">
+              <a:buNone/>
+            </a:pPr>
+            <a:r>
+              <a:rPr lang="en-US" sz="1400" dirty="0">
+                <a:solidFill>
+                  <a:srgbClr val="16202B"/>
+                </a:solidFill>
+                <a:latin typeface="Calibri" pitchFamily="34" charset="0"/>
+                <a:ea typeface="Calibri" pitchFamily="34" charset="-122"/>
+                <a:cs typeface="Calibri" pitchFamily="34" charset="-120"/>
+              </a:rPr>
+              <a:t>Timezone, break deduction, late marks per half-day</a:t>
+            </a:r>
+            <a:endParaRPr lang="en-US" sz="1400" dirty="0"/>
+          </a:p>
+        </p:txBody>
+      </p:sp>
+      <p:sp>
+        <p:nvSpPr>
+          <p:cNvPr id="9" name="Shape 7"/>
+          <p:cNvSpPr/>
+          <p:nvPr/>
+        </p:nvSpPr>
+        <p:spPr>
+          <a:xfrm>
+            <a:off x="548640" y="3401568"/>
+            <a:ext cx="7680960" cy="786384"/>
           </a:xfrm>
           <a:prstGeom prst="roundRect">
             <a:avLst>
-              <a:gd name="adj" fmla="val 10000"/>
+              <a:gd name="adj" fmla="val 9302"/>
             </a:avLst>
           </a:prstGeom>
           <a:solidFill>
             <a:srgbClr val="F3F5F7"/>
           </a:solidFill>
-          <a:ln w="6350">
+          <a:ln w="12700">
             <a:solidFill>
-              <a:srgbClr val="D9DEE4"/>
+              <a:srgbClr val="F3F5F7"/>
             </a:solidFill>
             <a:prstDash val="solid"/>
           </a:ln>
@@ -24005,221 +24094,24 @@
       </p:sp>
       <p:sp>
         <p:nvSpPr>
-          <p:cNvPr id="12" name="Text 10"/>
-          <p:cNvSpPr/>
-          <p:nvPr/>
-        </p:nvSpPr>
-        <p:spPr>
-          <a:xfrm>
-            <a:off x="548640" y="2386584"/>
-            <a:ext cx="5029200" cy="457200"/>
-          </a:xfrm>
-          <a:prstGeom prst="rect">
-            <a:avLst/>
-          </a:prstGeom>
-          <a:noFill/>
-          <a:ln/>
-        </p:spPr>
-        <p:txBody>
-          <a:bodyPr wrap="square" lIns="0" tIns="0" rIns="0" bIns="0" rtlCol="0" anchor="ctr"/>
-          <a:lstStyle/>
-          <a:p>
-            <a:pPr algn="l" indent="0" marL="0">
-              <a:buNone/>
-            </a:pPr>
-            <a:r>
-              <a:rPr lang="en-US" sz="1200" b="1" dirty="0">
-                <a:solidFill>
-                  <a:srgbClr val="16202B"/>
-                </a:solidFill>
-                <a:latin typeface="Calibri" pitchFamily="34" charset="0"/>
-                <a:ea typeface="Calibri" pitchFamily="34" charset="-122"/>
-                <a:cs typeface="Calibri" pitchFamily="34" charset="-120"/>
-              </a:rPr>
-              <a:t>Punch, own timesheet, apply for leave</a:t>
-            </a:r>
-            <a:endParaRPr lang="en-US" sz="1200" dirty="0"/>
-          </a:p>
-        </p:txBody>
-      </p:sp>
-      <p:sp>
-        <p:nvSpPr>
-          <p:cNvPr id="13" name="Text 11"/>
-          <p:cNvSpPr/>
-          <p:nvPr/>
-        </p:nvSpPr>
-        <p:spPr>
-          <a:xfrm>
-            <a:off x="5623560" y="2386584"/>
-            <a:ext cx="1463040" cy="457200"/>
-          </a:xfrm>
-          <a:prstGeom prst="rect">
-            <a:avLst/>
-          </a:prstGeom>
-          <a:noFill/>
-          <a:ln/>
-        </p:spPr>
-        <p:txBody>
-          <a:bodyPr wrap="square" lIns="0" tIns="0" rIns="0" bIns="0" rtlCol="0" anchor="ctr"/>
-          <a:lstStyle/>
-          <a:p>
-            <a:pPr algn="ctr" indent="0" marL="0">
-              <a:buNone/>
-            </a:pPr>
-            <a:r>
-              <a:rPr lang="en-US" sz="1200" b="1" dirty="0">
-                <a:solidFill>
-                  <a:srgbClr val="1E7A4C"/>
-                </a:solidFill>
-                <a:latin typeface="Calibri" pitchFamily="34" charset="0"/>
-                <a:ea typeface="Calibri" pitchFamily="34" charset="-122"/>
-                <a:cs typeface="Calibri" pitchFamily="34" charset="-120"/>
-              </a:rPr>
-              <a:t>Yes</a:t>
-            </a:r>
-            <a:endParaRPr lang="en-US" sz="1200" dirty="0"/>
-          </a:p>
-        </p:txBody>
-      </p:sp>
-      <p:sp>
-        <p:nvSpPr>
-          <p:cNvPr id="14" name="Text 12"/>
-          <p:cNvSpPr/>
-          <p:nvPr/>
-        </p:nvSpPr>
-        <p:spPr>
-          <a:xfrm>
-            <a:off x="7086600" y="2386584"/>
-            <a:ext cx="1828800" cy="457200"/>
-          </a:xfrm>
-          <a:prstGeom prst="rect">
-            <a:avLst/>
-          </a:prstGeom>
-          <a:noFill/>
-          <a:ln/>
-        </p:spPr>
-        <p:txBody>
-          <a:bodyPr wrap="square" lIns="0" tIns="0" rIns="0" bIns="0" rtlCol="0" anchor="ctr"/>
-          <a:lstStyle/>
-          <a:p>
-            <a:pPr algn="ctr" indent="0" marL="0">
-              <a:buNone/>
-            </a:pPr>
-            <a:r>
-              <a:rPr lang="en-US" sz="1200" b="1" dirty="0">
-                <a:solidFill>
-                  <a:srgbClr val="1E7A4C"/>
-                </a:solidFill>
-                <a:latin typeface="Calibri" pitchFamily="34" charset="0"/>
-                <a:ea typeface="Calibri" pitchFamily="34" charset="-122"/>
-                <a:cs typeface="Calibri" pitchFamily="34" charset="-120"/>
-              </a:rPr>
-              <a:t>Yes</a:t>
-            </a:r>
-            <a:endParaRPr lang="en-US" sz="1200" dirty="0"/>
-          </a:p>
-        </p:txBody>
-      </p:sp>
-      <p:sp>
-        <p:nvSpPr>
-          <p:cNvPr id="15" name="Text 13"/>
-          <p:cNvSpPr/>
-          <p:nvPr/>
-        </p:nvSpPr>
-        <p:spPr>
-          <a:xfrm>
-            <a:off x="8915400" y="2386584"/>
-            <a:ext cx="1463040" cy="457200"/>
-          </a:xfrm>
-          <a:prstGeom prst="rect">
-            <a:avLst/>
-          </a:prstGeom>
-          <a:noFill/>
-          <a:ln/>
-        </p:spPr>
-        <p:txBody>
-          <a:bodyPr wrap="square" lIns="0" tIns="0" rIns="0" bIns="0" rtlCol="0" anchor="ctr"/>
-          <a:lstStyle/>
-          <a:p>
-            <a:pPr algn="ctr" indent="0" marL="0">
-              <a:buNone/>
-            </a:pPr>
-            <a:r>
-              <a:rPr lang="en-US" sz="1200" b="1" dirty="0">
-                <a:solidFill>
-                  <a:srgbClr val="1E7A4C"/>
-                </a:solidFill>
-                <a:latin typeface="Calibri" pitchFamily="34" charset="0"/>
-                <a:ea typeface="Calibri" pitchFamily="34" charset="-122"/>
-                <a:cs typeface="Calibri" pitchFamily="34" charset="-120"/>
-              </a:rPr>
-              <a:t>Yes</a:t>
-            </a:r>
-            <a:endParaRPr lang="en-US" sz="1200" dirty="0"/>
-          </a:p>
-        </p:txBody>
-      </p:sp>
-      <p:sp>
-        <p:nvSpPr>
-          <p:cNvPr id="16" name="Text 14"/>
-          <p:cNvSpPr/>
-          <p:nvPr/>
-        </p:nvSpPr>
-        <p:spPr>
-          <a:xfrm>
-            <a:off x="10378440" y="2386584"/>
-            <a:ext cx="1234440" cy="457200"/>
-          </a:xfrm>
-          <a:prstGeom prst="rect">
-            <a:avLst/>
-          </a:prstGeom>
-          <a:noFill/>
-          <a:ln/>
-        </p:spPr>
-        <p:txBody>
-          <a:bodyPr wrap="square" lIns="0" tIns="0" rIns="0" bIns="0" rtlCol="0" anchor="ctr"/>
-          <a:lstStyle/>
-          <a:p>
-            <a:pPr algn="ctr" indent="0" marL="0">
-              <a:buNone/>
-            </a:pPr>
-            <a:r>
-              <a:rPr lang="en-US" sz="1200" b="1" dirty="0">
-                <a:solidFill>
-                  <a:srgbClr val="1E7A4C"/>
-                </a:solidFill>
-                <a:latin typeface="Calibri" pitchFamily="34" charset="0"/>
-                <a:ea typeface="Calibri" pitchFamily="34" charset="-122"/>
-                <a:cs typeface="Calibri" pitchFamily="34" charset="-120"/>
-              </a:rPr>
-              <a:t>Yes</a:t>
-            </a:r>
-            <a:endParaRPr lang="en-US" sz="1200" dirty="0"/>
-          </a:p>
-        </p:txBody>
-      </p:sp>
-      <p:sp>
-        <p:nvSpPr>
-          <p:cNvPr id="17" name="Shape 15"/>
-          <p:cNvSpPr/>
-          <p:nvPr/>
-        </p:nvSpPr>
-        <p:spPr>
-          <a:xfrm>
-            <a:off x="548640" y="2898648"/>
-            <a:ext cx="11064240" cy="457200"/>
-          </a:xfrm>
-          <a:prstGeom prst="roundRect">
-            <a:avLst>
-              <a:gd name="adj" fmla="val 10000"/>
-            </a:avLst>
+          <p:cNvPr id="10" name="Shape 8"/>
+          <p:cNvSpPr/>
+          <p:nvPr/>
+        </p:nvSpPr>
+        <p:spPr>
+          <a:xfrm>
+            <a:off x="786384" y="3616452"/>
+            <a:ext cx="356616" cy="356616"/>
+          </a:xfrm>
+          <a:prstGeom prst="ellipse">
+            <a:avLst/>
           </a:prstGeom>
           <a:solidFill>
-            <a:srgbClr val="FFFFFF"/>
+            <a:srgbClr val="0E1A28"/>
           </a:solidFill>
-          <a:ln w="6350">
+          <a:ln w="12700">
             <a:solidFill>
-              <a:srgbClr val="D9DEE4"/>
+              <a:srgbClr val="0E1A28"/>
             </a:solidFill>
             <a:prstDash val="solid"/>
           </a:ln>
@@ -24227,221 +24119,104 @@
       </p:sp>
       <p:sp>
         <p:nvSpPr>
-          <p:cNvPr id="18" name="Text 16"/>
-          <p:cNvSpPr/>
-          <p:nvPr/>
-        </p:nvSpPr>
-        <p:spPr>
-          <a:xfrm>
-            <a:off x="548640" y="2898648"/>
-            <a:ext cx="5029200" cy="457200"/>
-          </a:xfrm>
-          <a:prstGeom prst="rect">
-            <a:avLst/>
-          </a:prstGeom>
-          <a:noFill/>
-          <a:ln/>
-        </p:spPr>
-        <p:txBody>
-          <a:bodyPr wrap="square" lIns="0" tIns="0" rIns="0" bIns="0" rtlCol="0" anchor="ctr"/>
-          <a:lstStyle/>
-          <a:p>
-            <a:pPr algn="l" indent="0" marL="0">
+          <p:cNvPr id="11" name="Text 9"/>
+          <p:cNvSpPr/>
+          <p:nvPr/>
+        </p:nvSpPr>
+        <p:spPr>
+          <a:xfrm>
+            <a:off x="786384" y="3616452"/>
+            <a:ext cx="356616" cy="356616"/>
+          </a:xfrm>
+          <a:prstGeom prst="rect">
+            <a:avLst/>
+          </a:prstGeom>
+          <a:noFill/>
+          <a:ln/>
+        </p:spPr>
+        <p:txBody>
+          <a:bodyPr wrap="square" lIns="0" tIns="0" rIns="0" bIns="0" rtlCol="0" anchor="ctr"/>
+          <a:lstStyle/>
+          <a:p>
+            <a:pPr algn="ctr" indent="0" marL="0">
               <a:buNone/>
             </a:pPr>
             <a:r>
               <a:rPr lang="en-US" sz="1200" b="1" dirty="0">
                 <a:solidFill>
+                  <a:srgbClr val="F6C177"/>
+                </a:solidFill>
+                <a:latin typeface="Calibri" pitchFamily="34" charset="0"/>
+                <a:ea typeface="Calibri" pitchFamily="34" charset="-122"/>
+                <a:cs typeface="Calibri" pitchFamily="34" charset="-120"/>
+              </a:rPr>
+              <a:t>2</a:t>
+            </a:r>
+            <a:endParaRPr lang="en-US" sz="1200" dirty="0"/>
+          </a:p>
+        </p:txBody>
+      </p:sp>
+      <p:sp>
+        <p:nvSpPr>
+          <p:cNvPr id="12" name="Text 10"/>
+          <p:cNvSpPr/>
+          <p:nvPr/>
+        </p:nvSpPr>
+        <p:spPr>
+          <a:xfrm>
+            <a:off x="1298448" y="3456432"/>
+            <a:ext cx="6766560" cy="676656"/>
+          </a:xfrm>
+          <a:prstGeom prst="rect">
+            <a:avLst/>
+          </a:prstGeom>
+          <a:noFill/>
+          <a:ln/>
+        </p:spPr>
+        <p:txBody>
+          <a:bodyPr wrap="square" lIns="0" tIns="0" rIns="0" bIns="0" rtlCol="0" anchor="ctr"/>
+          <a:lstStyle/>
+          <a:p>
+            <a:pPr indent="0" marL="0">
+              <a:buNone/>
+            </a:pPr>
+            <a:r>
+              <a:rPr lang="en-US" sz="1400" dirty="0">
+                <a:solidFill>
                   <a:srgbClr val="16202B"/>
                 </a:solidFill>
                 <a:latin typeface="Calibri" pitchFamily="34" charset="0"/>
                 <a:ea typeface="Calibri" pitchFamily="34" charset="-122"/>
                 <a:cs typeface="Calibri" pitchFamily="34" charset="-120"/>
               </a:rPr>
-              <a:t>See the people at the site(s) you supervise</a:t>
-            </a:r>
-            <a:endParaRPr lang="en-US" sz="1200" dirty="0"/>
-          </a:p>
-        </p:txBody>
-      </p:sp>
-      <p:sp>
-        <p:nvSpPr>
-          <p:cNvPr id="19" name="Text 17"/>
-          <p:cNvSpPr/>
-          <p:nvPr/>
-        </p:nvSpPr>
-        <p:spPr>
-          <a:xfrm>
-            <a:off x="5623560" y="2898648"/>
-            <a:ext cx="1463040" cy="457200"/>
-          </a:xfrm>
-          <a:prstGeom prst="rect">
-            <a:avLst/>
-          </a:prstGeom>
-          <a:noFill/>
-          <a:ln/>
-        </p:spPr>
-        <p:txBody>
-          <a:bodyPr wrap="square" lIns="0" tIns="0" rIns="0" bIns="0" rtlCol="0" anchor="ctr"/>
-          <a:lstStyle/>
-          <a:p>
-            <a:pPr algn="ctr" indent="0" marL="0">
-              <a:buNone/>
-            </a:pPr>
-            <a:r>
-              <a:rPr lang="en-US" sz="1200" dirty="0">
-                <a:solidFill>
-                  <a:srgbClr val="A03A3A"/>
-                </a:solidFill>
-                <a:latin typeface="Calibri" pitchFamily="34" charset="0"/>
-                <a:ea typeface="Calibri" pitchFamily="34" charset="-122"/>
-                <a:cs typeface="Calibri" pitchFamily="34" charset="-120"/>
-              </a:rPr>
-              <a:t>No</a:t>
-            </a:r>
-            <a:endParaRPr lang="en-US" sz="1200" dirty="0"/>
-          </a:p>
-        </p:txBody>
-      </p:sp>
-      <p:sp>
-        <p:nvSpPr>
-          <p:cNvPr id="20" name="Text 18"/>
-          <p:cNvSpPr/>
-          <p:nvPr/>
-        </p:nvSpPr>
-        <p:spPr>
-          <a:xfrm>
-            <a:off x="7086600" y="2898648"/>
-            <a:ext cx="1828800" cy="457200"/>
-          </a:xfrm>
-          <a:prstGeom prst="rect">
-            <a:avLst/>
-          </a:prstGeom>
-          <a:noFill/>
-          <a:ln/>
-        </p:spPr>
-        <p:txBody>
-          <a:bodyPr wrap="square" lIns="0" tIns="0" rIns="0" bIns="0" rtlCol="0" anchor="ctr"/>
-          <a:lstStyle/>
-          <a:p>
-            <a:pPr algn="ctr" indent="0" marL="0">
-              <a:buNone/>
-            </a:pPr>
-            <a:r>
-              <a:rPr lang="en-US" sz="1200" b="1" dirty="0">
-                <a:solidFill>
-                  <a:srgbClr val="1E7A4C"/>
-                </a:solidFill>
-                <a:latin typeface="Calibri" pitchFamily="34" charset="0"/>
-                <a:ea typeface="Calibri" pitchFamily="34" charset="-122"/>
-                <a:cs typeface="Calibri" pitchFamily="34" charset="-120"/>
-              </a:rPr>
-              <a:t>Yes</a:t>
-            </a:r>
-            <a:endParaRPr lang="en-US" sz="1200" dirty="0"/>
-          </a:p>
-        </p:txBody>
-      </p:sp>
-      <p:sp>
-        <p:nvSpPr>
-          <p:cNvPr id="21" name="Text 19"/>
-          <p:cNvSpPr/>
-          <p:nvPr/>
-        </p:nvSpPr>
-        <p:spPr>
-          <a:xfrm>
-            <a:off x="8915400" y="2898648"/>
-            <a:ext cx="1463040" cy="457200"/>
-          </a:xfrm>
-          <a:prstGeom prst="rect">
-            <a:avLst/>
-          </a:prstGeom>
-          <a:noFill/>
-          <a:ln/>
-        </p:spPr>
-        <p:txBody>
-          <a:bodyPr wrap="square" lIns="0" tIns="0" rIns="0" bIns="0" rtlCol="0" anchor="ctr"/>
-          <a:lstStyle/>
-          <a:p>
-            <a:pPr algn="ctr" indent="0" marL="0">
-              <a:buNone/>
-            </a:pPr>
-            <a:r>
-              <a:rPr lang="en-US" sz="1200" b="1" dirty="0">
-                <a:solidFill>
-                  <a:srgbClr val="1E7A4C"/>
-                </a:solidFill>
-                <a:latin typeface="Calibri" pitchFamily="34" charset="0"/>
-                <a:ea typeface="Calibri" pitchFamily="34" charset="-122"/>
-                <a:cs typeface="Calibri" pitchFamily="34" charset="-120"/>
-              </a:rPr>
-              <a:t>Yes</a:t>
-            </a:r>
-            <a:endParaRPr lang="en-US" sz="1200" dirty="0"/>
-          </a:p>
-        </p:txBody>
-      </p:sp>
-      <p:sp>
-        <p:nvSpPr>
-          <p:cNvPr id="22" name="Text 20"/>
-          <p:cNvSpPr/>
-          <p:nvPr/>
-        </p:nvSpPr>
-        <p:spPr>
-          <a:xfrm>
-            <a:off x="10378440" y="2898648"/>
-            <a:ext cx="1234440" cy="457200"/>
-          </a:xfrm>
-          <a:prstGeom prst="rect">
-            <a:avLst/>
-          </a:prstGeom>
-          <a:noFill/>
-          <a:ln/>
-        </p:spPr>
-        <p:txBody>
-          <a:bodyPr wrap="square" lIns="0" tIns="0" rIns="0" bIns="0" rtlCol="0" anchor="ctr"/>
-          <a:lstStyle/>
-          <a:p>
-            <a:pPr algn="ctr" indent="0" marL="0">
-              <a:buNone/>
-            </a:pPr>
-            <a:r>
-              <a:rPr lang="en-US" sz="1200" b="1" dirty="0">
-                <a:solidFill>
-                  <a:srgbClr val="1E7A4C"/>
-                </a:solidFill>
-                <a:latin typeface="Calibri" pitchFamily="34" charset="0"/>
-                <a:ea typeface="Calibri" pitchFamily="34" charset="-122"/>
-                <a:cs typeface="Calibri" pitchFamily="34" charset="-120"/>
-              </a:rPr>
-              <a:t>Yes</a:t>
-            </a:r>
-            <a:endParaRPr lang="en-US" sz="1200" dirty="0"/>
-          </a:p>
-        </p:txBody>
-      </p:sp>
-      <p:sp>
-        <p:nvSpPr>
-          <p:cNvPr id="23" name="Shape 21"/>
-          <p:cNvSpPr/>
-          <p:nvPr/>
-        </p:nvSpPr>
-        <p:spPr>
-          <a:xfrm>
-            <a:off x="548640" y="3410712"/>
-            <a:ext cx="11064240" cy="457200"/>
+              <a:t>Employment types are your own list, not a fixed set</a:t>
+            </a:r>
+            <a:endParaRPr lang="en-US" sz="1400" dirty="0"/>
+          </a:p>
+        </p:txBody>
+      </p:sp>
+      <p:sp>
+        <p:nvSpPr>
+          <p:cNvPr id="13" name="Shape 11"/>
+          <p:cNvSpPr/>
+          <p:nvPr/>
+        </p:nvSpPr>
+        <p:spPr>
+          <a:xfrm>
+            <a:off x="548640" y="4315968"/>
+            <a:ext cx="7680960" cy="786384"/>
           </a:xfrm>
           <a:prstGeom prst="roundRect">
             <a:avLst>
-              <a:gd name="adj" fmla="val 10000"/>
+              <a:gd name="adj" fmla="val 9302"/>
             </a:avLst>
           </a:prstGeom>
           <a:solidFill>
             <a:srgbClr val="F3F5F7"/>
           </a:solidFill>
-          <a:ln w="6350">
+          <a:ln w="12700">
             <a:solidFill>
-              <a:srgbClr val="D9DEE4"/>
+              <a:srgbClr val="F3F5F7"/>
             </a:solidFill>
             <a:prstDash val="solid"/>
           </a:ln>
@@ -24449,221 +24224,24 @@
       </p:sp>
       <p:sp>
         <p:nvSpPr>
-          <p:cNvPr id="24" name="Text 22"/>
-          <p:cNvSpPr/>
-          <p:nvPr/>
-        </p:nvSpPr>
-        <p:spPr>
-          <a:xfrm>
-            <a:off x="548640" y="3410712"/>
-            <a:ext cx="5029200" cy="457200"/>
-          </a:xfrm>
-          <a:prstGeom prst="rect">
-            <a:avLst/>
-          </a:prstGeom>
-          <a:noFill/>
-          <a:ln/>
-        </p:spPr>
-        <p:txBody>
-          <a:bodyPr wrap="square" lIns="0" tIns="0" rIns="0" bIns="0" rtlCol="0" anchor="ctr"/>
-          <a:lstStyle/>
-          <a:p>
-            <a:pPr algn="l" indent="0" marL="0">
-              <a:buNone/>
-            </a:pPr>
-            <a:r>
-              <a:rPr lang="en-US" sz="1200" b="1" dirty="0">
-                <a:solidFill>
-                  <a:srgbClr val="16202B"/>
-                </a:solidFill>
-                <a:latin typeface="Calibri" pitchFamily="34" charset="0"/>
-                <a:ea typeface="Calibri" pitchFamily="34" charset="-122"/>
-                <a:cs typeface="Calibri" pitchFamily="34" charset="-120"/>
-              </a:rPr>
-              <a:t>See a site you don't supervise</a:t>
-            </a:r>
-            <a:endParaRPr lang="en-US" sz="1200" dirty="0"/>
-          </a:p>
-        </p:txBody>
-      </p:sp>
-      <p:sp>
-        <p:nvSpPr>
-          <p:cNvPr id="25" name="Text 23"/>
-          <p:cNvSpPr/>
-          <p:nvPr/>
-        </p:nvSpPr>
-        <p:spPr>
-          <a:xfrm>
-            <a:off x="5623560" y="3410712"/>
-            <a:ext cx="1463040" cy="457200"/>
-          </a:xfrm>
-          <a:prstGeom prst="rect">
-            <a:avLst/>
-          </a:prstGeom>
-          <a:noFill/>
-          <a:ln/>
-        </p:spPr>
-        <p:txBody>
-          <a:bodyPr wrap="square" lIns="0" tIns="0" rIns="0" bIns="0" rtlCol="0" anchor="ctr"/>
-          <a:lstStyle/>
-          <a:p>
-            <a:pPr algn="ctr" indent="0" marL="0">
-              <a:buNone/>
-            </a:pPr>
-            <a:r>
-              <a:rPr lang="en-US" sz="1200" dirty="0">
-                <a:solidFill>
-                  <a:srgbClr val="A03A3A"/>
-                </a:solidFill>
-                <a:latin typeface="Calibri" pitchFamily="34" charset="0"/>
-                <a:ea typeface="Calibri" pitchFamily="34" charset="-122"/>
-                <a:cs typeface="Calibri" pitchFamily="34" charset="-120"/>
-              </a:rPr>
-              <a:t>No</a:t>
-            </a:r>
-            <a:endParaRPr lang="en-US" sz="1200" dirty="0"/>
-          </a:p>
-        </p:txBody>
-      </p:sp>
-      <p:sp>
-        <p:nvSpPr>
-          <p:cNvPr id="26" name="Text 24"/>
-          <p:cNvSpPr/>
-          <p:nvPr/>
-        </p:nvSpPr>
-        <p:spPr>
-          <a:xfrm>
-            <a:off x="7086600" y="3410712"/>
-            <a:ext cx="1828800" cy="457200"/>
-          </a:xfrm>
-          <a:prstGeom prst="rect">
-            <a:avLst/>
-          </a:prstGeom>
-          <a:noFill/>
-          <a:ln/>
-        </p:spPr>
-        <p:txBody>
-          <a:bodyPr wrap="square" lIns="0" tIns="0" rIns="0" bIns="0" rtlCol="0" anchor="ctr"/>
-          <a:lstStyle/>
-          <a:p>
-            <a:pPr algn="ctr" indent="0" marL="0">
-              <a:buNone/>
-            </a:pPr>
-            <a:r>
-              <a:rPr lang="en-US" sz="1200" dirty="0">
-                <a:solidFill>
-                  <a:srgbClr val="A03A3A"/>
-                </a:solidFill>
-                <a:latin typeface="Calibri" pitchFamily="34" charset="0"/>
-                <a:ea typeface="Calibri" pitchFamily="34" charset="-122"/>
-                <a:cs typeface="Calibri" pitchFamily="34" charset="-120"/>
-              </a:rPr>
-              <a:t>No</a:t>
-            </a:r>
-            <a:endParaRPr lang="en-US" sz="1200" dirty="0"/>
-          </a:p>
-        </p:txBody>
-      </p:sp>
-      <p:sp>
-        <p:nvSpPr>
-          <p:cNvPr id="27" name="Text 25"/>
-          <p:cNvSpPr/>
-          <p:nvPr/>
-        </p:nvSpPr>
-        <p:spPr>
-          <a:xfrm>
-            <a:off x="8915400" y="3410712"/>
-            <a:ext cx="1463040" cy="457200"/>
-          </a:xfrm>
-          <a:prstGeom prst="rect">
-            <a:avLst/>
-          </a:prstGeom>
-          <a:noFill/>
-          <a:ln/>
-        </p:spPr>
-        <p:txBody>
-          <a:bodyPr wrap="square" lIns="0" tIns="0" rIns="0" bIns="0" rtlCol="0" anchor="ctr"/>
-          <a:lstStyle/>
-          <a:p>
-            <a:pPr algn="ctr" indent="0" marL="0">
-              <a:buNone/>
-            </a:pPr>
-            <a:r>
-              <a:rPr lang="en-US" sz="1200" b="1" dirty="0">
-                <a:solidFill>
-                  <a:srgbClr val="1E7A4C"/>
-                </a:solidFill>
-                <a:latin typeface="Calibri" pitchFamily="34" charset="0"/>
-                <a:ea typeface="Calibri" pitchFamily="34" charset="-122"/>
-                <a:cs typeface="Calibri" pitchFamily="34" charset="-120"/>
-              </a:rPr>
-              <a:t>Yes*</a:t>
-            </a:r>
-            <a:endParaRPr lang="en-US" sz="1200" dirty="0"/>
-          </a:p>
-        </p:txBody>
-      </p:sp>
-      <p:sp>
-        <p:nvSpPr>
-          <p:cNvPr id="28" name="Text 26"/>
-          <p:cNvSpPr/>
-          <p:nvPr/>
-        </p:nvSpPr>
-        <p:spPr>
-          <a:xfrm>
-            <a:off x="10378440" y="3410712"/>
-            <a:ext cx="1234440" cy="457200"/>
-          </a:xfrm>
-          <a:prstGeom prst="rect">
-            <a:avLst/>
-          </a:prstGeom>
-          <a:noFill/>
-          <a:ln/>
-        </p:spPr>
-        <p:txBody>
-          <a:bodyPr wrap="square" lIns="0" tIns="0" rIns="0" bIns="0" rtlCol="0" anchor="ctr"/>
-          <a:lstStyle/>
-          <a:p>
-            <a:pPr algn="ctr" indent="0" marL="0">
-              <a:buNone/>
-            </a:pPr>
-            <a:r>
-              <a:rPr lang="en-US" sz="1200" b="1" dirty="0">
-                <a:solidFill>
-                  <a:srgbClr val="1E7A4C"/>
-                </a:solidFill>
-                <a:latin typeface="Calibri" pitchFamily="34" charset="0"/>
-                <a:ea typeface="Calibri" pitchFamily="34" charset="-122"/>
-                <a:cs typeface="Calibri" pitchFamily="34" charset="-120"/>
-              </a:rPr>
-              <a:t>Yes</a:t>
-            </a:r>
-            <a:endParaRPr lang="en-US" sz="1200" dirty="0"/>
-          </a:p>
-        </p:txBody>
-      </p:sp>
-      <p:sp>
-        <p:nvSpPr>
-          <p:cNvPr id="29" name="Shape 27"/>
-          <p:cNvSpPr/>
-          <p:nvPr/>
-        </p:nvSpPr>
-        <p:spPr>
-          <a:xfrm>
-            <a:off x="548640" y="3922776"/>
-            <a:ext cx="11064240" cy="457200"/>
-          </a:xfrm>
-          <a:prstGeom prst="roundRect">
-            <a:avLst>
-              <a:gd name="adj" fmla="val 10000"/>
-            </a:avLst>
+          <p:cNvPr id="14" name="Shape 12"/>
+          <p:cNvSpPr/>
+          <p:nvPr/>
+        </p:nvSpPr>
+        <p:spPr>
+          <a:xfrm>
+            <a:off x="786384" y="4530852"/>
+            <a:ext cx="356616" cy="356616"/>
+          </a:xfrm>
+          <a:prstGeom prst="ellipse">
+            <a:avLst/>
           </a:prstGeom>
           <a:solidFill>
-            <a:srgbClr val="FFFFFF"/>
+            <a:srgbClr val="0E1A28"/>
           </a:solidFill>
-          <a:ln w="6350">
+          <a:ln w="12700">
             <a:solidFill>
-              <a:srgbClr val="D9DEE4"/>
+              <a:srgbClr val="0E1A28"/>
             </a:solidFill>
             <a:prstDash val="solid"/>
           </a:ln>
@@ -24671,221 +24249,104 @@
       </p:sp>
       <p:sp>
         <p:nvSpPr>
-          <p:cNvPr id="30" name="Text 28"/>
-          <p:cNvSpPr/>
-          <p:nvPr/>
-        </p:nvSpPr>
-        <p:spPr>
-          <a:xfrm>
-            <a:off x="548640" y="3922776"/>
-            <a:ext cx="5029200" cy="457200"/>
-          </a:xfrm>
-          <a:prstGeom prst="rect">
-            <a:avLst/>
-          </a:prstGeom>
-          <a:noFill/>
-          <a:ln/>
-        </p:spPr>
-        <p:txBody>
-          <a:bodyPr wrap="square" lIns="0" tIns="0" rIns="0" bIns="0" rtlCol="0" anchor="ctr"/>
-          <a:lstStyle/>
-          <a:p>
-            <a:pPr algn="l" indent="0" marL="0">
+          <p:cNvPr id="15" name="Text 13"/>
+          <p:cNvSpPr/>
+          <p:nvPr/>
+        </p:nvSpPr>
+        <p:spPr>
+          <a:xfrm>
+            <a:off x="786384" y="4530852"/>
+            <a:ext cx="356616" cy="356616"/>
+          </a:xfrm>
+          <a:prstGeom prst="rect">
+            <a:avLst/>
+          </a:prstGeom>
+          <a:noFill/>
+          <a:ln/>
+        </p:spPr>
+        <p:txBody>
+          <a:bodyPr wrap="square" lIns="0" tIns="0" rIns="0" bIns="0" rtlCol="0" anchor="ctr"/>
+          <a:lstStyle/>
+          <a:p>
+            <a:pPr algn="ctr" indent="0" marL="0">
               <a:buNone/>
             </a:pPr>
             <a:r>
               <a:rPr lang="en-US" sz="1200" b="1" dirty="0">
                 <a:solidFill>
+                  <a:srgbClr val="F6C177"/>
+                </a:solidFill>
+                <a:latin typeface="Calibri" pitchFamily="34" charset="0"/>
+                <a:ea typeface="Calibri" pitchFamily="34" charset="-122"/>
+                <a:cs typeface="Calibri" pitchFamily="34" charset="-120"/>
+              </a:rPr>
+              <a:t>3</a:t>
+            </a:r>
+            <a:endParaRPr lang="en-US" sz="1200" dirty="0"/>
+          </a:p>
+        </p:txBody>
+      </p:sp>
+      <p:sp>
+        <p:nvSpPr>
+          <p:cNvPr id="16" name="Text 14"/>
+          <p:cNvSpPr/>
+          <p:nvPr/>
+        </p:nvSpPr>
+        <p:spPr>
+          <a:xfrm>
+            <a:off x="1298448" y="4370832"/>
+            <a:ext cx="6766560" cy="676656"/>
+          </a:xfrm>
+          <a:prstGeom prst="rect">
+            <a:avLst/>
+          </a:prstGeom>
+          <a:noFill/>
+          <a:ln/>
+        </p:spPr>
+        <p:txBody>
+          <a:bodyPr wrap="square" lIns="0" tIns="0" rIns="0" bIns="0" rtlCol="0" anchor="ctr"/>
+          <a:lstStyle/>
+          <a:p>
+            <a:pPr indent="0" marL="0">
+              <a:buNone/>
+            </a:pPr>
+            <a:r>
+              <a:rPr lang="en-US" sz="1400" dirty="0">
+                <a:solidFill>
                   <a:srgbClr val="16202B"/>
                 </a:solidFill>
                 <a:latin typeface="Calibri" pitchFamily="34" charset="0"/>
                 <a:ea typeface="Calibri" pitchFamily="34" charset="-122"/>
                 <a:cs typeface="Calibri" pitchFamily="34" charset="-120"/>
               </a:rPr>
-              <a:t>Approve overtime, corrections and leave</a:t>
-            </a:r>
-            <a:endParaRPr lang="en-US" sz="1200" dirty="0"/>
-          </a:p>
-        </p:txBody>
-      </p:sp>
-      <p:sp>
-        <p:nvSpPr>
-          <p:cNvPr id="31" name="Text 29"/>
-          <p:cNvSpPr/>
-          <p:nvPr/>
-        </p:nvSpPr>
-        <p:spPr>
-          <a:xfrm>
-            <a:off x="5623560" y="3922776"/>
-            <a:ext cx="1463040" cy="457200"/>
-          </a:xfrm>
-          <a:prstGeom prst="rect">
-            <a:avLst/>
-          </a:prstGeom>
-          <a:noFill/>
-          <a:ln/>
-        </p:spPr>
-        <p:txBody>
-          <a:bodyPr wrap="square" lIns="0" tIns="0" rIns="0" bIns="0" rtlCol="0" anchor="ctr"/>
-          <a:lstStyle/>
-          <a:p>
-            <a:pPr algn="ctr" indent="0" marL="0">
-              <a:buNone/>
-            </a:pPr>
-            <a:r>
-              <a:rPr lang="en-US" sz="1200" dirty="0">
-                <a:solidFill>
-                  <a:srgbClr val="A03A3A"/>
-                </a:solidFill>
-                <a:latin typeface="Calibri" pitchFamily="34" charset="0"/>
-                <a:ea typeface="Calibri" pitchFamily="34" charset="-122"/>
-                <a:cs typeface="Calibri" pitchFamily="34" charset="-120"/>
-              </a:rPr>
-              <a:t>No</a:t>
-            </a:r>
-            <a:endParaRPr lang="en-US" sz="1200" dirty="0"/>
-          </a:p>
-        </p:txBody>
-      </p:sp>
-      <p:sp>
-        <p:nvSpPr>
-          <p:cNvPr id="32" name="Text 30"/>
-          <p:cNvSpPr/>
-          <p:nvPr/>
-        </p:nvSpPr>
-        <p:spPr>
-          <a:xfrm>
-            <a:off x="7086600" y="3922776"/>
-            <a:ext cx="1828800" cy="457200"/>
-          </a:xfrm>
-          <a:prstGeom prst="rect">
-            <a:avLst/>
-          </a:prstGeom>
-          <a:noFill/>
-          <a:ln/>
-        </p:spPr>
-        <p:txBody>
-          <a:bodyPr wrap="square" lIns="0" tIns="0" rIns="0" bIns="0" rtlCol="0" anchor="ctr"/>
-          <a:lstStyle/>
-          <a:p>
-            <a:pPr algn="ctr" indent="0" marL="0">
-              <a:buNone/>
-            </a:pPr>
-            <a:r>
-              <a:rPr lang="en-US" sz="1200" b="1" dirty="0">
-                <a:solidFill>
-                  <a:srgbClr val="1E7A4C"/>
-                </a:solidFill>
-                <a:latin typeface="Calibri" pitchFamily="34" charset="0"/>
-                <a:ea typeface="Calibri" pitchFamily="34" charset="-122"/>
-                <a:cs typeface="Calibri" pitchFamily="34" charset="-120"/>
-              </a:rPr>
-              <a:t>Yes</a:t>
-            </a:r>
-            <a:endParaRPr lang="en-US" sz="1200" dirty="0"/>
-          </a:p>
-        </p:txBody>
-      </p:sp>
-      <p:sp>
-        <p:nvSpPr>
-          <p:cNvPr id="33" name="Text 31"/>
-          <p:cNvSpPr/>
-          <p:nvPr/>
-        </p:nvSpPr>
-        <p:spPr>
-          <a:xfrm>
-            <a:off x="8915400" y="3922776"/>
-            <a:ext cx="1463040" cy="457200"/>
-          </a:xfrm>
-          <a:prstGeom prst="rect">
-            <a:avLst/>
-          </a:prstGeom>
-          <a:noFill/>
-          <a:ln/>
-        </p:spPr>
-        <p:txBody>
-          <a:bodyPr wrap="square" lIns="0" tIns="0" rIns="0" bIns="0" rtlCol="0" anchor="ctr"/>
-          <a:lstStyle/>
-          <a:p>
-            <a:pPr algn="ctr" indent="0" marL="0">
-              <a:buNone/>
-            </a:pPr>
-            <a:r>
-              <a:rPr lang="en-US" sz="1200" b="1" dirty="0">
-                <a:solidFill>
-                  <a:srgbClr val="1E7A4C"/>
-                </a:solidFill>
-                <a:latin typeface="Calibri" pitchFamily="34" charset="0"/>
-                <a:ea typeface="Calibri" pitchFamily="34" charset="-122"/>
-                <a:cs typeface="Calibri" pitchFamily="34" charset="-120"/>
-              </a:rPr>
-              <a:t>Yes</a:t>
-            </a:r>
-            <a:endParaRPr lang="en-US" sz="1200" dirty="0"/>
-          </a:p>
-        </p:txBody>
-      </p:sp>
-      <p:sp>
-        <p:nvSpPr>
-          <p:cNvPr id="34" name="Text 32"/>
-          <p:cNvSpPr/>
-          <p:nvPr/>
-        </p:nvSpPr>
-        <p:spPr>
-          <a:xfrm>
-            <a:off x="10378440" y="3922776"/>
-            <a:ext cx="1234440" cy="457200"/>
-          </a:xfrm>
-          <a:prstGeom prst="rect">
-            <a:avLst/>
-          </a:prstGeom>
-          <a:noFill/>
-          <a:ln/>
-        </p:spPr>
-        <p:txBody>
-          <a:bodyPr wrap="square" lIns="0" tIns="0" rIns="0" bIns="0" rtlCol="0" anchor="ctr"/>
-          <a:lstStyle/>
-          <a:p>
-            <a:pPr algn="ctr" indent="0" marL="0">
-              <a:buNone/>
-            </a:pPr>
-            <a:r>
-              <a:rPr lang="en-US" sz="1200" b="1" dirty="0">
-                <a:solidFill>
-                  <a:srgbClr val="1E7A4C"/>
-                </a:solidFill>
-                <a:latin typeface="Calibri" pitchFamily="34" charset="0"/>
-                <a:ea typeface="Calibri" pitchFamily="34" charset="-122"/>
-                <a:cs typeface="Calibri" pitchFamily="34" charset="-120"/>
-              </a:rPr>
-              <a:t>Yes</a:t>
-            </a:r>
-            <a:endParaRPr lang="en-US" sz="1200" dirty="0"/>
-          </a:p>
-        </p:txBody>
-      </p:sp>
-      <p:sp>
-        <p:nvSpPr>
-          <p:cNvPr id="35" name="Shape 33"/>
-          <p:cNvSpPr/>
-          <p:nvPr/>
-        </p:nvSpPr>
-        <p:spPr>
-          <a:xfrm>
-            <a:off x="548640" y="4434840"/>
-            <a:ext cx="11064240" cy="457200"/>
+              <a:t>Email alerts for late arrival, corrections, leave and rechecks</a:t>
+            </a:r>
+            <a:endParaRPr lang="en-US" sz="1400" dirty="0"/>
+          </a:p>
+        </p:txBody>
+      </p:sp>
+      <p:sp>
+        <p:nvSpPr>
+          <p:cNvPr id="17" name="Shape 15"/>
+          <p:cNvSpPr/>
+          <p:nvPr/>
+        </p:nvSpPr>
+        <p:spPr>
+          <a:xfrm>
+            <a:off x="8549640" y="2487168"/>
+            <a:ext cx="3063240" cy="2322576"/>
           </a:xfrm>
           <a:prstGeom prst="roundRect">
             <a:avLst>
-              <a:gd name="adj" fmla="val 10000"/>
+              <a:gd name="adj" fmla="val 3150"/>
             </a:avLst>
           </a:prstGeom>
           <a:solidFill>
-            <a:srgbClr val="F3F5F7"/>
+            <a:srgbClr val="0E1A28"/>
           </a:solidFill>
-          <a:ln w="6350">
+          <a:ln w="12700">
             <a:solidFill>
-              <a:srgbClr val="D9DEE4"/>
+              <a:srgbClr val="0E1A28"/>
             </a:solidFill>
             <a:prstDash val="solid"/>
           </a:ln>
@@ -24893,901 +24354,82 @@
       </p:sp>
       <p:sp>
         <p:nvSpPr>
-          <p:cNvPr id="36" name="Text 34"/>
-          <p:cNvSpPr/>
-          <p:nvPr/>
-        </p:nvSpPr>
-        <p:spPr>
-          <a:xfrm>
-            <a:off x="548640" y="4434840"/>
-            <a:ext cx="5029200" cy="457200"/>
-          </a:xfrm>
-          <a:prstGeom prst="rect">
-            <a:avLst/>
-          </a:prstGeom>
-          <a:noFill/>
-          <a:ln/>
-        </p:spPr>
-        <p:txBody>
-          <a:bodyPr wrap="square" lIns="0" tIns="0" rIns="0" bIns="0" rtlCol="0" anchor="ctr"/>
-          <a:lstStyle/>
-          <a:p>
-            <a:pPr algn="l" indent="0" marL="0">
-              <a:buNone/>
-            </a:pPr>
-            <a:r>
-              <a:rPr lang="en-US" sz="1200" b="1" dirty="0">
-                <a:solidFill>
-                  <a:srgbClr val="16202B"/>
-                </a:solidFill>
-                <a:latin typeface="Calibri" pitchFamily="34" charset="0"/>
-                <a:ea typeface="Calibri" pitchFamily="34" charset="-122"/>
-                <a:cs typeface="Calibri" pitchFamily="34" charset="-120"/>
-              </a:rPr>
-              <a:t>Approve your OWN request</a:t>
-            </a:r>
-            <a:endParaRPr lang="en-US" sz="1200" dirty="0"/>
-          </a:p>
-        </p:txBody>
-      </p:sp>
-      <p:sp>
-        <p:nvSpPr>
-          <p:cNvPr id="37" name="Text 35"/>
-          <p:cNvSpPr/>
-          <p:nvPr/>
-        </p:nvSpPr>
-        <p:spPr>
-          <a:xfrm>
-            <a:off x="5623560" y="4434840"/>
-            <a:ext cx="1463040" cy="457200"/>
-          </a:xfrm>
-          <a:prstGeom prst="rect">
-            <a:avLst/>
-          </a:prstGeom>
-          <a:noFill/>
-          <a:ln/>
-        </p:spPr>
-        <p:txBody>
-          <a:bodyPr wrap="square" lIns="0" tIns="0" rIns="0" bIns="0" rtlCol="0" anchor="ctr"/>
-          <a:lstStyle/>
-          <a:p>
-            <a:pPr algn="ctr" indent="0" marL="0">
-              <a:buNone/>
-            </a:pPr>
-            <a:r>
-              <a:rPr lang="en-US" sz="1200" dirty="0">
-                <a:solidFill>
-                  <a:srgbClr val="A03A3A"/>
-                </a:solidFill>
-                <a:latin typeface="Calibri" pitchFamily="34" charset="0"/>
-                <a:ea typeface="Calibri" pitchFamily="34" charset="-122"/>
-                <a:cs typeface="Calibri" pitchFamily="34" charset="-120"/>
-              </a:rPr>
-              <a:t>No</a:t>
-            </a:r>
-            <a:endParaRPr lang="en-US" sz="1200" dirty="0"/>
-          </a:p>
-        </p:txBody>
-      </p:sp>
-      <p:sp>
-        <p:nvSpPr>
-          <p:cNvPr id="38" name="Text 36"/>
-          <p:cNvSpPr/>
-          <p:nvPr/>
-        </p:nvSpPr>
-        <p:spPr>
-          <a:xfrm>
-            <a:off x="7086600" y="4434840"/>
-            <a:ext cx="1828800" cy="457200"/>
-          </a:xfrm>
-          <a:prstGeom prst="rect">
-            <a:avLst/>
-          </a:prstGeom>
-          <a:noFill/>
-          <a:ln/>
-        </p:spPr>
-        <p:txBody>
-          <a:bodyPr wrap="square" lIns="0" tIns="0" rIns="0" bIns="0" rtlCol="0" anchor="ctr"/>
-          <a:lstStyle/>
-          <a:p>
-            <a:pPr algn="ctr" indent="0" marL="0">
-              <a:buNone/>
-            </a:pPr>
-            <a:r>
-              <a:rPr lang="en-US" sz="1200" dirty="0">
-                <a:solidFill>
-                  <a:srgbClr val="A03A3A"/>
-                </a:solidFill>
-                <a:latin typeface="Calibri" pitchFamily="34" charset="0"/>
-                <a:ea typeface="Calibri" pitchFamily="34" charset="-122"/>
-                <a:cs typeface="Calibri" pitchFamily="34" charset="-120"/>
-              </a:rPr>
-              <a:t>No</a:t>
-            </a:r>
-            <a:endParaRPr lang="en-US" sz="1200" dirty="0"/>
-          </a:p>
-        </p:txBody>
-      </p:sp>
-      <p:sp>
-        <p:nvSpPr>
-          <p:cNvPr id="39" name="Text 37"/>
-          <p:cNvSpPr/>
-          <p:nvPr/>
-        </p:nvSpPr>
-        <p:spPr>
-          <a:xfrm>
-            <a:off x="8915400" y="4434840"/>
-            <a:ext cx="1463040" cy="457200"/>
-          </a:xfrm>
-          <a:prstGeom prst="rect">
-            <a:avLst/>
-          </a:prstGeom>
-          <a:noFill/>
-          <a:ln/>
-        </p:spPr>
-        <p:txBody>
-          <a:bodyPr wrap="square" lIns="0" tIns="0" rIns="0" bIns="0" rtlCol="0" anchor="ctr"/>
-          <a:lstStyle/>
-          <a:p>
-            <a:pPr algn="ctr" indent="0" marL="0">
-              <a:buNone/>
-            </a:pPr>
-            <a:r>
-              <a:rPr lang="en-US" sz="1200" dirty="0">
-                <a:solidFill>
-                  <a:srgbClr val="A03A3A"/>
-                </a:solidFill>
-                <a:latin typeface="Calibri" pitchFamily="34" charset="0"/>
-                <a:ea typeface="Calibri" pitchFamily="34" charset="-122"/>
-                <a:cs typeface="Calibri" pitchFamily="34" charset="-120"/>
-              </a:rPr>
-              <a:t>No</a:t>
-            </a:r>
-            <a:endParaRPr lang="en-US" sz="1200" dirty="0"/>
-          </a:p>
-        </p:txBody>
-      </p:sp>
-      <p:sp>
-        <p:nvSpPr>
-          <p:cNvPr id="40" name="Text 38"/>
-          <p:cNvSpPr/>
-          <p:nvPr/>
-        </p:nvSpPr>
-        <p:spPr>
-          <a:xfrm>
-            <a:off x="10378440" y="4434840"/>
-            <a:ext cx="1234440" cy="457200"/>
-          </a:xfrm>
-          <a:prstGeom prst="rect">
-            <a:avLst/>
-          </a:prstGeom>
-          <a:noFill/>
-          <a:ln/>
-        </p:spPr>
-        <p:txBody>
-          <a:bodyPr wrap="square" lIns="0" tIns="0" rIns="0" bIns="0" rtlCol="0" anchor="ctr"/>
-          <a:lstStyle/>
-          <a:p>
-            <a:pPr algn="ctr" indent="0" marL="0">
-              <a:buNone/>
-            </a:pPr>
-            <a:r>
-              <a:rPr lang="en-US" sz="1200" dirty="0">
-                <a:solidFill>
-                  <a:srgbClr val="A03A3A"/>
-                </a:solidFill>
-                <a:latin typeface="Calibri" pitchFamily="34" charset="0"/>
-                <a:ea typeface="Calibri" pitchFamily="34" charset="-122"/>
-                <a:cs typeface="Calibri" pitchFamily="34" charset="-120"/>
-              </a:rPr>
-              <a:t>No</a:t>
-            </a:r>
-            <a:endParaRPr lang="en-US" sz="1200" dirty="0"/>
-          </a:p>
-        </p:txBody>
-      </p:sp>
-      <p:sp>
-        <p:nvSpPr>
-          <p:cNvPr id="41" name="Shape 39"/>
-          <p:cNvSpPr/>
-          <p:nvPr/>
-        </p:nvSpPr>
-        <p:spPr>
-          <a:xfrm>
-            <a:off x="548640" y="4946904"/>
-            <a:ext cx="11064240" cy="457200"/>
-          </a:xfrm>
-          <a:prstGeom prst="roundRect">
-            <a:avLst>
-              <a:gd name="adj" fmla="val 10000"/>
-            </a:avLst>
-          </a:prstGeom>
-          <a:solidFill>
-            <a:srgbClr val="FFFFFF"/>
-          </a:solidFill>
-          <a:ln w="6350">
-            <a:solidFill>
-              <a:srgbClr val="D9DEE4"/>
-            </a:solidFill>
-            <a:prstDash val="solid"/>
-          </a:ln>
-        </p:spPr>
-      </p:sp>
-      <p:sp>
-        <p:nvSpPr>
-          <p:cNvPr id="42" name="Text 40"/>
-          <p:cNvSpPr/>
-          <p:nvPr/>
-        </p:nvSpPr>
-        <p:spPr>
-          <a:xfrm>
-            <a:off x="548640" y="4946904"/>
-            <a:ext cx="5029200" cy="457200"/>
-          </a:xfrm>
-          <a:prstGeom prst="rect">
-            <a:avLst/>
-          </a:prstGeom>
-          <a:noFill/>
-          <a:ln/>
-        </p:spPr>
-        <p:txBody>
-          <a:bodyPr wrap="square" lIns="0" tIns="0" rIns="0" bIns="0" rtlCol="0" anchor="ctr"/>
-          <a:lstStyle/>
-          <a:p>
-            <a:pPr algn="l" indent="0" marL="0">
-              <a:buNone/>
-            </a:pPr>
-            <a:r>
-              <a:rPr lang="en-US" sz="1200" b="1" dirty="0">
-                <a:solidFill>
-                  <a:srgbClr val="16202B"/>
-                </a:solidFill>
-                <a:latin typeface="Calibri" pitchFamily="34" charset="0"/>
-                <a:ea typeface="Calibri" pitchFamily="34" charset="-122"/>
-                <a:cs typeface="Calibri" pitchFamily="34" charset="-120"/>
-              </a:rPr>
-              <a:t>Plan the roster, manage employees</a:t>
-            </a:r>
-            <a:endParaRPr lang="en-US" sz="1200" dirty="0"/>
-          </a:p>
-        </p:txBody>
-      </p:sp>
-      <p:sp>
-        <p:nvSpPr>
-          <p:cNvPr id="43" name="Text 41"/>
-          <p:cNvSpPr/>
-          <p:nvPr/>
-        </p:nvSpPr>
-        <p:spPr>
-          <a:xfrm>
-            <a:off x="5623560" y="4946904"/>
-            <a:ext cx="1463040" cy="457200"/>
-          </a:xfrm>
-          <a:prstGeom prst="rect">
-            <a:avLst/>
-          </a:prstGeom>
-          <a:noFill/>
-          <a:ln/>
-        </p:spPr>
-        <p:txBody>
-          <a:bodyPr wrap="square" lIns="0" tIns="0" rIns="0" bIns="0" rtlCol="0" anchor="ctr"/>
-          <a:lstStyle/>
-          <a:p>
-            <a:pPr algn="ctr" indent="0" marL="0">
-              <a:buNone/>
-            </a:pPr>
-            <a:r>
-              <a:rPr lang="en-US" sz="1200" dirty="0">
-                <a:solidFill>
-                  <a:srgbClr val="A03A3A"/>
-                </a:solidFill>
-                <a:latin typeface="Calibri" pitchFamily="34" charset="0"/>
-                <a:ea typeface="Calibri" pitchFamily="34" charset="-122"/>
-                <a:cs typeface="Calibri" pitchFamily="34" charset="-120"/>
-              </a:rPr>
-              <a:t>No</a:t>
-            </a:r>
-            <a:endParaRPr lang="en-US" sz="1200" dirty="0"/>
-          </a:p>
-        </p:txBody>
-      </p:sp>
-      <p:sp>
-        <p:nvSpPr>
-          <p:cNvPr id="44" name="Text 42"/>
-          <p:cNvSpPr/>
-          <p:nvPr/>
-        </p:nvSpPr>
-        <p:spPr>
-          <a:xfrm>
-            <a:off x="7086600" y="4946904"/>
-            <a:ext cx="1828800" cy="457200"/>
-          </a:xfrm>
-          <a:prstGeom prst="rect">
-            <a:avLst/>
-          </a:prstGeom>
-          <a:noFill/>
-          <a:ln/>
-        </p:spPr>
-        <p:txBody>
-          <a:bodyPr wrap="square" lIns="0" tIns="0" rIns="0" bIns="0" rtlCol="0" anchor="ctr"/>
-          <a:lstStyle/>
-          <a:p>
-            <a:pPr algn="ctr" indent="0" marL="0">
-              <a:buNone/>
-            </a:pPr>
-            <a:r>
-              <a:rPr lang="en-US" sz="1200" b="1" dirty="0">
-                <a:solidFill>
-                  <a:srgbClr val="1E7A4C"/>
-                </a:solidFill>
-                <a:latin typeface="Calibri" pitchFamily="34" charset="0"/>
-                <a:ea typeface="Calibri" pitchFamily="34" charset="-122"/>
-                <a:cs typeface="Calibri" pitchFamily="34" charset="-120"/>
-              </a:rPr>
-              <a:t>Yes</a:t>
-            </a:r>
-            <a:endParaRPr lang="en-US" sz="1200" dirty="0"/>
-          </a:p>
-        </p:txBody>
-      </p:sp>
-      <p:sp>
-        <p:nvSpPr>
-          <p:cNvPr id="45" name="Text 43"/>
-          <p:cNvSpPr/>
-          <p:nvPr/>
-        </p:nvSpPr>
-        <p:spPr>
-          <a:xfrm>
-            <a:off x="8915400" y="4946904"/>
-            <a:ext cx="1463040" cy="457200"/>
-          </a:xfrm>
-          <a:prstGeom prst="rect">
-            <a:avLst/>
-          </a:prstGeom>
-          <a:noFill/>
-          <a:ln/>
-        </p:spPr>
-        <p:txBody>
-          <a:bodyPr wrap="square" lIns="0" tIns="0" rIns="0" bIns="0" rtlCol="0" anchor="ctr"/>
-          <a:lstStyle/>
-          <a:p>
-            <a:pPr algn="ctr" indent="0" marL="0">
-              <a:buNone/>
-            </a:pPr>
-            <a:r>
-              <a:rPr lang="en-US" sz="1200" b="1" dirty="0">
-                <a:solidFill>
-                  <a:srgbClr val="1E7A4C"/>
-                </a:solidFill>
-                <a:latin typeface="Calibri" pitchFamily="34" charset="0"/>
-                <a:ea typeface="Calibri" pitchFamily="34" charset="-122"/>
-                <a:cs typeface="Calibri" pitchFamily="34" charset="-120"/>
-              </a:rPr>
-              <a:t>Yes</a:t>
-            </a:r>
-            <a:endParaRPr lang="en-US" sz="1200" dirty="0"/>
-          </a:p>
-        </p:txBody>
-      </p:sp>
-      <p:sp>
-        <p:nvSpPr>
-          <p:cNvPr id="46" name="Text 44"/>
-          <p:cNvSpPr/>
-          <p:nvPr/>
-        </p:nvSpPr>
-        <p:spPr>
-          <a:xfrm>
-            <a:off x="10378440" y="4946904"/>
-            <a:ext cx="1234440" cy="457200"/>
-          </a:xfrm>
-          <a:prstGeom prst="rect">
-            <a:avLst/>
-          </a:prstGeom>
-          <a:noFill/>
-          <a:ln/>
-        </p:spPr>
-        <p:txBody>
-          <a:bodyPr wrap="square" lIns="0" tIns="0" rIns="0" bIns="0" rtlCol="0" anchor="ctr"/>
-          <a:lstStyle/>
-          <a:p>
-            <a:pPr algn="ctr" indent="0" marL="0">
-              <a:buNone/>
-            </a:pPr>
-            <a:r>
-              <a:rPr lang="en-US" sz="1200" b="1" dirty="0">
-                <a:solidFill>
-                  <a:srgbClr val="1E7A4C"/>
-                </a:solidFill>
-                <a:latin typeface="Calibri" pitchFamily="34" charset="0"/>
-                <a:ea typeface="Calibri" pitchFamily="34" charset="-122"/>
-                <a:cs typeface="Calibri" pitchFamily="34" charset="-120"/>
-              </a:rPr>
-              <a:t>Yes</a:t>
-            </a:r>
-            <a:endParaRPr lang="en-US" sz="1200" dirty="0"/>
-          </a:p>
-        </p:txBody>
-      </p:sp>
-      <p:sp>
-        <p:nvSpPr>
-          <p:cNvPr id="47" name="Shape 45"/>
-          <p:cNvSpPr/>
-          <p:nvPr/>
-        </p:nvSpPr>
-        <p:spPr>
-          <a:xfrm>
-            <a:off x="548640" y="5458968"/>
-            <a:ext cx="11064240" cy="457200"/>
-          </a:xfrm>
-          <a:prstGeom prst="roundRect">
-            <a:avLst>
-              <a:gd name="adj" fmla="val 10000"/>
-            </a:avLst>
-          </a:prstGeom>
-          <a:solidFill>
-            <a:srgbClr val="F3F5F7"/>
-          </a:solidFill>
-          <a:ln w="6350">
-            <a:solidFill>
-              <a:srgbClr val="D9DEE4"/>
-            </a:solidFill>
-            <a:prstDash val="solid"/>
-          </a:ln>
-        </p:spPr>
-      </p:sp>
-      <p:sp>
-        <p:nvSpPr>
-          <p:cNvPr id="48" name="Text 46"/>
-          <p:cNvSpPr/>
-          <p:nvPr/>
-        </p:nvSpPr>
-        <p:spPr>
-          <a:xfrm>
-            <a:off x="548640" y="5458968"/>
-            <a:ext cx="5029200" cy="457200"/>
-          </a:xfrm>
-          <a:prstGeom prst="rect">
-            <a:avLst/>
-          </a:prstGeom>
-          <a:noFill/>
-          <a:ln/>
-        </p:spPr>
-        <p:txBody>
-          <a:bodyPr wrap="square" lIns="0" tIns="0" rIns="0" bIns="0" rtlCol="0" anchor="ctr"/>
-          <a:lstStyle/>
-          <a:p>
-            <a:pPr algn="l" indent="0" marL="0">
-              <a:buNone/>
-            </a:pPr>
-            <a:r>
-              <a:rPr lang="en-US" sz="1200" b="1" dirty="0">
-                <a:solidFill>
-                  <a:srgbClr val="16202B"/>
-                </a:solidFill>
-                <a:latin typeface="Calibri" pitchFamily="34" charset="0"/>
-                <a:ea typeface="Calibri" pitchFamily="34" charset="-122"/>
-                <a:cs typeface="Calibri" pitchFamily="34" charset="-120"/>
-              </a:rPr>
-              <a:t>Monthly summary and Excel export</a:t>
-            </a:r>
-            <a:endParaRPr lang="en-US" sz="1200" dirty="0"/>
-          </a:p>
-        </p:txBody>
-      </p:sp>
-      <p:sp>
-        <p:nvSpPr>
-          <p:cNvPr id="49" name="Text 47"/>
-          <p:cNvSpPr/>
-          <p:nvPr/>
-        </p:nvSpPr>
-        <p:spPr>
-          <a:xfrm>
-            <a:off x="5623560" y="5458968"/>
-            <a:ext cx="1463040" cy="457200"/>
-          </a:xfrm>
-          <a:prstGeom prst="rect">
-            <a:avLst/>
-          </a:prstGeom>
-          <a:noFill/>
-          <a:ln/>
-        </p:spPr>
-        <p:txBody>
-          <a:bodyPr wrap="square" lIns="0" tIns="0" rIns="0" bIns="0" rtlCol="0" anchor="ctr"/>
-          <a:lstStyle/>
-          <a:p>
-            <a:pPr algn="ctr" indent="0" marL="0">
-              <a:buNone/>
-            </a:pPr>
-            <a:r>
-              <a:rPr lang="en-US" sz="1200" dirty="0">
-                <a:solidFill>
-                  <a:srgbClr val="A03A3A"/>
-                </a:solidFill>
-                <a:latin typeface="Calibri" pitchFamily="34" charset="0"/>
-                <a:ea typeface="Calibri" pitchFamily="34" charset="-122"/>
-                <a:cs typeface="Calibri" pitchFamily="34" charset="-120"/>
-              </a:rPr>
-              <a:t>No</a:t>
-            </a:r>
-            <a:endParaRPr lang="en-US" sz="1200" dirty="0"/>
-          </a:p>
-        </p:txBody>
-      </p:sp>
-      <p:sp>
-        <p:nvSpPr>
-          <p:cNvPr id="50" name="Text 48"/>
-          <p:cNvSpPr/>
-          <p:nvPr/>
-        </p:nvSpPr>
-        <p:spPr>
-          <a:xfrm>
-            <a:off x="7086600" y="5458968"/>
-            <a:ext cx="1828800" cy="457200"/>
-          </a:xfrm>
-          <a:prstGeom prst="rect">
-            <a:avLst/>
-          </a:prstGeom>
-          <a:noFill/>
-          <a:ln/>
-        </p:spPr>
-        <p:txBody>
-          <a:bodyPr wrap="square" lIns="0" tIns="0" rIns="0" bIns="0" rtlCol="0" anchor="ctr"/>
-          <a:lstStyle/>
-          <a:p>
-            <a:pPr algn="ctr" indent="0" marL="0">
-              <a:buNone/>
-            </a:pPr>
-            <a:r>
-              <a:rPr lang="en-US" sz="1200" b="1" dirty="0">
-                <a:solidFill>
-                  <a:srgbClr val="1E7A4C"/>
-                </a:solidFill>
-                <a:latin typeface="Calibri" pitchFamily="34" charset="0"/>
-                <a:ea typeface="Calibri" pitchFamily="34" charset="-122"/>
-                <a:cs typeface="Calibri" pitchFamily="34" charset="-120"/>
-              </a:rPr>
-              <a:t>Yes</a:t>
-            </a:r>
-            <a:endParaRPr lang="en-US" sz="1200" dirty="0"/>
-          </a:p>
-        </p:txBody>
-      </p:sp>
-      <p:sp>
-        <p:nvSpPr>
-          <p:cNvPr id="51" name="Text 49"/>
-          <p:cNvSpPr/>
-          <p:nvPr/>
-        </p:nvSpPr>
-        <p:spPr>
-          <a:xfrm>
-            <a:off x="8915400" y="5458968"/>
-            <a:ext cx="1463040" cy="457200"/>
-          </a:xfrm>
-          <a:prstGeom prst="rect">
-            <a:avLst/>
-          </a:prstGeom>
-          <a:noFill/>
-          <a:ln/>
-        </p:spPr>
-        <p:txBody>
-          <a:bodyPr wrap="square" lIns="0" tIns="0" rIns="0" bIns="0" rtlCol="0" anchor="ctr"/>
-          <a:lstStyle/>
-          <a:p>
-            <a:pPr algn="ctr" indent="0" marL="0">
-              <a:buNone/>
-            </a:pPr>
-            <a:r>
-              <a:rPr lang="en-US" sz="1200" b="1" dirty="0">
-                <a:solidFill>
-                  <a:srgbClr val="1E7A4C"/>
-                </a:solidFill>
-                <a:latin typeface="Calibri" pitchFamily="34" charset="0"/>
-                <a:ea typeface="Calibri" pitchFamily="34" charset="-122"/>
-                <a:cs typeface="Calibri" pitchFamily="34" charset="-120"/>
-              </a:rPr>
-              <a:t>Yes</a:t>
-            </a:r>
-            <a:endParaRPr lang="en-US" sz="1200" dirty="0"/>
-          </a:p>
-        </p:txBody>
-      </p:sp>
-      <p:sp>
-        <p:nvSpPr>
-          <p:cNvPr id="52" name="Text 50"/>
-          <p:cNvSpPr/>
-          <p:nvPr/>
-        </p:nvSpPr>
-        <p:spPr>
-          <a:xfrm>
-            <a:off x="10378440" y="5458968"/>
-            <a:ext cx="1234440" cy="457200"/>
-          </a:xfrm>
-          <a:prstGeom prst="rect">
-            <a:avLst/>
-          </a:prstGeom>
-          <a:noFill/>
-          <a:ln/>
-        </p:spPr>
-        <p:txBody>
-          <a:bodyPr wrap="square" lIns="0" tIns="0" rIns="0" bIns="0" rtlCol="0" anchor="ctr"/>
-          <a:lstStyle/>
-          <a:p>
-            <a:pPr algn="ctr" indent="0" marL="0">
-              <a:buNone/>
-            </a:pPr>
-            <a:r>
-              <a:rPr lang="en-US" sz="1200" b="1" dirty="0">
-                <a:solidFill>
-                  <a:srgbClr val="1E7A4C"/>
-                </a:solidFill>
-                <a:latin typeface="Calibri" pitchFamily="34" charset="0"/>
-                <a:ea typeface="Calibri" pitchFamily="34" charset="-122"/>
-                <a:cs typeface="Calibri" pitchFamily="34" charset="-120"/>
-              </a:rPr>
-              <a:t>Yes</a:t>
-            </a:r>
-            <a:endParaRPr lang="en-US" sz="1200" dirty="0"/>
-          </a:p>
-        </p:txBody>
-      </p:sp>
-      <p:sp>
-        <p:nvSpPr>
-          <p:cNvPr id="53" name="Shape 51"/>
-          <p:cNvSpPr/>
-          <p:nvPr/>
-        </p:nvSpPr>
-        <p:spPr>
-          <a:xfrm>
-            <a:off x="548640" y="5971032"/>
-            <a:ext cx="11064240" cy="457200"/>
-          </a:xfrm>
-          <a:prstGeom prst="roundRect">
-            <a:avLst>
-              <a:gd name="adj" fmla="val 10000"/>
-            </a:avLst>
-          </a:prstGeom>
-          <a:solidFill>
-            <a:srgbClr val="FFFFFF"/>
-          </a:solidFill>
-          <a:ln w="6350">
-            <a:solidFill>
-              <a:srgbClr val="D9DEE4"/>
-            </a:solidFill>
-            <a:prstDash val="solid"/>
-          </a:ln>
-        </p:spPr>
-      </p:sp>
-      <p:sp>
-        <p:nvSpPr>
-          <p:cNvPr id="54" name="Text 52"/>
-          <p:cNvSpPr/>
-          <p:nvPr/>
-        </p:nvSpPr>
-        <p:spPr>
-          <a:xfrm>
-            <a:off x="548640" y="5971032"/>
-            <a:ext cx="5029200" cy="457200"/>
-          </a:xfrm>
-          <a:prstGeom prst="rect">
-            <a:avLst/>
-          </a:prstGeom>
-          <a:noFill/>
-          <a:ln/>
-        </p:spPr>
-        <p:txBody>
-          <a:bodyPr wrap="square" lIns="0" tIns="0" rIns="0" bIns="0" rtlCol="0" anchor="ctr"/>
-          <a:lstStyle/>
-          <a:p>
-            <a:pPr algn="l" indent="0" marL="0">
-              <a:buNone/>
-            </a:pPr>
-            <a:r>
-              <a:rPr lang="en-US" sz="1200" b="1" dirty="0">
-                <a:solidFill>
-                  <a:srgbClr val="16202B"/>
-                </a:solidFill>
-                <a:latin typeface="Calibri" pitchFamily="34" charset="0"/>
-                <a:ea typeface="Calibri" pitchFamily="34" charset="-122"/>
-                <a:cs typeface="Calibri" pitchFamily="34" charset="-120"/>
-              </a:rPr>
-              <a:t>Shifts, sites, leave types, attendance rules</a:t>
-            </a:r>
-            <a:endParaRPr lang="en-US" sz="1200" dirty="0"/>
-          </a:p>
-        </p:txBody>
-      </p:sp>
-      <p:sp>
-        <p:nvSpPr>
-          <p:cNvPr id="55" name="Text 53"/>
-          <p:cNvSpPr/>
-          <p:nvPr/>
-        </p:nvSpPr>
-        <p:spPr>
-          <a:xfrm>
-            <a:off x="5623560" y="5971032"/>
-            <a:ext cx="1463040" cy="457200"/>
-          </a:xfrm>
-          <a:prstGeom prst="rect">
-            <a:avLst/>
-          </a:prstGeom>
-          <a:noFill/>
-          <a:ln/>
-        </p:spPr>
-        <p:txBody>
-          <a:bodyPr wrap="square" lIns="0" tIns="0" rIns="0" bIns="0" rtlCol="0" anchor="ctr"/>
-          <a:lstStyle/>
-          <a:p>
-            <a:pPr algn="ctr" indent="0" marL="0">
-              <a:buNone/>
-            </a:pPr>
-            <a:r>
-              <a:rPr lang="en-US" sz="1200" dirty="0">
-                <a:solidFill>
-                  <a:srgbClr val="A03A3A"/>
-                </a:solidFill>
-                <a:latin typeface="Calibri" pitchFamily="34" charset="0"/>
-                <a:ea typeface="Calibri" pitchFamily="34" charset="-122"/>
-                <a:cs typeface="Calibri" pitchFamily="34" charset="-120"/>
-              </a:rPr>
-              <a:t>No</a:t>
-            </a:r>
-            <a:endParaRPr lang="en-US" sz="1200" dirty="0"/>
-          </a:p>
-        </p:txBody>
-      </p:sp>
-      <p:sp>
-        <p:nvSpPr>
-          <p:cNvPr id="56" name="Text 54"/>
-          <p:cNvSpPr/>
-          <p:nvPr/>
-        </p:nvSpPr>
-        <p:spPr>
-          <a:xfrm>
-            <a:off x="7086600" y="5971032"/>
-            <a:ext cx="1828800" cy="457200"/>
-          </a:xfrm>
-          <a:prstGeom prst="rect">
-            <a:avLst/>
-          </a:prstGeom>
-          <a:noFill/>
-          <a:ln/>
-        </p:spPr>
-        <p:txBody>
-          <a:bodyPr wrap="square" lIns="0" tIns="0" rIns="0" bIns="0" rtlCol="0" anchor="ctr"/>
-          <a:lstStyle/>
-          <a:p>
-            <a:pPr algn="ctr" indent="0" marL="0">
-              <a:buNone/>
-            </a:pPr>
-            <a:r>
-              <a:rPr lang="en-US" sz="1200" dirty="0">
-                <a:solidFill>
-                  <a:srgbClr val="A03A3A"/>
-                </a:solidFill>
-                <a:latin typeface="Calibri" pitchFamily="34" charset="0"/>
-                <a:ea typeface="Calibri" pitchFamily="34" charset="-122"/>
-                <a:cs typeface="Calibri" pitchFamily="34" charset="-120"/>
-              </a:rPr>
-              <a:t>No</a:t>
-            </a:r>
-            <a:endParaRPr lang="en-US" sz="1200" dirty="0"/>
-          </a:p>
-        </p:txBody>
-      </p:sp>
-      <p:sp>
-        <p:nvSpPr>
-          <p:cNvPr id="57" name="Text 55"/>
-          <p:cNvSpPr/>
-          <p:nvPr/>
-        </p:nvSpPr>
-        <p:spPr>
-          <a:xfrm>
-            <a:off x="8915400" y="5971032"/>
-            <a:ext cx="1463040" cy="457200"/>
-          </a:xfrm>
-          <a:prstGeom prst="rect">
-            <a:avLst/>
-          </a:prstGeom>
-          <a:noFill/>
-          <a:ln/>
-        </p:spPr>
-        <p:txBody>
-          <a:bodyPr wrap="square" lIns="0" tIns="0" rIns="0" bIns="0" rtlCol="0" anchor="ctr"/>
-          <a:lstStyle/>
-          <a:p>
-            <a:pPr algn="ctr" indent="0" marL="0">
-              <a:buNone/>
-            </a:pPr>
-            <a:r>
-              <a:rPr lang="en-US" sz="1200" dirty="0">
-                <a:solidFill>
-                  <a:srgbClr val="A03A3A"/>
-                </a:solidFill>
-                <a:latin typeface="Calibri" pitchFamily="34" charset="0"/>
-                <a:ea typeface="Calibri" pitchFamily="34" charset="-122"/>
-                <a:cs typeface="Calibri" pitchFamily="34" charset="-120"/>
-              </a:rPr>
-              <a:t>No</a:t>
-            </a:r>
-            <a:endParaRPr lang="en-US" sz="1200" dirty="0"/>
-          </a:p>
-        </p:txBody>
-      </p:sp>
-      <p:sp>
-        <p:nvSpPr>
-          <p:cNvPr id="58" name="Text 56"/>
-          <p:cNvSpPr/>
-          <p:nvPr/>
-        </p:nvSpPr>
-        <p:spPr>
-          <a:xfrm>
-            <a:off x="10378440" y="5971032"/>
-            <a:ext cx="1234440" cy="457200"/>
-          </a:xfrm>
-          <a:prstGeom prst="rect">
-            <a:avLst/>
-          </a:prstGeom>
-          <a:noFill/>
-          <a:ln/>
-        </p:spPr>
-        <p:txBody>
-          <a:bodyPr wrap="square" lIns="0" tIns="0" rIns="0" bIns="0" rtlCol="0" anchor="ctr"/>
-          <a:lstStyle/>
-          <a:p>
-            <a:pPr algn="ctr" indent="0" marL="0">
-              <a:buNone/>
-            </a:pPr>
-            <a:r>
-              <a:rPr lang="en-US" sz="1200" b="1" dirty="0">
-                <a:solidFill>
-                  <a:srgbClr val="1E7A4C"/>
-                </a:solidFill>
-                <a:latin typeface="Calibri" pitchFamily="34" charset="0"/>
-                <a:ea typeface="Calibri" pitchFamily="34" charset="-122"/>
-                <a:cs typeface="Calibri" pitchFamily="34" charset="-120"/>
-              </a:rPr>
-              <a:t>Yes</a:t>
-            </a:r>
-            <a:endParaRPr lang="en-US" sz="1200" dirty="0"/>
-          </a:p>
-        </p:txBody>
-      </p:sp>
-      <p:sp>
-        <p:nvSpPr>
-          <p:cNvPr id="59" name="Text 57"/>
-          <p:cNvSpPr/>
-          <p:nvPr/>
-        </p:nvSpPr>
-        <p:spPr>
-          <a:xfrm>
-            <a:off x="548640" y="6556248"/>
-            <a:ext cx="11064240" cy="310896"/>
-          </a:xfrm>
-          <a:prstGeom prst="rect">
-            <a:avLst/>
-          </a:prstGeom>
-          <a:noFill/>
-          <a:ln/>
-        </p:spPr>
-        <p:txBody>
-          <a:bodyPr wrap="square" lIns="0" tIns="0" rIns="0" bIns="0" rtlCol="0" anchor="ctr"/>
-          <a:lstStyle/>
-          <a:p>
-            <a:pPr indent="0" marL="0">
-              <a:buNone/>
-            </a:pPr>
-            <a:r>
-              <a:rPr lang="en-US" sz="1150" i="1" dirty="0">
-                <a:solidFill>
-                  <a:srgbClr val="5C6B7A"/>
-                </a:solidFill>
-                <a:latin typeface="Calibri" pitchFamily="34" charset="0"/>
-                <a:ea typeface="Calibri" pitchFamily="34" charset="-122"/>
-                <a:cs typeface="Calibri" pitchFamily="34" charset="-120"/>
-              </a:rPr>
-              <a:t>*  A manager reaches only the sites beneath them — not another manager's branch. A tenant admin sits above the whole tree.</a:t>
-            </a:r>
-            <a:endParaRPr lang="en-US" sz="1150" dirty="0"/>
+          <p:cNvPr id="18" name="Text 16"/>
+          <p:cNvSpPr/>
+          <p:nvPr/>
+        </p:nvSpPr>
+        <p:spPr>
+          <a:xfrm>
+            <a:off x="8796528" y="2743200"/>
+            <a:ext cx="2560320" cy="274320"/>
+          </a:xfrm>
+          <a:prstGeom prst="rect">
+            <a:avLst/>
+          </a:prstGeom>
+          <a:noFill/>
+          <a:ln/>
+        </p:spPr>
+        <p:txBody>
+          <a:bodyPr wrap="square" lIns="0" tIns="0" rIns="0" bIns="0" rtlCol="0" anchor="ctr"/>
+          <a:lstStyle/>
+          <a:p>
+            <a:pPr indent="0" marL="0">
+              <a:buNone/>
+            </a:pPr>
+            <a:r>
+              <a:rPr lang="en-US" sz="1000" b="1" spc="160" kern="0" dirty="0">
+                <a:solidFill>
+                  <a:srgbClr val="E08A2E"/>
+                </a:solidFill>
+                <a:latin typeface="Calibri" pitchFamily="34" charset="0"/>
+                <a:ea typeface="Calibri" pitchFamily="34" charset="-122"/>
+                <a:cs typeface="Calibri" pitchFamily="34" charset="-120"/>
+              </a:rPr>
+              <a:t>WHO USES IT</a:t>
+            </a:r>
+            <a:endParaRPr lang="en-US" sz="1000" dirty="0"/>
+          </a:p>
+        </p:txBody>
+      </p:sp>
+      <p:sp>
+        <p:nvSpPr>
+          <p:cNvPr id="19" name="Text 17"/>
+          <p:cNvSpPr/>
+          <p:nvPr/>
+        </p:nvSpPr>
+        <p:spPr>
+          <a:xfrm>
+            <a:off x="8796528" y="3127248"/>
+            <a:ext cx="2560320" cy="1371600"/>
+          </a:xfrm>
+          <a:prstGeom prst="rect">
+            <a:avLst/>
+          </a:prstGeom>
+          <a:noFill/>
+          <a:ln/>
+        </p:spPr>
+        <p:txBody>
+          <a:bodyPr wrap="square" lIns="0" tIns="0" rIns="0" bIns="0" rtlCol="0" anchor="t"/>
+          <a:lstStyle/>
+          <a:p>
+            <a:pPr indent="0" marL="0">
+              <a:spcAft>
+                <a:spcPts val="800"/>
+              </a:spcAft>
+              <a:buNone/>
+            </a:pPr>
+            <a:r>
+              <a:rPr lang="en-US" sz="1500" b="1" dirty="0">
+                <a:solidFill>
+                  <a:srgbClr val="FFFFFF"/>
+                </a:solidFill>
+                <a:latin typeface="Calibri" pitchFamily="34" charset="0"/>
+                <a:ea typeface="Calibri" pitchFamily="34" charset="-122"/>
+                <a:cs typeface="Calibri" pitchFamily="34" charset="-120"/>
+              </a:rPr>
+              <a:t>Admin</a:t>
+            </a:r>
+            <a:endParaRPr lang="en-US" sz="1500" dirty="0"/>
           </a:p>
         </p:txBody>
       </p:sp>
@@ -25831,6 +24473,2930 @@
         </p:nvSpPr>
         <p:spPr>
           <a:xfrm>
+            <a:off x="548640" y="384048"/>
+            <a:ext cx="7315200" cy="274320"/>
+          </a:xfrm>
+          <a:prstGeom prst="rect">
+            <a:avLst/>
+          </a:prstGeom>
+          <a:noFill/>
+          <a:ln/>
+        </p:spPr>
+        <p:txBody>
+          <a:bodyPr wrap="square" rtlCol="0" anchor="ctr"/>
+          <a:lstStyle/>
+          <a:p>
+            <a:pPr indent="0" marL="0">
+              <a:buNone/>
+            </a:pPr>
+            <a:r>
+              <a:rPr lang="en-US" sz="1100" b="1" spc="200" kern="0" dirty="0">
+                <a:solidFill>
+                  <a:srgbClr val="E08A2E"/>
+                </a:solidFill>
+                <a:latin typeface="Calibri" pitchFamily="34" charset="0"/>
+                <a:ea typeface="Calibri" pitchFamily="34" charset="-122"/>
+                <a:cs typeface="Calibri" pitchFamily="34" charset="-120"/>
+              </a:rPr>
+              <a:t>HOW TO  —  ADMIN</a:t>
+            </a:r>
+            <a:endParaRPr lang="en-US" sz="1100" dirty="0"/>
+          </a:p>
+        </p:txBody>
+      </p:sp>
+      <p:sp>
+        <p:nvSpPr>
+          <p:cNvPr id="3" name="Text 1"/>
+          <p:cNvSpPr/>
+          <p:nvPr/>
+        </p:nvSpPr>
+        <p:spPr>
+          <a:xfrm>
+            <a:off x="548640" y="694944"/>
+            <a:ext cx="11064240" cy="566928"/>
+          </a:xfrm>
+          <a:prstGeom prst="rect">
+            <a:avLst/>
+          </a:prstGeom>
+          <a:noFill/>
+          <a:ln/>
+        </p:spPr>
+        <p:txBody>
+          <a:bodyPr wrap="square" rtlCol="0" anchor="t"/>
+          <a:lstStyle/>
+          <a:p>
+            <a:pPr indent="0" marL="0">
+              <a:buNone/>
+            </a:pPr>
+            <a:r>
+              <a:rPr lang="en-US" sz="2700" b="1" dirty="0">
+                <a:solidFill>
+                  <a:srgbClr val="FFFFFF"/>
+                </a:solidFill>
+                <a:latin typeface="Calibri" pitchFamily="34" charset="0"/>
+                <a:ea typeface="Calibri" pitchFamily="34" charset="-122"/>
+                <a:cs typeface="Calibri" pitchFamily="34" charset="-120"/>
+              </a:rPr>
+              <a:t>Attendance rules and notifications</a:t>
+            </a:r>
+            <a:endParaRPr lang="en-US" sz="2700" dirty="0"/>
+          </a:p>
+        </p:txBody>
+      </p:sp>
+      <p:sp>
+        <p:nvSpPr>
+          <p:cNvPr id="4" name="Shape 2"/>
+          <p:cNvSpPr/>
+          <p:nvPr/>
+        </p:nvSpPr>
+        <p:spPr>
+          <a:xfrm>
+            <a:off x="548640" y="1463040"/>
+            <a:ext cx="11064240" cy="676656"/>
+          </a:xfrm>
+          <a:prstGeom prst="roundRect">
+            <a:avLst>
+              <a:gd name="adj" fmla="val 10811"/>
+            </a:avLst>
+          </a:prstGeom>
+          <a:solidFill>
+            <a:srgbClr val="1B2C3F"/>
+          </a:solidFill>
+          <a:ln w="12700">
+            <a:solidFill>
+              <a:srgbClr val="1B2C3F"/>
+            </a:solidFill>
+            <a:prstDash val="solid"/>
+          </a:ln>
+        </p:spPr>
+      </p:sp>
+      <p:sp>
+        <p:nvSpPr>
+          <p:cNvPr id="5" name="Text 3"/>
+          <p:cNvSpPr/>
+          <p:nvPr/>
+        </p:nvSpPr>
+        <p:spPr>
+          <a:xfrm>
+            <a:off x="822960" y="1463040"/>
+            <a:ext cx="10515600" cy="676656"/>
+          </a:xfrm>
+          <a:prstGeom prst="rect">
+            <a:avLst/>
+          </a:prstGeom>
+          <a:noFill/>
+          <a:ln/>
+        </p:spPr>
+        <p:txBody>
+          <a:bodyPr wrap="square" lIns="0" tIns="0" rIns="0" bIns="0" rtlCol="0" anchor="ctr"/>
+          <a:lstStyle/>
+          <a:p>
+            <a:pPr indent="0" marL="0">
+              <a:buNone/>
+            </a:pPr>
+            <a:r>
+              <a:rPr lang="en-US" sz="1100" b="1" spc="150" kern="0" dirty="0">
+                <a:solidFill>
+                  <a:srgbClr val="E08A2E"/>
+                </a:solidFill>
+                <a:latin typeface="Calibri" pitchFamily="34" charset="0"/>
+                <a:ea typeface="Calibri" pitchFamily="34" charset="-122"/>
+                <a:cs typeface="Calibri" pitchFamily="34" charset="-120"/>
+              </a:rPr>
+              <a:t>PATH   </a:t>
+            </a:r>
+            <a:pPr indent="0" marL="0">
+              <a:buNone/>
+            </a:pPr>
+            <a:r>
+              <a:rPr lang="en-US" sz="1500" b="1" dirty="0">
+                <a:solidFill>
+                  <a:srgbClr val="FFFFFF"/>
+                </a:solidFill>
+                <a:latin typeface="Calibri" pitchFamily="34" charset="0"/>
+                <a:ea typeface="Calibri" pitchFamily="34" charset="-122"/>
+                <a:cs typeface="Calibri" pitchFamily="34" charset="-120"/>
+              </a:rPr>
+              <a:t>Settings</a:t>
+            </a:r>
+            <a:pPr indent="0" marL="0">
+              <a:buNone/>
+            </a:pPr>
+            <a:r>
+              <a:rPr lang="en-US" sz="1500" dirty="0">
+                <a:solidFill>
+                  <a:srgbClr val="F6C177"/>
+                </a:solidFill>
+                <a:latin typeface="Calibri" pitchFamily="34" charset="0"/>
+                <a:ea typeface="Calibri" pitchFamily="34" charset="-122"/>
+                <a:cs typeface="Calibri" pitchFamily="34" charset="-120"/>
+              </a:rPr>
+              <a:t>   ›   </a:t>
+            </a:r>
+            <a:pPr indent="0" marL="0">
+              <a:buNone/>
+            </a:pPr>
+            <a:r>
+              <a:rPr lang="en-US" sz="1500" b="1" dirty="0">
+                <a:solidFill>
+                  <a:srgbClr val="FFFFFF"/>
+                </a:solidFill>
+                <a:latin typeface="Calibri" pitchFamily="34" charset="0"/>
+                <a:ea typeface="Calibri" pitchFamily="34" charset="-122"/>
+                <a:cs typeface="Calibri" pitchFamily="34" charset="-120"/>
+              </a:rPr>
+              <a:t>Workforce</a:t>
+            </a:r>
+            <a:pPr indent="0" marL="0">
+              <a:buNone/>
+            </a:pPr>
+            <a:r>
+              <a:rPr lang="en-US" sz="1500" dirty="0">
+                <a:solidFill>
+                  <a:srgbClr val="F6C177"/>
+                </a:solidFill>
+                <a:latin typeface="Calibri" pitchFamily="34" charset="0"/>
+                <a:ea typeface="Calibri" pitchFamily="34" charset="-122"/>
+                <a:cs typeface="Calibri" pitchFamily="34" charset="-120"/>
+              </a:rPr>
+              <a:t>   ›   </a:t>
+            </a:r>
+            <a:pPr indent="0" marL="0">
+              <a:buNone/>
+            </a:pPr>
+            <a:r>
+              <a:rPr lang="en-US" sz="1500" b="1" dirty="0">
+                <a:solidFill>
+                  <a:srgbClr val="FFFFFF"/>
+                </a:solidFill>
+                <a:latin typeface="Calibri" pitchFamily="34" charset="0"/>
+                <a:ea typeface="Calibri" pitchFamily="34" charset="-122"/>
+                <a:cs typeface="Calibri" pitchFamily="34" charset="-120"/>
+              </a:rPr>
+              <a:t>General</a:t>
+            </a:r>
+            <a:endParaRPr lang="en-US" sz="1100" dirty="0"/>
+          </a:p>
+        </p:txBody>
+      </p:sp>
+      <p:sp>
+        <p:nvSpPr>
+          <p:cNvPr id="6" name="Shape 4"/>
+          <p:cNvSpPr/>
+          <p:nvPr/>
+        </p:nvSpPr>
+        <p:spPr>
+          <a:xfrm>
+            <a:off x="585216" y="2487168"/>
+            <a:ext cx="384048" cy="384048"/>
+          </a:xfrm>
+          <a:prstGeom prst="ellipse">
+            <a:avLst/>
+          </a:prstGeom>
+          <a:solidFill>
+            <a:srgbClr val="E08A2E"/>
+          </a:solidFill>
+          <a:ln w="12700">
+            <a:solidFill>
+              <a:srgbClr val="E08A2E"/>
+            </a:solidFill>
+            <a:prstDash val="solid"/>
+          </a:ln>
+        </p:spPr>
+      </p:sp>
+      <p:sp>
+        <p:nvSpPr>
+          <p:cNvPr id="7" name="Text 5"/>
+          <p:cNvSpPr/>
+          <p:nvPr/>
+        </p:nvSpPr>
+        <p:spPr>
+          <a:xfrm>
+            <a:off x="585216" y="2487168"/>
+            <a:ext cx="384048" cy="384048"/>
+          </a:xfrm>
+          <a:prstGeom prst="rect">
+            <a:avLst/>
+          </a:prstGeom>
+          <a:noFill/>
+          <a:ln/>
+        </p:spPr>
+        <p:txBody>
+          <a:bodyPr wrap="square" lIns="0" tIns="0" rIns="0" bIns="0" rtlCol="0" anchor="ctr"/>
+          <a:lstStyle/>
+          <a:p>
+            <a:pPr algn="ctr" indent="0" marL="0">
+              <a:buNone/>
+            </a:pPr>
+            <a:r>
+              <a:rPr lang="en-US" sz="1300" b="1" dirty="0">
+                <a:solidFill>
+                  <a:srgbClr val="0E1A28"/>
+                </a:solidFill>
+                <a:latin typeface="Calibri" pitchFamily="34" charset="0"/>
+                <a:ea typeface="Calibri" pitchFamily="34" charset="-122"/>
+                <a:cs typeface="Calibri" pitchFamily="34" charset="-120"/>
+              </a:rPr>
+              <a:t>1</a:t>
+            </a:r>
+            <a:endParaRPr lang="en-US" sz="1300" dirty="0"/>
+          </a:p>
+        </p:txBody>
+      </p:sp>
+      <p:sp>
+        <p:nvSpPr>
+          <p:cNvPr id="8" name="Text 6"/>
+          <p:cNvSpPr/>
+          <p:nvPr/>
+        </p:nvSpPr>
+        <p:spPr>
+          <a:xfrm>
+            <a:off x="1170432" y="2450592"/>
+            <a:ext cx="10424160" cy="457200"/>
+          </a:xfrm>
+          <a:prstGeom prst="rect">
+            <a:avLst/>
+          </a:prstGeom>
+          <a:noFill/>
+          <a:ln/>
+        </p:spPr>
+        <p:txBody>
+          <a:bodyPr wrap="square" lIns="0" tIns="0" rIns="0" bIns="0" rtlCol="0" anchor="ctr"/>
+          <a:lstStyle/>
+          <a:p>
+            <a:pPr indent="0" marL="0">
+              <a:buNone/>
+            </a:pPr>
+            <a:r>
+              <a:rPr lang="en-US" sz="1500" dirty="0">
+                <a:solidFill>
+                  <a:srgbClr val="F0F3F6"/>
+                </a:solidFill>
+                <a:latin typeface="Calibri" pitchFamily="34" charset="0"/>
+                <a:ea typeface="Calibri" pitchFamily="34" charset="-122"/>
+                <a:cs typeface="Calibri" pitchFamily="34" charset="-120"/>
+              </a:rPr>
+              <a:t>Open Settings → Workforce → General.</a:t>
+            </a:r>
+            <a:endParaRPr lang="en-US" sz="1500" dirty="0"/>
+          </a:p>
+        </p:txBody>
+      </p:sp>
+      <p:sp>
+        <p:nvSpPr>
+          <p:cNvPr id="9" name="Shape 7"/>
+          <p:cNvSpPr/>
+          <p:nvPr/>
+        </p:nvSpPr>
+        <p:spPr>
+          <a:xfrm>
+            <a:off x="585216" y="3090672"/>
+            <a:ext cx="384048" cy="384048"/>
+          </a:xfrm>
+          <a:prstGeom prst="ellipse">
+            <a:avLst/>
+          </a:prstGeom>
+          <a:solidFill>
+            <a:srgbClr val="E08A2E"/>
+          </a:solidFill>
+          <a:ln w="12700">
+            <a:solidFill>
+              <a:srgbClr val="E08A2E"/>
+            </a:solidFill>
+            <a:prstDash val="solid"/>
+          </a:ln>
+        </p:spPr>
+      </p:sp>
+      <p:sp>
+        <p:nvSpPr>
+          <p:cNvPr id="10" name="Text 8"/>
+          <p:cNvSpPr/>
+          <p:nvPr/>
+        </p:nvSpPr>
+        <p:spPr>
+          <a:xfrm>
+            <a:off x="585216" y="3090672"/>
+            <a:ext cx="384048" cy="384048"/>
+          </a:xfrm>
+          <a:prstGeom prst="rect">
+            <a:avLst/>
+          </a:prstGeom>
+          <a:noFill/>
+          <a:ln/>
+        </p:spPr>
+        <p:txBody>
+          <a:bodyPr wrap="square" lIns="0" tIns="0" rIns="0" bIns="0" rtlCol="0" anchor="ctr"/>
+          <a:lstStyle/>
+          <a:p>
+            <a:pPr algn="ctr" indent="0" marL="0">
+              <a:buNone/>
+            </a:pPr>
+            <a:r>
+              <a:rPr lang="en-US" sz="1300" b="1" dirty="0">
+                <a:solidFill>
+                  <a:srgbClr val="0E1A28"/>
+                </a:solidFill>
+                <a:latin typeface="Calibri" pitchFamily="34" charset="0"/>
+                <a:ea typeface="Calibri" pitchFamily="34" charset="-122"/>
+                <a:cs typeface="Calibri" pitchFamily="34" charset="-120"/>
+              </a:rPr>
+              <a:t>2</a:t>
+            </a:r>
+            <a:endParaRPr lang="en-US" sz="1300" dirty="0"/>
+          </a:p>
+        </p:txBody>
+      </p:sp>
+      <p:sp>
+        <p:nvSpPr>
+          <p:cNvPr id="11" name="Text 9"/>
+          <p:cNvSpPr/>
+          <p:nvPr/>
+        </p:nvSpPr>
+        <p:spPr>
+          <a:xfrm>
+            <a:off x="1170432" y="3054096"/>
+            <a:ext cx="10424160" cy="457200"/>
+          </a:xfrm>
+          <a:prstGeom prst="rect">
+            <a:avLst/>
+          </a:prstGeom>
+          <a:noFill/>
+          <a:ln/>
+        </p:spPr>
+        <p:txBody>
+          <a:bodyPr wrap="square" lIns="0" tIns="0" rIns="0" bIns="0" rtlCol="0" anchor="ctr"/>
+          <a:lstStyle/>
+          <a:p>
+            <a:pPr indent="0" marL="0">
+              <a:buNone/>
+            </a:pPr>
+            <a:r>
+              <a:rPr lang="en-US" sz="1500" dirty="0">
+                <a:solidFill>
+                  <a:srgbClr val="F0F3F6"/>
+                </a:solidFill>
+                <a:latin typeface="Calibri" pitchFamily="34" charset="0"/>
+                <a:ea typeface="Calibri" pitchFamily="34" charset="-122"/>
+                <a:cs typeface="Calibri" pitchFamily="34" charset="-120"/>
+              </a:rPr>
+              <a:t>Set the timezone, break deduction and weekly off days.</a:t>
+            </a:r>
+            <a:endParaRPr lang="en-US" sz="1500" dirty="0"/>
+          </a:p>
+        </p:txBody>
+      </p:sp>
+      <p:sp>
+        <p:nvSpPr>
+          <p:cNvPr id="12" name="Shape 10"/>
+          <p:cNvSpPr/>
+          <p:nvPr/>
+        </p:nvSpPr>
+        <p:spPr>
+          <a:xfrm>
+            <a:off x="585216" y="3694176"/>
+            <a:ext cx="384048" cy="384048"/>
+          </a:xfrm>
+          <a:prstGeom prst="ellipse">
+            <a:avLst/>
+          </a:prstGeom>
+          <a:solidFill>
+            <a:srgbClr val="E08A2E"/>
+          </a:solidFill>
+          <a:ln w="12700">
+            <a:solidFill>
+              <a:srgbClr val="E08A2E"/>
+            </a:solidFill>
+            <a:prstDash val="solid"/>
+          </a:ln>
+        </p:spPr>
+      </p:sp>
+      <p:sp>
+        <p:nvSpPr>
+          <p:cNvPr id="13" name="Text 11"/>
+          <p:cNvSpPr/>
+          <p:nvPr/>
+        </p:nvSpPr>
+        <p:spPr>
+          <a:xfrm>
+            <a:off x="585216" y="3694176"/>
+            <a:ext cx="384048" cy="384048"/>
+          </a:xfrm>
+          <a:prstGeom prst="rect">
+            <a:avLst/>
+          </a:prstGeom>
+          <a:noFill/>
+          <a:ln/>
+        </p:spPr>
+        <p:txBody>
+          <a:bodyPr wrap="square" lIns="0" tIns="0" rIns="0" bIns="0" rtlCol="0" anchor="ctr"/>
+          <a:lstStyle/>
+          <a:p>
+            <a:pPr algn="ctr" indent="0" marL="0">
+              <a:buNone/>
+            </a:pPr>
+            <a:r>
+              <a:rPr lang="en-US" sz="1300" b="1" dirty="0">
+                <a:solidFill>
+                  <a:srgbClr val="0E1A28"/>
+                </a:solidFill>
+                <a:latin typeface="Calibri" pitchFamily="34" charset="0"/>
+                <a:ea typeface="Calibri" pitchFamily="34" charset="-122"/>
+                <a:cs typeface="Calibri" pitchFamily="34" charset="-120"/>
+              </a:rPr>
+              <a:t>3</a:t>
+            </a:r>
+            <a:endParaRPr lang="en-US" sz="1300" dirty="0"/>
+          </a:p>
+        </p:txBody>
+      </p:sp>
+      <p:sp>
+        <p:nvSpPr>
+          <p:cNvPr id="14" name="Text 12"/>
+          <p:cNvSpPr/>
+          <p:nvPr/>
+        </p:nvSpPr>
+        <p:spPr>
+          <a:xfrm>
+            <a:off x="1170432" y="3657600"/>
+            <a:ext cx="10424160" cy="457200"/>
+          </a:xfrm>
+          <a:prstGeom prst="rect">
+            <a:avLst/>
+          </a:prstGeom>
+          <a:noFill/>
+          <a:ln/>
+        </p:spPr>
+        <p:txBody>
+          <a:bodyPr wrap="square" lIns="0" tIns="0" rIns="0" bIns="0" rtlCol="0" anchor="ctr"/>
+          <a:lstStyle/>
+          <a:p>
+            <a:pPr indent="0" marL="0">
+              <a:buNone/>
+            </a:pPr>
+            <a:r>
+              <a:rPr lang="en-US" sz="1500" dirty="0">
+                <a:solidFill>
+                  <a:srgbClr val="F0F3F6"/>
+                </a:solidFill>
+                <a:latin typeface="Calibri" pitchFamily="34" charset="0"/>
+                <a:ea typeface="Calibri" pitchFamily="34" charset="-122"/>
+                <a:cs typeface="Calibri" pitchFamily="34" charset="-120"/>
+              </a:rPr>
+              <a:t>Edit the employment types — add Intern, Contractor and so on.</a:t>
+            </a:r>
+            <a:endParaRPr lang="en-US" sz="1500" dirty="0"/>
+          </a:p>
+        </p:txBody>
+      </p:sp>
+      <p:sp>
+        <p:nvSpPr>
+          <p:cNvPr id="15" name="Shape 13"/>
+          <p:cNvSpPr/>
+          <p:nvPr/>
+        </p:nvSpPr>
+        <p:spPr>
+          <a:xfrm>
+            <a:off x="585216" y="4297680"/>
+            <a:ext cx="384048" cy="384048"/>
+          </a:xfrm>
+          <a:prstGeom prst="ellipse">
+            <a:avLst/>
+          </a:prstGeom>
+          <a:solidFill>
+            <a:srgbClr val="E08A2E"/>
+          </a:solidFill>
+          <a:ln w="12700">
+            <a:solidFill>
+              <a:srgbClr val="E08A2E"/>
+            </a:solidFill>
+            <a:prstDash val="solid"/>
+          </a:ln>
+        </p:spPr>
+      </p:sp>
+      <p:sp>
+        <p:nvSpPr>
+          <p:cNvPr id="16" name="Text 14"/>
+          <p:cNvSpPr/>
+          <p:nvPr/>
+        </p:nvSpPr>
+        <p:spPr>
+          <a:xfrm>
+            <a:off x="585216" y="4297680"/>
+            <a:ext cx="384048" cy="384048"/>
+          </a:xfrm>
+          <a:prstGeom prst="rect">
+            <a:avLst/>
+          </a:prstGeom>
+          <a:noFill/>
+          <a:ln/>
+        </p:spPr>
+        <p:txBody>
+          <a:bodyPr wrap="square" lIns="0" tIns="0" rIns="0" bIns="0" rtlCol="0" anchor="ctr"/>
+          <a:lstStyle/>
+          <a:p>
+            <a:pPr algn="ctr" indent="0" marL="0">
+              <a:buNone/>
+            </a:pPr>
+            <a:r>
+              <a:rPr lang="en-US" sz="1300" b="1" dirty="0">
+                <a:solidFill>
+                  <a:srgbClr val="0E1A28"/>
+                </a:solidFill>
+                <a:latin typeface="Calibri" pitchFamily="34" charset="0"/>
+                <a:ea typeface="Calibri" pitchFamily="34" charset="-122"/>
+                <a:cs typeface="Calibri" pitchFamily="34" charset="-120"/>
+              </a:rPr>
+              <a:t>4</a:t>
+            </a:r>
+            <a:endParaRPr lang="en-US" sz="1300" dirty="0"/>
+          </a:p>
+        </p:txBody>
+      </p:sp>
+      <p:sp>
+        <p:nvSpPr>
+          <p:cNvPr id="17" name="Text 15"/>
+          <p:cNvSpPr/>
+          <p:nvPr/>
+        </p:nvSpPr>
+        <p:spPr>
+          <a:xfrm>
+            <a:off x="1170432" y="4261104"/>
+            <a:ext cx="10424160" cy="457200"/>
+          </a:xfrm>
+          <a:prstGeom prst="rect">
+            <a:avLst/>
+          </a:prstGeom>
+          <a:noFill/>
+          <a:ln/>
+        </p:spPr>
+        <p:txBody>
+          <a:bodyPr wrap="square" lIns="0" tIns="0" rIns="0" bIns="0" rtlCol="0" anchor="ctr"/>
+          <a:lstStyle/>
+          <a:p>
+            <a:pPr indent="0" marL="0">
+              <a:buNone/>
+            </a:pPr>
+            <a:r>
+              <a:rPr lang="en-US" sz="1500" dirty="0">
+                <a:solidFill>
+                  <a:srgbClr val="F0F3F6"/>
+                </a:solidFill>
+                <a:latin typeface="Calibri" pitchFamily="34" charset="0"/>
+                <a:ea typeface="Calibri" pitchFamily="34" charset="-122"/>
+                <a:cs typeface="Calibri" pitchFamily="34" charset="-120"/>
+              </a:rPr>
+              <a:t>Switch the four email notifications on or off.</a:t>
+            </a:r>
+            <a:endParaRPr lang="en-US" sz="1500" dirty="0"/>
+          </a:p>
+        </p:txBody>
+      </p:sp>
+      <p:sp>
+        <p:nvSpPr>
+          <p:cNvPr id="18" name="Shape 16"/>
+          <p:cNvSpPr/>
+          <p:nvPr/>
+        </p:nvSpPr>
+        <p:spPr>
+          <a:xfrm>
+            <a:off x="548640" y="5742432"/>
+            <a:ext cx="11064240" cy="658368"/>
+          </a:xfrm>
+          <a:prstGeom prst="roundRect">
+            <a:avLst>
+              <a:gd name="adj" fmla="val 11111"/>
+            </a:avLst>
+          </a:prstGeom>
+          <a:solidFill>
+            <a:srgbClr val="1B2C3F"/>
+          </a:solidFill>
+          <a:ln w="12700">
+            <a:solidFill>
+              <a:srgbClr val="1B2C3F"/>
+            </a:solidFill>
+            <a:prstDash val="solid"/>
+          </a:ln>
+        </p:spPr>
+      </p:sp>
+      <p:sp>
+        <p:nvSpPr>
+          <p:cNvPr id="19" name="Text 17"/>
+          <p:cNvSpPr/>
+          <p:nvPr/>
+        </p:nvSpPr>
+        <p:spPr>
+          <a:xfrm>
+            <a:off x="822960" y="5742432"/>
+            <a:ext cx="10515600" cy="658368"/>
+          </a:xfrm>
+          <a:prstGeom prst="rect">
+            <a:avLst/>
+          </a:prstGeom>
+          <a:noFill/>
+          <a:ln/>
+        </p:spPr>
+        <p:txBody>
+          <a:bodyPr wrap="square" lIns="0" tIns="0" rIns="0" bIns="0" rtlCol="0" anchor="ctr"/>
+          <a:lstStyle/>
+          <a:p>
+            <a:pPr indent="0" marL="0">
+              <a:buNone/>
+            </a:pPr>
+            <a:r>
+              <a:rPr lang="en-US" sz="1050" b="1" spc="140" kern="0" dirty="0">
+                <a:solidFill>
+                  <a:srgbClr val="E08A2E"/>
+                </a:solidFill>
+                <a:latin typeface="Calibri" pitchFamily="34" charset="0"/>
+                <a:ea typeface="Calibri" pitchFamily="34" charset="-122"/>
+                <a:cs typeface="Calibri" pitchFamily="34" charset="-120"/>
+              </a:rPr>
+              <a:t>NOTE   </a:t>
+            </a:r>
+            <a:pPr indent="0" marL="0">
+              <a:buNone/>
+            </a:pPr>
+            <a:r>
+              <a:rPr lang="en-US" sz="1300" i="1" dirty="0">
+                <a:solidFill>
+                  <a:srgbClr val="DCE3EA"/>
+                </a:solidFill>
+                <a:latin typeface="Calibri" pitchFamily="34" charset="0"/>
+                <a:ea typeface="Calibri" pitchFamily="34" charset="-122"/>
+                <a:cs typeface="Calibri" pitchFamily="34" charset="-120"/>
+              </a:rPr>
+              <a:t>Never rename an employment type code once employees use it — the Excel export groups its sheets by that code.</a:t>
+            </a:r>
+            <a:endParaRPr lang="en-US" sz="1050" dirty="0"/>
+          </a:p>
+        </p:txBody>
+      </p:sp>
+    </p:spTree>
+  </p:cSld>
+  <p:clrMapOvr>
+    <a:masterClrMapping/>
+  </p:clrMapOvr>
+</p:sld>
+</file>
+
+<file path=ppt/slides/slide37.xml><?xml version="1.0" encoding="utf-8"?>
+<p:sld xmlns:a="http://schemas.openxmlformats.org/drawingml/2006/main" xmlns:r="http://schemas.openxmlformats.org/officeDocument/2006/relationships" xmlns:p="http://schemas.openxmlformats.org/presentationml/2006/main">
+  <p:cSld name="Slide 37">
+    <p:bg>
+      <p:bgPr>
+        <a:solidFill>
+          <a:srgbClr val="FFFFFF"/>
+        </a:solidFill>
+      </p:bgPr>
+    </p:bg>
+    <p:spTree>
+      <p:nvGrpSpPr>
+        <p:cNvPr id="1" name=""/>
+        <p:cNvGrpSpPr/>
+        <p:nvPr/>
+      </p:nvGrpSpPr>
+      <p:grpSpPr>
+        <a:xfrm>
+          <a:off x="0" y="0"/>
+          <a:ext cx="0" cy="0"/>
+          <a:chOff x="0" y="0"/>
+          <a:chExt cx="0" cy="0"/>
+        </a:xfrm>
+      </p:grpSpPr>
+      <p:sp>
+        <p:nvSpPr>
+          <p:cNvPr id="2" name="Text 0"/>
+          <p:cNvSpPr/>
+          <p:nvPr/>
+        </p:nvSpPr>
+        <p:spPr>
+          <a:xfrm>
+            <a:off x="548640" y="384048"/>
+            <a:ext cx="5486400" cy="274320"/>
+          </a:xfrm>
+          <a:prstGeom prst="rect">
+            <a:avLst/>
+          </a:prstGeom>
+          <a:noFill/>
+          <a:ln/>
+        </p:spPr>
+        <p:txBody>
+          <a:bodyPr wrap="square" rtlCol="0" anchor="ctr"/>
+          <a:lstStyle/>
+          <a:p>
+            <a:pPr indent="0" marL="0">
+              <a:buNone/>
+            </a:pPr>
+            <a:r>
+              <a:rPr lang="en-US" sz="1100" b="1" spc="200" kern="0" dirty="0">
+                <a:solidFill>
+                  <a:srgbClr val="E08A2E"/>
+                </a:solidFill>
+                <a:latin typeface="Calibri" pitchFamily="34" charset="0"/>
+                <a:ea typeface="Calibri" pitchFamily="34" charset="-122"/>
+                <a:cs typeface="Calibri" pitchFamily="34" charset="-120"/>
+              </a:rPr>
+              <a:t>PERMISSIONS</a:t>
+            </a:r>
+            <a:endParaRPr lang="en-US" sz="1100" dirty="0"/>
+          </a:p>
+        </p:txBody>
+      </p:sp>
+      <p:sp>
+        <p:nvSpPr>
+          <p:cNvPr id="3" name="Text 1"/>
+          <p:cNvSpPr/>
+          <p:nvPr/>
+        </p:nvSpPr>
+        <p:spPr>
+          <a:xfrm>
+            <a:off x="548640" y="685800"/>
+            <a:ext cx="10515600" cy="640080"/>
+          </a:xfrm>
+          <a:prstGeom prst="rect">
+            <a:avLst/>
+          </a:prstGeom>
+          <a:noFill/>
+          <a:ln/>
+        </p:spPr>
+        <p:txBody>
+          <a:bodyPr wrap="square" rtlCol="0" anchor="ctr"/>
+          <a:lstStyle/>
+          <a:p>
+            <a:pPr indent="0" marL="0">
+              <a:buNone/>
+            </a:pPr>
+            <a:r>
+              <a:rPr lang="en-US" sz="3300" b="1" dirty="0">
+                <a:solidFill>
+                  <a:srgbClr val="0E1A28"/>
+                </a:solidFill>
+                <a:latin typeface="Calibri" pitchFamily="34" charset="0"/>
+                <a:ea typeface="Calibri" pitchFamily="34" charset="-122"/>
+                <a:cs typeface="Calibri" pitchFamily="34" charset="-120"/>
+              </a:rPr>
+              <a:t>Who can do what</a:t>
+            </a:r>
+            <a:endParaRPr lang="en-US" sz="3300" dirty="0"/>
+          </a:p>
+        </p:txBody>
+      </p:sp>
+      <p:sp>
+        <p:nvSpPr>
+          <p:cNvPr id="4" name="Text 2"/>
+          <p:cNvSpPr/>
+          <p:nvPr/>
+        </p:nvSpPr>
+        <p:spPr>
+          <a:xfrm>
+            <a:off x="548640" y="1371600"/>
+            <a:ext cx="10515600" cy="365760"/>
+          </a:xfrm>
+          <a:prstGeom prst="rect">
+            <a:avLst/>
+          </a:prstGeom>
+          <a:noFill/>
+          <a:ln/>
+        </p:spPr>
+        <p:txBody>
+          <a:bodyPr wrap="square" rtlCol="0" anchor="ctr"/>
+          <a:lstStyle/>
+          <a:p>
+            <a:pPr indent="0" marL="0">
+              <a:buNone/>
+            </a:pPr>
+            <a:r>
+              <a:rPr lang="en-US" sz="1400" dirty="0">
+                <a:solidFill>
+                  <a:srgbClr val="5C6B7A"/>
+                </a:solidFill>
+                <a:latin typeface="Calibri" pitchFamily="34" charset="0"/>
+                <a:ea typeface="Calibri" pitchFamily="34" charset="-122"/>
+                <a:cs typeface="Calibri" pitchFamily="34" charset="-120"/>
+              </a:rPr>
+              <a:t>Enforced on the server, not just hidden in the interface.</a:t>
+            </a:r>
+            <a:endParaRPr lang="en-US" sz="1400" dirty="0"/>
+          </a:p>
+        </p:txBody>
+      </p:sp>
+      <p:sp>
+        <p:nvSpPr>
+          <p:cNvPr id="5" name="Shape 3"/>
+          <p:cNvSpPr/>
+          <p:nvPr/>
+        </p:nvSpPr>
+        <p:spPr>
+          <a:xfrm>
+            <a:off x="548640" y="1874520"/>
+            <a:ext cx="11064240" cy="457200"/>
+          </a:xfrm>
+          <a:prstGeom prst="roundRect">
+            <a:avLst>
+              <a:gd name="adj" fmla="val 10000"/>
+            </a:avLst>
+          </a:prstGeom>
+          <a:solidFill>
+            <a:srgbClr val="0E1A28"/>
+          </a:solidFill>
+          <a:ln w="12700">
+            <a:solidFill>
+              <a:srgbClr val="0E1A28"/>
+            </a:solidFill>
+            <a:prstDash val="solid"/>
+          </a:ln>
+        </p:spPr>
+      </p:sp>
+      <p:sp>
+        <p:nvSpPr>
+          <p:cNvPr id="6" name="Text 4"/>
+          <p:cNvSpPr/>
+          <p:nvPr/>
+        </p:nvSpPr>
+        <p:spPr>
+          <a:xfrm>
+            <a:off x="548640" y="1874520"/>
+            <a:ext cx="5029200" cy="457200"/>
+          </a:xfrm>
+          <a:prstGeom prst="rect">
+            <a:avLst/>
+          </a:prstGeom>
+          <a:noFill/>
+          <a:ln/>
+        </p:spPr>
+        <p:txBody>
+          <a:bodyPr wrap="square" lIns="0" tIns="0" rIns="0" bIns="0" rtlCol="0" anchor="ctr"/>
+          <a:lstStyle/>
+          <a:p>
+            <a:pPr algn="l" indent="0" marL="0">
+              <a:buNone/>
+            </a:pPr>
+            <a:r>
+              <a:rPr lang="en-US" sz="1150" b="1" dirty="0">
+                <a:solidFill>
+                  <a:srgbClr val="FFFFFF"/>
+                </a:solidFill>
+                <a:latin typeface="Calibri" pitchFamily="34" charset="0"/>
+                <a:ea typeface="Calibri" pitchFamily="34" charset="-122"/>
+                <a:cs typeface="Calibri" pitchFamily="34" charset="-120"/>
+              </a:rPr>
+              <a:t>Action</a:t>
+            </a:r>
+            <a:endParaRPr lang="en-US" sz="1150" dirty="0"/>
+          </a:p>
+        </p:txBody>
+      </p:sp>
+      <p:sp>
+        <p:nvSpPr>
+          <p:cNvPr id="7" name="Text 5"/>
+          <p:cNvSpPr/>
+          <p:nvPr/>
+        </p:nvSpPr>
+        <p:spPr>
+          <a:xfrm>
+            <a:off x="5623560" y="1874520"/>
+            <a:ext cx="1463040" cy="457200"/>
+          </a:xfrm>
+          <a:prstGeom prst="rect">
+            <a:avLst/>
+          </a:prstGeom>
+          <a:noFill/>
+          <a:ln/>
+        </p:spPr>
+        <p:txBody>
+          <a:bodyPr wrap="square" lIns="0" tIns="0" rIns="0" bIns="0" rtlCol="0" anchor="ctr"/>
+          <a:lstStyle/>
+          <a:p>
+            <a:pPr algn="ctr" indent="0" marL="0">
+              <a:buNone/>
+            </a:pPr>
+            <a:r>
+              <a:rPr lang="en-US" sz="1150" b="1" dirty="0">
+                <a:solidFill>
+                  <a:srgbClr val="FFFFFF"/>
+                </a:solidFill>
+                <a:latin typeface="Calibri" pitchFamily="34" charset="0"/>
+                <a:ea typeface="Calibri" pitchFamily="34" charset="-122"/>
+                <a:cs typeface="Calibri" pitchFamily="34" charset="-120"/>
+              </a:rPr>
+              <a:t>Employee</a:t>
+            </a:r>
+            <a:endParaRPr lang="en-US" sz="1150" dirty="0"/>
+          </a:p>
+        </p:txBody>
+      </p:sp>
+      <p:sp>
+        <p:nvSpPr>
+          <p:cNvPr id="8" name="Text 6"/>
+          <p:cNvSpPr/>
+          <p:nvPr/>
+        </p:nvSpPr>
+        <p:spPr>
+          <a:xfrm>
+            <a:off x="7086600" y="1874520"/>
+            <a:ext cx="1828800" cy="457200"/>
+          </a:xfrm>
+          <a:prstGeom prst="rect">
+            <a:avLst/>
+          </a:prstGeom>
+          <a:noFill/>
+          <a:ln/>
+        </p:spPr>
+        <p:txBody>
+          <a:bodyPr wrap="square" lIns="0" tIns="0" rIns="0" bIns="0" rtlCol="0" anchor="ctr"/>
+          <a:lstStyle/>
+          <a:p>
+            <a:pPr algn="ctr" indent="0" marL="0">
+              <a:buNone/>
+            </a:pPr>
+            <a:r>
+              <a:rPr lang="en-US" sz="1150" b="1" dirty="0">
+                <a:solidFill>
+                  <a:srgbClr val="FFFFFF"/>
+                </a:solidFill>
+                <a:latin typeface="Calibri" pitchFamily="34" charset="0"/>
+                <a:ea typeface="Calibri" pitchFamily="34" charset="-122"/>
+                <a:cs typeface="Calibri" pitchFamily="34" charset="-120"/>
+              </a:rPr>
+              <a:t>Site supervisor</a:t>
+            </a:r>
+            <a:endParaRPr lang="en-US" sz="1150" dirty="0"/>
+          </a:p>
+        </p:txBody>
+      </p:sp>
+      <p:sp>
+        <p:nvSpPr>
+          <p:cNvPr id="9" name="Text 7"/>
+          <p:cNvSpPr/>
+          <p:nvPr/>
+        </p:nvSpPr>
+        <p:spPr>
+          <a:xfrm>
+            <a:off x="8915400" y="1874520"/>
+            <a:ext cx="1463040" cy="457200"/>
+          </a:xfrm>
+          <a:prstGeom prst="rect">
+            <a:avLst/>
+          </a:prstGeom>
+          <a:noFill/>
+          <a:ln/>
+        </p:spPr>
+        <p:txBody>
+          <a:bodyPr wrap="square" lIns="0" tIns="0" rIns="0" bIns="0" rtlCol="0" anchor="ctr"/>
+          <a:lstStyle/>
+          <a:p>
+            <a:pPr algn="ctr" indent="0" marL="0">
+              <a:buNone/>
+            </a:pPr>
+            <a:r>
+              <a:rPr lang="en-US" sz="1150" b="1" dirty="0">
+                <a:solidFill>
+                  <a:srgbClr val="FFFFFF"/>
+                </a:solidFill>
+                <a:latin typeface="Calibri" pitchFamily="34" charset="0"/>
+                <a:ea typeface="Calibri" pitchFamily="34" charset="-122"/>
+                <a:cs typeface="Calibri" pitchFamily="34" charset="-120"/>
+              </a:rPr>
+              <a:t>Manager</a:t>
+            </a:r>
+            <a:endParaRPr lang="en-US" sz="1150" dirty="0"/>
+          </a:p>
+        </p:txBody>
+      </p:sp>
+      <p:sp>
+        <p:nvSpPr>
+          <p:cNvPr id="10" name="Text 8"/>
+          <p:cNvSpPr/>
+          <p:nvPr/>
+        </p:nvSpPr>
+        <p:spPr>
+          <a:xfrm>
+            <a:off x="10378440" y="1874520"/>
+            <a:ext cx="1234440" cy="457200"/>
+          </a:xfrm>
+          <a:prstGeom prst="rect">
+            <a:avLst/>
+          </a:prstGeom>
+          <a:noFill/>
+          <a:ln/>
+        </p:spPr>
+        <p:txBody>
+          <a:bodyPr wrap="square" lIns="0" tIns="0" rIns="0" bIns="0" rtlCol="0" anchor="ctr"/>
+          <a:lstStyle/>
+          <a:p>
+            <a:pPr algn="ctr" indent="0" marL="0">
+              <a:buNone/>
+            </a:pPr>
+            <a:r>
+              <a:rPr lang="en-US" sz="1150" b="1" dirty="0">
+                <a:solidFill>
+                  <a:srgbClr val="FFFFFF"/>
+                </a:solidFill>
+                <a:latin typeface="Calibri" pitchFamily="34" charset="0"/>
+                <a:ea typeface="Calibri" pitchFamily="34" charset="-122"/>
+                <a:cs typeface="Calibri" pitchFamily="34" charset="-120"/>
+              </a:rPr>
+              <a:t>Admin</a:t>
+            </a:r>
+            <a:endParaRPr lang="en-US" sz="1150" dirty="0"/>
+          </a:p>
+        </p:txBody>
+      </p:sp>
+      <p:sp>
+        <p:nvSpPr>
+          <p:cNvPr id="11" name="Shape 9"/>
+          <p:cNvSpPr/>
+          <p:nvPr/>
+        </p:nvSpPr>
+        <p:spPr>
+          <a:xfrm>
+            <a:off x="548640" y="2386584"/>
+            <a:ext cx="11064240" cy="457200"/>
+          </a:xfrm>
+          <a:prstGeom prst="roundRect">
+            <a:avLst>
+              <a:gd name="adj" fmla="val 10000"/>
+            </a:avLst>
+          </a:prstGeom>
+          <a:solidFill>
+            <a:srgbClr val="F3F5F7"/>
+          </a:solidFill>
+          <a:ln w="6350">
+            <a:solidFill>
+              <a:srgbClr val="D9DEE4"/>
+            </a:solidFill>
+            <a:prstDash val="solid"/>
+          </a:ln>
+        </p:spPr>
+      </p:sp>
+      <p:sp>
+        <p:nvSpPr>
+          <p:cNvPr id="12" name="Text 10"/>
+          <p:cNvSpPr/>
+          <p:nvPr/>
+        </p:nvSpPr>
+        <p:spPr>
+          <a:xfrm>
+            <a:off x="548640" y="2386584"/>
+            <a:ext cx="5029200" cy="457200"/>
+          </a:xfrm>
+          <a:prstGeom prst="rect">
+            <a:avLst/>
+          </a:prstGeom>
+          <a:noFill/>
+          <a:ln/>
+        </p:spPr>
+        <p:txBody>
+          <a:bodyPr wrap="square" lIns="0" tIns="0" rIns="0" bIns="0" rtlCol="0" anchor="ctr"/>
+          <a:lstStyle/>
+          <a:p>
+            <a:pPr algn="l" indent="0" marL="0">
+              <a:buNone/>
+            </a:pPr>
+            <a:r>
+              <a:rPr lang="en-US" sz="1200" b="1" dirty="0">
+                <a:solidFill>
+                  <a:srgbClr val="16202B"/>
+                </a:solidFill>
+                <a:latin typeface="Calibri" pitchFamily="34" charset="0"/>
+                <a:ea typeface="Calibri" pitchFamily="34" charset="-122"/>
+                <a:cs typeface="Calibri" pitchFamily="34" charset="-120"/>
+              </a:rPr>
+              <a:t>Punch, own timesheet, apply for leave</a:t>
+            </a:r>
+            <a:endParaRPr lang="en-US" sz="1200" dirty="0"/>
+          </a:p>
+        </p:txBody>
+      </p:sp>
+      <p:sp>
+        <p:nvSpPr>
+          <p:cNvPr id="13" name="Text 11"/>
+          <p:cNvSpPr/>
+          <p:nvPr/>
+        </p:nvSpPr>
+        <p:spPr>
+          <a:xfrm>
+            <a:off x="5623560" y="2386584"/>
+            <a:ext cx="1463040" cy="457200"/>
+          </a:xfrm>
+          <a:prstGeom prst="rect">
+            <a:avLst/>
+          </a:prstGeom>
+          <a:noFill/>
+          <a:ln/>
+        </p:spPr>
+        <p:txBody>
+          <a:bodyPr wrap="square" lIns="0" tIns="0" rIns="0" bIns="0" rtlCol="0" anchor="ctr"/>
+          <a:lstStyle/>
+          <a:p>
+            <a:pPr algn="ctr" indent="0" marL="0">
+              <a:buNone/>
+            </a:pPr>
+            <a:r>
+              <a:rPr lang="en-US" sz="1200" b="1" dirty="0">
+                <a:solidFill>
+                  <a:srgbClr val="1E7A4C"/>
+                </a:solidFill>
+                <a:latin typeface="Calibri" pitchFamily="34" charset="0"/>
+                <a:ea typeface="Calibri" pitchFamily="34" charset="-122"/>
+                <a:cs typeface="Calibri" pitchFamily="34" charset="-120"/>
+              </a:rPr>
+              <a:t>Yes</a:t>
+            </a:r>
+            <a:endParaRPr lang="en-US" sz="1200" dirty="0"/>
+          </a:p>
+        </p:txBody>
+      </p:sp>
+      <p:sp>
+        <p:nvSpPr>
+          <p:cNvPr id="14" name="Text 12"/>
+          <p:cNvSpPr/>
+          <p:nvPr/>
+        </p:nvSpPr>
+        <p:spPr>
+          <a:xfrm>
+            <a:off x="7086600" y="2386584"/>
+            <a:ext cx="1828800" cy="457200"/>
+          </a:xfrm>
+          <a:prstGeom prst="rect">
+            <a:avLst/>
+          </a:prstGeom>
+          <a:noFill/>
+          <a:ln/>
+        </p:spPr>
+        <p:txBody>
+          <a:bodyPr wrap="square" lIns="0" tIns="0" rIns="0" bIns="0" rtlCol="0" anchor="ctr"/>
+          <a:lstStyle/>
+          <a:p>
+            <a:pPr algn="ctr" indent="0" marL="0">
+              <a:buNone/>
+            </a:pPr>
+            <a:r>
+              <a:rPr lang="en-US" sz="1200" b="1" dirty="0">
+                <a:solidFill>
+                  <a:srgbClr val="1E7A4C"/>
+                </a:solidFill>
+                <a:latin typeface="Calibri" pitchFamily="34" charset="0"/>
+                <a:ea typeface="Calibri" pitchFamily="34" charset="-122"/>
+                <a:cs typeface="Calibri" pitchFamily="34" charset="-120"/>
+              </a:rPr>
+              <a:t>Yes</a:t>
+            </a:r>
+            <a:endParaRPr lang="en-US" sz="1200" dirty="0"/>
+          </a:p>
+        </p:txBody>
+      </p:sp>
+      <p:sp>
+        <p:nvSpPr>
+          <p:cNvPr id="15" name="Text 13"/>
+          <p:cNvSpPr/>
+          <p:nvPr/>
+        </p:nvSpPr>
+        <p:spPr>
+          <a:xfrm>
+            <a:off x="8915400" y="2386584"/>
+            <a:ext cx="1463040" cy="457200"/>
+          </a:xfrm>
+          <a:prstGeom prst="rect">
+            <a:avLst/>
+          </a:prstGeom>
+          <a:noFill/>
+          <a:ln/>
+        </p:spPr>
+        <p:txBody>
+          <a:bodyPr wrap="square" lIns="0" tIns="0" rIns="0" bIns="0" rtlCol="0" anchor="ctr"/>
+          <a:lstStyle/>
+          <a:p>
+            <a:pPr algn="ctr" indent="0" marL="0">
+              <a:buNone/>
+            </a:pPr>
+            <a:r>
+              <a:rPr lang="en-US" sz="1200" b="1" dirty="0">
+                <a:solidFill>
+                  <a:srgbClr val="1E7A4C"/>
+                </a:solidFill>
+                <a:latin typeface="Calibri" pitchFamily="34" charset="0"/>
+                <a:ea typeface="Calibri" pitchFamily="34" charset="-122"/>
+                <a:cs typeface="Calibri" pitchFamily="34" charset="-120"/>
+              </a:rPr>
+              <a:t>Yes</a:t>
+            </a:r>
+            <a:endParaRPr lang="en-US" sz="1200" dirty="0"/>
+          </a:p>
+        </p:txBody>
+      </p:sp>
+      <p:sp>
+        <p:nvSpPr>
+          <p:cNvPr id="16" name="Text 14"/>
+          <p:cNvSpPr/>
+          <p:nvPr/>
+        </p:nvSpPr>
+        <p:spPr>
+          <a:xfrm>
+            <a:off x="10378440" y="2386584"/>
+            <a:ext cx="1234440" cy="457200"/>
+          </a:xfrm>
+          <a:prstGeom prst="rect">
+            <a:avLst/>
+          </a:prstGeom>
+          <a:noFill/>
+          <a:ln/>
+        </p:spPr>
+        <p:txBody>
+          <a:bodyPr wrap="square" lIns="0" tIns="0" rIns="0" bIns="0" rtlCol="0" anchor="ctr"/>
+          <a:lstStyle/>
+          <a:p>
+            <a:pPr algn="ctr" indent="0" marL="0">
+              <a:buNone/>
+            </a:pPr>
+            <a:r>
+              <a:rPr lang="en-US" sz="1200" b="1" dirty="0">
+                <a:solidFill>
+                  <a:srgbClr val="1E7A4C"/>
+                </a:solidFill>
+                <a:latin typeface="Calibri" pitchFamily="34" charset="0"/>
+                <a:ea typeface="Calibri" pitchFamily="34" charset="-122"/>
+                <a:cs typeface="Calibri" pitchFamily="34" charset="-120"/>
+              </a:rPr>
+              <a:t>Yes</a:t>
+            </a:r>
+            <a:endParaRPr lang="en-US" sz="1200" dirty="0"/>
+          </a:p>
+        </p:txBody>
+      </p:sp>
+      <p:sp>
+        <p:nvSpPr>
+          <p:cNvPr id="17" name="Shape 15"/>
+          <p:cNvSpPr/>
+          <p:nvPr/>
+        </p:nvSpPr>
+        <p:spPr>
+          <a:xfrm>
+            <a:off x="548640" y="2898648"/>
+            <a:ext cx="11064240" cy="457200"/>
+          </a:xfrm>
+          <a:prstGeom prst="roundRect">
+            <a:avLst>
+              <a:gd name="adj" fmla="val 10000"/>
+            </a:avLst>
+          </a:prstGeom>
+          <a:solidFill>
+            <a:srgbClr val="FFFFFF"/>
+          </a:solidFill>
+          <a:ln w="6350">
+            <a:solidFill>
+              <a:srgbClr val="D9DEE4"/>
+            </a:solidFill>
+            <a:prstDash val="solid"/>
+          </a:ln>
+        </p:spPr>
+      </p:sp>
+      <p:sp>
+        <p:nvSpPr>
+          <p:cNvPr id="18" name="Text 16"/>
+          <p:cNvSpPr/>
+          <p:nvPr/>
+        </p:nvSpPr>
+        <p:spPr>
+          <a:xfrm>
+            <a:off x="548640" y="2898648"/>
+            <a:ext cx="5029200" cy="457200"/>
+          </a:xfrm>
+          <a:prstGeom prst="rect">
+            <a:avLst/>
+          </a:prstGeom>
+          <a:noFill/>
+          <a:ln/>
+        </p:spPr>
+        <p:txBody>
+          <a:bodyPr wrap="square" lIns="0" tIns="0" rIns="0" bIns="0" rtlCol="0" anchor="ctr"/>
+          <a:lstStyle/>
+          <a:p>
+            <a:pPr algn="l" indent="0" marL="0">
+              <a:buNone/>
+            </a:pPr>
+            <a:r>
+              <a:rPr lang="en-US" sz="1200" b="1" dirty="0">
+                <a:solidFill>
+                  <a:srgbClr val="16202B"/>
+                </a:solidFill>
+                <a:latin typeface="Calibri" pitchFamily="34" charset="0"/>
+                <a:ea typeface="Calibri" pitchFamily="34" charset="-122"/>
+                <a:cs typeface="Calibri" pitchFamily="34" charset="-120"/>
+              </a:rPr>
+              <a:t>See the people at the site(s) you supervise</a:t>
+            </a:r>
+            <a:endParaRPr lang="en-US" sz="1200" dirty="0"/>
+          </a:p>
+        </p:txBody>
+      </p:sp>
+      <p:sp>
+        <p:nvSpPr>
+          <p:cNvPr id="19" name="Text 17"/>
+          <p:cNvSpPr/>
+          <p:nvPr/>
+        </p:nvSpPr>
+        <p:spPr>
+          <a:xfrm>
+            <a:off x="5623560" y="2898648"/>
+            <a:ext cx="1463040" cy="457200"/>
+          </a:xfrm>
+          <a:prstGeom prst="rect">
+            <a:avLst/>
+          </a:prstGeom>
+          <a:noFill/>
+          <a:ln/>
+        </p:spPr>
+        <p:txBody>
+          <a:bodyPr wrap="square" lIns="0" tIns="0" rIns="0" bIns="0" rtlCol="0" anchor="ctr"/>
+          <a:lstStyle/>
+          <a:p>
+            <a:pPr algn="ctr" indent="0" marL="0">
+              <a:buNone/>
+            </a:pPr>
+            <a:r>
+              <a:rPr lang="en-US" sz="1200" dirty="0">
+                <a:solidFill>
+                  <a:srgbClr val="A03A3A"/>
+                </a:solidFill>
+                <a:latin typeface="Calibri" pitchFamily="34" charset="0"/>
+                <a:ea typeface="Calibri" pitchFamily="34" charset="-122"/>
+                <a:cs typeface="Calibri" pitchFamily="34" charset="-120"/>
+              </a:rPr>
+              <a:t>No</a:t>
+            </a:r>
+            <a:endParaRPr lang="en-US" sz="1200" dirty="0"/>
+          </a:p>
+        </p:txBody>
+      </p:sp>
+      <p:sp>
+        <p:nvSpPr>
+          <p:cNvPr id="20" name="Text 18"/>
+          <p:cNvSpPr/>
+          <p:nvPr/>
+        </p:nvSpPr>
+        <p:spPr>
+          <a:xfrm>
+            <a:off x="7086600" y="2898648"/>
+            <a:ext cx="1828800" cy="457200"/>
+          </a:xfrm>
+          <a:prstGeom prst="rect">
+            <a:avLst/>
+          </a:prstGeom>
+          <a:noFill/>
+          <a:ln/>
+        </p:spPr>
+        <p:txBody>
+          <a:bodyPr wrap="square" lIns="0" tIns="0" rIns="0" bIns="0" rtlCol="0" anchor="ctr"/>
+          <a:lstStyle/>
+          <a:p>
+            <a:pPr algn="ctr" indent="0" marL="0">
+              <a:buNone/>
+            </a:pPr>
+            <a:r>
+              <a:rPr lang="en-US" sz="1200" b="1" dirty="0">
+                <a:solidFill>
+                  <a:srgbClr val="1E7A4C"/>
+                </a:solidFill>
+                <a:latin typeface="Calibri" pitchFamily="34" charset="0"/>
+                <a:ea typeface="Calibri" pitchFamily="34" charset="-122"/>
+                <a:cs typeface="Calibri" pitchFamily="34" charset="-120"/>
+              </a:rPr>
+              <a:t>Yes</a:t>
+            </a:r>
+            <a:endParaRPr lang="en-US" sz="1200" dirty="0"/>
+          </a:p>
+        </p:txBody>
+      </p:sp>
+      <p:sp>
+        <p:nvSpPr>
+          <p:cNvPr id="21" name="Text 19"/>
+          <p:cNvSpPr/>
+          <p:nvPr/>
+        </p:nvSpPr>
+        <p:spPr>
+          <a:xfrm>
+            <a:off x="8915400" y="2898648"/>
+            <a:ext cx="1463040" cy="457200"/>
+          </a:xfrm>
+          <a:prstGeom prst="rect">
+            <a:avLst/>
+          </a:prstGeom>
+          <a:noFill/>
+          <a:ln/>
+        </p:spPr>
+        <p:txBody>
+          <a:bodyPr wrap="square" lIns="0" tIns="0" rIns="0" bIns="0" rtlCol="0" anchor="ctr"/>
+          <a:lstStyle/>
+          <a:p>
+            <a:pPr algn="ctr" indent="0" marL="0">
+              <a:buNone/>
+            </a:pPr>
+            <a:r>
+              <a:rPr lang="en-US" sz="1200" b="1" dirty="0">
+                <a:solidFill>
+                  <a:srgbClr val="1E7A4C"/>
+                </a:solidFill>
+                <a:latin typeface="Calibri" pitchFamily="34" charset="0"/>
+                <a:ea typeface="Calibri" pitchFamily="34" charset="-122"/>
+                <a:cs typeface="Calibri" pitchFamily="34" charset="-120"/>
+              </a:rPr>
+              <a:t>Yes</a:t>
+            </a:r>
+            <a:endParaRPr lang="en-US" sz="1200" dirty="0"/>
+          </a:p>
+        </p:txBody>
+      </p:sp>
+      <p:sp>
+        <p:nvSpPr>
+          <p:cNvPr id="22" name="Text 20"/>
+          <p:cNvSpPr/>
+          <p:nvPr/>
+        </p:nvSpPr>
+        <p:spPr>
+          <a:xfrm>
+            <a:off x="10378440" y="2898648"/>
+            <a:ext cx="1234440" cy="457200"/>
+          </a:xfrm>
+          <a:prstGeom prst="rect">
+            <a:avLst/>
+          </a:prstGeom>
+          <a:noFill/>
+          <a:ln/>
+        </p:spPr>
+        <p:txBody>
+          <a:bodyPr wrap="square" lIns="0" tIns="0" rIns="0" bIns="0" rtlCol="0" anchor="ctr"/>
+          <a:lstStyle/>
+          <a:p>
+            <a:pPr algn="ctr" indent="0" marL="0">
+              <a:buNone/>
+            </a:pPr>
+            <a:r>
+              <a:rPr lang="en-US" sz="1200" b="1" dirty="0">
+                <a:solidFill>
+                  <a:srgbClr val="1E7A4C"/>
+                </a:solidFill>
+                <a:latin typeface="Calibri" pitchFamily="34" charset="0"/>
+                <a:ea typeface="Calibri" pitchFamily="34" charset="-122"/>
+                <a:cs typeface="Calibri" pitchFamily="34" charset="-120"/>
+              </a:rPr>
+              <a:t>Yes</a:t>
+            </a:r>
+            <a:endParaRPr lang="en-US" sz="1200" dirty="0"/>
+          </a:p>
+        </p:txBody>
+      </p:sp>
+      <p:sp>
+        <p:nvSpPr>
+          <p:cNvPr id="23" name="Shape 21"/>
+          <p:cNvSpPr/>
+          <p:nvPr/>
+        </p:nvSpPr>
+        <p:spPr>
+          <a:xfrm>
+            <a:off x="548640" y="3410712"/>
+            <a:ext cx="11064240" cy="457200"/>
+          </a:xfrm>
+          <a:prstGeom prst="roundRect">
+            <a:avLst>
+              <a:gd name="adj" fmla="val 10000"/>
+            </a:avLst>
+          </a:prstGeom>
+          <a:solidFill>
+            <a:srgbClr val="F3F5F7"/>
+          </a:solidFill>
+          <a:ln w="6350">
+            <a:solidFill>
+              <a:srgbClr val="D9DEE4"/>
+            </a:solidFill>
+            <a:prstDash val="solid"/>
+          </a:ln>
+        </p:spPr>
+      </p:sp>
+      <p:sp>
+        <p:nvSpPr>
+          <p:cNvPr id="24" name="Text 22"/>
+          <p:cNvSpPr/>
+          <p:nvPr/>
+        </p:nvSpPr>
+        <p:spPr>
+          <a:xfrm>
+            <a:off x="548640" y="3410712"/>
+            <a:ext cx="5029200" cy="457200"/>
+          </a:xfrm>
+          <a:prstGeom prst="rect">
+            <a:avLst/>
+          </a:prstGeom>
+          <a:noFill/>
+          <a:ln/>
+        </p:spPr>
+        <p:txBody>
+          <a:bodyPr wrap="square" lIns="0" tIns="0" rIns="0" bIns="0" rtlCol="0" anchor="ctr"/>
+          <a:lstStyle/>
+          <a:p>
+            <a:pPr algn="l" indent="0" marL="0">
+              <a:buNone/>
+            </a:pPr>
+            <a:r>
+              <a:rPr lang="en-US" sz="1200" b="1" dirty="0">
+                <a:solidFill>
+                  <a:srgbClr val="16202B"/>
+                </a:solidFill>
+                <a:latin typeface="Calibri" pitchFamily="34" charset="0"/>
+                <a:ea typeface="Calibri" pitchFamily="34" charset="-122"/>
+                <a:cs typeface="Calibri" pitchFamily="34" charset="-120"/>
+              </a:rPr>
+              <a:t>See a site you don't supervise</a:t>
+            </a:r>
+            <a:endParaRPr lang="en-US" sz="1200" dirty="0"/>
+          </a:p>
+        </p:txBody>
+      </p:sp>
+      <p:sp>
+        <p:nvSpPr>
+          <p:cNvPr id="25" name="Text 23"/>
+          <p:cNvSpPr/>
+          <p:nvPr/>
+        </p:nvSpPr>
+        <p:spPr>
+          <a:xfrm>
+            <a:off x="5623560" y="3410712"/>
+            <a:ext cx="1463040" cy="457200"/>
+          </a:xfrm>
+          <a:prstGeom prst="rect">
+            <a:avLst/>
+          </a:prstGeom>
+          <a:noFill/>
+          <a:ln/>
+        </p:spPr>
+        <p:txBody>
+          <a:bodyPr wrap="square" lIns="0" tIns="0" rIns="0" bIns="0" rtlCol="0" anchor="ctr"/>
+          <a:lstStyle/>
+          <a:p>
+            <a:pPr algn="ctr" indent="0" marL="0">
+              <a:buNone/>
+            </a:pPr>
+            <a:r>
+              <a:rPr lang="en-US" sz="1200" dirty="0">
+                <a:solidFill>
+                  <a:srgbClr val="A03A3A"/>
+                </a:solidFill>
+                <a:latin typeface="Calibri" pitchFamily="34" charset="0"/>
+                <a:ea typeface="Calibri" pitchFamily="34" charset="-122"/>
+                <a:cs typeface="Calibri" pitchFamily="34" charset="-120"/>
+              </a:rPr>
+              <a:t>No</a:t>
+            </a:r>
+            <a:endParaRPr lang="en-US" sz="1200" dirty="0"/>
+          </a:p>
+        </p:txBody>
+      </p:sp>
+      <p:sp>
+        <p:nvSpPr>
+          <p:cNvPr id="26" name="Text 24"/>
+          <p:cNvSpPr/>
+          <p:nvPr/>
+        </p:nvSpPr>
+        <p:spPr>
+          <a:xfrm>
+            <a:off x="7086600" y="3410712"/>
+            <a:ext cx="1828800" cy="457200"/>
+          </a:xfrm>
+          <a:prstGeom prst="rect">
+            <a:avLst/>
+          </a:prstGeom>
+          <a:noFill/>
+          <a:ln/>
+        </p:spPr>
+        <p:txBody>
+          <a:bodyPr wrap="square" lIns="0" tIns="0" rIns="0" bIns="0" rtlCol="0" anchor="ctr"/>
+          <a:lstStyle/>
+          <a:p>
+            <a:pPr algn="ctr" indent="0" marL="0">
+              <a:buNone/>
+            </a:pPr>
+            <a:r>
+              <a:rPr lang="en-US" sz="1200" dirty="0">
+                <a:solidFill>
+                  <a:srgbClr val="A03A3A"/>
+                </a:solidFill>
+                <a:latin typeface="Calibri" pitchFamily="34" charset="0"/>
+                <a:ea typeface="Calibri" pitchFamily="34" charset="-122"/>
+                <a:cs typeface="Calibri" pitchFamily="34" charset="-120"/>
+              </a:rPr>
+              <a:t>No</a:t>
+            </a:r>
+            <a:endParaRPr lang="en-US" sz="1200" dirty="0"/>
+          </a:p>
+        </p:txBody>
+      </p:sp>
+      <p:sp>
+        <p:nvSpPr>
+          <p:cNvPr id="27" name="Text 25"/>
+          <p:cNvSpPr/>
+          <p:nvPr/>
+        </p:nvSpPr>
+        <p:spPr>
+          <a:xfrm>
+            <a:off x="8915400" y="3410712"/>
+            <a:ext cx="1463040" cy="457200"/>
+          </a:xfrm>
+          <a:prstGeom prst="rect">
+            <a:avLst/>
+          </a:prstGeom>
+          <a:noFill/>
+          <a:ln/>
+        </p:spPr>
+        <p:txBody>
+          <a:bodyPr wrap="square" lIns="0" tIns="0" rIns="0" bIns="0" rtlCol="0" anchor="ctr"/>
+          <a:lstStyle/>
+          <a:p>
+            <a:pPr algn="ctr" indent="0" marL="0">
+              <a:buNone/>
+            </a:pPr>
+            <a:r>
+              <a:rPr lang="en-US" sz="1200" b="1" dirty="0">
+                <a:solidFill>
+                  <a:srgbClr val="1E7A4C"/>
+                </a:solidFill>
+                <a:latin typeface="Calibri" pitchFamily="34" charset="0"/>
+                <a:ea typeface="Calibri" pitchFamily="34" charset="-122"/>
+                <a:cs typeface="Calibri" pitchFamily="34" charset="-120"/>
+              </a:rPr>
+              <a:t>Yes*</a:t>
+            </a:r>
+            <a:endParaRPr lang="en-US" sz="1200" dirty="0"/>
+          </a:p>
+        </p:txBody>
+      </p:sp>
+      <p:sp>
+        <p:nvSpPr>
+          <p:cNvPr id="28" name="Text 26"/>
+          <p:cNvSpPr/>
+          <p:nvPr/>
+        </p:nvSpPr>
+        <p:spPr>
+          <a:xfrm>
+            <a:off x="10378440" y="3410712"/>
+            <a:ext cx="1234440" cy="457200"/>
+          </a:xfrm>
+          <a:prstGeom prst="rect">
+            <a:avLst/>
+          </a:prstGeom>
+          <a:noFill/>
+          <a:ln/>
+        </p:spPr>
+        <p:txBody>
+          <a:bodyPr wrap="square" lIns="0" tIns="0" rIns="0" bIns="0" rtlCol="0" anchor="ctr"/>
+          <a:lstStyle/>
+          <a:p>
+            <a:pPr algn="ctr" indent="0" marL="0">
+              <a:buNone/>
+            </a:pPr>
+            <a:r>
+              <a:rPr lang="en-US" sz="1200" b="1" dirty="0">
+                <a:solidFill>
+                  <a:srgbClr val="1E7A4C"/>
+                </a:solidFill>
+                <a:latin typeface="Calibri" pitchFamily="34" charset="0"/>
+                <a:ea typeface="Calibri" pitchFamily="34" charset="-122"/>
+                <a:cs typeface="Calibri" pitchFamily="34" charset="-120"/>
+              </a:rPr>
+              <a:t>Yes</a:t>
+            </a:r>
+            <a:endParaRPr lang="en-US" sz="1200" dirty="0"/>
+          </a:p>
+        </p:txBody>
+      </p:sp>
+      <p:sp>
+        <p:nvSpPr>
+          <p:cNvPr id="29" name="Shape 27"/>
+          <p:cNvSpPr/>
+          <p:nvPr/>
+        </p:nvSpPr>
+        <p:spPr>
+          <a:xfrm>
+            <a:off x="548640" y="3922776"/>
+            <a:ext cx="11064240" cy="457200"/>
+          </a:xfrm>
+          <a:prstGeom prst="roundRect">
+            <a:avLst>
+              <a:gd name="adj" fmla="val 10000"/>
+            </a:avLst>
+          </a:prstGeom>
+          <a:solidFill>
+            <a:srgbClr val="FFFFFF"/>
+          </a:solidFill>
+          <a:ln w="6350">
+            <a:solidFill>
+              <a:srgbClr val="D9DEE4"/>
+            </a:solidFill>
+            <a:prstDash val="solid"/>
+          </a:ln>
+        </p:spPr>
+      </p:sp>
+      <p:sp>
+        <p:nvSpPr>
+          <p:cNvPr id="30" name="Text 28"/>
+          <p:cNvSpPr/>
+          <p:nvPr/>
+        </p:nvSpPr>
+        <p:spPr>
+          <a:xfrm>
+            <a:off x="548640" y="3922776"/>
+            <a:ext cx="5029200" cy="457200"/>
+          </a:xfrm>
+          <a:prstGeom prst="rect">
+            <a:avLst/>
+          </a:prstGeom>
+          <a:noFill/>
+          <a:ln/>
+        </p:spPr>
+        <p:txBody>
+          <a:bodyPr wrap="square" lIns="0" tIns="0" rIns="0" bIns="0" rtlCol="0" anchor="ctr"/>
+          <a:lstStyle/>
+          <a:p>
+            <a:pPr algn="l" indent="0" marL="0">
+              <a:buNone/>
+            </a:pPr>
+            <a:r>
+              <a:rPr lang="en-US" sz="1200" b="1" dirty="0">
+                <a:solidFill>
+                  <a:srgbClr val="16202B"/>
+                </a:solidFill>
+                <a:latin typeface="Calibri" pitchFamily="34" charset="0"/>
+                <a:ea typeface="Calibri" pitchFamily="34" charset="-122"/>
+                <a:cs typeface="Calibri" pitchFamily="34" charset="-120"/>
+              </a:rPr>
+              <a:t>Approve overtime, corrections and leave</a:t>
+            </a:r>
+            <a:endParaRPr lang="en-US" sz="1200" dirty="0"/>
+          </a:p>
+        </p:txBody>
+      </p:sp>
+      <p:sp>
+        <p:nvSpPr>
+          <p:cNvPr id="31" name="Text 29"/>
+          <p:cNvSpPr/>
+          <p:nvPr/>
+        </p:nvSpPr>
+        <p:spPr>
+          <a:xfrm>
+            <a:off x="5623560" y="3922776"/>
+            <a:ext cx="1463040" cy="457200"/>
+          </a:xfrm>
+          <a:prstGeom prst="rect">
+            <a:avLst/>
+          </a:prstGeom>
+          <a:noFill/>
+          <a:ln/>
+        </p:spPr>
+        <p:txBody>
+          <a:bodyPr wrap="square" lIns="0" tIns="0" rIns="0" bIns="0" rtlCol="0" anchor="ctr"/>
+          <a:lstStyle/>
+          <a:p>
+            <a:pPr algn="ctr" indent="0" marL="0">
+              <a:buNone/>
+            </a:pPr>
+            <a:r>
+              <a:rPr lang="en-US" sz="1200" dirty="0">
+                <a:solidFill>
+                  <a:srgbClr val="A03A3A"/>
+                </a:solidFill>
+                <a:latin typeface="Calibri" pitchFamily="34" charset="0"/>
+                <a:ea typeface="Calibri" pitchFamily="34" charset="-122"/>
+                <a:cs typeface="Calibri" pitchFamily="34" charset="-120"/>
+              </a:rPr>
+              <a:t>No</a:t>
+            </a:r>
+            <a:endParaRPr lang="en-US" sz="1200" dirty="0"/>
+          </a:p>
+        </p:txBody>
+      </p:sp>
+      <p:sp>
+        <p:nvSpPr>
+          <p:cNvPr id="32" name="Text 30"/>
+          <p:cNvSpPr/>
+          <p:nvPr/>
+        </p:nvSpPr>
+        <p:spPr>
+          <a:xfrm>
+            <a:off x="7086600" y="3922776"/>
+            <a:ext cx="1828800" cy="457200"/>
+          </a:xfrm>
+          <a:prstGeom prst="rect">
+            <a:avLst/>
+          </a:prstGeom>
+          <a:noFill/>
+          <a:ln/>
+        </p:spPr>
+        <p:txBody>
+          <a:bodyPr wrap="square" lIns="0" tIns="0" rIns="0" bIns="0" rtlCol="0" anchor="ctr"/>
+          <a:lstStyle/>
+          <a:p>
+            <a:pPr algn="ctr" indent="0" marL="0">
+              <a:buNone/>
+            </a:pPr>
+            <a:r>
+              <a:rPr lang="en-US" sz="1200" b="1" dirty="0">
+                <a:solidFill>
+                  <a:srgbClr val="1E7A4C"/>
+                </a:solidFill>
+                <a:latin typeface="Calibri" pitchFamily="34" charset="0"/>
+                <a:ea typeface="Calibri" pitchFamily="34" charset="-122"/>
+                <a:cs typeface="Calibri" pitchFamily="34" charset="-120"/>
+              </a:rPr>
+              <a:t>Yes</a:t>
+            </a:r>
+            <a:endParaRPr lang="en-US" sz="1200" dirty="0"/>
+          </a:p>
+        </p:txBody>
+      </p:sp>
+      <p:sp>
+        <p:nvSpPr>
+          <p:cNvPr id="33" name="Text 31"/>
+          <p:cNvSpPr/>
+          <p:nvPr/>
+        </p:nvSpPr>
+        <p:spPr>
+          <a:xfrm>
+            <a:off x="8915400" y="3922776"/>
+            <a:ext cx="1463040" cy="457200"/>
+          </a:xfrm>
+          <a:prstGeom prst="rect">
+            <a:avLst/>
+          </a:prstGeom>
+          <a:noFill/>
+          <a:ln/>
+        </p:spPr>
+        <p:txBody>
+          <a:bodyPr wrap="square" lIns="0" tIns="0" rIns="0" bIns="0" rtlCol="0" anchor="ctr"/>
+          <a:lstStyle/>
+          <a:p>
+            <a:pPr algn="ctr" indent="0" marL="0">
+              <a:buNone/>
+            </a:pPr>
+            <a:r>
+              <a:rPr lang="en-US" sz="1200" b="1" dirty="0">
+                <a:solidFill>
+                  <a:srgbClr val="1E7A4C"/>
+                </a:solidFill>
+                <a:latin typeface="Calibri" pitchFamily="34" charset="0"/>
+                <a:ea typeface="Calibri" pitchFamily="34" charset="-122"/>
+                <a:cs typeface="Calibri" pitchFamily="34" charset="-120"/>
+              </a:rPr>
+              <a:t>Yes</a:t>
+            </a:r>
+            <a:endParaRPr lang="en-US" sz="1200" dirty="0"/>
+          </a:p>
+        </p:txBody>
+      </p:sp>
+      <p:sp>
+        <p:nvSpPr>
+          <p:cNvPr id="34" name="Text 32"/>
+          <p:cNvSpPr/>
+          <p:nvPr/>
+        </p:nvSpPr>
+        <p:spPr>
+          <a:xfrm>
+            <a:off x="10378440" y="3922776"/>
+            <a:ext cx="1234440" cy="457200"/>
+          </a:xfrm>
+          <a:prstGeom prst="rect">
+            <a:avLst/>
+          </a:prstGeom>
+          <a:noFill/>
+          <a:ln/>
+        </p:spPr>
+        <p:txBody>
+          <a:bodyPr wrap="square" lIns="0" tIns="0" rIns="0" bIns="0" rtlCol="0" anchor="ctr"/>
+          <a:lstStyle/>
+          <a:p>
+            <a:pPr algn="ctr" indent="0" marL="0">
+              <a:buNone/>
+            </a:pPr>
+            <a:r>
+              <a:rPr lang="en-US" sz="1200" b="1" dirty="0">
+                <a:solidFill>
+                  <a:srgbClr val="1E7A4C"/>
+                </a:solidFill>
+                <a:latin typeface="Calibri" pitchFamily="34" charset="0"/>
+                <a:ea typeface="Calibri" pitchFamily="34" charset="-122"/>
+                <a:cs typeface="Calibri" pitchFamily="34" charset="-120"/>
+              </a:rPr>
+              <a:t>Yes</a:t>
+            </a:r>
+            <a:endParaRPr lang="en-US" sz="1200" dirty="0"/>
+          </a:p>
+        </p:txBody>
+      </p:sp>
+      <p:sp>
+        <p:nvSpPr>
+          <p:cNvPr id="35" name="Shape 33"/>
+          <p:cNvSpPr/>
+          <p:nvPr/>
+        </p:nvSpPr>
+        <p:spPr>
+          <a:xfrm>
+            <a:off x="548640" y="4434840"/>
+            <a:ext cx="11064240" cy="457200"/>
+          </a:xfrm>
+          <a:prstGeom prst="roundRect">
+            <a:avLst>
+              <a:gd name="adj" fmla="val 10000"/>
+            </a:avLst>
+          </a:prstGeom>
+          <a:solidFill>
+            <a:srgbClr val="F3F5F7"/>
+          </a:solidFill>
+          <a:ln w="6350">
+            <a:solidFill>
+              <a:srgbClr val="D9DEE4"/>
+            </a:solidFill>
+            <a:prstDash val="solid"/>
+          </a:ln>
+        </p:spPr>
+      </p:sp>
+      <p:sp>
+        <p:nvSpPr>
+          <p:cNvPr id="36" name="Text 34"/>
+          <p:cNvSpPr/>
+          <p:nvPr/>
+        </p:nvSpPr>
+        <p:spPr>
+          <a:xfrm>
+            <a:off x="548640" y="4434840"/>
+            <a:ext cx="5029200" cy="457200"/>
+          </a:xfrm>
+          <a:prstGeom prst="rect">
+            <a:avLst/>
+          </a:prstGeom>
+          <a:noFill/>
+          <a:ln/>
+        </p:spPr>
+        <p:txBody>
+          <a:bodyPr wrap="square" lIns="0" tIns="0" rIns="0" bIns="0" rtlCol="0" anchor="ctr"/>
+          <a:lstStyle/>
+          <a:p>
+            <a:pPr algn="l" indent="0" marL="0">
+              <a:buNone/>
+            </a:pPr>
+            <a:r>
+              <a:rPr lang="en-US" sz="1200" b="1" dirty="0">
+                <a:solidFill>
+                  <a:srgbClr val="16202B"/>
+                </a:solidFill>
+                <a:latin typeface="Calibri" pitchFamily="34" charset="0"/>
+                <a:ea typeface="Calibri" pitchFamily="34" charset="-122"/>
+                <a:cs typeface="Calibri" pitchFamily="34" charset="-120"/>
+              </a:rPr>
+              <a:t>Approve your OWN request</a:t>
+            </a:r>
+            <a:endParaRPr lang="en-US" sz="1200" dirty="0"/>
+          </a:p>
+        </p:txBody>
+      </p:sp>
+      <p:sp>
+        <p:nvSpPr>
+          <p:cNvPr id="37" name="Text 35"/>
+          <p:cNvSpPr/>
+          <p:nvPr/>
+        </p:nvSpPr>
+        <p:spPr>
+          <a:xfrm>
+            <a:off x="5623560" y="4434840"/>
+            <a:ext cx="1463040" cy="457200"/>
+          </a:xfrm>
+          <a:prstGeom prst="rect">
+            <a:avLst/>
+          </a:prstGeom>
+          <a:noFill/>
+          <a:ln/>
+        </p:spPr>
+        <p:txBody>
+          <a:bodyPr wrap="square" lIns="0" tIns="0" rIns="0" bIns="0" rtlCol="0" anchor="ctr"/>
+          <a:lstStyle/>
+          <a:p>
+            <a:pPr algn="ctr" indent="0" marL="0">
+              <a:buNone/>
+            </a:pPr>
+            <a:r>
+              <a:rPr lang="en-US" sz="1200" dirty="0">
+                <a:solidFill>
+                  <a:srgbClr val="A03A3A"/>
+                </a:solidFill>
+                <a:latin typeface="Calibri" pitchFamily="34" charset="0"/>
+                <a:ea typeface="Calibri" pitchFamily="34" charset="-122"/>
+                <a:cs typeface="Calibri" pitchFamily="34" charset="-120"/>
+              </a:rPr>
+              <a:t>No</a:t>
+            </a:r>
+            <a:endParaRPr lang="en-US" sz="1200" dirty="0"/>
+          </a:p>
+        </p:txBody>
+      </p:sp>
+      <p:sp>
+        <p:nvSpPr>
+          <p:cNvPr id="38" name="Text 36"/>
+          <p:cNvSpPr/>
+          <p:nvPr/>
+        </p:nvSpPr>
+        <p:spPr>
+          <a:xfrm>
+            <a:off x="7086600" y="4434840"/>
+            <a:ext cx="1828800" cy="457200"/>
+          </a:xfrm>
+          <a:prstGeom prst="rect">
+            <a:avLst/>
+          </a:prstGeom>
+          <a:noFill/>
+          <a:ln/>
+        </p:spPr>
+        <p:txBody>
+          <a:bodyPr wrap="square" lIns="0" tIns="0" rIns="0" bIns="0" rtlCol="0" anchor="ctr"/>
+          <a:lstStyle/>
+          <a:p>
+            <a:pPr algn="ctr" indent="0" marL="0">
+              <a:buNone/>
+            </a:pPr>
+            <a:r>
+              <a:rPr lang="en-US" sz="1200" dirty="0">
+                <a:solidFill>
+                  <a:srgbClr val="A03A3A"/>
+                </a:solidFill>
+                <a:latin typeface="Calibri" pitchFamily="34" charset="0"/>
+                <a:ea typeface="Calibri" pitchFamily="34" charset="-122"/>
+                <a:cs typeface="Calibri" pitchFamily="34" charset="-120"/>
+              </a:rPr>
+              <a:t>No</a:t>
+            </a:r>
+            <a:endParaRPr lang="en-US" sz="1200" dirty="0"/>
+          </a:p>
+        </p:txBody>
+      </p:sp>
+      <p:sp>
+        <p:nvSpPr>
+          <p:cNvPr id="39" name="Text 37"/>
+          <p:cNvSpPr/>
+          <p:nvPr/>
+        </p:nvSpPr>
+        <p:spPr>
+          <a:xfrm>
+            <a:off x="8915400" y="4434840"/>
+            <a:ext cx="1463040" cy="457200"/>
+          </a:xfrm>
+          <a:prstGeom prst="rect">
+            <a:avLst/>
+          </a:prstGeom>
+          <a:noFill/>
+          <a:ln/>
+        </p:spPr>
+        <p:txBody>
+          <a:bodyPr wrap="square" lIns="0" tIns="0" rIns="0" bIns="0" rtlCol="0" anchor="ctr"/>
+          <a:lstStyle/>
+          <a:p>
+            <a:pPr algn="ctr" indent="0" marL="0">
+              <a:buNone/>
+            </a:pPr>
+            <a:r>
+              <a:rPr lang="en-US" sz="1200" dirty="0">
+                <a:solidFill>
+                  <a:srgbClr val="A03A3A"/>
+                </a:solidFill>
+                <a:latin typeface="Calibri" pitchFamily="34" charset="0"/>
+                <a:ea typeface="Calibri" pitchFamily="34" charset="-122"/>
+                <a:cs typeface="Calibri" pitchFamily="34" charset="-120"/>
+              </a:rPr>
+              <a:t>No</a:t>
+            </a:r>
+            <a:endParaRPr lang="en-US" sz="1200" dirty="0"/>
+          </a:p>
+        </p:txBody>
+      </p:sp>
+      <p:sp>
+        <p:nvSpPr>
+          <p:cNvPr id="40" name="Text 38"/>
+          <p:cNvSpPr/>
+          <p:nvPr/>
+        </p:nvSpPr>
+        <p:spPr>
+          <a:xfrm>
+            <a:off x="10378440" y="4434840"/>
+            <a:ext cx="1234440" cy="457200"/>
+          </a:xfrm>
+          <a:prstGeom prst="rect">
+            <a:avLst/>
+          </a:prstGeom>
+          <a:noFill/>
+          <a:ln/>
+        </p:spPr>
+        <p:txBody>
+          <a:bodyPr wrap="square" lIns="0" tIns="0" rIns="0" bIns="0" rtlCol="0" anchor="ctr"/>
+          <a:lstStyle/>
+          <a:p>
+            <a:pPr algn="ctr" indent="0" marL="0">
+              <a:buNone/>
+            </a:pPr>
+            <a:r>
+              <a:rPr lang="en-US" sz="1200" dirty="0">
+                <a:solidFill>
+                  <a:srgbClr val="A03A3A"/>
+                </a:solidFill>
+                <a:latin typeface="Calibri" pitchFamily="34" charset="0"/>
+                <a:ea typeface="Calibri" pitchFamily="34" charset="-122"/>
+                <a:cs typeface="Calibri" pitchFamily="34" charset="-120"/>
+              </a:rPr>
+              <a:t>No</a:t>
+            </a:r>
+            <a:endParaRPr lang="en-US" sz="1200" dirty="0"/>
+          </a:p>
+        </p:txBody>
+      </p:sp>
+      <p:sp>
+        <p:nvSpPr>
+          <p:cNvPr id="41" name="Shape 39"/>
+          <p:cNvSpPr/>
+          <p:nvPr/>
+        </p:nvSpPr>
+        <p:spPr>
+          <a:xfrm>
+            <a:off x="548640" y="4946904"/>
+            <a:ext cx="11064240" cy="457200"/>
+          </a:xfrm>
+          <a:prstGeom prst="roundRect">
+            <a:avLst>
+              <a:gd name="adj" fmla="val 10000"/>
+            </a:avLst>
+          </a:prstGeom>
+          <a:solidFill>
+            <a:srgbClr val="FFFFFF"/>
+          </a:solidFill>
+          <a:ln w="6350">
+            <a:solidFill>
+              <a:srgbClr val="D9DEE4"/>
+            </a:solidFill>
+            <a:prstDash val="solid"/>
+          </a:ln>
+        </p:spPr>
+      </p:sp>
+      <p:sp>
+        <p:nvSpPr>
+          <p:cNvPr id="42" name="Text 40"/>
+          <p:cNvSpPr/>
+          <p:nvPr/>
+        </p:nvSpPr>
+        <p:spPr>
+          <a:xfrm>
+            <a:off x="548640" y="4946904"/>
+            <a:ext cx="5029200" cy="457200"/>
+          </a:xfrm>
+          <a:prstGeom prst="rect">
+            <a:avLst/>
+          </a:prstGeom>
+          <a:noFill/>
+          <a:ln/>
+        </p:spPr>
+        <p:txBody>
+          <a:bodyPr wrap="square" lIns="0" tIns="0" rIns="0" bIns="0" rtlCol="0" anchor="ctr"/>
+          <a:lstStyle/>
+          <a:p>
+            <a:pPr algn="l" indent="0" marL="0">
+              <a:buNone/>
+            </a:pPr>
+            <a:r>
+              <a:rPr lang="en-US" sz="1200" b="1" dirty="0">
+                <a:solidFill>
+                  <a:srgbClr val="16202B"/>
+                </a:solidFill>
+                <a:latin typeface="Calibri" pitchFamily="34" charset="0"/>
+                <a:ea typeface="Calibri" pitchFamily="34" charset="-122"/>
+                <a:cs typeface="Calibri" pitchFamily="34" charset="-120"/>
+              </a:rPr>
+              <a:t>Plan the roster, manage employees</a:t>
+            </a:r>
+            <a:endParaRPr lang="en-US" sz="1200" dirty="0"/>
+          </a:p>
+        </p:txBody>
+      </p:sp>
+      <p:sp>
+        <p:nvSpPr>
+          <p:cNvPr id="43" name="Text 41"/>
+          <p:cNvSpPr/>
+          <p:nvPr/>
+        </p:nvSpPr>
+        <p:spPr>
+          <a:xfrm>
+            <a:off x="5623560" y="4946904"/>
+            <a:ext cx="1463040" cy="457200"/>
+          </a:xfrm>
+          <a:prstGeom prst="rect">
+            <a:avLst/>
+          </a:prstGeom>
+          <a:noFill/>
+          <a:ln/>
+        </p:spPr>
+        <p:txBody>
+          <a:bodyPr wrap="square" lIns="0" tIns="0" rIns="0" bIns="0" rtlCol="0" anchor="ctr"/>
+          <a:lstStyle/>
+          <a:p>
+            <a:pPr algn="ctr" indent="0" marL="0">
+              <a:buNone/>
+            </a:pPr>
+            <a:r>
+              <a:rPr lang="en-US" sz="1200" dirty="0">
+                <a:solidFill>
+                  <a:srgbClr val="A03A3A"/>
+                </a:solidFill>
+                <a:latin typeface="Calibri" pitchFamily="34" charset="0"/>
+                <a:ea typeface="Calibri" pitchFamily="34" charset="-122"/>
+                <a:cs typeface="Calibri" pitchFamily="34" charset="-120"/>
+              </a:rPr>
+              <a:t>No</a:t>
+            </a:r>
+            <a:endParaRPr lang="en-US" sz="1200" dirty="0"/>
+          </a:p>
+        </p:txBody>
+      </p:sp>
+      <p:sp>
+        <p:nvSpPr>
+          <p:cNvPr id="44" name="Text 42"/>
+          <p:cNvSpPr/>
+          <p:nvPr/>
+        </p:nvSpPr>
+        <p:spPr>
+          <a:xfrm>
+            <a:off x="7086600" y="4946904"/>
+            <a:ext cx="1828800" cy="457200"/>
+          </a:xfrm>
+          <a:prstGeom prst="rect">
+            <a:avLst/>
+          </a:prstGeom>
+          <a:noFill/>
+          <a:ln/>
+        </p:spPr>
+        <p:txBody>
+          <a:bodyPr wrap="square" lIns="0" tIns="0" rIns="0" bIns="0" rtlCol="0" anchor="ctr"/>
+          <a:lstStyle/>
+          <a:p>
+            <a:pPr algn="ctr" indent="0" marL="0">
+              <a:buNone/>
+            </a:pPr>
+            <a:r>
+              <a:rPr lang="en-US" sz="1200" b="1" dirty="0">
+                <a:solidFill>
+                  <a:srgbClr val="1E7A4C"/>
+                </a:solidFill>
+                <a:latin typeface="Calibri" pitchFamily="34" charset="0"/>
+                <a:ea typeface="Calibri" pitchFamily="34" charset="-122"/>
+                <a:cs typeface="Calibri" pitchFamily="34" charset="-120"/>
+              </a:rPr>
+              <a:t>Yes</a:t>
+            </a:r>
+            <a:endParaRPr lang="en-US" sz="1200" dirty="0"/>
+          </a:p>
+        </p:txBody>
+      </p:sp>
+      <p:sp>
+        <p:nvSpPr>
+          <p:cNvPr id="45" name="Text 43"/>
+          <p:cNvSpPr/>
+          <p:nvPr/>
+        </p:nvSpPr>
+        <p:spPr>
+          <a:xfrm>
+            <a:off x="8915400" y="4946904"/>
+            <a:ext cx="1463040" cy="457200"/>
+          </a:xfrm>
+          <a:prstGeom prst="rect">
+            <a:avLst/>
+          </a:prstGeom>
+          <a:noFill/>
+          <a:ln/>
+        </p:spPr>
+        <p:txBody>
+          <a:bodyPr wrap="square" lIns="0" tIns="0" rIns="0" bIns="0" rtlCol="0" anchor="ctr"/>
+          <a:lstStyle/>
+          <a:p>
+            <a:pPr algn="ctr" indent="0" marL="0">
+              <a:buNone/>
+            </a:pPr>
+            <a:r>
+              <a:rPr lang="en-US" sz="1200" b="1" dirty="0">
+                <a:solidFill>
+                  <a:srgbClr val="1E7A4C"/>
+                </a:solidFill>
+                <a:latin typeface="Calibri" pitchFamily="34" charset="0"/>
+                <a:ea typeface="Calibri" pitchFamily="34" charset="-122"/>
+                <a:cs typeface="Calibri" pitchFamily="34" charset="-120"/>
+              </a:rPr>
+              <a:t>Yes</a:t>
+            </a:r>
+            <a:endParaRPr lang="en-US" sz="1200" dirty="0"/>
+          </a:p>
+        </p:txBody>
+      </p:sp>
+      <p:sp>
+        <p:nvSpPr>
+          <p:cNvPr id="46" name="Text 44"/>
+          <p:cNvSpPr/>
+          <p:nvPr/>
+        </p:nvSpPr>
+        <p:spPr>
+          <a:xfrm>
+            <a:off x="10378440" y="4946904"/>
+            <a:ext cx="1234440" cy="457200"/>
+          </a:xfrm>
+          <a:prstGeom prst="rect">
+            <a:avLst/>
+          </a:prstGeom>
+          <a:noFill/>
+          <a:ln/>
+        </p:spPr>
+        <p:txBody>
+          <a:bodyPr wrap="square" lIns="0" tIns="0" rIns="0" bIns="0" rtlCol="0" anchor="ctr"/>
+          <a:lstStyle/>
+          <a:p>
+            <a:pPr algn="ctr" indent="0" marL="0">
+              <a:buNone/>
+            </a:pPr>
+            <a:r>
+              <a:rPr lang="en-US" sz="1200" b="1" dirty="0">
+                <a:solidFill>
+                  <a:srgbClr val="1E7A4C"/>
+                </a:solidFill>
+                <a:latin typeface="Calibri" pitchFamily="34" charset="0"/>
+                <a:ea typeface="Calibri" pitchFamily="34" charset="-122"/>
+                <a:cs typeface="Calibri" pitchFamily="34" charset="-120"/>
+              </a:rPr>
+              <a:t>Yes</a:t>
+            </a:r>
+            <a:endParaRPr lang="en-US" sz="1200" dirty="0"/>
+          </a:p>
+        </p:txBody>
+      </p:sp>
+      <p:sp>
+        <p:nvSpPr>
+          <p:cNvPr id="47" name="Shape 45"/>
+          <p:cNvSpPr/>
+          <p:nvPr/>
+        </p:nvSpPr>
+        <p:spPr>
+          <a:xfrm>
+            <a:off x="548640" y="5458968"/>
+            <a:ext cx="11064240" cy="457200"/>
+          </a:xfrm>
+          <a:prstGeom prst="roundRect">
+            <a:avLst>
+              <a:gd name="adj" fmla="val 10000"/>
+            </a:avLst>
+          </a:prstGeom>
+          <a:solidFill>
+            <a:srgbClr val="F3F5F7"/>
+          </a:solidFill>
+          <a:ln w="6350">
+            <a:solidFill>
+              <a:srgbClr val="D9DEE4"/>
+            </a:solidFill>
+            <a:prstDash val="solid"/>
+          </a:ln>
+        </p:spPr>
+      </p:sp>
+      <p:sp>
+        <p:nvSpPr>
+          <p:cNvPr id="48" name="Text 46"/>
+          <p:cNvSpPr/>
+          <p:nvPr/>
+        </p:nvSpPr>
+        <p:spPr>
+          <a:xfrm>
+            <a:off x="548640" y="5458968"/>
+            <a:ext cx="5029200" cy="457200"/>
+          </a:xfrm>
+          <a:prstGeom prst="rect">
+            <a:avLst/>
+          </a:prstGeom>
+          <a:noFill/>
+          <a:ln/>
+        </p:spPr>
+        <p:txBody>
+          <a:bodyPr wrap="square" lIns="0" tIns="0" rIns="0" bIns="0" rtlCol="0" anchor="ctr"/>
+          <a:lstStyle/>
+          <a:p>
+            <a:pPr algn="l" indent="0" marL="0">
+              <a:buNone/>
+            </a:pPr>
+            <a:r>
+              <a:rPr lang="en-US" sz="1200" b="1" dirty="0">
+                <a:solidFill>
+                  <a:srgbClr val="16202B"/>
+                </a:solidFill>
+                <a:latin typeface="Calibri" pitchFamily="34" charset="0"/>
+                <a:ea typeface="Calibri" pitchFamily="34" charset="-122"/>
+                <a:cs typeface="Calibri" pitchFamily="34" charset="-120"/>
+              </a:rPr>
+              <a:t>Monthly summary and Excel export</a:t>
+            </a:r>
+            <a:endParaRPr lang="en-US" sz="1200" dirty="0"/>
+          </a:p>
+        </p:txBody>
+      </p:sp>
+      <p:sp>
+        <p:nvSpPr>
+          <p:cNvPr id="49" name="Text 47"/>
+          <p:cNvSpPr/>
+          <p:nvPr/>
+        </p:nvSpPr>
+        <p:spPr>
+          <a:xfrm>
+            <a:off x="5623560" y="5458968"/>
+            <a:ext cx="1463040" cy="457200"/>
+          </a:xfrm>
+          <a:prstGeom prst="rect">
+            <a:avLst/>
+          </a:prstGeom>
+          <a:noFill/>
+          <a:ln/>
+        </p:spPr>
+        <p:txBody>
+          <a:bodyPr wrap="square" lIns="0" tIns="0" rIns="0" bIns="0" rtlCol="0" anchor="ctr"/>
+          <a:lstStyle/>
+          <a:p>
+            <a:pPr algn="ctr" indent="0" marL="0">
+              <a:buNone/>
+            </a:pPr>
+            <a:r>
+              <a:rPr lang="en-US" sz="1200" dirty="0">
+                <a:solidFill>
+                  <a:srgbClr val="A03A3A"/>
+                </a:solidFill>
+                <a:latin typeface="Calibri" pitchFamily="34" charset="0"/>
+                <a:ea typeface="Calibri" pitchFamily="34" charset="-122"/>
+                <a:cs typeface="Calibri" pitchFamily="34" charset="-120"/>
+              </a:rPr>
+              <a:t>No</a:t>
+            </a:r>
+            <a:endParaRPr lang="en-US" sz="1200" dirty="0"/>
+          </a:p>
+        </p:txBody>
+      </p:sp>
+      <p:sp>
+        <p:nvSpPr>
+          <p:cNvPr id="50" name="Text 48"/>
+          <p:cNvSpPr/>
+          <p:nvPr/>
+        </p:nvSpPr>
+        <p:spPr>
+          <a:xfrm>
+            <a:off x="7086600" y="5458968"/>
+            <a:ext cx="1828800" cy="457200"/>
+          </a:xfrm>
+          <a:prstGeom prst="rect">
+            <a:avLst/>
+          </a:prstGeom>
+          <a:noFill/>
+          <a:ln/>
+        </p:spPr>
+        <p:txBody>
+          <a:bodyPr wrap="square" lIns="0" tIns="0" rIns="0" bIns="0" rtlCol="0" anchor="ctr"/>
+          <a:lstStyle/>
+          <a:p>
+            <a:pPr algn="ctr" indent="0" marL="0">
+              <a:buNone/>
+            </a:pPr>
+            <a:r>
+              <a:rPr lang="en-US" sz="1200" b="1" dirty="0">
+                <a:solidFill>
+                  <a:srgbClr val="1E7A4C"/>
+                </a:solidFill>
+                <a:latin typeface="Calibri" pitchFamily="34" charset="0"/>
+                <a:ea typeface="Calibri" pitchFamily="34" charset="-122"/>
+                <a:cs typeface="Calibri" pitchFamily="34" charset="-120"/>
+              </a:rPr>
+              <a:t>Yes</a:t>
+            </a:r>
+            <a:endParaRPr lang="en-US" sz="1200" dirty="0"/>
+          </a:p>
+        </p:txBody>
+      </p:sp>
+      <p:sp>
+        <p:nvSpPr>
+          <p:cNvPr id="51" name="Text 49"/>
+          <p:cNvSpPr/>
+          <p:nvPr/>
+        </p:nvSpPr>
+        <p:spPr>
+          <a:xfrm>
+            <a:off x="8915400" y="5458968"/>
+            <a:ext cx="1463040" cy="457200"/>
+          </a:xfrm>
+          <a:prstGeom prst="rect">
+            <a:avLst/>
+          </a:prstGeom>
+          <a:noFill/>
+          <a:ln/>
+        </p:spPr>
+        <p:txBody>
+          <a:bodyPr wrap="square" lIns="0" tIns="0" rIns="0" bIns="0" rtlCol="0" anchor="ctr"/>
+          <a:lstStyle/>
+          <a:p>
+            <a:pPr algn="ctr" indent="0" marL="0">
+              <a:buNone/>
+            </a:pPr>
+            <a:r>
+              <a:rPr lang="en-US" sz="1200" b="1" dirty="0">
+                <a:solidFill>
+                  <a:srgbClr val="1E7A4C"/>
+                </a:solidFill>
+                <a:latin typeface="Calibri" pitchFamily="34" charset="0"/>
+                <a:ea typeface="Calibri" pitchFamily="34" charset="-122"/>
+                <a:cs typeface="Calibri" pitchFamily="34" charset="-120"/>
+              </a:rPr>
+              <a:t>Yes</a:t>
+            </a:r>
+            <a:endParaRPr lang="en-US" sz="1200" dirty="0"/>
+          </a:p>
+        </p:txBody>
+      </p:sp>
+      <p:sp>
+        <p:nvSpPr>
+          <p:cNvPr id="52" name="Text 50"/>
+          <p:cNvSpPr/>
+          <p:nvPr/>
+        </p:nvSpPr>
+        <p:spPr>
+          <a:xfrm>
+            <a:off x="10378440" y="5458968"/>
+            <a:ext cx="1234440" cy="457200"/>
+          </a:xfrm>
+          <a:prstGeom prst="rect">
+            <a:avLst/>
+          </a:prstGeom>
+          <a:noFill/>
+          <a:ln/>
+        </p:spPr>
+        <p:txBody>
+          <a:bodyPr wrap="square" lIns="0" tIns="0" rIns="0" bIns="0" rtlCol="0" anchor="ctr"/>
+          <a:lstStyle/>
+          <a:p>
+            <a:pPr algn="ctr" indent="0" marL="0">
+              <a:buNone/>
+            </a:pPr>
+            <a:r>
+              <a:rPr lang="en-US" sz="1200" b="1" dirty="0">
+                <a:solidFill>
+                  <a:srgbClr val="1E7A4C"/>
+                </a:solidFill>
+                <a:latin typeface="Calibri" pitchFamily="34" charset="0"/>
+                <a:ea typeface="Calibri" pitchFamily="34" charset="-122"/>
+                <a:cs typeface="Calibri" pitchFamily="34" charset="-120"/>
+              </a:rPr>
+              <a:t>Yes</a:t>
+            </a:r>
+            <a:endParaRPr lang="en-US" sz="1200" dirty="0"/>
+          </a:p>
+        </p:txBody>
+      </p:sp>
+      <p:sp>
+        <p:nvSpPr>
+          <p:cNvPr id="53" name="Shape 51"/>
+          <p:cNvSpPr/>
+          <p:nvPr/>
+        </p:nvSpPr>
+        <p:spPr>
+          <a:xfrm>
+            <a:off x="548640" y="5971032"/>
+            <a:ext cx="11064240" cy="457200"/>
+          </a:xfrm>
+          <a:prstGeom prst="roundRect">
+            <a:avLst>
+              <a:gd name="adj" fmla="val 10000"/>
+            </a:avLst>
+          </a:prstGeom>
+          <a:solidFill>
+            <a:srgbClr val="FFFFFF"/>
+          </a:solidFill>
+          <a:ln w="6350">
+            <a:solidFill>
+              <a:srgbClr val="D9DEE4"/>
+            </a:solidFill>
+            <a:prstDash val="solid"/>
+          </a:ln>
+        </p:spPr>
+      </p:sp>
+      <p:sp>
+        <p:nvSpPr>
+          <p:cNvPr id="54" name="Text 52"/>
+          <p:cNvSpPr/>
+          <p:nvPr/>
+        </p:nvSpPr>
+        <p:spPr>
+          <a:xfrm>
+            <a:off x="548640" y="5971032"/>
+            <a:ext cx="5029200" cy="457200"/>
+          </a:xfrm>
+          <a:prstGeom prst="rect">
+            <a:avLst/>
+          </a:prstGeom>
+          <a:noFill/>
+          <a:ln/>
+        </p:spPr>
+        <p:txBody>
+          <a:bodyPr wrap="square" lIns="0" tIns="0" rIns="0" bIns="0" rtlCol="0" anchor="ctr"/>
+          <a:lstStyle/>
+          <a:p>
+            <a:pPr algn="l" indent="0" marL="0">
+              <a:buNone/>
+            </a:pPr>
+            <a:r>
+              <a:rPr lang="en-US" sz="1200" b="1" dirty="0">
+                <a:solidFill>
+                  <a:srgbClr val="16202B"/>
+                </a:solidFill>
+                <a:latin typeface="Calibri" pitchFamily="34" charset="0"/>
+                <a:ea typeface="Calibri" pitchFamily="34" charset="-122"/>
+                <a:cs typeface="Calibri" pitchFamily="34" charset="-120"/>
+              </a:rPr>
+              <a:t>Shifts, sites, leave types, attendance rules</a:t>
+            </a:r>
+            <a:endParaRPr lang="en-US" sz="1200" dirty="0"/>
+          </a:p>
+        </p:txBody>
+      </p:sp>
+      <p:sp>
+        <p:nvSpPr>
+          <p:cNvPr id="55" name="Text 53"/>
+          <p:cNvSpPr/>
+          <p:nvPr/>
+        </p:nvSpPr>
+        <p:spPr>
+          <a:xfrm>
+            <a:off x="5623560" y="5971032"/>
+            <a:ext cx="1463040" cy="457200"/>
+          </a:xfrm>
+          <a:prstGeom prst="rect">
+            <a:avLst/>
+          </a:prstGeom>
+          <a:noFill/>
+          <a:ln/>
+        </p:spPr>
+        <p:txBody>
+          <a:bodyPr wrap="square" lIns="0" tIns="0" rIns="0" bIns="0" rtlCol="0" anchor="ctr"/>
+          <a:lstStyle/>
+          <a:p>
+            <a:pPr algn="ctr" indent="0" marL="0">
+              <a:buNone/>
+            </a:pPr>
+            <a:r>
+              <a:rPr lang="en-US" sz="1200" dirty="0">
+                <a:solidFill>
+                  <a:srgbClr val="A03A3A"/>
+                </a:solidFill>
+                <a:latin typeface="Calibri" pitchFamily="34" charset="0"/>
+                <a:ea typeface="Calibri" pitchFamily="34" charset="-122"/>
+                <a:cs typeface="Calibri" pitchFamily="34" charset="-120"/>
+              </a:rPr>
+              <a:t>No</a:t>
+            </a:r>
+            <a:endParaRPr lang="en-US" sz="1200" dirty="0"/>
+          </a:p>
+        </p:txBody>
+      </p:sp>
+      <p:sp>
+        <p:nvSpPr>
+          <p:cNvPr id="56" name="Text 54"/>
+          <p:cNvSpPr/>
+          <p:nvPr/>
+        </p:nvSpPr>
+        <p:spPr>
+          <a:xfrm>
+            <a:off x="7086600" y="5971032"/>
+            <a:ext cx="1828800" cy="457200"/>
+          </a:xfrm>
+          <a:prstGeom prst="rect">
+            <a:avLst/>
+          </a:prstGeom>
+          <a:noFill/>
+          <a:ln/>
+        </p:spPr>
+        <p:txBody>
+          <a:bodyPr wrap="square" lIns="0" tIns="0" rIns="0" bIns="0" rtlCol="0" anchor="ctr"/>
+          <a:lstStyle/>
+          <a:p>
+            <a:pPr algn="ctr" indent="0" marL="0">
+              <a:buNone/>
+            </a:pPr>
+            <a:r>
+              <a:rPr lang="en-US" sz="1200" dirty="0">
+                <a:solidFill>
+                  <a:srgbClr val="A03A3A"/>
+                </a:solidFill>
+                <a:latin typeface="Calibri" pitchFamily="34" charset="0"/>
+                <a:ea typeface="Calibri" pitchFamily="34" charset="-122"/>
+                <a:cs typeface="Calibri" pitchFamily="34" charset="-120"/>
+              </a:rPr>
+              <a:t>No</a:t>
+            </a:r>
+            <a:endParaRPr lang="en-US" sz="1200" dirty="0"/>
+          </a:p>
+        </p:txBody>
+      </p:sp>
+      <p:sp>
+        <p:nvSpPr>
+          <p:cNvPr id="57" name="Text 55"/>
+          <p:cNvSpPr/>
+          <p:nvPr/>
+        </p:nvSpPr>
+        <p:spPr>
+          <a:xfrm>
+            <a:off x="8915400" y="5971032"/>
+            <a:ext cx="1463040" cy="457200"/>
+          </a:xfrm>
+          <a:prstGeom prst="rect">
+            <a:avLst/>
+          </a:prstGeom>
+          <a:noFill/>
+          <a:ln/>
+        </p:spPr>
+        <p:txBody>
+          <a:bodyPr wrap="square" lIns="0" tIns="0" rIns="0" bIns="0" rtlCol="0" anchor="ctr"/>
+          <a:lstStyle/>
+          <a:p>
+            <a:pPr algn="ctr" indent="0" marL="0">
+              <a:buNone/>
+            </a:pPr>
+            <a:r>
+              <a:rPr lang="en-US" sz="1200" dirty="0">
+                <a:solidFill>
+                  <a:srgbClr val="A03A3A"/>
+                </a:solidFill>
+                <a:latin typeface="Calibri" pitchFamily="34" charset="0"/>
+                <a:ea typeface="Calibri" pitchFamily="34" charset="-122"/>
+                <a:cs typeface="Calibri" pitchFamily="34" charset="-120"/>
+              </a:rPr>
+              <a:t>No</a:t>
+            </a:r>
+            <a:endParaRPr lang="en-US" sz="1200" dirty="0"/>
+          </a:p>
+        </p:txBody>
+      </p:sp>
+      <p:sp>
+        <p:nvSpPr>
+          <p:cNvPr id="58" name="Text 56"/>
+          <p:cNvSpPr/>
+          <p:nvPr/>
+        </p:nvSpPr>
+        <p:spPr>
+          <a:xfrm>
+            <a:off x="10378440" y="5971032"/>
+            <a:ext cx="1234440" cy="457200"/>
+          </a:xfrm>
+          <a:prstGeom prst="rect">
+            <a:avLst/>
+          </a:prstGeom>
+          <a:noFill/>
+          <a:ln/>
+        </p:spPr>
+        <p:txBody>
+          <a:bodyPr wrap="square" lIns="0" tIns="0" rIns="0" bIns="0" rtlCol="0" anchor="ctr"/>
+          <a:lstStyle/>
+          <a:p>
+            <a:pPr algn="ctr" indent="0" marL="0">
+              <a:buNone/>
+            </a:pPr>
+            <a:r>
+              <a:rPr lang="en-US" sz="1200" b="1" dirty="0">
+                <a:solidFill>
+                  <a:srgbClr val="1E7A4C"/>
+                </a:solidFill>
+                <a:latin typeface="Calibri" pitchFamily="34" charset="0"/>
+                <a:ea typeface="Calibri" pitchFamily="34" charset="-122"/>
+                <a:cs typeface="Calibri" pitchFamily="34" charset="-120"/>
+              </a:rPr>
+              <a:t>Yes</a:t>
+            </a:r>
+            <a:endParaRPr lang="en-US" sz="1200" dirty="0"/>
+          </a:p>
+        </p:txBody>
+      </p:sp>
+      <p:sp>
+        <p:nvSpPr>
+          <p:cNvPr id="59" name="Text 57"/>
+          <p:cNvSpPr/>
+          <p:nvPr/>
+        </p:nvSpPr>
+        <p:spPr>
+          <a:xfrm>
+            <a:off x="548640" y="6556248"/>
+            <a:ext cx="11064240" cy="310896"/>
+          </a:xfrm>
+          <a:prstGeom prst="rect">
+            <a:avLst/>
+          </a:prstGeom>
+          <a:noFill/>
+          <a:ln/>
+        </p:spPr>
+        <p:txBody>
+          <a:bodyPr wrap="square" lIns="0" tIns="0" rIns="0" bIns="0" rtlCol="0" anchor="ctr"/>
+          <a:lstStyle/>
+          <a:p>
+            <a:pPr indent="0" marL="0">
+              <a:buNone/>
+            </a:pPr>
+            <a:r>
+              <a:rPr lang="en-US" sz="1150" i="1" dirty="0">
+                <a:solidFill>
+                  <a:srgbClr val="5C6B7A"/>
+                </a:solidFill>
+                <a:latin typeface="Calibri" pitchFamily="34" charset="0"/>
+                <a:ea typeface="Calibri" pitchFamily="34" charset="-122"/>
+                <a:cs typeface="Calibri" pitchFamily="34" charset="-120"/>
+              </a:rPr>
+              <a:t>*  A manager reaches only the sites beneath them — not another manager's branch. A tenant admin sits above the whole tree.</a:t>
+            </a:r>
+            <a:endParaRPr lang="en-US" sz="1150" dirty="0"/>
+          </a:p>
+        </p:txBody>
+      </p:sp>
+    </p:spTree>
+  </p:cSld>
+  <p:clrMapOvr>
+    <a:masterClrMapping/>
+  </p:clrMapOvr>
+</p:sld>
+</file>
+
+<file path=ppt/slides/slide38.xml><?xml version="1.0" encoding="utf-8"?>
+<p:sld xmlns:a="http://schemas.openxmlformats.org/drawingml/2006/main" xmlns:r="http://schemas.openxmlformats.org/officeDocument/2006/relationships" xmlns:p="http://schemas.openxmlformats.org/presentationml/2006/main">
+  <p:cSld name="Slide 38">
+    <p:bg>
+      <p:bgPr>
+        <a:solidFill>
+          <a:srgbClr val="0E1A28"/>
+        </a:solidFill>
+      </p:bgPr>
+    </p:bg>
+    <p:spTree>
+      <p:nvGrpSpPr>
+        <p:cNvPr id="1" name=""/>
+        <p:cNvGrpSpPr/>
+        <p:nvPr/>
+      </p:nvGrpSpPr>
+      <p:grpSpPr>
+        <a:xfrm>
+          <a:off x="0" y="0"/>
+          <a:ext cx="0" cy="0"/>
+          <a:chOff x="0" y="0"/>
+          <a:chExt cx="0" cy="0"/>
+        </a:xfrm>
+      </p:grpSpPr>
+      <p:sp>
+        <p:nvSpPr>
+          <p:cNvPr id="2" name="Text 0"/>
+          <p:cNvSpPr/>
+          <p:nvPr/>
+        </p:nvSpPr>
+        <p:spPr>
+          <a:xfrm>
             <a:off x="548640" y="1234440"/>
             <a:ext cx="7315200" cy="274320"/>
           </a:xfrm>
@@ -27202,7 +28768,7 @@
                 <a:ea typeface="Calibri" pitchFamily="34" charset="-122"/>
                 <a:cs typeface="Calibri" pitchFamily="34" charset="-120"/>
               </a:rPr>
-              <a:t>Punch types: OT, mobile work, trips</a:t>
+              <a:t>Punching with no signal</a:t>
             </a:r>
             <a:endParaRPr lang="en-US" sz="3300" dirty="0"/>
           </a:p>
@@ -27244,7 +28810,7 @@
                 <a:ea typeface="Calibri" pitchFamily="34" charset="-122"/>
                 <a:cs typeface="Calibri" pitchFamily="34" charset="-120"/>
               </a:rPr>
-              <a:t>Extra punch types sit in a dropdown next to the main button — only the ones your workspace switches on.</a:t>
+              <a:t>A dead spot doesn't cost anyone their attendance. The punch is captured on the device and sent when the network returns.</a:t>
             </a:r>
             <a:endParaRPr lang="en-US" sz="1500" dirty="0"/>
           </a:p>
@@ -27374,7 +28940,7 @@
                 <a:ea typeface="Calibri" pitchFamily="34" charset="-122"/>
                 <a:cs typeface="Calibri" pitchFamily="34" charset="-120"/>
               </a:rPr>
-              <a:t>OT in / OT out — overtime as its own paid session</a:t>
+              <a:t>Timestamped at CAPTURE, not at sync — 09:02 stays 09:02</a:t>
             </a:r>
             <a:endParaRPr lang="en-US" sz="1400" dirty="0"/>
           </a:p>
@@ -27504,7 +29070,7 @@
                 <a:ea typeface="Calibri" pitchFamily="34" charset="-122"/>
                 <a:cs typeface="Calibri" pitchFamily="34" charset="-120"/>
               </a:rPr>
-              <a:t>Mobile work and Business trip — ordinary hours, labelled</a:t>
+              <a:t>Selfie and GPS are held with it and uploaded on reconnect</a:t>
             </a:r>
             <a:endParaRPr lang="en-US" sz="1400" dirty="0"/>
           </a:p>
@@ -27634,7 +29200,7 @@
                 <a:ea typeface="Calibri" pitchFamily="34" charset="-122"/>
                 <a:cs typeface="Calibri" pitchFamily="34" charset="-120"/>
               </a:rPr>
-              <a:t>A disabled type is refused by the server, not merely hidden</a:t>
+              <a:t>Each punch carries its own id, so a retry can never double-count</a:t>
             </a:r>
             <a:endParaRPr lang="en-US" sz="1400" dirty="0"/>
           </a:p>
@@ -27742,7 +29308,7 @@
                 <a:ea typeface="Calibri" pitchFamily="34" charset="-122"/>
                 <a:cs typeface="Calibri" pitchFamily="34" charset="-120"/>
               </a:rPr>
-              <a:t>Admin enables</a:t>
+              <a:t>Employee</a:t>
             </a:r>
             <a:endParaRPr lang="en-US" sz="1500" dirty="0"/>
           </a:p>
@@ -27762,7 +29328,7 @@
                 <a:ea typeface="Calibri" pitchFamily="34" charset="-122"/>
                 <a:cs typeface="Calibri" pitchFamily="34" charset="-120"/>
               </a:rPr>
-              <a:t>Employee uses</a:t>
+              <a:t>Nothing to configure</a:t>
             </a:r>
             <a:endParaRPr lang="en-US" sz="1500" dirty="0"/>
           </a:p>
@@ -27833,7 +29399,7 @@
                 <a:ea typeface="Calibri" pitchFamily="34" charset="-122"/>
                 <a:cs typeface="Calibri" pitchFamily="34" charset="-120"/>
               </a:rPr>
-              <a:t>HOW TO  —  ADMIN</a:t>
+              <a:t>HOW TO  —  EMPLOYEE</a:t>
             </a:r>
             <a:endParaRPr lang="en-US" sz="1100" dirty="0"/>
           </a:p>
@@ -27872,7 +29438,7 @@
                 <a:ea typeface="Calibri" pitchFamily="34" charset="-122"/>
                 <a:cs typeface="Calibri" pitchFamily="34" charset="-120"/>
               </a:rPr>
-              <a:t>Punch types: OT, mobile work, trips</a:t>
+              <a:t>Punching with no signal</a:t>
             </a:r>
             <a:endParaRPr lang="en-US" sz="2700" dirty="0"/>
           </a:p>
@@ -27952,7 +29518,7 @@
                 <a:ea typeface="Calibri" pitchFamily="34" charset="-122"/>
                 <a:cs typeface="Calibri" pitchFamily="34" charset="-120"/>
               </a:rPr>
-              <a:t>Settings</a:t>
+              <a:t>Workforce</a:t>
             </a:r>
             <a:pPr indent="0" marL="0">
               <a:buNone/>
@@ -27980,7 +29546,7 @@
                 <a:ea typeface="Calibri" pitchFamily="34" charset="-122"/>
                 <a:cs typeface="Calibri" pitchFamily="34" charset="-120"/>
               </a:rPr>
-              <a:t>Workforce</a:t>
+              <a:t>My Workforce</a:t>
             </a:r>
             <a:pPr indent="0" marL="0">
               <a:buNone/>
@@ -28008,35 +29574,7 @@
                 <a:ea typeface="Calibri" pitchFamily="34" charset="-122"/>
                 <a:cs typeface="Calibri" pitchFamily="34" charset="-120"/>
               </a:rPr>
-              <a:t>General</a:t>
-            </a:r>
-            <a:pPr indent="0" marL="0">
-              <a:buNone/>
-            </a:pPr>
-            <a:r>
-              <a:rPr lang="en-US" sz="1500" dirty="0">
-                <a:solidFill>
-                  <a:srgbClr val="F6C177"/>
-                </a:solidFill>
-                <a:latin typeface="Calibri" pitchFamily="34" charset="0"/>
-                <a:ea typeface="Calibri" pitchFamily="34" charset="-122"/>
-                <a:cs typeface="Calibri" pitchFamily="34" charset="-120"/>
-              </a:rPr>
-              <a:t>   ›   </a:t>
-            </a:r>
-            <a:pPr indent="0" marL="0">
-              <a:buNone/>
-            </a:pPr>
-            <a:r>
-              <a:rPr lang="en-US" sz="1500" b="1" dirty="0">
-                <a:solidFill>
-                  <a:srgbClr val="FFFFFF"/>
-                </a:solidFill>
-                <a:latin typeface="Calibri" pitchFamily="34" charset="0"/>
-                <a:ea typeface="Calibri" pitchFamily="34" charset="-122"/>
-                <a:cs typeface="Calibri" pitchFamily="34" charset="-120"/>
-              </a:rPr>
-              <a:t>Punch types</a:t>
+              <a:t>Home</a:t>
             </a:r>
             <a:endParaRPr lang="en-US" sz="1100" dirty="0"/>
           </a:p>
@@ -28139,7 +29677,7 @@
                 <a:ea typeface="Calibri" pitchFamily="34" charset="-122"/>
                 <a:cs typeface="Calibri" pitchFamily="34" charset="-120"/>
               </a:rPr>
-              <a:t>Open Settings → Workforce and stay on the General tab.</a:t>
+              <a:t>Punch exactly as normal — there is no offline button and no mode to switch.</a:t>
             </a:r>
             <a:endParaRPr lang="en-US" sz="1500" dirty="0"/>
           </a:p>
@@ -28242,7 +29780,7 @@
                 <a:ea typeface="Calibri" pitchFamily="34" charset="-122"/>
                 <a:cs typeface="Calibri" pitchFamily="34" charset="-120"/>
               </a:rPr>
-              <a:t>Scroll to Punch types and switch on the ones this client uses.</a:t>
+              <a:t>With no signal the screen confirms the punch was saved on the device.</a:t>
             </a:r>
             <a:endParaRPr lang="en-US" sz="1500" dirty="0"/>
           </a:p>
@@ -28345,7 +29883,7 @@
                 <a:ea typeface="Calibri" pitchFamily="34" charset="-122"/>
                 <a:cs typeface="Calibri" pitchFamily="34" charset="-120"/>
               </a:rPr>
-              <a:t>Set OT rate per hour in the same tab. Zero means hours are tracked but no cost is computed.</a:t>
+              <a:t>It sends itself when the network returns, or next time the screen is opened.</a:t>
             </a:r>
             <a:endParaRPr lang="en-US" sz="1500" dirty="0"/>
           </a:p>
@@ -28448,7 +29986,7 @@
                 <a:ea typeface="Calibri" pitchFamily="34" charset="-122"/>
                 <a:cs typeface="Calibri" pitchFamily="34" charset="-120"/>
               </a:rPr>
-              <a:t>Save. The dropdown appears for every employee immediately.</a:t>
+              <a:t>Queued punches go oldest first, so the sequence is preserved.</a:t>
             </a:r>
             <a:endParaRPr lang="en-US" sz="1500" dirty="0"/>
           </a:p>
@@ -28528,7 +30066,7 @@
                 <a:ea typeface="Calibri" pitchFamily="34" charset="-122"/>
                 <a:cs typeface="Calibri" pitchFamily="34" charset="-120"/>
               </a:rPr>
-              <a:t>Enable Overtime before asking anyone to punch it — the API rejects a disabled punch type.</a:t>
+              <a:t>Always on: losing a punch to a dead workshop corner is never the better outcome. The app does need to have been opened once on that device.</a:t>
             </a:r>
             <a:endParaRPr lang="en-US" sz="1050" dirty="0"/>
           </a:p>
@@ -28638,7 +30176,7 @@
                 <a:ea typeface="Calibri" pitchFamily="34" charset="-122"/>
                 <a:cs typeface="Calibri" pitchFamily="34" charset="-120"/>
               </a:rPr>
-              <a:t>Overtime — record and approve</a:t>
+              <a:t>Punch types: OT, mobile work, trips</a:t>
             </a:r>
             <a:endParaRPr lang="en-US" sz="3300" dirty="0"/>
           </a:p>
@@ -28680,7 +30218,7 @@
                 <a:ea typeface="Calibri" pitchFamily="34" charset="-122"/>
                 <a:cs typeface="Calibri" pitchFamily="34" charset="-120"/>
               </a:rPr>
-              <a:t>Overtime is a separate session, punched after checking out, and paid only once a supervisor approves it.</a:t>
+              <a:t>Extra punch types sit in a dropdown next to the main button — only the ones your workspace switches on.</a:t>
             </a:r>
             <a:endParaRPr lang="en-US" sz="1500" dirty="0"/>
           </a:p>
@@ -28810,7 +30348,7 @@
                 <a:ea typeface="Calibri" pitchFamily="34" charset="-122"/>
                 <a:cs typeface="Calibri" pitchFamily="34" charset="-120"/>
               </a:rPr>
-              <a:t>OT cannot start while checked in — structurally prevented</a:t>
+              <a:t>OT in / OT out — overtime as its own paid session</a:t>
             </a:r>
             <a:endParaRPr lang="en-US" sz="1400" dirty="0"/>
           </a:p>
@@ -28940,7 +30478,7 @@
                 <a:ea typeface="Calibri" pitchFamily="34" charset="-122"/>
                 <a:cs typeface="Calibri" pitchFamily="34" charset="-120"/>
               </a:rPr>
-              <a:t>Exact minutes, no rounding, at a flat rate per hour</a:t>
+              <a:t>Mobile work and Business trip — ordinary hours, labelled</a:t>
             </a:r>
             <a:endParaRPr lang="en-US" sz="1400" dirty="0"/>
           </a:p>
@@ -29070,7 +30608,7 @@
                 <a:ea typeface="Calibri" pitchFamily="34" charset="-122"/>
                 <a:cs typeface="Calibri" pitchFamily="34" charset="-120"/>
               </a:rPr>
-              <a:t>An all-night block stays on the day it started</a:t>
+              <a:t>A disabled type is refused by the server, not merely hidden</a:t>
             </a:r>
             <a:endParaRPr lang="en-US" sz="1400" dirty="0"/>
           </a:p>
@@ -29178,7 +30716,7 @@
                 <a:ea typeface="Calibri" pitchFamily="34" charset="-122"/>
                 <a:cs typeface="Calibri" pitchFamily="34" charset="-120"/>
               </a:rPr>
-              <a:t>Employee punches</a:t>
+              <a:t>Admin enables</a:t>
             </a:r>
             <a:endParaRPr lang="en-US" sz="1500" dirty="0"/>
           </a:p>
@@ -29198,7 +30736,7 @@
                 <a:ea typeface="Calibri" pitchFamily="34" charset="-122"/>
                 <a:cs typeface="Calibri" pitchFamily="34" charset="-120"/>
               </a:rPr>
-              <a:t>Supervisor approves</a:t>
+              <a:t>Employee uses</a:t>
             </a:r>
             <a:endParaRPr lang="en-US" sz="1500" dirty="0"/>
           </a:p>
@@ -29269,7 +30807,7 @@
                 <a:ea typeface="Calibri" pitchFamily="34" charset="-122"/>
                 <a:cs typeface="Calibri" pitchFamily="34" charset="-120"/>
               </a:rPr>
-              <a:t>HOW TO  —  EMPLOYEE + SUPERVISOR</a:t>
+              <a:t>HOW TO  —  ADMIN</a:t>
             </a:r>
             <a:endParaRPr lang="en-US" sz="1100" dirty="0"/>
           </a:p>
@@ -29308,7 +30846,7 @@
                 <a:ea typeface="Calibri" pitchFamily="34" charset="-122"/>
                 <a:cs typeface="Calibri" pitchFamily="34" charset="-120"/>
               </a:rPr>
-              <a:t>Overtime — record and approve</a:t>
+              <a:t>Punch types: OT, mobile work, trips</a:t>
             </a:r>
             <a:endParaRPr lang="en-US" sz="2700" dirty="0"/>
           </a:p>
@@ -29388,6 +30926,34 @@
                 <a:ea typeface="Calibri" pitchFamily="34" charset="-122"/>
                 <a:cs typeface="Calibri" pitchFamily="34" charset="-120"/>
               </a:rPr>
+              <a:t>Settings</a:t>
+            </a:r>
+            <a:pPr indent="0" marL="0">
+              <a:buNone/>
+            </a:pPr>
+            <a:r>
+              <a:rPr lang="en-US" sz="1500" dirty="0">
+                <a:solidFill>
+                  <a:srgbClr val="F6C177"/>
+                </a:solidFill>
+                <a:latin typeface="Calibri" pitchFamily="34" charset="0"/>
+                <a:ea typeface="Calibri" pitchFamily="34" charset="-122"/>
+                <a:cs typeface="Calibri" pitchFamily="34" charset="-120"/>
+              </a:rPr>
+              <a:t>   ›   </a:t>
+            </a:r>
+            <a:pPr indent="0" marL="0">
+              <a:buNone/>
+            </a:pPr>
+            <a:r>
+              <a:rPr lang="en-US" sz="1500" b="1" dirty="0">
+                <a:solidFill>
+                  <a:srgbClr val="FFFFFF"/>
+                </a:solidFill>
+                <a:latin typeface="Calibri" pitchFamily="34" charset="0"/>
+                <a:ea typeface="Calibri" pitchFamily="34" charset="-122"/>
+                <a:cs typeface="Calibri" pitchFamily="34" charset="-120"/>
+              </a:rPr>
               <a:t>Workforce</a:t>
             </a:r>
             <a:pPr indent="0" marL="0">
@@ -29416,7 +30982,7 @@
                 <a:ea typeface="Calibri" pitchFamily="34" charset="-122"/>
                 <a:cs typeface="Calibri" pitchFamily="34" charset="-120"/>
               </a:rPr>
-              <a:t>Corrections</a:t>
+              <a:t>General</a:t>
             </a:r>
             <a:pPr indent="0" marL="0">
               <a:buNone/>
@@ -29444,7 +31010,7 @@
                 <a:ea typeface="Calibri" pitchFamily="34" charset="-122"/>
                 <a:cs typeface="Calibri" pitchFamily="34" charset="-120"/>
               </a:rPr>
-              <a:t>Overtime</a:t>
+              <a:t>Punch types</a:t>
             </a:r>
             <a:endParaRPr lang="en-US" sz="1100" dirty="0"/>
           </a:p>
@@ -29547,7 +31113,7 @@
                 <a:ea typeface="Calibri" pitchFamily="34" charset="-122"/>
                 <a:cs typeface="Calibri" pitchFamily="34" charset="-120"/>
               </a:rPr>
-              <a:t>Employee checks OUT of the regular shift first — this is required.</a:t>
+              <a:t>Open Settings → Workforce and stay on the General tab.</a:t>
             </a:r>
             <a:endParaRPr lang="en-US" sz="1500" dirty="0"/>
           </a:p>
@@ -29650,7 +31216,7 @@
                 <a:ea typeface="Calibri" pitchFamily="34" charset="-122"/>
                 <a:cs typeface="Calibri" pitchFamily="34" charset="-120"/>
               </a:rPr>
-              <a:t>Employee picks OT in from the punch dropdown, then OT out when finished.</a:t>
+              <a:t>Scroll to Punch types and switch on the ones this client uses.</a:t>
             </a:r>
             <a:endParaRPr lang="en-US" sz="1500" dirty="0"/>
           </a:p>
@@ -29753,7 +31319,7 @@
                 <a:ea typeface="Calibri" pitchFamily="34" charset="-122"/>
                 <a:cs typeface="Calibri" pitchFamily="34" charset="-120"/>
               </a:rPr>
-              <a:t>Supervisor opens Workforce → Corrections → Overtime tab.</a:t>
+              <a:t>Set OT rate per hour in the same tab. Zero means hours are tracked but no cost is computed.</a:t>
             </a:r>
             <a:endParaRPr lang="en-US" sz="1500" dirty="0"/>
           </a:p>
@@ -29856,7 +31422,7 @@
                 <a:ea typeface="Calibri" pitchFamily="34" charset="-122"/>
                 <a:cs typeface="Calibri" pitchFamily="34" charset="-120"/>
               </a:rPr>
-              <a:t>Review the date, duration and +1d marker, then Approve or Reject.</a:t>
+              <a:t>Save. The dropdown appears for every employee immediately.</a:t>
             </a:r>
             <a:endParaRPr lang="en-US" sz="1500" dirty="0"/>
           </a:p>
@@ -29936,7 +31502,7 @@
                 <a:ea typeface="Calibri" pitchFamily="34" charset="-122"/>
                 <a:cs typeface="Calibri" pitchFamily="34" charset="-120"/>
               </a:rPr>
-              <a:t>A remark is mandatory to reject. Pending and rejected overtime is visible everywhere but counted nowhere.</a:t>
+              <a:t>Enable Overtime before asking anyone to punch it — the API rejects a disabled punch type.</a:t>
             </a:r>
             <a:endParaRPr lang="en-US" sz="1050" dirty="0"/>
           </a:p>
@@ -30046,7 +31612,7 @@
                 <a:ea typeface="Calibri" pitchFamily="34" charset="-122"/>
                 <a:cs typeface="Calibri" pitchFamily="34" charset="-120"/>
               </a:rPr>
-              <a:t>Monthly timeline</a:t>
+              <a:t>Overtime — record and approve</a:t>
             </a:r>
             <a:endParaRPr lang="en-US" sz="3300" dirty="0"/>
           </a:p>
@@ -30088,7 +31654,7 @@
                 <a:ea typeface="Calibri" pitchFamily="34" charset="-122"/>
                 <a:cs typeface="Calibri" pitchFamily="34" charset="-120"/>
               </a:rPr>
-              <a:t>One calendar month per page, each day drawn as a horizontal bar against a time axis.</a:t>
+              <a:t>Overtime is a separate session, punched after checking out, and paid only once a supervisor approves it.</a:t>
             </a:r>
             <a:endParaRPr lang="en-US" sz="1500" dirty="0"/>
           </a:p>
@@ -30218,7 +31784,7 @@
                 <a:ea typeface="Calibri" pitchFamily="34" charset="-122"/>
                 <a:cs typeface="Calibri" pitchFamily="34" charset="-120"/>
               </a:rPr>
-              <a:t>Work, break and overtime shown as separate bands</a:t>
+              <a:t>OT cannot start while checked in — structurally prevented</a:t>
             </a:r>
             <a:endParaRPr lang="en-US" sz="1400" dirty="0"/>
           </a:p>
@@ -30348,7 +31914,7 @@
                 <a:ea typeface="Calibri" pitchFamily="34" charset="-122"/>
                 <a:cs typeface="Calibri" pitchFamily="34" charset="-120"/>
               </a:rPr>
-              <a:t>Pending overtime is faded and dashed until approved</a:t>
+              <a:t>Exact minutes, no rounding, at a flat rate per hour</a:t>
             </a:r>
             <a:endParaRPr lang="en-US" sz="1400" dirty="0"/>
           </a:p>
@@ -30478,7 +32044,7 @@
                 <a:ea typeface="Calibri" pitchFamily="34" charset="-122"/>
                 <a:cs typeface="Calibri" pitchFamily="34" charset="-120"/>
               </a:rPr>
-              <a:t>Click any day to open its detail and file a correction</a:t>
+              <a:t>An all-night block stays on the day it started</a:t>
             </a:r>
             <a:endParaRPr lang="en-US" sz="1400" dirty="0"/>
           </a:p>
@@ -30586,7 +32152,27 @@
                 <a:ea typeface="Calibri" pitchFamily="34" charset="-122"/>
                 <a:cs typeface="Calibri" pitchFamily="34" charset="-120"/>
               </a:rPr>
-              <a:t>Employee</a:t>
+              <a:t>Employee punches</a:t>
+            </a:r>
+            <a:endParaRPr lang="en-US" sz="1500" dirty="0"/>
+          </a:p>
+          <a:p>
+            <a:pPr indent="0" marL="0">
+              <a:spcAft>
+                <a:spcPts val="800"/>
+              </a:spcAft>
+              <a:buNone/>
+            </a:pPr>
+            <a:r>
+              <a:rPr lang="en-US" sz="1500" b="1" dirty="0">
+                <a:solidFill>
+                  <a:srgbClr val="FFFFFF"/>
+                </a:solidFill>
+                <a:latin typeface="Calibri" pitchFamily="34" charset="0"/>
+                <a:ea typeface="Calibri" pitchFamily="34" charset="-122"/>
+                <a:cs typeface="Calibri" pitchFamily="34" charset="-120"/>
+              </a:rPr>
+              <a:t>Supervisor approves</a:t>
             </a:r>
             <a:endParaRPr lang="en-US" sz="1500" dirty="0"/>
           </a:p>

--- a/docs/qa/BPMSquare_WFM_Feature_Guide.pptx
+++ b/docs/qa/BPMSquare_WFM_Feature_Guide.pptx
@@ -1419,7 +1419,7 @@
           <a:p>
             <a:r>
               <a:rPr lang="en-US" dirty="0"/>
-              <a:t>Recheck requests — A supervisor queries a punch and asks the employee to explain it — the mirror of a correction.</a:t>
+              <a:t>Flag for review — A supervisor queries a punch and asks the employee to explain it — the mirror of a correction.</a:t>
             </a:r>
             <a:endParaRPr lang="en-US" dirty="0"/>
           </a:p>
@@ -1595,7 +1595,7 @@
           <a:p>
             <a:r>
               <a:rPr lang="en-US" dirty="0"/>
-              <a:t>How to: Recheck requests. Path: Workforce &gt; Corrections &gt; Recheck requests</a:t>
+              <a:t>How to: Flag for review. Path: Workforce &gt; Corrections &gt; Flagged for review</a:t>
             </a:r>
             <a:endParaRPr lang="en-US" dirty="0"/>
           </a:p>
@@ -10752,7 +10752,7 @@
                 <a:ea typeface="Calibri" pitchFamily="34" charset="-122"/>
                 <a:cs typeface="Calibri" pitchFamily="34" charset="-120"/>
               </a:rPr>
-              <a:t>Recheck requests</a:t>
+              <a:t>Flag for review</a:t>
             </a:r>
             <a:endParaRPr lang="en-US" sz="3300" dirty="0"/>
           </a:p>
@@ -10924,7 +10924,7 @@
                 <a:ea typeface="Calibri" pitchFamily="34" charset="-122"/>
                 <a:cs typeface="Calibri" pitchFamily="34" charset="-120"/>
               </a:rPr>
-              <a:t>Flag a single punch or an entire day</a:t>
+              <a:t>Flag a single punch or an entire day for the employee to review</a:t>
             </a:r>
             <a:endParaRPr lang="en-US" sz="1400" dirty="0"/>
           </a:p>
@@ -11184,7 +11184,7 @@
                 <a:ea typeface="Calibri" pitchFamily="34" charset="-122"/>
                 <a:cs typeface="Calibri" pitchFamily="34" charset="-120"/>
               </a:rPr>
-              <a:t>Attendance never changes from a recheck alone — a fix still needs a correction</a:t>
+              <a:t>Attendance never changes from a flag alone — a fix still needs a correction</a:t>
             </a:r>
             <a:endParaRPr lang="en-US" sz="1400" dirty="0"/>
           </a:p>
@@ -12958,7 +12958,7 @@
                 <a:ea typeface="Calibri" pitchFamily="34" charset="-122"/>
                 <a:cs typeface="Calibri" pitchFamily="34" charset="-120"/>
               </a:rPr>
-              <a:t>Recheck requests</a:t>
+              <a:t>Flag for review</a:t>
             </a:r>
             <a:endParaRPr lang="en-US" sz="2700" dirty="0"/>
           </a:p>
@@ -13094,7 +13094,7 @@
                 <a:ea typeface="Calibri" pitchFamily="34" charset="-122"/>
                 <a:cs typeface="Calibri" pitchFamily="34" charset="-120"/>
               </a:rPr>
-              <a:t>Recheck requests</a:t>
+              <a:t>Flagged for review</a:t>
             </a:r>
             <a:endParaRPr lang="en-US" sz="1100" dirty="0"/>
           </a:p>
@@ -13197,7 +13197,7 @@
                 <a:ea typeface="Calibri" pitchFamily="34" charset="-122"/>
                 <a:cs typeface="Calibri" pitchFamily="34" charset="-120"/>
               </a:rPr>
-              <a:t>Open Workforce → Corrections → Recheck requests.</a:t>
+              <a:t>Open Workforce → Corrections → Flagged for review.</a:t>
             </a:r>
             <a:endParaRPr lang="en-US" sz="1500" dirty="0"/>
           </a:p>
@@ -13300,7 +13300,7 @@
                 <a:ea typeface="Calibri" pitchFamily="34" charset="-122"/>
                 <a:cs typeface="Calibri" pitchFamily="34" charset="-120"/>
               </a:rPr>
-              <a:t>Choose the employee, the date, and what to recheck.</a:t>
+              <a:t>Choose the employee, the date, and what needs review.</a:t>
             </a:r>
             <a:endParaRPr lang="en-US" sz="1500" dirty="0"/>
           </a:p>
@@ -24319,7 +24319,7 @@
                 <a:ea typeface="Calibri" pitchFamily="34" charset="-122"/>
                 <a:cs typeface="Calibri" pitchFamily="34" charset="-120"/>
               </a:rPr>
-              <a:t>Email alerts for late arrival, corrections, leave and rechecks</a:t>
+              <a:t>Email alerts for late arrival, corrections, leave and review flags</a:t>
             </a:r>
             <a:endParaRPr lang="en-US" sz="1400" dirty="0"/>
           </a:p>
